--- a/bishops/cs321/resources/CS321_Lecture_12.pptx
+++ b/bishops/cs321/resources/CS321_Lecture_12.pptx
@@ -5,7 +5,7 @@
     <p:sldMasterId id="2147483648" r:id="rId1"/>
   </p:sldMasterIdLst>
   <p:notesMasterIdLst>
-    <p:notesMasterId r:id="rId41"/>
+    <p:notesMasterId r:id="rId43"/>
   </p:notesMasterIdLst>
   <p:sldIdLst>
     <p:sldId id="256" r:id="rId2"/>
@@ -31,22 +31,24 @@
     <p:sldId id="341" r:id="rId22"/>
     <p:sldId id="282" r:id="rId23"/>
     <p:sldId id="309" r:id="rId24"/>
-    <p:sldId id="311" r:id="rId25"/>
-    <p:sldId id="342" r:id="rId26"/>
-    <p:sldId id="268" r:id="rId27"/>
-    <p:sldId id="269" r:id="rId28"/>
-    <p:sldId id="270" r:id="rId29"/>
-    <p:sldId id="344" r:id="rId30"/>
-    <p:sldId id="260" r:id="rId31"/>
-    <p:sldId id="265" r:id="rId32"/>
-    <p:sldId id="326" r:id="rId33"/>
-    <p:sldId id="328" r:id="rId34"/>
-    <p:sldId id="345" r:id="rId35"/>
-    <p:sldId id="329" r:id="rId36"/>
-    <p:sldId id="346" r:id="rId37"/>
-    <p:sldId id="297" r:id="rId38"/>
-    <p:sldId id="323" r:id="rId39"/>
-    <p:sldId id="325" r:id="rId40"/>
+    <p:sldId id="347" r:id="rId25"/>
+    <p:sldId id="348" r:id="rId26"/>
+    <p:sldId id="311" r:id="rId27"/>
+    <p:sldId id="342" r:id="rId28"/>
+    <p:sldId id="268" r:id="rId29"/>
+    <p:sldId id="269" r:id="rId30"/>
+    <p:sldId id="270" r:id="rId31"/>
+    <p:sldId id="344" r:id="rId32"/>
+    <p:sldId id="260" r:id="rId33"/>
+    <p:sldId id="265" r:id="rId34"/>
+    <p:sldId id="326" r:id="rId35"/>
+    <p:sldId id="328" r:id="rId36"/>
+    <p:sldId id="345" r:id="rId37"/>
+    <p:sldId id="329" r:id="rId38"/>
+    <p:sldId id="346" r:id="rId39"/>
+    <p:sldId id="297" r:id="rId40"/>
+    <p:sldId id="323" r:id="rId41"/>
+    <p:sldId id="325" r:id="rId42"/>
   </p:sldIdLst>
   <p:sldSz cx="12192000" cy="6858000"/>
   <p:notesSz cx="6858000" cy="9144000"/>
@@ -147,7 +149,7 @@
   </p:defaultTextStyle>
   <p:extLst>
     <p:ext uri="{EFAFB233-063F-42B5-8137-9DF3F51BA10A}">
-      <p15:sldGuideLst xmlns="" xmlns:p15="http://schemas.microsoft.com/office/powerpoint/2012/main"/>
+      <p15:sldGuideLst xmlns:p15="http://schemas.microsoft.com/office/powerpoint/2012/main" xmlns=""/>
     </p:ext>
   </p:extLst>
 </p:presentation>
@@ -158,7 +160,7 @@
   <p:cmAuthor id="1" name="Gregory" initials="G" lastIdx="1" clrIdx="0">
     <p:extLst>
       <p:ext uri="{19B8F6BF-5375-455C-9EA6-DF929625EA0E}">
-        <p15:presenceInfo xmlns="" xmlns:p15="http://schemas.microsoft.com/office/powerpoint/2012/main" userId="Gregory" providerId="None"/>
+        <p15:presenceInfo xmlns:p15="http://schemas.microsoft.com/office/powerpoint/2012/main" xmlns="" userId="Gregory" providerId="None"/>
       </p:ext>
     </p:extLst>
   </p:cmAuthor>
@@ -248,7 +250,7 @@
             <a:fld id="{A6583E9D-07AB-4C6D-BFD0-47E805C6B3D4}" type="datetimeFigureOut">
               <a:rPr lang="en-CA" smtClean="0"/>
               <a:pPr/>
-              <a:t>2024-02-26</a:t>
+              <a:t>2026-03-08</a:t>
             </a:fld>
             <a:endParaRPr lang="en-CA"/>
           </a:p>
@@ -417,7 +419,7 @@
     </p:spTree>
     <p:extLst>
       <p:ext uri="{BB962C8B-B14F-4D97-AF65-F5344CB8AC3E}">
-        <p14:creationId xmlns="" xmlns:p14="http://schemas.microsoft.com/office/powerpoint/2010/main" val="4237529172"/>
+        <p14:creationId xmlns:p14="http://schemas.microsoft.com/office/powerpoint/2010/main" xmlns="" val="4237529172"/>
       </p:ext>
     </p:extLst>
   </p:cSld>
@@ -592,7 +594,7 @@
     </p:spTree>
     <p:extLst>
       <p:ext uri="{BB962C8B-B14F-4D97-AF65-F5344CB8AC3E}">
-        <p14:creationId xmlns="" xmlns:p14="http://schemas.microsoft.com/office/powerpoint/2010/main" val="2340334442"/>
+        <p14:creationId xmlns:p14="http://schemas.microsoft.com/office/powerpoint/2010/main" xmlns="" val="2340334442"/>
       </p:ext>
     </p:extLst>
   </p:cSld>
@@ -677,7 +679,7 @@
     </p:spTree>
     <p:extLst>
       <p:ext uri="{BB962C8B-B14F-4D97-AF65-F5344CB8AC3E}">
-        <p14:creationId xmlns="" xmlns:p14="http://schemas.microsoft.com/office/powerpoint/2010/main" val="1863914651"/>
+        <p14:creationId xmlns:p14="http://schemas.microsoft.com/office/powerpoint/2010/main" xmlns="" val="1863914651"/>
       </p:ext>
     </p:extLst>
   </p:cSld>
@@ -881,7 +883,7 @@
     </p:spTree>
     <p:extLst>
       <p:ext uri="{BB962C8B-B14F-4D97-AF65-F5344CB8AC3E}">
-        <p14:creationId xmlns="" xmlns:p14="http://schemas.microsoft.com/office/powerpoint/2010/main" val="1900560834"/>
+        <p14:creationId xmlns:p14="http://schemas.microsoft.com/office/powerpoint/2010/main" xmlns="" val="1900560834"/>
       </p:ext>
     </p:extLst>
   </p:cSld>
@@ -1055,7 +1057,7 @@
     </p:spTree>
     <p:extLst>
       <p:ext uri="{BB962C8B-B14F-4D97-AF65-F5344CB8AC3E}">
-        <p14:creationId xmlns="" xmlns:p14="http://schemas.microsoft.com/office/powerpoint/2010/main" val="3722958745"/>
+        <p14:creationId xmlns:p14="http://schemas.microsoft.com/office/powerpoint/2010/main" xmlns="" val="3722958745"/>
       </p:ext>
     </p:extLst>
   </p:cSld>
@@ -1291,7 +1293,7 @@
     </p:spTree>
     <p:extLst>
       <p:ext uri="{BB962C8B-B14F-4D97-AF65-F5344CB8AC3E}">
-        <p14:creationId xmlns="" xmlns:p14="http://schemas.microsoft.com/office/powerpoint/2010/main" val="1822376042"/>
+        <p14:creationId xmlns:p14="http://schemas.microsoft.com/office/powerpoint/2010/main" xmlns="" val="1822376042"/>
       </p:ext>
     </p:extLst>
   </p:cSld>
@@ -1541,7 +1543,7 @@
     </p:spTree>
     <p:extLst>
       <p:ext uri="{BB962C8B-B14F-4D97-AF65-F5344CB8AC3E}">
-        <p14:creationId xmlns="" xmlns:p14="http://schemas.microsoft.com/office/powerpoint/2010/main" val="3411672561"/>
+        <p14:creationId xmlns:p14="http://schemas.microsoft.com/office/powerpoint/2010/main" xmlns="" val="3411672561"/>
       </p:ext>
     </p:extLst>
   </p:cSld>
@@ -1777,7 +1779,7 @@
     </p:spTree>
     <p:extLst>
       <p:ext uri="{BB962C8B-B14F-4D97-AF65-F5344CB8AC3E}">
-        <p14:creationId xmlns="" xmlns:p14="http://schemas.microsoft.com/office/powerpoint/2010/main" val="1093008526"/>
+        <p14:creationId xmlns:p14="http://schemas.microsoft.com/office/powerpoint/2010/main" xmlns="" val="1093008526"/>
       </p:ext>
     </p:extLst>
   </p:cSld>
@@ -2148,7 +2150,7 @@
     </p:spTree>
     <p:extLst>
       <p:ext uri="{BB962C8B-B14F-4D97-AF65-F5344CB8AC3E}">
-        <p14:creationId xmlns="" xmlns:p14="http://schemas.microsoft.com/office/powerpoint/2010/main" val="1087924878"/>
+        <p14:creationId xmlns:p14="http://schemas.microsoft.com/office/powerpoint/2010/main" xmlns="" val="1087924878"/>
       </p:ext>
     </p:extLst>
   </p:cSld>
@@ -2270,7 +2272,7 @@
     </p:spTree>
     <p:extLst>
       <p:ext uri="{BB962C8B-B14F-4D97-AF65-F5344CB8AC3E}">
-        <p14:creationId xmlns="" xmlns:p14="http://schemas.microsoft.com/office/powerpoint/2010/main" val="3802387408"/>
+        <p14:creationId xmlns:p14="http://schemas.microsoft.com/office/powerpoint/2010/main" xmlns="" val="3802387408"/>
       </p:ext>
     </p:extLst>
   </p:cSld>
@@ -2369,7 +2371,7 @@
     </p:spTree>
     <p:extLst>
       <p:ext uri="{BB962C8B-B14F-4D97-AF65-F5344CB8AC3E}">
-        <p14:creationId xmlns="" xmlns:p14="http://schemas.microsoft.com/office/powerpoint/2010/main" val="4234091411"/>
+        <p14:creationId xmlns:p14="http://schemas.microsoft.com/office/powerpoint/2010/main" xmlns="" val="4234091411"/>
       </p:ext>
     </p:extLst>
   </p:cSld>
@@ -2650,7 +2652,7 @@
     </p:spTree>
     <p:extLst>
       <p:ext uri="{BB962C8B-B14F-4D97-AF65-F5344CB8AC3E}">
-        <p14:creationId xmlns="" xmlns:p14="http://schemas.microsoft.com/office/powerpoint/2010/main" val="4189422420"/>
+        <p14:creationId xmlns:p14="http://schemas.microsoft.com/office/powerpoint/2010/main" xmlns="" val="4189422420"/>
       </p:ext>
     </p:extLst>
   </p:cSld>
@@ -2907,7 +2909,7 @@
     </p:spTree>
     <p:extLst>
       <p:ext uri="{BB962C8B-B14F-4D97-AF65-F5344CB8AC3E}">
-        <p14:creationId xmlns="" xmlns:p14="http://schemas.microsoft.com/office/powerpoint/2010/main" val="3252977898"/>
+        <p14:creationId xmlns:p14="http://schemas.microsoft.com/office/powerpoint/2010/main" xmlns="" val="3252977898"/>
       </p:ext>
     </p:extLst>
   </p:cSld>
@@ -3176,7 +3178,7 @@
           <a:blip r:embed="rId13" cstate="print">
             <a:extLst>
               <a:ext uri="{28A0092B-C50C-407E-A947-70E740481C1C}">
-                <a14:useLocalDpi xmlns="" xmlns:a14="http://schemas.microsoft.com/office/drawing/2010/main" val="0"/>
+                <a14:useLocalDpi xmlns:a14="http://schemas.microsoft.com/office/drawing/2010/main" xmlns="" val="0"/>
               </a:ext>
             </a:extLst>
           </a:blip>
@@ -3197,7 +3199,7 @@
     </p:spTree>
     <p:extLst>
       <p:ext uri="{BB962C8B-B14F-4D97-AF65-F5344CB8AC3E}">
-        <p14:creationId xmlns="" xmlns:p14="http://schemas.microsoft.com/office/powerpoint/2010/main" val="4230061028"/>
+        <p14:creationId xmlns:p14="http://schemas.microsoft.com/office/powerpoint/2010/main" xmlns="" val="4230061028"/>
       </p:ext>
     </p:extLst>
   </p:cSld>
@@ -3649,7 +3651,7 @@
           <p:cNvPr id="13" name="Picture 8" descr="http://osiris.ubishops.ca/~alussier/images/transparentlogo_bu.png">
             <a:extLst>
               <a:ext uri="{FF2B5EF4-FFF2-40B4-BE49-F238E27FC236}">
-                <a16:creationId xmlns="" xmlns:a16="http://schemas.microsoft.com/office/drawing/2014/main" id="{CCB9A035-2F1C-4B96-A5DB-70B72D6E4AD8}"/>
+                <a16:creationId xmlns:a16="http://schemas.microsoft.com/office/drawing/2014/main" xmlns="" id="{CCB9A035-2F1C-4B96-A5DB-70B72D6E4AD8}"/>
               </a:ext>
             </a:extLst>
           </p:cNvPr>
@@ -3662,7 +3664,7 @@
           <a:blip r:embed="rId3" cstate="print">
             <a:extLst>
               <a:ext uri="{28A0092B-C50C-407E-A947-70E740481C1C}">
-                <a14:useLocalDpi xmlns="" xmlns:a14="http://schemas.microsoft.com/office/drawing/2010/main" val="0"/>
+                <a14:useLocalDpi xmlns:a14="http://schemas.microsoft.com/office/drawing/2010/main" xmlns="" val="0"/>
               </a:ext>
             </a:extLst>
           </a:blip>
@@ -3682,7 +3684,7 @@
           <a:noFill/>
           <a:extLst>
             <a:ext uri="{909E8E84-426E-40DD-AFC4-6F175D3DCCD1}">
-              <a14:hiddenFill xmlns="" xmlns:a14="http://schemas.microsoft.com/office/drawing/2010/main">
+              <a14:hiddenFill xmlns:a14="http://schemas.microsoft.com/office/drawing/2010/main" xmlns="">
                 <a:solidFill>
                   <a:srgbClr val="FFFFFF"/>
                 </a:solidFill>
@@ -3694,7 +3696,7 @@
     </p:spTree>
     <p:extLst>
       <p:ext uri="{BB962C8B-B14F-4D97-AF65-F5344CB8AC3E}">
-        <p14:creationId xmlns="" xmlns:p14="http://schemas.microsoft.com/office/powerpoint/2010/main" val="4177077622"/>
+        <p14:creationId xmlns:p14="http://schemas.microsoft.com/office/powerpoint/2010/main" xmlns="" val="4177077622"/>
       </p:ext>
     </p:extLst>
   </p:cSld>
@@ -3733,7 +3735,7 @@
           <p:cNvPr id="7" name="Picture 6">
             <a:extLst>
               <a:ext uri="{FF2B5EF4-FFF2-40B4-BE49-F238E27FC236}">
-                <a16:creationId xmlns="" xmlns:a16="http://schemas.microsoft.com/office/drawing/2014/main" id="{CBE07435-6B16-411D-BE0D-FB61038A8F09}"/>
+                <a16:creationId xmlns:a16="http://schemas.microsoft.com/office/drawing/2014/main" xmlns="" id="{CBE07435-6B16-411D-BE0D-FB61038A8F09}"/>
               </a:ext>
             </a:extLst>
           </p:cNvPr>
@@ -3746,10 +3748,10 @@
           <a:blip r:embed="rId2" cstate="print">
             <a:extLst>
               <a:ext uri="{28A0092B-C50C-407E-A947-70E740481C1C}">
-                <a14:useLocalDpi xmlns="" xmlns:a14="http://schemas.microsoft.com/office/drawing/2010/main" val="0"/>
+                <a14:useLocalDpi xmlns:a14="http://schemas.microsoft.com/office/drawing/2010/main" xmlns="" val="0"/>
               </a:ext>
               <a:ext uri="{837473B0-CC2E-450A-ABE3-18F120FF3D39}">
-                <a1611:picAttrSrcUrl xmlns="" xmlns:a1611="http://schemas.microsoft.com/office/drawing/2016/11/main" r:id="rId3"/>
+                <a1611:picAttrSrcUrl xmlns:a1611="http://schemas.microsoft.com/office/drawing/2016/11/main" xmlns="" r:id="rId3"/>
               </a:ext>
             </a:extLst>
           </a:blip>
@@ -3875,7 +3877,7 @@
           <p:cNvPr id="4" name="TextBox 3">
             <a:extLst>
               <a:ext uri="{FF2B5EF4-FFF2-40B4-BE49-F238E27FC236}">
-                <a16:creationId xmlns="" xmlns:a16="http://schemas.microsoft.com/office/drawing/2014/main" id="{065F8F52-C484-420F-8838-9BA9EB24F06F}"/>
+                <a16:creationId xmlns:a16="http://schemas.microsoft.com/office/drawing/2014/main" xmlns="" id="{065F8F52-C484-420F-8838-9BA9EB24F06F}"/>
               </a:ext>
             </a:extLst>
           </p:cNvPr>
@@ -3910,7 +3912,7 @@
           <p:cNvPr id="14" name="TextBox 13">
             <a:extLst>
               <a:ext uri="{FF2B5EF4-FFF2-40B4-BE49-F238E27FC236}">
-                <a16:creationId xmlns="" xmlns:a16="http://schemas.microsoft.com/office/drawing/2014/main" id="{545FB07B-3C17-49FB-8188-00D3D635E234}"/>
+                <a16:creationId xmlns:a16="http://schemas.microsoft.com/office/drawing/2014/main" xmlns="" id="{545FB07B-3C17-49FB-8188-00D3D635E234}"/>
               </a:ext>
             </a:extLst>
           </p:cNvPr>
@@ -3946,7 +3948,7 @@
           <p:cNvPr id="16" name="TextBox 15">
             <a:extLst>
               <a:ext uri="{FF2B5EF4-FFF2-40B4-BE49-F238E27FC236}">
-                <a16:creationId xmlns="" xmlns:a16="http://schemas.microsoft.com/office/drawing/2014/main" id="{FE719AD3-1761-492D-823C-0AA513693A5E}"/>
+                <a16:creationId xmlns:a16="http://schemas.microsoft.com/office/drawing/2014/main" xmlns="" id="{FE719AD3-1761-492D-823C-0AA513693A5E}"/>
               </a:ext>
             </a:extLst>
           </p:cNvPr>
@@ -3981,7 +3983,7 @@
           <p:cNvPr id="18" name="Straight Arrow Connector 17">
             <a:extLst>
               <a:ext uri="{FF2B5EF4-FFF2-40B4-BE49-F238E27FC236}">
-                <a16:creationId xmlns="" xmlns:a16="http://schemas.microsoft.com/office/drawing/2014/main" id="{F1E47557-78F8-4490-9DC2-B232D55FD35C}"/>
+                <a16:creationId xmlns:a16="http://schemas.microsoft.com/office/drawing/2014/main" xmlns="" id="{F1E47557-78F8-4490-9DC2-B232D55FD35C}"/>
               </a:ext>
             </a:extLst>
           </p:cNvPr>
@@ -4025,7 +4027,7 @@
           <p:cNvPr id="22" name="Straight Arrow Connector 21">
             <a:extLst>
               <a:ext uri="{FF2B5EF4-FFF2-40B4-BE49-F238E27FC236}">
-                <a16:creationId xmlns="" xmlns:a16="http://schemas.microsoft.com/office/drawing/2014/main" id="{54728F14-6E5A-45E2-AC4A-EFD14011F60B}"/>
+                <a16:creationId xmlns:a16="http://schemas.microsoft.com/office/drawing/2014/main" xmlns="" id="{54728F14-6E5A-45E2-AC4A-EFD14011F60B}"/>
               </a:ext>
             </a:extLst>
           </p:cNvPr>
@@ -4070,7 +4072,7 @@
           <p:cNvPr id="25" name="Straight Arrow Connector 24">
             <a:extLst>
               <a:ext uri="{FF2B5EF4-FFF2-40B4-BE49-F238E27FC236}">
-                <a16:creationId xmlns="" xmlns:a16="http://schemas.microsoft.com/office/drawing/2014/main" id="{D54D66D9-20DA-42BE-9E8F-546A8ED2AA32}"/>
+                <a16:creationId xmlns:a16="http://schemas.microsoft.com/office/drawing/2014/main" xmlns="" id="{D54D66D9-20DA-42BE-9E8F-546A8ED2AA32}"/>
               </a:ext>
             </a:extLst>
           </p:cNvPr>
@@ -4115,7 +4117,7 @@
           <p:cNvPr id="19" name="Group 18">
             <a:extLst>
               <a:ext uri="{FF2B5EF4-FFF2-40B4-BE49-F238E27FC236}">
-                <a16:creationId xmlns="" xmlns:a16="http://schemas.microsoft.com/office/drawing/2014/main" id="{6F513CEE-2FED-431E-B171-29AD4FD8073D}"/>
+                <a16:creationId xmlns:a16="http://schemas.microsoft.com/office/drawing/2014/main" xmlns="" id="{6F513CEE-2FED-431E-B171-29AD4FD8073D}"/>
               </a:ext>
             </a:extLst>
           </p:cNvPr>
@@ -4135,7 +4137,7 @@
             <p:cNvPr id="33" name="Straight Arrow Connector 32">
               <a:extLst>
                 <a:ext uri="{FF2B5EF4-FFF2-40B4-BE49-F238E27FC236}">
-                  <a16:creationId xmlns="" xmlns:a16="http://schemas.microsoft.com/office/drawing/2014/main" id="{760F0522-E927-4EF6-875E-2DADA29693AC}"/>
+                  <a16:creationId xmlns:a16="http://schemas.microsoft.com/office/drawing/2014/main" xmlns="" id="{760F0522-E927-4EF6-875E-2DADA29693AC}"/>
                 </a:ext>
               </a:extLst>
             </p:cNvPr>
@@ -4179,7 +4181,7 @@
             <p:cNvPr id="34" name="TextBox 33">
               <a:extLst>
                 <a:ext uri="{FF2B5EF4-FFF2-40B4-BE49-F238E27FC236}">
-                  <a16:creationId xmlns="" xmlns:a16="http://schemas.microsoft.com/office/drawing/2014/main" id="{E096BC95-CF89-477C-A149-CADD8535D70D}"/>
+                  <a16:creationId xmlns:a16="http://schemas.microsoft.com/office/drawing/2014/main" xmlns="" id="{E096BC95-CF89-477C-A149-CADD8535D70D}"/>
                 </a:ext>
               </a:extLst>
             </p:cNvPr>
@@ -4214,7 +4216,7 @@
             <p:cNvPr id="35" name="Straight Arrow Connector 34">
               <a:extLst>
                 <a:ext uri="{FF2B5EF4-FFF2-40B4-BE49-F238E27FC236}">
-                  <a16:creationId xmlns="" xmlns:a16="http://schemas.microsoft.com/office/drawing/2014/main" id="{16A5DB64-6D02-469B-8ECF-1AC120A06DE3}"/>
+                  <a16:creationId xmlns:a16="http://schemas.microsoft.com/office/drawing/2014/main" xmlns="" id="{16A5DB64-6D02-469B-8ECF-1AC120A06DE3}"/>
                 </a:ext>
               </a:extLst>
             </p:cNvPr>
@@ -4258,7 +4260,7 @@
             <p:cNvPr id="37" name="TextBox 36">
               <a:extLst>
                 <a:ext uri="{FF2B5EF4-FFF2-40B4-BE49-F238E27FC236}">
-                  <a16:creationId xmlns="" xmlns:a16="http://schemas.microsoft.com/office/drawing/2014/main" id="{85C4C53D-D5CB-4E7F-937C-C49212F44A70}"/>
+                  <a16:creationId xmlns:a16="http://schemas.microsoft.com/office/drawing/2014/main" xmlns="" id="{85C4C53D-D5CB-4E7F-937C-C49212F44A70}"/>
                 </a:ext>
               </a:extLst>
             </p:cNvPr>
@@ -4294,7 +4296,7 @@
           <p:cNvPr id="49" name="TextBox 48">
             <a:extLst>
               <a:ext uri="{FF2B5EF4-FFF2-40B4-BE49-F238E27FC236}">
-                <a16:creationId xmlns="" xmlns:a16="http://schemas.microsoft.com/office/drawing/2014/main" id="{AD4E479C-C7D3-4FA7-8EE4-DA3F6846CEBF}"/>
+                <a16:creationId xmlns:a16="http://schemas.microsoft.com/office/drawing/2014/main" xmlns="" id="{AD4E479C-C7D3-4FA7-8EE4-DA3F6846CEBF}"/>
               </a:ext>
             </a:extLst>
           </p:cNvPr>
@@ -4329,7 +4331,7 @@
           <p:cNvPr id="51" name="Straight Arrow Connector 50">
             <a:extLst>
               <a:ext uri="{FF2B5EF4-FFF2-40B4-BE49-F238E27FC236}">
-                <a16:creationId xmlns="" xmlns:a16="http://schemas.microsoft.com/office/drawing/2014/main" id="{B7A35247-303C-440E-9EF8-CFF4A62CB795}"/>
+                <a16:creationId xmlns:a16="http://schemas.microsoft.com/office/drawing/2014/main" xmlns="" id="{B7A35247-303C-440E-9EF8-CFF4A62CB795}"/>
               </a:ext>
             </a:extLst>
           </p:cNvPr>
@@ -4373,7 +4375,7 @@
           <p:cNvPr id="52" name="TextBox 51">
             <a:extLst>
               <a:ext uri="{FF2B5EF4-FFF2-40B4-BE49-F238E27FC236}">
-                <a16:creationId xmlns="" xmlns:a16="http://schemas.microsoft.com/office/drawing/2014/main" id="{D2456DF6-62CB-4E4B-B3FA-997F2B3B16E6}"/>
+                <a16:creationId xmlns:a16="http://schemas.microsoft.com/office/drawing/2014/main" xmlns="" id="{D2456DF6-62CB-4E4B-B3FA-997F2B3B16E6}"/>
               </a:ext>
             </a:extLst>
           </p:cNvPr>
@@ -4408,7 +4410,7 @@
           <p:cNvPr id="54" name="Straight Arrow Connector 53">
             <a:extLst>
               <a:ext uri="{FF2B5EF4-FFF2-40B4-BE49-F238E27FC236}">
-                <a16:creationId xmlns="" xmlns:a16="http://schemas.microsoft.com/office/drawing/2014/main" id="{1958F21B-DD9D-4F87-A9FC-CBF5255F1B3C}"/>
+                <a16:creationId xmlns:a16="http://schemas.microsoft.com/office/drawing/2014/main" xmlns="" id="{1958F21B-DD9D-4F87-A9FC-CBF5255F1B3C}"/>
               </a:ext>
             </a:extLst>
           </p:cNvPr>
@@ -4453,7 +4455,7 @@
           <p:cNvPr id="55" name="TextBox 54">
             <a:extLst>
               <a:ext uri="{FF2B5EF4-FFF2-40B4-BE49-F238E27FC236}">
-                <a16:creationId xmlns="" xmlns:a16="http://schemas.microsoft.com/office/drawing/2014/main" id="{E7E4DA4C-EC3A-4ACF-8EBB-A00C0F8FF55E}"/>
+                <a16:creationId xmlns:a16="http://schemas.microsoft.com/office/drawing/2014/main" xmlns="" id="{E7E4DA4C-EC3A-4ACF-8EBB-A00C0F8FF55E}"/>
               </a:ext>
             </a:extLst>
           </p:cNvPr>
@@ -4488,7 +4490,7 @@
           <p:cNvPr id="59" name="Straight Arrow Connector 58">
             <a:extLst>
               <a:ext uri="{FF2B5EF4-FFF2-40B4-BE49-F238E27FC236}">
-                <a16:creationId xmlns="" xmlns:a16="http://schemas.microsoft.com/office/drawing/2014/main" id="{0CC8607E-5F22-4E9F-A601-DE0D6E1F20A4}"/>
+                <a16:creationId xmlns:a16="http://schemas.microsoft.com/office/drawing/2014/main" xmlns="" id="{0CC8607E-5F22-4E9F-A601-DE0D6E1F20A4}"/>
               </a:ext>
             </a:extLst>
           </p:cNvPr>
@@ -4533,7 +4535,7 @@
           <p:cNvPr id="64" name="Straight Arrow Connector 63">
             <a:extLst>
               <a:ext uri="{FF2B5EF4-FFF2-40B4-BE49-F238E27FC236}">
-                <a16:creationId xmlns="" xmlns:a16="http://schemas.microsoft.com/office/drawing/2014/main" id="{71FB8733-BFA2-4CDB-98C3-F2442114AFB8}"/>
+                <a16:creationId xmlns:a16="http://schemas.microsoft.com/office/drawing/2014/main" xmlns="" id="{71FB8733-BFA2-4CDB-98C3-F2442114AFB8}"/>
               </a:ext>
             </a:extLst>
           </p:cNvPr>
@@ -4578,7 +4580,7 @@
           <p:cNvPr id="67" name="TextBox 66">
             <a:extLst>
               <a:ext uri="{FF2B5EF4-FFF2-40B4-BE49-F238E27FC236}">
-                <a16:creationId xmlns="" xmlns:a16="http://schemas.microsoft.com/office/drawing/2014/main" id="{DC0BFD13-F3B3-4BCC-8F72-4820D3CA3F2F}"/>
+                <a16:creationId xmlns:a16="http://schemas.microsoft.com/office/drawing/2014/main" xmlns="" id="{DC0BFD13-F3B3-4BCC-8F72-4820D3CA3F2F}"/>
               </a:ext>
             </a:extLst>
           </p:cNvPr>
@@ -4613,7 +4615,7 @@
           <p:cNvPr id="78" name="Group 77">
             <a:extLst>
               <a:ext uri="{FF2B5EF4-FFF2-40B4-BE49-F238E27FC236}">
-                <a16:creationId xmlns="" xmlns:a16="http://schemas.microsoft.com/office/drawing/2014/main" id="{B0D8A55A-C35F-4DD8-A7AC-42C2A2C91E9E}"/>
+                <a16:creationId xmlns:a16="http://schemas.microsoft.com/office/drawing/2014/main" xmlns="" id="{B0D8A55A-C35F-4DD8-A7AC-42C2A2C91E9E}"/>
               </a:ext>
             </a:extLst>
           </p:cNvPr>
@@ -4633,7 +4635,7 @@
             <p:cNvPr id="17" name="TextBox 16">
               <a:extLst>
                 <a:ext uri="{FF2B5EF4-FFF2-40B4-BE49-F238E27FC236}">
-                  <a16:creationId xmlns="" xmlns:a16="http://schemas.microsoft.com/office/drawing/2014/main" id="{0AECDDDD-9C69-4208-AA1C-905C5B95F22C}"/>
+                  <a16:creationId xmlns:a16="http://schemas.microsoft.com/office/drawing/2014/main" xmlns="" id="{0AECDDDD-9C69-4208-AA1C-905C5B95F22C}"/>
                 </a:ext>
               </a:extLst>
             </p:cNvPr>
@@ -4668,7 +4670,7 @@
             <p:cNvPr id="8" name="Straight Arrow Connector 7">
               <a:extLst>
                 <a:ext uri="{FF2B5EF4-FFF2-40B4-BE49-F238E27FC236}">
-                  <a16:creationId xmlns="" xmlns:a16="http://schemas.microsoft.com/office/drawing/2014/main" id="{8DDBEF33-54E1-493E-BF2F-6C758455DB2F}"/>
+                  <a16:creationId xmlns:a16="http://schemas.microsoft.com/office/drawing/2014/main" xmlns="" id="{8DDBEF33-54E1-493E-BF2F-6C758455DB2F}"/>
                 </a:ext>
               </a:extLst>
             </p:cNvPr>
@@ -4713,7 +4715,7 @@
             <p:cNvPr id="29" name="Group 28">
               <a:extLst>
                 <a:ext uri="{FF2B5EF4-FFF2-40B4-BE49-F238E27FC236}">
-                  <a16:creationId xmlns="" xmlns:a16="http://schemas.microsoft.com/office/drawing/2014/main" id="{E0A9ECB2-F47D-41E6-A396-253B7A4ED88E}"/>
+                  <a16:creationId xmlns:a16="http://schemas.microsoft.com/office/drawing/2014/main" xmlns="" id="{E0A9ECB2-F47D-41E6-A396-253B7A4ED88E}"/>
                 </a:ext>
               </a:extLst>
             </p:cNvPr>
@@ -4733,7 +4735,7 @@
               <p:cNvPr id="27" name="Straight Arrow Connector 26">
                 <a:extLst>
                   <a:ext uri="{FF2B5EF4-FFF2-40B4-BE49-F238E27FC236}">
-                    <a16:creationId xmlns="" xmlns:a16="http://schemas.microsoft.com/office/drawing/2014/main" id="{104F6FC2-E13D-4097-9667-8F4A154A8D80}"/>
+                    <a16:creationId xmlns:a16="http://schemas.microsoft.com/office/drawing/2014/main" xmlns="" id="{104F6FC2-E13D-4097-9667-8F4A154A8D80}"/>
                   </a:ext>
                 </a:extLst>
               </p:cNvPr>
@@ -4777,7 +4779,7 @@
               <p:cNvPr id="28" name="Straight Arrow Connector 27">
                 <a:extLst>
                   <a:ext uri="{FF2B5EF4-FFF2-40B4-BE49-F238E27FC236}">
-                    <a16:creationId xmlns="" xmlns:a16="http://schemas.microsoft.com/office/drawing/2014/main" id="{29780F90-A07F-4BB0-9F2F-AAC340DC9D38}"/>
+                    <a16:creationId xmlns:a16="http://schemas.microsoft.com/office/drawing/2014/main" xmlns="" id="{29780F90-A07F-4BB0-9F2F-AAC340DC9D38}"/>
                   </a:ext>
                 </a:extLst>
               </p:cNvPr>
@@ -4821,7 +4823,7 @@
               <p:cNvPr id="32" name="TextBox 31">
                 <a:extLst>
                   <a:ext uri="{FF2B5EF4-FFF2-40B4-BE49-F238E27FC236}">
-                    <a16:creationId xmlns="" xmlns:a16="http://schemas.microsoft.com/office/drawing/2014/main" id="{78EDB91B-C071-4D7E-B239-6F5257BFA37A}"/>
+                    <a16:creationId xmlns:a16="http://schemas.microsoft.com/office/drawing/2014/main" xmlns="" id="{78EDB91B-C071-4D7E-B239-6F5257BFA37A}"/>
                   </a:ext>
                 </a:extLst>
               </p:cNvPr>
@@ -4857,7 +4859,7 @@
             <p:cNvPr id="68" name="TextBox 67">
               <a:extLst>
                 <a:ext uri="{FF2B5EF4-FFF2-40B4-BE49-F238E27FC236}">
-                  <a16:creationId xmlns="" xmlns:a16="http://schemas.microsoft.com/office/drawing/2014/main" id="{0A60C194-FFE9-4535-BDE8-2F20E4E57547}"/>
+                  <a16:creationId xmlns:a16="http://schemas.microsoft.com/office/drawing/2014/main" xmlns="" id="{0A60C194-FFE9-4535-BDE8-2F20E4E57547}"/>
                 </a:ext>
               </a:extLst>
             </p:cNvPr>
@@ -4892,7 +4894,7 @@
             <p:cNvPr id="69" name="Straight Arrow Connector 68">
               <a:extLst>
                 <a:ext uri="{FF2B5EF4-FFF2-40B4-BE49-F238E27FC236}">
-                  <a16:creationId xmlns="" xmlns:a16="http://schemas.microsoft.com/office/drawing/2014/main" id="{47E19BB3-F762-4D66-86F3-4DF00CE8304A}"/>
+                  <a16:creationId xmlns:a16="http://schemas.microsoft.com/office/drawing/2014/main" xmlns="" id="{47E19BB3-F762-4D66-86F3-4DF00CE8304A}"/>
                 </a:ext>
               </a:extLst>
             </p:cNvPr>
@@ -4936,7 +4938,7 @@
             <p:cNvPr id="70" name="TextBox 69">
               <a:extLst>
                 <a:ext uri="{FF2B5EF4-FFF2-40B4-BE49-F238E27FC236}">
-                  <a16:creationId xmlns="" xmlns:a16="http://schemas.microsoft.com/office/drawing/2014/main" id="{3B75113D-26B4-4A15-9FFC-2D447FA3EC79}"/>
+                  <a16:creationId xmlns:a16="http://schemas.microsoft.com/office/drawing/2014/main" xmlns="" id="{3B75113D-26B4-4A15-9FFC-2D447FA3EC79}"/>
                 </a:ext>
               </a:extLst>
             </p:cNvPr>
@@ -4971,7 +4973,7 @@
             <p:cNvPr id="71" name="Straight Arrow Connector 70">
               <a:extLst>
                 <a:ext uri="{FF2B5EF4-FFF2-40B4-BE49-F238E27FC236}">
-                  <a16:creationId xmlns="" xmlns:a16="http://schemas.microsoft.com/office/drawing/2014/main" id="{EBF545C9-EA5A-4CE0-A939-9A1C6615DDD5}"/>
+                  <a16:creationId xmlns:a16="http://schemas.microsoft.com/office/drawing/2014/main" xmlns="" id="{EBF545C9-EA5A-4CE0-A939-9A1C6615DDD5}"/>
                 </a:ext>
               </a:extLst>
             </p:cNvPr>
@@ -5015,7 +5017,7 @@
             <p:cNvPr id="72" name="TextBox 71">
               <a:extLst>
                 <a:ext uri="{FF2B5EF4-FFF2-40B4-BE49-F238E27FC236}">
-                  <a16:creationId xmlns="" xmlns:a16="http://schemas.microsoft.com/office/drawing/2014/main" id="{4C9035C0-A0A4-430A-91A1-6C4219863EDE}"/>
+                  <a16:creationId xmlns:a16="http://schemas.microsoft.com/office/drawing/2014/main" xmlns="" id="{4C9035C0-A0A4-430A-91A1-6C4219863EDE}"/>
                 </a:ext>
               </a:extLst>
             </p:cNvPr>
@@ -5051,7 +5053,7 @@
           <p:cNvPr id="74" name="TextBox 73">
             <a:extLst>
               <a:ext uri="{FF2B5EF4-FFF2-40B4-BE49-F238E27FC236}">
-                <a16:creationId xmlns="" xmlns:a16="http://schemas.microsoft.com/office/drawing/2014/main" id="{50741080-9C80-4250-AC0F-FFD661CBFA1F}"/>
+                <a16:creationId xmlns:a16="http://schemas.microsoft.com/office/drawing/2014/main" xmlns="" id="{50741080-9C80-4250-AC0F-FFD661CBFA1F}"/>
               </a:ext>
             </a:extLst>
           </p:cNvPr>
@@ -5087,7 +5089,7 @@
           <p:cNvPr id="75" name="Straight Arrow Connector 74">
             <a:extLst>
               <a:ext uri="{FF2B5EF4-FFF2-40B4-BE49-F238E27FC236}">
-                <a16:creationId xmlns="" xmlns:a16="http://schemas.microsoft.com/office/drawing/2014/main" id="{6B3F6054-C557-4674-912C-7B62D069A0A5}"/>
+                <a16:creationId xmlns:a16="http://schemas.microsoft.com/office/drawing/2014/main" xmlns="" id="{6B3F6054-C557-4674-912C-7B62D069A0A5}"/>
               </a:ext>
             </a:extLst>
           </p:cNvPr>
@@ -5132,7 +5134,7 @@
           <p:cNvPr id="81" name="TextBox 80">
             <a:extLst>
               <a:ext uri="{FF2B5EF4-FFF2-40B4-BE49-F238E27FC236}">
-                <a16:creationId xmlns="" xmlns:a16="http://schemas.microsoft.com/office/drawing/2014/main" id="{1544325F-61CC-4767-9E91-0BFCAF00FECD}"/>
+                <a16:creationId xmlns:a16="http://schemas.microsoft.com/office/drawing/2014/main" xmlns="" id="{1544325F-61CC-4767-9E91-0BFCAF00FECD}"/>
               </a:ext>
             </a:extLst>
           </p:cNvPr>
@@ -5168,7 +5170,7 @@
           <p:cNvPr id="82" name="Straight Arrow Connector 81">
             <a:extLst>
               <a:ext uri="{FF2B5EF4-FFF2-40B4-BE49-F238E27FC236}">
-                <a16:creationId xmlns="" xmlns:a16="http://schemas.microsoft.com/office/drawing/2014/main" id="{3DC0B780-9162-4D43-8BD5-694331D969B9}"/>
+                <a16:creationId xmlns:a16="http://schemas.microsoft.com/office/drawing/2014/main" xmlns="" id="{3DC0B780-9162-4D43-8BD5-694331D969B9}"/>
               </a:ext>
             </a:extLst>
           </p:cNvPr>
@@ -5212,7 +5214,7 @@
           <p:cNvPr id="44" name="TextBox 43">
             <a:extLst>
               <a:ext uri="{FF2B5EF4-FFF2-40B4-BE49-F238E27FC236}">
-                <a16:creationId xmlns="" xmlns:a16="http://schemas.microsoft.com/office/drawing/2014/main" id="{5D331EED-21ED-4FC2-B7DC-83316B7E165D}"/>
+                <a16:creationId xmlns:a16="http://schemas.microsoft.com/office/drawing/2014/main" xmlns="" id="{5D331EED-21ED-4FC2-B7DC-83316B7E165D}"/>
               </a:ext>
             </a:extLst>
           </p:cNvPr>
@@ -5250,7 +5252,7 @@
     </p:spTree>
     <p:extLst>
       <p:ext uri="{BB962C8B-B14F-4D97-AF65-F5344CB8AC3E}">
-        <p14:creationId xmlns="" xmlns:p14="http://schemas.microsoft.com/office/powerpoint/2010/main" val="1256710779"/>
+        <p14:creationId xmlns:p14="http://schemas.microsoft.com/office/powerpoint/2010/main" xmlns="" val="1256710779"/>
       </p:ext>
     </p:extLst>
   </p:cSld>
@@ -5398,7 +5400,7 @@
           <p:cNvPr id="7" name="Picture 6">
             <a:extLst>
               <a:ext uri="{FF2B5EF4-FFF2-40B4-BE49-F238E27FC236}">
-                <a16:creationId xmlns="" xmlns:a16="http://schemas.microsoft.com/office/drawing/2014/main" id="{8BAB5EDB-C339-4658-978D-CB7B86C318C8}"/>
+                <a16:creationId xmlns:a16="http://schemas.microsoft.com/office/drawing/2014/main" xmlns="" id="{8BAB5EDB-C339-4658-978D-CB7B86C318C8}"/>
               </a:ext>
             </a:extLst>
           </p:cNvPr>
@@ -5411,10 +5413,10 @@
           <a:blip r:embed="rId2" cstate="print">
             <a:extLst>
               <a:ext uri="{28A0092B-C50C-407E-A947-70E740481C1C}">
-                <a14:useLocalDpi xmlns="" xmlns:a14="http://schemas.microsoft.com/office/drawing/2010/main" val="0"/>
+                <a14:useLocalDpi xmlns:a14="http://schemas.microsoft.com/office/drawing/2010/main" xmlns="" val="0"/>
               </a:ext>
               <a:ext uri="{837473B0-CC2E-450A-ABE3-18F120FF3D39}">
-                <a1611:picAttrSrcUrl xmlns="" xmlns:a1611="http://schemas.microsoft.com/office/drawing/2016/11/main" r:id="rId3"/>
+                <a1611:picAttrSrcUrl xmlns:a1611="http://schemas.microsoft.com/office/drawing/2016/11/main" xmlns="" r:id="rId3"/>
               </a:ext>
             </a:extLst>
           </a:blip>
@@ -5437,7 +5439,7 @@
           <p:cNvPr id="9" name="Picture 8">
             <a:extLst>
               <a:ext uri="{FF2B5EF4-FFF2-40B4-BE49-F238E27FC236}">
-                <a16:creationId xmlns="" xmlns:a16="http://schemas.microsoft.com/office/drawing/2014/main" id="{217DD399-6BEC-42B0-8C8F-80C05C13BB8F}"/>
+                <a16:creationId xmlns:a16="http://schemas.microsoft.com/office/drawing/2014/main" xmlns="" id="{217DD399-6BEC-42B0-8C8F-80C05C13BB8F}"/>
               </a:ext>
             </a:extLst>
           </p:cNvPr>
@@ -5450,10 +5452,10 @@
           <a:blip r:embed="rId4" cstate="print">
             <a:extLst>
               <a:ext uri="{28A0092B-C50C-407E-A947-70E740481C1C}">
-                <a14:useLocalDpi xmlns="" xmlns:a14="http://schemas.microsoft.com/office/drawing/2010/main" val="0"/>
+                <a14:useLocalDpi xmlns:a14="http://schemas.microsoft.com/office/drawing/2010/main" xmlns="" val="0"/>
               </a:ext>
               <a:ext uri="{837473B0-CC2E-450A-ABE3-18F120FF3D39}">
-                <a1611:picAttrSrcUrl xmlns="" xmlns:a1611="http://schemas.microsoft.com/office/drawing/2016/11/main" r:id="rId5"/>
+                <a1611:picAttrSrcUrl xmlns:a1611="http://schemas.microsoft.com/office/drawing/2016/11/main" xmlns="" r:id="rId5"/>
               </a:ext>
             </a:extLst>
           </a:blip>
@@ -5476,7 +5478,7 @@
           <p:cNvPr id="5" name="Straight Arrow Connector 4">
             <a:extLst>
               <a:ext uri="{FF2B5EF4-FFF2-40B4-BE49-F238E27FC236}">
-                <a16:creationId xmlns="" xmlns:a16="http://schemas.microsoft.com/office/drawing/2014/main" id="{807C7073-511B-46BE-8CEC-CAFF15AD79B2}"/>
+                <a16:creationId xmlns:a16="http://schemas.microsoft.com/office/drawing/2014/main" xmlns="" id="{807C7073-511B-46BE-8CEC-CAFF15AD79B2}"/>
               </a:ext>
             </a:extLst>
           </p:cNvPr>
@@ -5520,7 +5522,7 @@
           <p:cNvPr id="13" name="TextBox 12">
             <a:extLst>
               <a:ext uri="{FF2B5EF4-FFF2-40B4-BE49-F238E27FC236}">
-                <a16:creationId xmlns="" xmlns:a16="http://schemas.microsoft.com/office/drawing/2014/main" id="{E056EDE4-8844-4846-B0A1-BE530F4D7466}"/>
+                <a16:creationId xmlns:a16="http://schemas.microsoft.com/office/drawing/2014/main" xmlns="" id="{E056EDE4-8844-4846-B0A1-BE530F4D7466}"/>
               </a:ext>
             </a:extLst>
           </p:cNvPr>
@@ -5562,7 +5564,7 @@
           <p:cNvPr id="14" name="TextBox 13">
             <a:extLst>
               <a:ext uri="{FF2B5EF4-FFF2-40B4-BE49-F238E27FC236}">
-                <a16:creationId xmlns="" xmlns:a16="http://schemas.microsoft.com/office/drawing/2014/main" id="{16109C71-5DB7-418B-ACC6-6B9C83D6F5BB}"/>
+                <a16:creationId xmlns:a16="http://schemas.microsoft.com/office/drawing/2014/main" xmlns="" id="{16109C71-5DB7-418B-ACC6-6B9C83D6F5BB}"/>
               </a:ext>
             </a:extLst>
           </p:cNvPr>
@@ -5612,7 +5614,7 @@
           <p:cNvPr id="15" name="Straight Arrow Connector 14">
             <a:extLst>
               <a:ext uri="{FF2B5EF4-FFF2-40B4-BE49-F238E27FC236}">
-                <a16:creationId xmlns="" xmlns:a16="http://schemas.microsoft.com/office/drawing/2014/main" id="{005BF5B4-EE3E-4309-A841-F9E134AE9FC1}"/>
+                <a16:creationId xmlns:a16="http://schemas.microsoft.com/office/drawing/2014/main" xmlns="" id="{005BF5B4-EE3E-4309-A841-F9E134AE9FC1}"/>
               </a:ext>
             </a:extLst>
           </p:cNvPr>
@@ -5654,7 +5656,7 @@
     </p:spTree>
     <p:extLst>
       <p:ext uri="{BB962C8B-B14F-4D97-AF65-F5344CB8AC3E}">
-        <p14:creationId xmlns="" xmlns:p14="http://schemas.microsoft.com/office/powerpoint/2010/main" val="100707161"/>
+        <p14:creationId xmlns:p14="http://schemas.microsoft.com/office/powerpoint/2010/main" xmlns="" val="100707161"/>
       </p:ext>
     </p:extLst>
   </p:cSld>
@@ -5802,7 +5804,7 @@
           <p:cNvPr id="7" name="Picture 6">
             <a:extLst>
               <a:ext uri="{FF2B5EF4-FFF2-40B4-BE49-F238E27FC236}">
-                <a16:creationId xmlns="" xmlns:a16="http://schemas.microsoft.com/office/drawing/2014/main" id="{8BAB5EDB-C339-4658-978D-CB7B86C318C8}"/>
+                <a16:creationId xmlns:a16="http://schemas.microsoft.com/office/drawing/2014/main" xmlns="" id="{8BAB5EDB-C339-4658-978D-CB7B86C318C8}"/>
               </a:ext>
             </a:extLst>
           </p:cNvPr>
@@ -5815,10 +5817,10 @@
           <a:blip r:embed="rId2" cstate="print">
             <a:extLst>
               <a:ext uri="{28A0092B-C50C-407E-A947-70E740481C1C}">
-                <a14:useLocalDpi xmlns="" xmlns:a14="http://schemas.microsoft.com/office/drawing/2010/main" val="0"/>
+                <a14:useLocalDpi xmlns:a14="http://schemas.microsoft.com/office/drawing/2010/main" xmlns="" val="0"/>
               </a:ext>
               <a:ext uri="{837473B0-CC2E-450A-ABE3-18F120FF3D39}">
-                <a1611:picAttrSrcUrl xmlns="" xmlns:a1611="http://schemas.microsoft.com/office/drawing/2016/11/main" r:id="rId3"/>
+                <a1611:picAttrSrcUrl xmlns:a1611="http://schemas.microsoft.com/office/drawing/2016/11/main" xmlns="" r:id="rId3"/>
               </a:ext>
             </a:extLst>
           </a:blip>
@@ -5841,7 +5843,7 @@
           <p:cNvPr id="9" name="Picture 8">
             <a:extLst>
               <a:ext uri="{FF2B5EF4-FFF2-40B4-BE49-F238E27FC236}">
-                <a16:creationId xmlns="" xmlns:a16="http://schemas.microsoft.com/office/drawing/2014/main" id="{217DD399-6BEC-42B0-8C8F-80C05C13BB8F}"/>
+                <a16:creationId xmlns:a16="http://schemas.microsoft.com/office/drawing/2014/main" xmlns="" id="{217DD399-6BEC-42B0-8C8F-80C05C13BB8F}"/>
               </a:ext>
             </a:extLst>
           </p:cNvPr>
@@ -5854,10 +5856,10 @@
           <a:blip r:embed="rId4" cstate="print">
             <a:extLst>
               <a:ext uri="{28A0092B-C50C-407E-A947-70E740481C1C}">
-                <a14:useLocalDpi xmlns="" xmlns:a14="http://schemas.microsoft.com/office/drawing/2010/main" val="0"/>
+                <a14:useLocalDpi xmlns:a14="http://schemas.microsoft.com/office/drawing/2010/main" xmlns="" val="0"/>
               </a:ext>
               <a:ext uri="{837473B0-CC2E-450A-ABE3-18F120FF3D39}">
-                <a1611:picAttrSrcUrl xmlns="" xmlns:a1611="http://schemas.microsoft.com/office/drawing/2016/11/main" r:id="rId5"/>
+                <a1611:picAttrSrcUrl xmlns:a1611="http://schemas.microsoft.com/office/drawing/2016/11/main" xmlns="" r:id="rId5"/>
               </a:ext>
             </a:extLst>
           </a:blip>
@@ -5880,7 +5882,7 @@
           <p:cNvPr id="5" name="Straight Arrow Connector 4">
             <a:extLst>
               <a:ext uri="{FF2B5EF4-FFF2-40B4-BE49-F238E27FC236}">
-                <a16:creationId xmlns="" xmlns:a16="http://schemas.microsoft.com/office/drawing/2014/main" id="{807C7073-511B-46BE-8CEC-CAFF15AD79B2}"/>
+                <a16:creationId xmlns:a16="http://schemas.microsoft.com/office/drawing/2014/main" xmlns="" id="{807C7073-511B-46BE-8CEC-CAFF15AD79B2}"/>
               </a:ext>
             </a:extLst>
           </p:cNvPr>
@@ -5924,7 +5926,7 @@
           <p:cNvPr id="13" name="TextBox 12">
             <a:extLst>
               <a:ext uri="{FF2B5EF4-FFF2-40B4-BE49-F238E27FC236}">
-                <a16:creationId xmlns="" xmlns:a16="http://schemas.microsoft.com/office/drawing/2014/main" id="{E056EDE4-8844-4846-B0A1-BE530F4D7466}"/>
+                <a16:creationId xmlns:a16="http://schemas.microsoft.com/office/drawing/2014/main" xmlns="" id="{E056EDE4-8844-4846-B0A1-BE530F4D7466}"/>
               </a:ext>
             </a:extLst>
           </p:cNvPr>
@@ -5966,7 +5968,7 @@
           <p:cNvPr id="14" name="TextBox 13">
             <a:extLst>
               <a:ext uri="{FF2B5EF4-FFF2-40B4-BE49-F238E27FC236}">
-                <a16:creationId xmlns="" xmlns:a16="http://schemas.microsoft.com/office/drawing/2014/main" id="{16109C71-5DB7-418B-ACC6-6B9C83D6F5BB}"/>
+                <a16:creationId xmlns:a16="http://schemas.microsoft.com/office/drawing/2014/main" xmlns="" id="{16109C71-5DB7-418B-ACC6-6B9C83D6F5BB}"/>
               </a:ext>
             </a:extLst>
           </p:cNvPr>
@@ -6016,7 +6018,7 @@
           <p:cNvPr id="15" name="Straight Arrow Connector 14">
             <a:extLst>
               <a:ext uri="{FF2B5EF4-FFF2-40B4-BE49-F238E27FC236}">
-                <a16:creationId xmlns="" xmlns:a16="http://schemas.microsoft.com/office/drawing/2014/main" id="{005BF5B4-EE3E-4309-A841-F9E134AE9FC1}"/>
+                <a16:creationId xmlns:a16="http://schemas.microsoft.com/office/drawing/2014/main" xmlns="" id="{005BF5B4-EE3E-4309-A841-F9E134AE9FC1}"/>
               </a:ext>
             </a:extLst>
           </p:cNvPr>
@@ -6060,7 +6062,7 @@
           <p:cNvPr id="17" name="Oval 16">
             <a:extLst>
               <a:ext uri="{FF2B5EF4-FFF2-40B4-BE49-F238E27FC236}">
-                <a16:creationId xmlns="" xmlns:a16="http://schemas.microsoft.com/office/drawing/2014/main" id="{DBA27E3B-CE81-443B-8B7B-F3E80DB22152}"/>
+                <a16:creationId xmlns:a16="http://schemas.microsoft.com/office/drawing/2014/main" xmlns="" id="{DBA27E3B-CE81-443B-8B7B-F3E80DB22152}"/>
               </a:ext>
             </a:extLst>
           </p:cNvPr>
@@ -6108,7 +6110,7 @@
           <p:cNvPr id="19" name="Oval 18">
             <a:extLst>
               <a:ext uri="{FF2B5EF4-FFF2-40B4-BE49-F238E27FC236}">
-                <a16:creationId xmlns="" xmlns:a16="http://schemas.microsoft.com/office/drawing/2014/main" id="{059E428F-9429-45DA-A48E-0CC5482E0B5D}"/>
+                <a16:creationId xmlns:a16="http://schemas.microsoft.com/office/drawing/2014/main" xmlns="" id="{059E428F-9429-45DA-A48E-0CC5482E0B5D}"/>
               </a:ext>
             </a:extLst>
           </p:cNvPr>
@@ -6158,7 +6160,7 @@
     </p:spTree>
     <p:extLst>
       <p:ext uri="{BB962C8B-B14F-4D97-AF65-F5344CB8AC3E}">
-        <p14:creationId xmlns="" xmlns:p14="http://schemas.microsoft.com/office/powerpoint/2010/main" val="3902734336"/>
+        <p14:creationId xmlns:p14="http://schemas.microsoft.com/office/powerpoint/2010/main" xmlns="" val="3902734336"/>
       </p:ext>
     </p:extLst>
   </p:cSld>
@@ -6306,7 +6308,7 @@
           <p:cNvPr id="7" name="Picture 6">
             <a:extLst>
               <a:ext uri="{FF2B5EF4-FFF2-40B4-BE49-F238E27FC236}">
-                <a16:creationId xmlns="" xmlns:a16="http://schemas.microsoft.com/office/drawing/2014/main" id="{8BAB5EDB-C339-4658-978D-CB7B86C318C8}"/>
+                <a16:creationId xmlns:a16="http://schemas.microsoft.com/office/drawing/2014/main" xmlns="" id="{8BAB5EDB-C339-4658-978D-CB7B86C318C8}"/>
               </a:ext>
             </a:extLst>
           </p:cNvPr>
@@ -6319,10 +6321,10 @@
           <a:blip r:embed="rId2" cstate="print">
             <a:extLst>
               <a:ext uri="{28A0092B-C50C-407E-A947-70E740481C1C}">
-                <a14:useLocalDpi xmlns="" xmlns:a14="http://schemas.microsoft.com/office/drawing/2010/main" val="0"/>
+                <a14:useLocalDpi xmlns:a14="http://schemas.microsoft.com/office/drawing/2010/main" xmlns="" val="0"/>
               </a:ext>
               <a:ext uri="{837473B0-CC2E-450A-ABE3-18F120FF3D39}">
-                <a1611:picAttrSrcUrl xmlns="" xmlns:a1611="http://schemas.microsoft.com/office/drawing/2016/11/main" r:id="rId3"/>
+                <a1611:picAttrSrcUrl xmlns:a1611="http://schemas.microsoft.com/office/drawing/2016/11/main" xmlns="" r:id="rId3"/>
               </a:ext>
             </a:extLst>
           </a:blip>
@@ -6345,7 +6347,7 @@
           <p:cNvPr id="9" name="Picture 8">
             <a:extLst>
               <a:ext uri="{FF2B5EF4-FFF2-40B4-BE49-F238E27FC236}">
-                <a16:creationId xmlns="" xmlns:a16="http://schemas.microsoft.com/office/drawing/2014/main" id="{217DD399-6BEC-42B0-8C8F-80C05C13BB8F}"/>
+                <a16:creationId xmlns:a16="http://schemas.microsoft.com/office/drawing/2014/main" xmlns="" id="{217DD399-6BEC-42B0-8C8F-80C05C13BB8F}"/>
               </a:ext>
             </a:extLst>
           </p:cNvPr>
@@ -6358,10 +6360,10 @@
           <a:blip r:embed="rId4" cstate="print">
             <a:extLst>
               <a:ext uri="{28A0092B-C50C-407E-A947-70E740481C1C}">
-                <a14:useLocalDpi xmlns="" xmlns:a14="http://schemas.microsoft.com/office/drawing/2010/main" val="0"/>
+                <a14:useLocalDpi xmlns:a14="http://schemas.microsoft.com/office/drawing/2010/main" xmlns="" val="0"/>
               </a:ext>
               <a:ext uri="{837473B0-CC2E-450A-ABE3-18F120FF3D39}">
-                <a1611:picAttrSrcUrl xmlns="" xmlns:a1611="http://schemas.microsoft.com/office/drawing/2016/11/main" r:id="rId5"/>
+                <a1611:picAttrSrcUrl xmlns:a1611="http://schemas.microsoft.com/office/drawing/2016/11/main" xmlns="" r:id="rId5"/>
               </a:ext>
             </a:extLst>
           </a:blip>
@@ -6384,7 +6386,7 @@
           <p:cNvPr id="5" name="Straight Arrow Connector 4">
             <a:extLst>
               <a:ext uri="{FF2B5EF4-FFF2-40B4-BE49-F238E27FC236}">
-                <a16:creationId xmlns="" xmlns:a16="http://schemas.microsoft.com/office/drawing/2014/main" id="{807C7073-511B-46BE-8CEC-CAFF15AD79B2}"/>
+                <a16:creationId xmlns:a16="http://schemas.microsoft.com/office/drawing/2014/main" xmlns="" id="{807C7073-511B-46BE-8CEC-CAFF15AD79B2}"/>
               </a:ext>
             </a:extLst>
           </p:cNvPr>
@@ -6428,7 +6430,7 @@
           <p:cNvPr id="13" name="TextBox 12">
             <a:extLst>
               <a:ext uri="{FF2B5EF4-FFF2-40B4-BE49-F238E27FC236}">
-                <a16:creationId xmlns="" xmlns:a16="http://schemas.microsoft.com/office/drawing/2014/main" id="{E056EDE4-8844-4846-B0A1-BE530F4D7466}"/>
+                <a16:creationId xmlns:a16="http://schemas.microsoft.com/office/drawing/2014/main" xmlns="" id="{E056EDE4-8844-4846-B0A1-BE530F4D7466}"/>
               </a:ext>
             </a:extLst>
           </p:cNvPr>
@@ -6470,7 +6472,7 @@
           <p:cNvPr id="14" name="TextBox 13">
             <a:extLst>
               <a:ext uri="{FF2B5EF4-FFF2-40B4-BE49-F238E27FC236}">
-                <a16:creationId xmlns="" xmlns:a16="http://schemas.microsoft.com/office/drawing/2014/main" id="{16109C71-5DB7-418B-ACC6-6B9C83D6F5BB}"/>
+                <a16:creationId xmlns:a16="http://schemas.microsoft.com/office/drawing/2014/main" xmlns="" id="{16109C71-5DB7-418B-ACC6-6B9C83D6F5BB}"/>
               </a:ext>
             </a:extLst>
           </p:cNvPr>
@@ -6520,7 +6522,7 @@
           <p:cNvPr id="15" name="Straight Arrow Connector 14">
             <a:extLst>
               <a:ext uri="{FF2B5EF4-FFF2-40B4-BE49-F238E27FC236}">
-                <a16:creationId xmlns="" xmlns:a16="http://schemas.microsoft.com/office/drawing/2014/main" id="{005BF5B4-EE3E-4309-A841-F9E134AE9FC1}"/>
+                <a16:creationId xmlns:a16="http://schemas.microsoft.com/office/drawing/2014/main" xmlns="" id="{005BF5B4-EE3E-4309-A841-F9E134AE9FC1}"/>
               </a:ext>
             </a:extLst>
           </p:cNvPr>
@@ -6564,7 +6566,7 @@
           <p:cNvPr id="8" name="Straight Connector 7">
             <a:extLst>
               <a:ext uri="{FF2B5EF4-FFF2-40B4-BE49-F238E27FC236}">
-                <a16:creationId xmlns="" xmlns:a16="http://schemas.microsoft.com/office/drawing/2014/main" id="{3B59536B-137F-41E4-BA0A-2C4C1A71E1C1}"/>
+                <a16:creationId xmlns:a16="http://schemas.microsoft.com/office/drawing/2014/main" xmlns="" id="{3B59536B-137F-41E4-BA0A-2C4C1A71E1C1}"/>
               </a:ext>
             </a:extLst>
           </p:cNvPr>
@@ -6605,7 +6607,7 @@
           <p:cNvPr id="16" name="Straight Connector 15">
             <a:extLst>
               <a:ext uri="{FF2B5EF4-FFF2-40B4-BE49-F238E27FC236}">
-                <a16:creationId xmlns="" xmlns:a16="http://schemas.microsoft.com/office/drawing/2014/main" id="{D5F83E8C-4962-4D60-9C76-2445177C0A91}"/>
+                <a16:creationId xmlns:a16="http://schemas.microsoft.com/office/drawing/2014/main" xmlns="" id="{D5F83E8C-4962-4D60-9C76-2445177C0A91}"/>
               </a:ext>
             </a:extLst>
           </p:cNvPr>
@@ -6646,7 +6648,7 @@
     </p:spTree>
     <p:extLst>
       <p:ext uri="{BB962C8B-B14F-4D97-AF65-F5344CB8AC3E}">
-        <p14:creationId xmlns="" xmlns:p14="http://schemas.microsoft.com/office/powerpoint/2010/main" val="3140037942"/>
+        <p14:creationId xmlns:p14="http://schemas.microsoft.com/office/powerpoint/2010/main" xmlns="" val="3140037942"/>
       </p:ext>
     </p:extLst>
   </p:cSld>
@@ -6794,7 +6796,7 @@
           <p:cNvPr id="7" name="Picture 6">
             <a:extLst>
               <a:ext uri="{FF2B5EF4-FFF2-40B4-BE49-F238E27FC236}">
-                <a16:creationId xmlns="" xmlns:a16="http://schemas.microsoft.com/office/drawing/2014/main" id="{8BAB5EDB-C339-4658-978D-CB7B86C318C8}"/>
+                <a16:creationId xmlns:a16="http://schemas.microsoft.com/office/drawing/2014/main" xmlns="" id="{8BAB5EDB-C339-4658-978D-CB7B86C318C8}"/>
               </a:ext>
             </a:extLst>
           </p:cNvPr>
@@ -6807,10 +6809,10 @@
           <a:blip r:embed="rId2" cstate="print">
             <a:extLst>
               <a:ext uri="{28A0092B-C50C-407E-A947-70E740481C1C}">
-                <a14:useLocalDpi xmlns="" xmlns:a14="http://schemas.microsoft.com/office/drawing/2010/main" val="0"/>
+                <a14:useLocalDpi xmlns:a14="http://schemas.microsoft.com/office/drawing/2010/main" xmlns="" val="0"/>
               </a:ext>
               <a:ext uri="{837473B0-CC2E-450A-ABE3-18F120FF3D39}">
-                <a1611:picAttrSrcUrl xmlns="" xmlns:a1611="http://schemas.microsoft.com/office/drawing/2016/11/main" r:id="rId3"/>
+                <a1611:picAttrSrcUrl xmlns:a1611="http://schemas.microsoft.com/office/drawing/2016/11/main" xmlns="" r:id="rId3"/>
               </a:ext>
             </a:extLst>
           </a:blip>
@@ -6833,7 +6835,7 @@
           <p:cNvPr id="9" name="Picture 8">
             <a:extLst>
               <a:ext uri="{FF2B5EF4-FFF2-40B4-BE49-F238E27FC236}">
-                <a16:creationId xmlns="" xmlns:a16="http://schemas.microsoft.com/office/drawing/2014/main" id="{217DD399-6BEC-42B0-8C8F-80C05C13BB8F}"/>
+                <a16:creationId xmlns:a16="http://schemas.microsoft.com/office/drawing/2014/main" xmlns="" id="{217DD399-6BEC-42B0-8C8F-80C05C13BB8F}"/>
               </a:ext>
             </a:extLst>
           </p:cNvPr>
@@ -6846,10 +6848,10 @@
           <a:blip r:embed="rId4" cstate="print">
             <a:extLst>
               <a:ext uri="{28A0092B-C50C-407E-A947-70E740481C1C}">
-                <a14:useLocalDpi xmlns="" xmlns:a14="http://schemas.microsoft.com/office/drawing/2010/main" val="0"/>
+                <a14:useLocalDpi xmlns:a14="http://schemas.microsoft.com/office/drawing/2010/main" xmlns="" val="0"/>
               </a:ext>
               <a:ext uri="{837473B0-CC2E-450A-ABE3-18F120FF3D39}">
-                <a1611:picAttrSrcUrl xmlns="" xmlns:a1611="http://schemas.microsoft.com/office/drawing/2016/11/main" r:id="rId5"/>
+                <a1611:picAttrSrcUrl xmlns:a1611="http://schemas.microsoft.com/office/drawing/2016/11/main" xmlns="" r:id="rId5"/>
               </a:ext>
             </a:extLst>
           </a:blip>
@@ -6872,7 +6874,7 @@
           <p:cNvPr id="5" name="Straight Arrow Connector 4">
             <a:extLst>
               <a:ext uri="{FF2B5EF4-FFF2-40B4-BE49-F238E27FC236}">
-                <a16:creationId xmlns="" xmlns:a16="http://schemas.microsoft.com/office/drawing/2014/main" id="{807C7073-511B-46BE-8CEC-CAFF15AD79B2}"/>
+                <a16:creationId xmlns:a16="http://schemas.microsoft.com/office/drawing/2014/main" xmlns="" id="{807C7073-511B-46BE-8CEC-CAFF15AD79B2}"/>
               </a:ext>
             </a:extLst>
           </p:cNvPr>
@@ -6916,7 +6918,7 @@
           <p:cNvPr id="13" name="TextBox 12">
             <a:extLst>
               <a:ext uri="{FF2B5EF4-FFF2-40B4-BE49-F238E27FC236}">
-                <a16:creationId xmlns="" xmlns:a16="http://schemas.microsoft.com/office/drawing/2014/main" id="{E056EDE4-8844-4846-B0A1-BE530F4D7466}"/>
+                <a16:creationId xmlns:a16="http://schemas.microsoft.com/office/drawing/2014/main" xmlns="" id="{E056EDE4-8844-4846-B0A1-BE530F4D7466}"/>
               </a:ext>
             </a:extLst>
           </p:cNvPr>
@@ -6958,7 +6960,7 @@
           <p:cNvPr id="14" name="TextBox 13">
             <a:extLst>
               <a:ext uri="{FF2B5EF4-FFF2-40B4-BE49-F238E27FC236}">
-                <a16:creationId xmlns="" xmlns:a16="http://schemas.microsoft.com/office/drawing/2014/main" id="{16109C71-5DB7-418B-ACC6-6B9C83D6F5BB}"/>
+                <a16:creationId xmlns:a16="http://schemas.microsoft.com/office/drawing/2014/main" xmlns="" id="{16109C71-5DB7-418B-ACC6-6B9C83D6F5BB}"/>
               </a:ext>
             </a:extLst>
           </p:cNvPr>
@@ -7008,7 +7010,7 @@
           <p:cNvPr id="15" name="Straight Arrow Connector 14">
             <a:extLst>
               <a:ext uri="{FF2B5EF4-FFF2-40B4-BE49-F238E27FC236}">
-                <a16:creationId xmlns="" xmlns:a16="http://schemas.microsoft.com/office/drawing/2014/main" id="{005BF5B4-EE3E-4309-A841-F9E134AE9FC1}"/>
+                <a16:creationId xmlns:a16="http://schemas.microsoft.com/office/drawing/2014/main" xmlns="" id="{005BF5B4-EE3E-4309-A841-F9E134AE9FC1}"/>
               </a:ext>
             </a:extLst>
           </p:cNvPr>
@@ -7052,7 +7054,7 @@
           <p:cNvPr id="4" name="Freeform: Shape 3">
             <a:extLst>
               <a:ext uri="{FF2B5EF4-FFF2-40B4-BE49-F238E27FC236}">
-                <a16:creationId xmlns="" xmlns:a16="http://schemas.microsoft.com/office/drawing/2014/main" id="{D0BEC306-7EB5-4B09-8E8E-D0C74D8CB22E}"/>
+                <a16:creationId xmlns:a16="http://schemas.microsoft.com/office/drawing/2014/main" xmlns="" id="{D0BEC306-7EB5-4B09-8E8E-D0C74D8CB22E}"/>
               </a:ext>
             </a:extLst>
           </p:cNvPr>
@@ -7205,7 +7207,7 @@
           <p:cNvPr id="11" name="Rectangle 10">
             <a:extLst>
               <a:ext uri="{FF2B5EF4-FFF2-40B4-BE49-F238E27FC236}">
-                <a16:creationId xmlns="" xmlns:a16="http://schemas.microsoft.com/office/drawing/2014/main" id="{9C0FB370-DD8C-4F2B-AF04-E541C7C8FFFB}"/>
+                <a16:creationId xmlns:a16="http://schemas.microsoft.com/office/drawing/2014/main" xmlns="" id="{9C0FB370-DD8C-4F2B-AF04-E541C7C8FFFB}"/>
               </a:ext>
             </a:extLst>
           </p:cNvPr>
@@ -7253,7 +7255,7 @@
           <p:cNvPr id="17" name="Rectangle 16">
             <a:extLst>
               <a:ext uri="{FF2B5EF4-FFF2-40B4-BE49-F238E27FC236}">
-                <a16:creationId xmlns="" xmlns:a16="http://schemas.microsoft.com/office/drawing/2014/main" id="{1291B997-CF72-4B83-8055-5AAA79536704}"/>
+                <a16:creationId xmlns:a16="http://schemas.microsoft.com/office/drawing/2014/main" xmlns="" id="{1291B997-CF72-4B83-8055-5AAA79536704}"/>
               </a:ext>
             </a:extLst>
           </p:cNvPr>
@@ -7303,7 +7305,7 @@
     </p:spTree>
     <p:extLst>
       <p:ext uri="{BB962C8B-B14F-4D97-AF65-F5344CB8AC3E}">
-        <p14:creationId xmlns="" xmlns:p14="http://schemas.microsoft.com/office/powerpoint/2010/main" val="2557757287"/>
+        <p14:creationId xmlns:p14="http://schemas.microsoft.com/office/powerpoint/2010/main" xmlns="" val="2557757287"/>
       </p:ext>
     </p:extLst>
   </p:cSld>
@@ -7521,7 +7523,7 @@
     </p:spTree>
     <p:extLst>
       <p:ext uri="{BB962C8B-B14F-4D97-AF65-F5344CB8AC3E}">
-        <p14:creationId xmlns="" xmlns:p14="http://schemas.microsoft.com/office/powerpoint/2010/main" val="3365457725"/>
+        <p14:creationId xmlns:p14="http://schemas.microsoft.com/office/powerpoint/2010/main" xmlns="" val="3365457725"/>
       </p:ext>
     </p:extLst>
   </p:cSld>
@@ -7726,7 +7728,7 @@
     </p:spTree>
     <p:extLst>
       <p:ext uri="{BB962C8B-B14F-4D97-AF65-F5344CB8AC3E}">
-        <p14:creationId xmlns="" xmlns:p14="http://schemas.microsoft.com/office/powerpoint/2010/main" val="2737390811"/>
+        <p14:creationId xmlns:p14="http://schemas.microsoft.com/office/powerpoint/2010/main" xmlns="" val="2737390811"/>
       </p:ext>
     </p:extLst>
   </p:cSld>
@@ -7915,7 +7917,7 @@
     </p:spTree>
     <p:extLst>
       <p:ext uri="{BB962C8B-B14F-4D97-AF65-F5344CB8AC3E}">
-        <p14:creationId xmlns="" xmlns:p14="http://schemas.microsoft.com/office/powerpoint/2010/main" val="3470026828"/>
+        <p14:creationId xmlns:p14="http://schemas.microsoft.com/office/powerpoint/2010/main" xmlns="" val="3470026828"/>
       </p:ext>
     </p:extLst>
   </p:cSld>
@@ -8162,7 +8164,7 @@
     </p:spTree>
     <p:extLst>
       <p:ext uri="{BB962C8B-B14F-4D97-AF65-F5344CB8AC3E}">
-        <p14:creationId xmlns="" xmlns:p14="http://schemas.microsoft.com/office/powerpoint/2010/main" val="1157039037"/>
+        <p14:creationId xmlns:p14="http://schemas.microsoft.com/office/powerpoint/2010/main" xmlns="" val="1157039037"/>
       </p:ext>
     </p:extLst>
   </p:cSld>
@@ -8421,7 +8423,7 @@
     </p:spTree>
     <p:extLst>
       <p:ext uri="{BB962C8B-B14F-4D97-AF65-F5344CB8AC3E}">
-        <p14:creationId xmlns="" xmlns:p14="http://schemas.microsoft.com/office/powerpoint/2010/main" val="1161006655"/>
+        <p14:creationId xmlns:p14="http://schemas.microsoft.com/office/powerpoint/2010/main" xmlns="" val="1161006655"/>
       </p:ext>
     </p:extLst>
   </p:cSld>
@@ -8653,7 +8655,7 @@
     </p:spTree>
     <p:extLst>
       <p:ext uri="{BB962C8B-B14F-4D97-AF65-F5344CB8AC3E}">
-        <p14:creationId xmlns="" xmlns:p14="http://schemas.microsoft.com/office/powerpoint/2010/main" val="3107128514"/>
+        <p14:creationId xmlns:p14="http://schemas.microsoft.com/office/powerpoint/2010/main" xmlns="" val="3107128514"/>
       </p:ext>
     </p:extLst>
   </p:cSld>
@@ -8829,7 +8831,7 @@
     </p:spTree>
     <p:extLst>
       <p:ext uri="{BB962C8B-B14F-4D97-AF65-F5344CB8AC3E}">
-        <p14:creationId xmlns="" xmlns:p14="http://schemas.microsoft.com/office/powerpoint/2010/main" val="202686773"/>
+        <p14:creationId xmlns:p14="http://schemas.microsoft.com/office/powerpoint/2010/main" xmlns="" val="202686773"/>
       </p:ext>
     </p:extLst>
   </p:cSld>
@@ -9011,7 +9013,7 @@
     </p:spTree>
     <p:extLst>
       <p:ext uri="{BB962C8B-B14F-4D97-AF65-F5344CB8AC3E}">
-        <p14:creationId xmlns="" xmlns:p14="http://schemas.microsoft.com/office/powerpoint/2010/main" val="1490306992"/>
+        <p14:creationId xmlns:p14="http://schemas.microsoft.com/office/powerpoint/2010/main" xmlns="" val="1490306992"/>
       </p:ext>
     </p:extLst>
   </p:cSld>
@@ -9255,7 +9257,7 @@
     </p:spTree>
     <p:extLst>
       <p:ext uri="{BB962C8B-B14F-4D97-AF65-F5344CB8AC3E}">
-        <p14:creationId xmlns="" xmlns:p14="http://schemas.microsoft.com/office/powerpoint/2010/main" val="2609893494"/>
+        <p14:creationId xmlns:p14="http://schemas.microsoft.com/office/powerpoint/2010/main" xmlns="" val="2609893494"/>
       </p:ext>
     </p:extLst>
   </p:cSld>
@@ -9432,7 +9434,7 @@
     </p:spTree>
     <p:extLst>
       <p:ext uri="{BB962C8B-B14F-4D97-AF65-F5344CB8AC3E}">
-        <p14:creationId xmlns="" xmlns:p14="http://schemas.microsoft.com/office/powerpoint/2010/main" val="2325078793"/>
+        <p14:creationId xmlns:p14="http://schemas.microsoft.com/office/powerpoint/2010/main" xmlns="" val="2325078793"/>
       </p:ext>
     </p:extLst>
   </p:cSld>
@@ -9468,13 +9470,7 @@
       </p:grpSpPr>
       <p:sp>
         <p:nvSpPr>
-          <p:cNvPr id="2" name="Title 1">
-            <a:extLst>
-              <a:ext uri="{FF2B5EF4-FFF2-40B4-BE49-F238E27FC236}">
-                <a16:creationId xmlns="" xmlns:a16="http://schemas.microsoft.com/office/drawing/2014/main" id="{D3144BBF-69E2-47B3-A5D4-FB03B54F0F96}"/>
-              </a:ext>
-            </a:extLst>
-          </p:cNvPr>
+          <p:cNvPr id="2" name="Title 1"/>
           <p:cNvSpPr>
             <a:spLocks noGrp="1"/>
           </p:cNvSpPr>
@@ -9487,112 +9483,92 @@
           <a:bodyPr/>
           <a:lstStyle/>
           <a:p>
-            <a:r>
-              <a:rPr lang="en-CA" dirty="0"/>
-              <a:t>UML, &amp; Version Control Systems</a:t>
-            </a:r>
-          </a:p>
-        </p:txBody>
-      </p:sp>
-      <p:sp>
-        <p:nvSpPr>
-          <p:cNvPr id="3" name="Content Placeholder 2">
-            <a:extLst>
-              <a:ext uri="{FF2B5EF4-FFF2-40B4-BE49-F238E27FC236}">
-                <a16:creationId xmlns="" xmlns:a16="http://schemas.microsoft.com/office/drawing/2014/main" id="{B981305C-A702-4FE5-A134-6B1E026A73CE}"/>
-              </a:ext>
-            </a:extLst>
-          </p:cNvPr>
-          <p:cNvSpPr>
-            <a:spLocks noGrp="1"/>
-          </p:cNvSpPr>
-          <p:nvPr>
-            <p:ph idx="1"/>
-          </p:nvPr>
-        </p:nvSpPr>
-        <p:spPr/>
-        <p:txBody>
-          <a:bodyPr/>
-          <a:lstStyle/>
-          <a:p>
-            <a:r>
-              <a:rPr lang="en-CA" dirty="0"/>
-              <a:t>UML</a:t>
-            </a:r>
-          </a:p>
-          <a:p>
-            <a:pPr lvl="1"/>
-            <a:r>
-              <a:rPr lang="en-CA" dirty="0"/>
-              <a:t>Useful for conveying complex architectural solutions</a:t>
-            </a:r>
-          </a:p>
-          <a:p>
-            <a:pPr lvl="1"/>
-            <a:r>
-              <a:rPr lang="en-CA" dirty="0"/>
-              <a:t>Plenty of tools available online to help you build them and properly follow the conventions</a:t>
-            </a:r>
-          </a:p>
-          <a:p>
-            <a:r>
-              <a:rPr lang="en-CA" dirty="0"/>
-              <a:t>Version Control Systems</a:t>
-            </a:r>
-          </a:p>
-          <a:p>
-            <a:pPr lvl="1"/>
-            <a:r>
-              <a:rPr lang="en-CA" dirty="0"/>
-              <a:t>Immutable history</a:t>
-            </a:r>
-          </a:p>
-          <a:p>
-            <a:pPr lvl="1"/>
-            <a:r>
-              <a:rPr lang="en-CA" dirty="0"/>
-              <a:t>Many kinds, with Git and Mercurial being a couple of the most popular</a:t>
-            </a:r>
-          </a:p>
-          <a:p>
-            <a:pPr lvl="1"/>
-            <a:r>
-              <a:rPr lang="en-CA" dirty="0"/>
-              <a:t>Git is the VCS</a:t>
-            </a:r>
-          </a:p>
-          <a:p>
-            <a:pPr lvl="1"/>
-            <a:r>
-              <a:rPr lang="en-CA" dirty="0" err="1"/>
-              <a:t>Github</a:t>
-            </a:r>
-            <a:r>
-              <a:rPr lang="en-CA" dirty="0"/>
-              <a:t> is a host for Git repositories</a:t>
-            </a:r>
-          </a:p>
-          <a:p>
-            <a:pPr marL="457200" lvl="1" indent="0">
+            <a:pPr>
+              <a:buClr>
+                <a:srgbClr val="000000"/>
+              </a:buClr>
+              <a:buSzPct val="38000"/>
+              <a:buFont typeface="StarBats" charset="0"/>
               <a:buNone/>
             </a:pPr>
-            <a:endParaRPr lang="en-CA" dirty="0"/>
+            <a:r>
+              <a:rPr lang="en-US" altLang="en-US" sz="4400" i="0" dirty="0" smtClean="0"/>
+              <a:t>Key Acronyms: DRY</a:t>
+            </a:r>
+            <a:endParaRPr lang="en-US" altLang="en-US" sz="4400" i="0" dirty="0"/>
+          </a:p>
+        </p:txBody>
+      </p:sp>
+      <p:sp>
+        <p:nvSpPr>
+          <p:cNvPr id="3" name="Content Placeholder 2"/>
+          <p:cNvSpPr>
+            <a:spLocks noGrp="1"/>
+          </p:cNvSpPr>
+          <p:nvPr>
+            <p:ph idx="1"/>
+          </p:nvPr>
+        </p:nvSpPr>
+        <p:spPr>
+          <a:xfrm>
+            <a:off x="640874" y="1168400"/>
+            <a:ext cx="10515600" cy="5378703"/>
+          </a:xfrm>
+        </p:spPr>
+        <p:txBody>
+          <a:bodyPr>
+            <a:normAutofit/>
+          </a:bodyPr>
+          <a:lstStyle/>
+          <a:p>
+            <a:r>
+              <a:rPr lang="en-US" b="1" dirty="0" smtClean="0"/>
+              <a:t>DRY</a:t>
+            </a:r>
+            <a:r>
+              <a:rPr lang="en-US" dirty="0" smtClean="0"/>
+              <a:t>: Don’t repeat yourself</a:t>
+            </a:r>
           </a:p>
           <a:p>
             <a:pPr lvl="1"/>
-            <a:endParaRPr lang="en-CA" dirty="0"/>
-          </a:p>
-        </p:txBody>
-      </p:sp>
-      <p:sp>
-        <p:nvSpPr>
-          <p:cNvPr id="6" name="Slide Number Placeholder 5">
-            <a:extLst>
-              <a:ext uri="{FF2B5EF4-FFF2-40B4-BE49-F238E27FC236}">
-                <a16:creationId xmlns="" xmlns:a16="http://schemas.microsoft.com/office/drawing/2014/main" id="{E0B06360-FB4C-4A3F-AFC2-967508E6478B}"/>
-              </a:ext>
-            </a:extLst>
-          </p:cNvPr>
+            <a:r>
+              <a:rPr lang="en-CA" dirty="0" smtClean="0"/>
+              <a:t>The idea that you shouldn’t repeat the same code in multiple areas.</a:t>
+            </a:r>
+            <a:endParaRPr lang="en-US" dirty="0" smtClean="0"/>
+          </a:p>
+          <a:p>
+            <a:pPr lvl="1"/>
+            <a:endParaRPr lang="en-US" dirty="0"/>
+          </a:p>
+        </p:txBody>
+      </p:sp>
+      <p:sp>
+        <p:nvSpPr>
+          <p:cNvPr id="10" name="Footer Placeholder 9"/>
+          <p:cNvSpPr>
+            <a:spLocks noGrp="1"/>
+          </p:cNvSpPr>
+          <p:nvPr>
+            <p:ph type="ftr" sz="quarter" idx="3"/>
+          </p:nvPr>
+        </p:nvSpPr>
+        <p:spPr/>
+        <p:txBody>
+          <a:bodyPr/>
+          <a:lstStyle/>
+          <a:p>
+            <a:r>
+              <a:rPr lang="en-CA" dirty="0"/>
+              <a:t>CS321: Advanced Programming Techniques</a:t>
+            </a:r>
+          </a:p>
+        </p:txBody>
+      </p:sp>
+      <p:sp>
+        <p:nvSpPr>
+          <p:cNvPr id="12" name="Slide Number Placeholder 11"/>
           <p:cNvSpPr>
             <a:spLocks noGrp="1"/>
           </p:cNvSpPr>
@@ -9617,37 +9593,10 @@
           </a:p>
         </p:txBody>
       </p:sp>
-      <p:sp>
-        <p:nvSpPr>
-          <p:cNvPr id="7" name="Footer Placeholder 9"/>
-          <p:cNvSpPr>
-            <a:spLocks noGrp="1"/>
-          </p:cNvSpPr>
-          <p:nvPr>
-            <p:ph type="ftr" sz="quarter" idx="3"/>
-          </p:nvPr>
-        </p:nvSpPr>
-        <p:spPr>
-          <a:xfrm>
-            <a:off x="52387" y="6573836"/>
-            <a:ext cx="2986087" cy="365125"/>
-          </a:xfrm>
-        </p:spPr>
-        <p:txBody>
-          <a:bodyPr/>
-          <a:lstStyle/>
-          <a:p>
-            <a:r>
-              <a:rPr lang="en-CA" dirty="0"/>
-              <a:t>CS321: Advanced Programming Techniques</a:t>
-            </a:r>
-          </a:p>
-        </p:txBody>
-      </p:sp>
     </p:spTree>
     <p:extLst>
       <p:ext uri="{BB962C8B-B14F-4D97-AF65-F5344CB8AC3E}">
-        <p14:creationId xmlns="" xmlns:p14="http://schemas.microsoft.com/office/powerpoint/2010/main" val="154311472"/>
+        <p14:creationId xmlns:p14="http://schemas.microsoft.com/office/powerpoint/2010/main" xmlns="" val="2325078793"/>
       </p:ext>
     </p:extLst>
   </p:cSld>
@@ -9683,13 +9632,7 @@
       </p:grpSpPr>
       <p:sp>
         <p:nvSpPr>
-          <p:cNvPr id="2" name="Title 1">
-            <a:extLst>
-              <a:ext uri="{FF2B5EF4-FFF2-40B4-BE49-F238E27FC236}">
-                <a16:creationId xmlns="" xmlns:a16="http://schemas.microsoft.com/office/drawing/2014/main" id="{0A921011-18FC-475B-B283-A4E0D7C676E2}"/>
-              </a:ext>
-            </a:extLst>
-          </p:cNvPr>
+          <p:cNvPr id="2" name="Title 1"/>
           <p:cNvSpPr>
             <a:spLocks noGrp="1"/>
           </p:cNvSpPr>
@@ -9702,76 +9645,144 @@
           <a:bodyPr/>
           <a:lstStyle/>
           <a:p>
+            <a:pPr>
+              <a:buClr>
+                <a:srgbClr val="000000"/>
+              </a:buClr>
+              <a:buSzPct val="38000"/>
+              <a:buFont typeface="StarBats" charset="0"/>
+              <a:buNone/>
+            </a:pPr>
+            <a:r>
+              <a:rPr lang="en-US" altLang="en-US" sz="4400" i="0" dirty="0" smtClean="0"/>
+              <a:t>Key Acronyms: SOLID</a:t>
+            </a:r>
+            <a:endParaRPr lang="en-US" altLang="en-US" sz="4400" i="0" dirty="0"/>
+          </a:p>
+        </p:txBody>
+      </p:sp>
+      <p:sp>
+        <p:nvSpPr>
+          <p:cNvPr id="3" name="Content Placeholder 2"/>
+          <p:cNvSpPr>
+            <a:spLocks noGrp="1"/>
+          </p:cNvSpPr>
+          <p:nvPr>
+            <p:ph idx="1"/>
+          </p:nvPr>
+        </p:nvSpPr>
+        <p:spPr>
+          <a:xfrm>
+            <a:off x="640874" y="1168400"/>
+            <a:ext cx="10515600" cy="5378703"/>
+          </a:xfrm>
+        </p:spPr>
+        <p:txBody>
+          <a:bodyPr>
+            <a:normAutofit/>
+          </a:bodyPr>
+          <a:lstStyle/>
+          <a:p>
+            <a:r>
+              <a:rPr lang="en-US" b="1" dirty="0" smtClean="0"/>
+              <a:t>SOLID</a:t>
+            </a:r>
+            <a:r>
+              <a:rPr lang="en-US" dirty="0" smtClean="0"/>
+              <a:t>: </a:t>
+            </a:r>
+          </a:p>
+          <a:p>
+            <a:pPr lvl="1"/>
+            <a:r>
+              <a:rPr lang="en-CA" b="1" dirty="0" smtClean="0"/>
+              <a:t>Single Responsibility Principle</a:t>
+            </a:r>
+            <a:r>
+              <a:rPr lang="en-CA" dirty="0" smtClean="0"/>
+              <a:t>: Classes/objects only have one responsibility/job.</a:t>
+            </a:r>
+          </a:p>
+          <a:p>
+            <a:pPr lvl="1"/>
+            <a:r>
+              <a:rPr lang="en-CA" b="1" dirty="0" smtClean="0"/>
+              <a:t>Open-Closed Principle</a:t>
+            </a:r>
+            <a:r>
+              <a:rPr lang="en-CA" dirty="0" smtClean="0"/>
+              <a:t>:  Classes should be open for extension, but closed for modification.</a:t>
+            </a:r>
+          </a:p>
+          <a:p>
+            <a:pPr lvl="1"/>
+            <a:r>
+              <a:rPr lang="en-CA" b="1" dirty="0" err="1" smtClean="0"/>
+              <a:t>Liskov</a:t>
+            </a:r>
+            <a:r>
+              <a:rPr lang="en-CA" b="1" dirty="0" smtClean="0"/>
+              <a:t> Substitution Principle</a:t>
+            </a:r>
+            <a:r>
+              <a:rPr lang="en-CA" dirty="0" smtClean="0"/>
+              <a:t>: Given a parent class and a subclass, the subclass can be used anywhere a parent class is with no issues and should behave in an indistinguishable manner.</a:t>
+            </a:r>
+          </a:p>
+          <a:p>
+            <a:pPr lvl="1"/>
+            <a:r>
+              <a:rPr lang="en-CA" b="1" dirty="0" smtClean="0"/>
+              <a:t>Interface Segregation Principle</a:t>
+            </a:r>
+            <a:r>
+              <a:rPr lang="en-CA" dirty="0" smtClean="0"/>
+              <a:t>: Users of a class should not be forced to depend on interfaces they don’t need/use.</a:t>
+            </a:r>
+          </a:p>
+          <a:p>
+            <a:pPr lvl="1"/>
+            <a:r>
+              <a:rPr lang="en-CA" b="1" dirty="0" smtClean="0"/>
+              <a:t>Dependency Inversion Principle</a:t>
+            </a:r>
+            <a:r>
+              <a:rPr lang="en-CA" dirty="0" smtClean="0"/>
+              <a:t>: Classes/objects in use shouldn’t depend on other concrete classes, instead depend on abstractions. In other words, concrete high-level modules should not depend on concrete low-level modules – depend on abstractions of the low-level modules instead.</a:t>
+            </a:r>
+            <a:endParaRPr lang="en-CA" b="1" dirty="0" smtClean="0"/>
+          </a:p>
+          <a:p>
+            <a:pPr lvl="1"/>
+            <a:endParaRPr lang="en-US" dirty="0"/>
+          </a:p>
+        </p:txBody>
+      </p:sp>
+      <p:sp>
+        <p:nvSpPr>
+          <p:cNvPr id="10" name="Footer Placeholder 9"/>
+          <p:cNvSpPr>
+            <a:spLocks noGrp="1"/>
+          </p:cNvSpPr>
+          <p:nvPr>
+            <p:ph type="ftr" sz="quarter" idx="3"/>
+          </p:nvPr>
+        </p:nvSpPr>
+        <p:spPr/>
+        <p:txBody>
+          <a:bodyPr/>
+          <a:lstStyle/>
+          <a:p>
             <a:r>
               <a:rPr lang="en-CA" dirty="0"/>
-              <a:t>Inner and Anonymous Classes/Methods</a:t>
-            </a:r>
-          </a:p>
-        </p:txBody>
-      </p:sp>
-      <p:sp>
-        <p:nvSpPr>
-          <p:cNvPr id="3" name="Content Placeholder 2">
-            <a:extLst>
-              <a:ext uri="{FF2B5EF4-FFF2-40B4-BE49-F238E27FC236}">
-                <a16:creationId xmlns="" xmlns:a16="http://schemas.microsoft.com/office/drawing/2014/main" id="{E519EC20-1B41-4FDC-B979-74F142F690A2}"/>
-              </a:ext>
-            </a:extLst>
-          </p:cNvPr>
-          <p:cNvSpPr>
-            <a:spLocks noGrp="1"/>
-          </p:cNvSpPr>
-          <p:nvPr>
-            <p:ph idx="1"/>
-          </p:nvPr>
-        </p:nvSpPr>
-        <p:spPr/>
-        <p:txBody>
-          <a:bodyPr/>
-          <a:lstStyle/>
-          <a:p>
-            <a:r>
-              <a:rPr lang="en-CA" dirty="0"/>
-              <a:t>Exists in many languages</a:t>
-            </a:r>
-          </a:p>
-          <a:p>
-            <a:endParaRPr lang="en-CA" dirty="0"/>
-          </a:p>
-          <a:p>
-            <a:r>
-              <a:rPr lang="en-CA" dirty="0"/>
-              <a:t>Useful to hide (encapsulate) and organize functionality within an outer class (e.g. </a:t>
-            </a:r>
-            <a:r>
-              <a:rPr lang="en-CA" dirty="0" err="1"/>
-              <a:t>LinkedListCell</a:t>
-            </a:r>
-            <a:r>
-              <a:rPr lang="en-CA" dirty="0"/>
-              <a:t> in a LinkedList, Node in a Tree)</a:t>
-            </a:r>
-          </a:p>
-          <a:p>
-            <a:endParaRPr lang="en-CA" dirty="0"/>
-          </a:p>
-          <a:p>
-            <a:r>
-              <a:rPr lang="en-CA" dirty="0"/>
-              <a:t>Quickly create an object that inherits from an interface as a method argument</a:t>
-            </a:r>
-          </a:p>
-        </p:txBody>
-      </p:sp>
-      <p:sp>
-        <p:nvSpPr>
-          <p:cNvPr id="6" name="Slide Number Placeholder 5">
-            <a:extLst>
-              <a:ext uri="{FF2B5EF4-FFF2-40B4-BE49-F238E27FC236}">
-                <a16:creationId xmlns="" xmlns:a16="http://schemas.microsoft.com/office/drawing/2014/main" id="{2BFBBD55-E3C1-4C22-8665-BC6CC0B5B10F}"/>
-              </a:ext>
-            </a:extLst>
-          </p:cNvPr>
+              <a:t>CS321: Advanced Programming Techniques</a:t>
+            </a:r>
+          </a:p>
+        </p:txBody>
+      </p:sp>
+      <p:sp>
+        <p:nvSpPr>
+          <p:cNvPr id="12" name="Slide Number Placeholder 11"/>
           <p:cNvSpPr>
             <a:spLocks noGrp="1"/>
           </p:cNvSpPr>
@@ -9796,37 +9807,10 @@
           </a:p>
         </p:txBody>
       </p:sp>
-      <p:sp>
-        <p:nvSpPr>
-          <p:cNvPr id="7" name="Footer Placeholder 9"/>
-          <p:cNvSpPr>
-            <a:spLocks noGrp="1"/>
-          </p:cNvSpPr>
-          <p:nvPr>
-            <p:ph type="ftr" sz="quarter" idx="3"/>
-          </p:nvPr>
-        </p:nvSpPr>
-        <p:spPr>
-          <a:xfrm>
-            <a:off x="52387" y="6573836"/>
-            <a:ext cx="2986087" cy="365125"/>
-          </a:xfrm>
-        </p:spPr>
-        <p:txBody>
-          <a:bodyPr/>
-          <a:lstStyle/>
-          <a:p>
-            <a:r>
-              <a:rPr lang="en-CA" dirty="0"/>
-              <a:t>CS321: Advanced Programming Techniques</a:t>
-            </a:r>
-          </a:p>
-        </p:txBody>
-      </p:sp>
     </p:spTree>
     <p:extLst>
       <p:ext uri="{BB962C8B-B14F-4D97-AF65-F5344CB8AC3E}">
-        <p14:creationId xmlns="" xmlns:p14="http://schemas.microsoft.com/office/powerpoint/2010/main" val="2701822725"/>
+        <p14:creationId xmlns:p14="http://schemas.microsoft.com/office/powerpoint/2010/main" xmlns="" val="2325078793"/>
       </p:ext>
     </p:extLst>
   </p:cSld>
@@ -9862,7 +9846,13 @@
       </p:grpSpPr>
       <p:sp>
         <p:nvSpPr>
-          <p:cNvPr id="2" name="Title 1"/>
+          <p:cNvPr id="2" name="Title 1">
+            <a:extLst>
+              <a:ext uri="{FF2B5EF4-FFF2-40B4-BE49-F238E27FC236}">
+                <a16:creationId xmlns:a16="http://schemas.microsoft.com/office/drawing/2014/main" xmlns="" id="{D3144BBF-69E2-47B3-A5D4-FB03B54F0F96}"/>
+              </a:ext>
+            </a:extLst>
+          </p:cNvPr>
           <p:cNvSpPr>
             <a:spLocks noGrp="1"/>
           </p:cNvSpPr>
@@ -9872,32 +9862,25 @@
         </p:nvSpPr>
         <p:spPr/>
         <p:txBody>
-          <a:bodyPr>
-            <a:normAutofit/>
-          </a:bodyPr>
-          <a:lstStyle/>
-          <a:p>
-            <a:r>
-              <a:rPr lang="en-US" altLang="en-US" sz="4000" dirty="0"/>
-              <a:t>Java Iterators (in </a:t>
-            </a:r>
-            <a:r>
-              <a:rPr lang="en-US" altLang="en-US" sz="4000" b="0" dirty="0" err="1">
-                <a:latin typeface="Courier New" charset="0"/>
-              </a:rPr>
-              <a:t>java.util</a:t>
-            </a:r>
-            <a:r>
-              <a:rPr lang="en-US" altLang="en-US" sz="4000" dirty="0"/>
-              <a:t>)</a:t>
-            </a:r>
-            <a:endParaRPr lang="en-CA" sz="4000" dirty="0"/>
-          </a:p>
-        </p:txBody>
-      </p:sp>
-      <p:sp>
-        <p:nvSpPr>
-          <p:cNvPr id="3" name="Content Placeholder 2"/>
+          <a:bodyPr/>
+          <a:lstStyle/>
+          <a:p>
+            <a:r>
+              <a:rPr lang="en-CA" dirty="0"/>
+              <a:t>UML, &amp; Version Control Systems</a:t>
+            </a:r>
+          </a:p>
+        </p:txBody>
+      </p:sp>
+      <p:sp>
+        <p:nvSpPr>
+          <p:cNvPr id="3" name="Content Placeholder 2">
+            <a:extLst>
+              <a:ext uri="{FF2B5EF4-FFF2-40B4-BE49-F238E27FC236}">
+                <a16:creationId xmlns:a16="http://schemas.microsoft.com/office/drawing/2014/main" xmlns="" id="{B981305C-A702-4FE5-A134-6B1E026A73CE}"/>
+              </a:ext>
+            </a:extLst>
+          </p:cNvPr>
           <p:cNvSpPr>
             <a:spLocks noGrp="1"/>
           </p:cNvSpPr>
@@ -9905,132 +9888,89 @@
             <p:ph idx="1"/>
           </p:nvPr>
         </p:nvSpPr>
-        <p:spPr>
-          <a:xfrm>
-            <a:off x="640874" y="1168400"/>
-            <a:ext cx="10515600" cy="5405435"/>
-          </a:xfrm>
-        </p:spPr>
-        <p:txBody>
-          <a:bodyPr>
-            <a:normAutofit fontScale="92500" lnSpcReduction="10000"/>
-          </a:bodyPr>
-          <a:lstStyle/>
-          <a:p>
-            <a:pPr marL="342900" indent="-342900">
-              <a:defRPr/>
+        <p:spPr/>
+        <p:txBody>
+          <a:bodyPr/>
+          <a:lstStyle/>
+          <a:p>
+            <a:r>
+              <a:rPr lang="en-CA" dirty="0"/>
+              <a:t>UML</a:t>
+            </a:r>
+          </a:p>
+          <a:p>
+            <a:pPr lvl="1"/>
+            <a:r>
+              <a:rPr lang="en-CA" dirty="0"/>
+              <a:t>Useful for conveying complex architectural solutions</a:t>
+            </a:r>
+          </a:p>
+          <a:p>
+            <a:pPr lvl="1"/>
+            <a:r>
+              <a:rPr lang="en-CA" dirty="0"/>
+              <a:t>Plenty of tools available online to help you build them and properly follow the conventions</a:t>
+            </a:r>
+          </a:p>
+          <a:p>
+            <a:r>
+              <a:rPr lang="en-CA" dirty="0"/>
+              <a:t>Version Control Systems</a:t>
+            </a:r>
+          </a:p>
+          <a:p>
+            <a:pPr lvl="1"/>
+            <a:r>
+              <a:rPr lang="en-CA" dirty="0"/>
+              <a:t>Immutable history</a:t>
+            </a:r>
+          </a:p>
+          <a:p>
+            <a:pPr lvl="1"/>
+            <a:r>
+              <a:rPr lang="en-CA" dirty="0"/>
+              <a:t>Many kinds, with Git and Mercurial being a couple of the most popular</a:t>
+            </a:r>
+          </a:p>
+          <a:p>
+            <a:pPr lvl="1"/>
+            <a:r>
+              <a:rPr lang="en-CA" dirty="0"/>
+              <a:t>Git is the VCS</a:t>
+            </a:r>
+          </a:p>
+          <a:p>
+            <a:pPr lvl="1"/>
+            <a:r>
+              <a:rPr lang="en-CA" dirty="0" err="1"/>
+              <a:t>Github</a:t>
+            </a:r>
+            <a:r>
+              <a:rPr lang="en-CA" dirty="0"/>
+              <a:t> is a host for Git repositories</a:t>
+            </a:r>
+          </a:p>
+          <a:p>
+            <a:pPr marL="457200" lvl="1" indent="0">
+              <a:buNone/>
             </a:pPr>
-            <a:endParaRPr lang="en-US" altLang="en-US" dirty="0"/>
-          </a:p>
-          <a:p>
-            <a:pPr marL="342900" indent="-342900">
-              <a:defRPr/>
-            </a:pPr>
-            <a:endParaRPr lang="en-US" altLang="en-US" dirty="0"/>
-          </a:p>
-          <a:p>
-            <a:pPr marL="342900" indent="-342900">
-              <a:defRPr/>
-            </a:pPr>
-            <a:endParaRPr lang="en-US" altLang="en-US" dirty="0"/>
-          </a:p>
-          <a:p>
-            <a:pPr marL="342900" indent="-342900">
-              <a:defRPr/>
-            </a:pPr>
-            <a:endParaRPr lang="en-US" altLang="en-US" dirty="0"/>
-          </a:p>
-          <a:p>
-            <a:pPr marL="342900" indent="-342900">
-              <a:defRPr/>
-            </a:pPr>
-            <a:endParaRPr lang="en-US" altLang="en-US" dirty="0"/>
-          </a:p>
-          <a:p>
-            <a:pPr marL="342900" indent="-342900">
-              <a:defRPr/>
-            </a:pPr>
-            <a:endParaRPr lang="en-US" altLang="en-US" dirty="0"/>
-          </a:p>
-          <a:p>
-            <a:pPr marL="342900" indent="-342900">
-              <a:defRPr/>
-            </a:pPr>
-            <a:r>
-              <a:rPr lang="en-US" altLang="en-US" dirty="0"/>
-              <a:t>remove safely deletes the object most recently accessed with next.</a:t>
-            </a:r>
-          </a:p>
-          <a:p>
-            <a:pPr marL="800100" lvl="1" indent="-342900">
-              <a:defRPr/>
-            </a:pPr>
-            <a:r>
-              <a:rPr lang="en-US" altLang="en-US" dirty="0"/>
-              <a:t>remove need not be supported.</a:t>
-            </a:r>
-          </a:p>
-          <a:p>
-            <a:pPr marL="342900" indent="-342900">
-              <a:defRPr/>
-            </a:pPr>
-            <a:endParaRPr lang="en-US" altLang="en-US" dirty="0"/>
-          </a:p>
-          <a:p>
-            <a:pPr marL="342900" indent="-342900">
-              <a:defRPr/>
-            </a:pPr>
-            <a:r>
-              <a:rPr lang="en-US" altLang="en-US" dirty="0" err="1"/>
-              <a:t>hasNext</a:t>
-            </a:r>
-            <a:r>
-              <a:rPr lang="en-US" altLang="en-US" dirty="0"/>
-              <a:t> returns true if there are more items in a collection.</a:t>
-            </a:r>
-          </a:p>
-          <a:p>
-            <a:pPr marL="342900" indent="-342900">
-              <a:defRPr/>
-            </a:pPr>
-            <a:endParaRPr lang="en-US" altLang="en-US" dirty="0"/>
-          </a:p>
-          <a:p>
-            <a:pPr marL="342900" indent="-342900">
-              <a:defRPr/>
-            </a:pPr>
-            <a:r>
-              <a:rPr lang="en-US" altLang="en-US" dirty="0"/>
-              <a:t>next will return the next item in a collection</a:t>
-            </a:r>
-          </a:p>
-        </p:txBody>
-      </p:sp>
-      <p:sp>
-        <p:nvSpPr>
-          <p:cNvPr id="10" name="Footer Placeholder 9"/>
-          <p:cNvSpPr>
-            <a:spLocks noGrp="1"/>
-          </p:cNvSpPr>
-          <p:nvPr>
-            <p:ph type="ftr" sz="quarter" idx="3"/>
-          </p:nvPr>
-        </p:nvSpPr>
-        <p:spPr/>
-        <p:txBody>
-          <a:bodyPr/>
-          <a:lstStyle/>
-          <a:p>
-            <a:r>
-              <a:rPr lang="en-CA" dirty="0"/>
-              <a:t>CS321: Advanced Programming Techniques</a:t>
-            </a:r>
-          </a:p>
-        </p:txBody>
-      </p:sp>
-      <p:sp>
-        <p:nvSpPr>
-          <p:cNvPr id="12" name="Slide Number Placeholder 11"/>
+            <a:endParaRPr lang="en-CA" dirty="0"/>
+          </a:p>
+          <a:p>
+            <a:pPr lvl="1"/>
+            <a:endParaRPr lang="en-CA" dirty="0"/>
+          </a:p>
+        </p:txBody>
+      </p:sp>
+      <p:sp>
+        <p:nvSpPr>
+          <p:cNvPr id="6" name="Slide Number Placeholder 5">
+            <a:extLst>
+              <a:ext uri="{FF2B5EF4-FFF2-40B4-BE49-F238E27FC236}">
+                <a16:creationId xmlns:a16="http://schemas.microsoft.com/office/drawing/2014/main" xmlns="" id="{E0B06360-FB4C-4A3F-AFC2-967508E6478B}"/>
+              </a:ext>
+            </a:extLst>
+          </p:cNvPr>
           <p:cNvSpPr>
             <a:spLocks noGrp="1"/>
           </p:cNvSpPr>
@@ -10057,110 +9997,27 @@
       </p:sp>
       <p:sp>
         <p:nvSpPr>
-          <p:cNvPr id="7" name="Text Box 2">
-            <a:extLst>
-              <a:ext uri="{FF2B5EF4-FFF2-40B4-BE49-F238E27FC236}">
-                <a16:creationId xmlns="" xmlns:a16="http://schemas.microsoft.com/office/drawing/2014/main" id="{FCE9DDDC-8F7E-44FA-97F1-BF6F02C1B1A8}"/>
-              </a:ext>
-            </a:extLst>
-          </p:cNvPr>
-          <p:cNvSpPr txBox="1">
-            <a:spLocks noChangeArrowheads="1"/>
-          </p:cNvSpPr>
-          <p:nvPr/>
-        </p:nvSpPr>
-        <p:spPr bwMode="auto">
+          <p:cNvPr id="7" name="Footer Placeholder 9"/>
+          <p:cNvSpPr>
+            <a:spLocks noGrp="1"/>
+          </p:cNvSpPr>
+          <p:nvPr>
+            <p:ph type="ftr" sz="quarter" idx="3"/>
+          </p:nvPr>
+        </p:nvSpPr>
+        <p:spPr>
           <a:xfrm>
-            <a:off x="3286432" y="1622323"/>
-            <a:ext cx="4549775" cy="1314450"/>
+            <a:off x="52387" y="6573836"/>
+            <a:ext cx="2986087" cy="365125"/>
           </a:xfrm>
-          <a:prstGeom prst="rect">
-            <a:avLst/>
-          </a:prstGeom>
-          <a:solidFill>
-            <a:srgbClr val="FFFF00"/>
-          </a:solidFill>
-          <a:ln>
-            <a:noFill/>
-          </a:ln>
-          <a:effectLst/>
         </p:spPr>
         <p:txBody>
-          <a:bodyPr>
-            <a:spAutoFit/>
-          </a:bodyPr>
-          <a:lstStyle/>
-          <a:p>
-            <a:pPr>
-              <a:defRPr/>
-            </a:pPr>
-            <a:r>
-              <a:rPr lang="en-US" altLang="en-US" sz="1600" b="1" dirty="0">
-                <a:latin typeface="Courier New" charset="0"/>
-              </a:rPr>
-              <a:t>public </a:t>
-            </a:r>
-            <a:r>
-              <a:rPr lang="en-US" altLang="en-US" sz="1600" b="1" dirty="0" err="1">
-                <a:latin typeface="Courier New" charset="0"/>
-              </a:rPr>
-              <a:t>boolean</a:t>
-            </a:r>
-            <a:r>
-              <a:rPr lang="en-US" altLang="en-US" sz="1600" b="1" dirty="0">
-                <a:latin typeface="Courier New" charset="0"/>
-              </a:rPr>
-              <a:t> </a:t>
-            </a:r>
-            <a:r>
-              <a:rPr lang="en-US" altLang="en-US" sz="1600" b="1" dirty="0" err="1">
-                <a:latin typeface="Courier New" charset="0"/>
-              </a:rPr>
-              <a:t>hasNext</a:t>
-            </a:r>
-            <a:r>
-              <a:rPr lang="en-US" altLang="en-US" sz="1600" b="1" dirty="0">
-                <a:latin typeface="Courier New" charset="0"/>
-              </a:rPr>
-              <a:t>()</a:t>
-            </a:r>
-          </a:p>
-          <a:p>
-            <a:pPr>
-              <a:defRPr/>
-            </a:pPr>
-            <a:endParaRPr lang="en-US" altLang="en-US" sz="1600" b="1" dirty="0">
-              <a:latin typeface="Courier New" charset="0"/>
-            </a:endParaRPr>
-          </a:p>
-          <a:p>
-            <a:pPr>
-              <a:defRPr/>
-            </a:pPr>
-            <a:r>
-              <a:rPr lang="en-US" altLang="en-US" sz="1600" b="1" dirty="0">
-                <a:latin typeface="Courier New" charset="0"/>
-              </a:rPr>
-              <a:t>public Object next()</a:t>
-            </a:r>
-          </a:p>
-          <a:p>
-            <a:pPr>
-              <a:defRPr/>
-            </a:pPr>
-            <a:endParaRPr lang="en-US" altLang="en-US" sz="1600" b="1" dirty="0">
-              <a:latin typeface="Courier New" charset="0"/>
-            </a:endParaRPr>
-          </a:p>
-          <a:p>
-            <a:pPr>
-              <a:defRPr/>
-            </a:pPr>
-            <a:r>
-              <a:rPr lang="en-US" altLang="en-US" sz="1600" b="1" dirty="0">
-                <a:latin typeface="Courier New" charset="0"/>
-              </a:rPr>
-              <a:t>public void remove()</a:t>
+          <a:bodyPr/>
+          <a:lstStyle/>
+          <a:p>
+            <a:r>
+              <a:rPr lang="en-CA" dirty="0"/>
+              <a:t>CS321: Advanced Programming Techniques</a:t>
             </a:r>
           </a:p>
         </p:txBody>
@@ -10168,7 +10025,7 @@
     </p:spTree>
     <p:extLst>
       <p:ext uri="{BB962C8B-B14F-4D97-AF65-F5344CB8AC3E}">
-        <p14:creationId xmlns="" xmlns:p14="http://schemas.microsoft.com/office/powerpoint/2010/main" val="3854217108"/>
+        <p14:creationId xmlns:p14="http://schemas.microsoft.com/office/powerpoint/2010/main" xmlns="" val="154311472"/>
       </p:ext>
     </p:extLst>
   </p:cSld>
@@ -10204,7 +10061,13 @@
       </p:grpSpPr>
       <p:sp>
         <p:nvSpPr>
-          <p:cNvPr id="2" name="Title 1"/>
+          <p:cNvPr id="2" name="Title 1">
+            <a:extLst>
+              <a:ext uri="{FF2B5EF4-FFF2-40B4-BE49-F238E27FC236}">
+                <a16:creationId xmlns:a16="http://schemas.microsoft.com/office/drawing/2014/main" xmlns="" id="{0A921011-18FC-475B-B283-A4E0D7C676E2}"/>
+              </a:ext>
+            </a:extLst>
+          </p:cNvPr>
           <p:cNvSpPr>
             <a:spLocks noGrp="1"/>
           </p:cNvSpPr>
@@ -10218,72 +10081,75 @@
           <a:lstStyle/>
           <a:p>
             <a:r>
-              <a:rPr lang="en-US" dirty="0"/>
-              <a:t>Using an Iterator</a:t>
-            </a:r>
+              <a:rPr lang="en-CA" dirty="0"/>
+              <a:t>Inner and Anonymous Classes/Methods</a:t>
+            </a:r>
+          </a:p>
+        </p:txBody>
+      </p:sp>
+      <p:sp>
+        <p:nvSpPr>
+          <p:cNvPr id="3" name="Content Placeholder 2">
+            <a:extLst>
+              <a:ext uri="{FF2B5EF4-FFF2-40B4-BE49-F238E27FC236}">
+                <a16:creationId xmlns:a16="http://schemas.microsoft.com/office/drawing/2014/main" xmlns="" id="{E519EC20-1B41-4FDC-B979-74F142F690A2}"/>
+              </a:ext>
+            </a:extLst>
+          </p:cNvPr>
+          <p:cNvSpPr>
+            <a:spLocks noGrp="1"/>
+          </p:cNvSpPr>
+          <p:nvPr>
+            <p:ph idx="1"/>
+          </p:nvPr>
+        </p:nvSpPr>
+        <p:spPr/>
+        <p:txBody>
+          <a:bodyPr/>
+          <a:lstStyle/>
+          <a:p>
+            <a:r>
+              <a:rPr lang="en-CA" dirty="0"/>
+              <a:t>Exists in many languages</a:t>
+            </a:r>
+          </a:p>
+          <a:p>
             <a:endParaRPr lang="en-CA" dirty="0"/>
           </a:p>
-        </p:txBody>
-      </p:sp>
-      <p:sp>
-        <p:nvSpPr>
-          <p:cNvPr id="3" name="Content Placeholder 2"/>
-          <p:cNvSpPr>
-            <a:spLocks noGrp="1"/>
-          </p:cNvSpPr>
-          <p:nvPr>
-            <p:ph idx="1"/>
-          </p:nvPr>
-        </p:nvSpPr>
-        <p:spPr>
-          <a:xfrm>
-            <a:off x="640874" y="1168400"/>
-            <a:ext cx="10515600" cy="5405435"/>
-          </a:xfrm>
-        </p:spPr>
-        <p:txBody>
-          <a:bodyPr>
-            <a:normAutofit/>
-          </a:bodyPr>
-          <a:lstStyle/>
-          <a:p>
-            <a:pPr marL="0" indent="0">
-              <a:buNone/>
-              <a:defRPr/>
-            </a:pPr>
-            <a:r>
-              <a:rPr lang="en-US" altLang="en-US" dirty="0"/>
-              <a:t> </a:t>
-            </a:r>
-            <a:endParaRPr lang="en-US" altLang="en-US" sz="2800" dirty="0"/>
-          </a:p>
-        </p:txBody>
-      </p:sp>
-      <p:sp>
-        <p:nvSpPr>
-          <p:cNvPr id="10" name="Footer Placeholder 9"/>
-          <p:cNvSpPr>
-            <a:spLocks noGrp="1"/>
-          </p:cNvSpPr>
-          <p:nvPr>
-            <p:ph type="ftr" sz="quarter" idx="3"/>
-          </p:nvPr>
-        </p:nvSpPr>
-        <p:spPr/>
-        <p:txBody>
-          <a:bodyPr/>
-          <a:lstStyle/>
           <a:p>
             <a:r>
               <a:rPr lang="en-CA" dirty="0"/>
-              <a:t>CS321: Advanced Programming Techniques</a:t>
-            </a:r>
-          </a:p>
-        </p:txBody>
-      </p:sp>
-      <p:sp>
-        <p:nvSpPr>
-          <p:cNvPr id="12" name="Slide Number Placeholder 11"/>
+              <a:t>Useful to hide (encapsulate) and organize functionality within an outer class (e.g. </a:t>
+            </a:r>
+            <a:r>
+              <a:rPr lang="en-CA" dirty="0" err="1"/>
+              <a:t>LinkedListCell</a:t>
+            </a:r>
+            <a:r>
+              <a:rPr lang="en-CA" dirty="0"/>
+              <a:t> in a LinkedList, Node in a Tree)</a:t>
+            </a:r>
+          </a:p>
+          <a:p>
+            <a:endParaRPr lang="en-CA" dirty="0"/>
+          </a:p>
+          <a:p>
+            <a:r>
+              <a:rPr lang="en-CA" dirty="0"/>
+              <a:t>Quickly create an object that inherits from an interface as a method argument</a:t>
+            </a:r>
+          </a:p>
+        </p:txBody>
+      </p:sp>
+      <p:sp>
+        <p:nvSpPr>
+          <p:cNvPr id="6" name="Slide Number Placeholder 5">
+            <a:extLst>
+              <a:ext uri="{FF2B5EF4-FFF2-40B4-BE49-F238E27FC236}">
+                <a16:creationId xmlns:a16="http://schemas.microsoft.com/office/drawing/2014/main" xmlns="" id="{2BFBBD55-E3C1-4C22-8665-BC6CC0B5B10F}"/>
+              </a:ext>
+            </a:extLst>
+          </p:cNvPr>
           <p:cNvSpPr>
             <a:spLocks noGrp="1"/>
           </p:cNvSpPr>
@@ -10310,786 +10176,27 @@
       </p:sp>
       <p:sp>
         <p:nvSpPr>
-          <p:cNvPr id="7" name="Text Box 2">
-            <a:extLst>
-              <a:ext uri="{FF2B5EF4-FFF2-40B4-BE49-F238E27FC236}">
-                <a16:creationId xmlns="" xmlns:a16="http://schemas.microsoft.com/office/drawing/2014/main" id="{F5F1EF1B-FDCC-44CE-90EB-0CB7313C951B}"/>
-              </a:ext>
-            </a:extLst>
-          </p:cNvPr>
-          <p:cNvSpPr txBox="1">
-            <a:spLocks noChangeArrowheads="1"/>
-          </p:cNvSpPr>
-          <p:nvPr/>
-        </p:nvSpPr>
-        <p:spPr bwMode="auto">
+          <p:cNvPr id="7" name="Footer Placeholder 9"/>
+          <p:cNvSpPr>
+            <a:spLocks noGrp="1"/>
+          </p:cNvSpPr>
+          <p:nvPr>
+            <p:ph type="ftr" sz="quarter" idx="3"/>
+          </p:nvPr>
+        </p:nvSpPr>
+        <p:spPr>
           <a:xfrm>
-            <a:off x="1941871" y="1420761"/>
-            <a:ext cx="8153400" cy="3759200"/>
+            <a:off x="52387" y="6573836"/>
+            <a:ext cx="2986087" cy="365125"/>
           </a:xfrm>
-          <a:prstGeom prst="rect">
-            <a:avLst/>
-          </a:prstGeom>
-          <a:solidFill>
-            <a:srgbClr val="FAFD00"/>
-          </a:solidFill>
-          <a:ln>
-            <a:noFill/>
-          </a:ln>
-          <a:effectLst/>
-          <a:extLst>
-            <a:ext uri="{91240B29-F687-4F45-9708-019B960494DF}">
-              <a14:hiddenLine xmlns="" xmlns:a14="http://schemas.microsoft.com/office/drawing/2010/main" w="9525">
-                <a:solidFill>
-                  <a:schemeClr val="tx1"/>
-                </a:solidFill>
-                <a:miter lim="800000"/>
-                <a:headEnd/>
-                <a:tailEnd/>
-              </a14:hiddenLine>
-            </a:ext>
-            <a:ext uri="{AF507438-7753-43E0-B8FC-AC1667EBCBE1}">
-              <a14:hiddenEffects xmlns="" xmlns:a14="http://schemas.microsoft.com/office/drawing/2010/main">
-                <a:effectLst>
-                  <a:outerShdw blurRad="63500" dist="38099" dir="2700000" algn="ctr" rotWithShape="0">
-                    <a:schemeClr val="bg2">
-                      <a:alpha val="74998"/>
-                    </a:schemeClr>
-                  </a:outerShdw>
-                </a:effectLst>
-              </a14:hiddenEffects>
-            </a:ext>
-          </a:extLst>
         </p:spPr>
         <p:txBody>
-          <a:bodyPr>
-            <a:spAutoFit/>
-          </a:bodyPr>
-          <a:lstStyle/>
-          <a:p>
-            <a:pPr marL="0" marR="0" lvl="0" indent="0" defTabSz="914400" eaLnBrk="0" fontAlgn="base" latinLnBrk="0" hangingPunct="0">
-              <a:lnSpc>
-                <a:spcPct val="100000"/>
-              </a:lnSpc>
-              <a:spcBef>
-                <a:spcPct val="0"/>
-              </a:spcBef>
-              <a:spcAft>
-                <a:spcPct val="0"/>
-              </a:spcAft>
-              <a:buClrTx/>
-              <a:buSzTx/>
-              <a:buFontTx/>
-              <a:buNone/>
-              <a:tabLst/>
-              <a:defRPr/>
-            </a:pPr>
-            <a:r>
-              <a:rPr kumimoji="0" lang="en-US" altLang="en-US" sz="1600" b="1" i="0" u="none" strike="noStrike" kern="0" cap="none" spc="0" normalizeH="0" baseline="0" noProof="0" dirty="0">
-                <a:ln>
-                  <a:noFill/>
-                </a:ln>
-                <a:solidFill>
-                  <a:srgbClr val="063DE8"/>
-                </a:solidFill>
-                <a:effectLst/>
-                <a:uLnTx/>
-                <a:uFillTx/>
-                <a:latin typeface="Courier New" charset="0"/>
-              </a:rPr>
-              <a:t>Collection </a:t>
-            </a:r>
-            <a:r>
-              <a:rPr kumimoji="0" lang="en-US" altLang="en-US" sz="1600" b="1" i="0" u="none" strike="noStrike" kern="0" cap="none" spc="0" normalizeH="0" baseline="0" noProof="0" dirty="0" err="1">
-                <a:ln>
-                  <a:noFill/>
-                </a:ln>
-                <a:solidFill>
-                  <a:srgbClr val="063DE8"/>
-                </a:solidFill>
-                <a:effectLst/>
-                <a:uLnTx/>
-                <a:uFillTx/>
-                <a:latin typeface="Courier New" charset="0"/>
-              </a:rPr>
-              <a:t>tcol</a:t>
-            </a:r>
-            <a:r>
-              <a:rPr kumimoji="0" lang="en-US" altLang="en-US" sz="1600" b="1" i="0" u="none" strike="noStrike" kern="0" cap="none" spc="0" normalizeH="0" baseline="0" noProof="0" dirty="0">
-                <a:ln>
-                  <a:noFill/>
-                </a:ln>
-                <a:solidFill>
-                  <a:srgbClr val="063DE8"/>
-                </a:solidFill>
-                <a:effectLst/>
-                <a:uLnTx/>
-                <a:uFillTx/>
-                <a:latin typeface="Courier New" charset="0"/>
-              </a:rPr>
-              <a:t> = . . .;</a:t>
-            </a:r>
-          </a:p>
-          <a:p>
-            <a:pPr marL="0" marR="0" lvl="0" indent="0" defTabSz="914400" eaLnBrk="0" fontAlgn="base" latinLnBrk="0" hangingPunct="0">
-              <a:lnSpc>
-                <a:spcPct val="100000"/>
-              </a:lnSpc>
-              <a:spcBef>
-                <a:spcPct val="0"/>
-              </a:spcBef>
-              <a:spcAft>
-                <a:spcPct val="0"/>
-              </a:spcAft>
-              <a:buClrTx/>
-              <a:buSzTx/>
-              <a:buFontTx/>
-              <a:buNone/>
-              <a:tabLst/>
-              <a:defRPr/>
-            </a:pPr>
-            <a:endParaRPr kumimoji="0" lang="en-US" altLang="en-US" sz="1600" b="1" i="0" u="none" strike="noStrike" kern="0" cap="none" spc="0" normalizeH="0" baseline="0" noProof="0" dirty="0">
-              <a:ln>
-                <a:noFill/>
-              </a:ln>
-              <a:solidFill>
-                <a:srgbClr val="063DE8"/>
-              </a:solidFill>
-              <a:effectLst/>
-              <a:uLnTx/>
-              <a:uFillTx/>
-              <a:latin typeface="Courier New" charset="0"/>
-            </a:endParaRPr>
-          </a:p>
-          <a:p>
-            <a:pPr marL="0" marR="0" lvl="0" indent="0" defTabSz="914400" eaLnBrk="0" fontAlgn="base" latinLnBrk="0" hangingPunct="0">
-              <a:lnSpc>
-                <a:spcPct val="100000"/>
-              </a:lnSpc>
-              <a:spcBef>
-                <a:spcPct val="0"/>
-              </a:spcBef>
-              <a:spcAft>
-                <a:spcPct val="0"/>
-              </a:spcAft>
-              <a:buClrTx/>
-              <a:buSzTx/>
-              <a:buFontTx/>
-              <a:buNone/>
-              <a:tabLst/>
-              <a:defRPr/>
-            </a:pPr>
-            <a:r>
-              <a:rPr kumimoji="0" lang="en-US" altLang="en-US" sz="1600" b="1" i="0" u="none" strike="noStrike" kern="0" cap="none" spc="0" normalizeH="0" baseline="0" noProof="0" dirty="0">
-                <a:ln>
-                  <a:noFill/>
-                </a:ln>
-                <a:solidFill>
-                  <a:srgbClr val="063DE8"/>
-                </a:solidFill>
-                <a:effectLst/>
-                <a:uLnTx/>
-                <a:uFillTx/>
-                <a:latin typeface="Courier New" charset="0"/>
-              </a:rPr>
-              <a:t>/*** Remove all elements of the collection ***/</a:t>
-            </a:r>
-          </a:p>
-          <a:p>
-            <a:pPr marL="0" marR="0" lvl="0" indent="0" defTabSz="914400" eaLnBrk="0" fontAlgn="base" latinLnBrk="0" hangingPunct="0">
-              <a:lnSpc>
-                <a:spcPct val="100000"/>
-              </a:lnSpc>
-              <a:spcBef>
-                <a:spcPct val="0"/>
-              </a:spcBef>
-              <a:spcAft>
-                <a:spcPct val="0"/>
-              </a:spcAft>
-              <a:buClrTx/>
-              <a:buSzTx/>
-              <a:buFontTx/>
-              <a:buNone/>
-              <a:tabLst/>
-              <a:defRPr/>
-            </a:pPr>
-            <a:endParaRPr kumimoji="0" lang="en-US" altLang="en-US" sz="1600" b="1" i="0" u="none" strike="noStrike" kern="0" cap="none" spc="0" normalizeH="0" baseline="0" noProof="0" dirty="0">
-              <a:ln>
-                <a:noFill/>
-              </a:ln>
-              <a:solidFill>
-                <a:srgbClr val="063DE8"/>
-              </a:solidFill>
-              <a:effectLst/>
-              <a:uLnTx/>
-              <a:uFillTx/>
-              <a:latin typeface="Courier New" charset="0"/>
-            </a:endParaRPr>
-          </a:p>
-          <a:p>
-            <a:pPr marL="0" marR="0" lvl="0" indent="0" defTabSz="914400" eaLnBrk="0" fontAlgn="base" latinLnBrk="0" hangingPunct="0">
-              <a:lnSpc>
-                <a:spcPct val="100000"/>
-              </a:lnSpc>
-              <a:spcBef>
-                <a:spcPct val="0"/>
-              </a:spcBef>
-              <a:spcAft>
-                <a:spcPct val="0"/>
-              </a:spcAft>
-              <a:buClrTx/>
-              <a:buSzTx/>
-              <a:buFontTx/>
-              <a:buNone/>
-              <a:tabLst/>
-              <a:defRPr/>
-            </a:pPr>
-            <a:r>
-              <a:rPr kumimoji="0" lang="en-US" altLang="en-US" sz="1600" b="1" i="0" u="none" strike="noStrike" kern="0" cap="none" spc="0" normalizeH="0" baseline="0" noProof="0" dirty="0">
-                <a:ln>
-                  <a:noFill/>
-                </a:ln>
-                <a:solidFill>
-                  <a:srgbClr val="063DE8"/>
-                </a:solidFill>
-                <a:effectLst/>
-                <a:uLnTx/>
-                <a:uFillTx/>
-                <a:latin typeface="Courier New" charset="0"/>
-              </a:rPr>
-              <a:t>// Declare an iterator over the collection</a:t>
-            </a:r>
-          </a:p>
-          <a:p>
-            <a:pPr marL="0" marR="0" lvl="0" indent="0" defTabSz="914400" eaLnBrk="0" fontAlgn="base" latinLnBrk="0" hangingPunct="0">
-              <a:lnSpc>
-                <a:spcPct val="100000"/>
-              </a:lnSpc>
-              <a:spcBef>
-                <a:spcPct val="0"/>
-              </a:spcBef>
-              <a:spcAft>
-                <a:spcPct val="0"/>
-              </a:spcAft>
-              <a:buClrTx/>
-              <a:buSzTx/>
-              <a:buFontTx/>
-              <a:buNone/>
-              <a:tabLst/>
-              <a:defRPr/>
-            </a:pPr>
-            <a:r>
-              <a:rPr kumimoji="0" lang="en-US" altLang="en-US" sz="1600" b="1" i="0" u="none" strike="noStrike" kern="0" cap="none" spc="0" normalizeH="0" baseline="0" noProof="0" dirty="0">
-                <a:ln>
-                  <a:noFill/>
-                </a:ln>
-                <a:solidFill>
-                  <a:srgbClr val="063DE8"/>
-                </a:solidFill>
-                <a:effectLst/>
-                <a:uLnTx/>
-                <a:uFillTx/>
-                <a:latin typeface="Courier New" charset="0"/>
-              </a:rPr>
-              <a:t>Iterator </a:t>
-            </a:r>
-            <a:r>
-              <a:rPr kumimoji="0" lang="en-US" altLang="en-US" sz="1600" b="1" i="0" u="none" strike="noStrike" kern="0" cap="none" spc="0" normalizeH="0" baseline="0" noProof="0" dirty="0" err="1">
-                <a:ln>
-                  <a:noFill/>
-                </a:ln>
-                <a:solidFill>
-                  <a:srgbClr val="063DE8"/>
-                </a:solidFill>
-                <a:effectLst/>
-                <a:uLnTx/>
-                <a:uFillTx/>
-                <a:latin typeface="Courier New" charset="0"/>
-              </a:rPr>
-              <a:t>iter</a:t>
-            </a:r>
-            <a:r>
-              <a:rPr kumimoji="0" lang="en-US" altLang="en-US" sz="1600" b="1" i="0" u="none" strike="noStrike" kern="0" cap="none" spc="0" normalizeH="0" baseline="0" noProof="0" dirty="0">
-                <a:ln>
-                  <a:noFill/>
-                </a:ln>
-                <a:solidFill>
-                  <a:srgbClr val="063DE8"/>
-                </a:solidFill>
-                <a:effectLst/>
-                <a:uLnTx/>
-                <a:uFillTx/>
-                <a:latin typeface="Courier New" charset="0"/>
-              </a:rPr>
-              <a:t> = </a:t>
-            </a:r>
-            <a:r>
-              <a:rPr kumimoji="0" lang="en-US" altLang="en-US" sz="1600" b="1" i="0" u="none" strike="noStrike" kern="0" cap="none" spc="0" normalizeH="0" baseline="0" noProof="0" dirty="0" err="1">
-                <a:ln>
-                  <a:noFill/>
-                </a:ln>
-                <a:solidFill>
-                  <a:srgbClr val="063DE8"/>
-                </a:solidFill>
-                <a:effectLst/>
-                <a:uLnTx/>
-                <a:uFillTx/>
-                <a:latin typeface="Courier New" charset="0"/>
-              </a:rPr>
-              <a:t>tcol.iterator</a:t>
-            </a:r>
-            <a:r>
-              <a:rPr kumimoji="0" lang="en-US" altLang="en-US" sz="1600" b="1" i="0" u="none" strike="noStrike" kern="0" cap="none" spc="0" normalizeH="0" baseline="0" noProof="0" dirty="0">
-                <a:ln>
-                  <a:noFill/>
-                </a:ln>
-                <a:solidFill>
-                  <a:srgbClr val="063DE8"/>
-                </a:solidFill>
-                <a:effectLst/>
-                <a:uLnTx/>
-                <a:uFillTx/>
-                <a:latin typeface="Courier New" charset="0"/>
-              </a:rPr>
-              <a:t>();</a:t>
-            </a:r>
-          </a:p>
-          <a:p>
-            <a:pPr marL="0" marR="0" lvl="0" indent="0" defTabSz="914400" eaLnBrk="0" fontAlgn="base" latinLnBrk="0" hangingPunct="0">
-              <a:lnSpc>
-                <a:spcPct val="100000"/>
-              </a:lnSpc>
-              <a:spcBef>
-                <a:spcPct val="0"/>
-              </a:spcBef>
-              <a:spcAft>
-                <a:spcPct val="0"/>
-              </a:spcAft>
-              <a:buClrTx/>
-              <a:buSzTx/>
-              <a:buFontTx/>
-              <a:buNone/>
-              <a:tabLst/>
-              <a:defRPr/>
-            </a:pPr>
-            <a:endParaRPr kumimoji="0" lang="en-US" altLang="en-US" sz="1600" b="1" i="0" u="none" strike="noStrike" kern="0" cap="none" spc="0" normalizeH="0" baseline="0" noProof="0" dirty="0">
-              <a:ln>
-                <a:noFill/>
-              </a:ln>
-              <a:solidFill>
-                <a:srgbClr val="063DE8"/>
-              </a:solidFill>
-              <a:effectLst/>
-              <a:uLnTx/>
-              <a:uFillTx/>
-              <a:latin typeface="Courier New" charset="0"/>
-            </a:endParaRPr>
-          </a:p>
-          <a:p>
-            <a:pPr marL="0" marR="0" lvl="0" indent="0" defTabSz="914400" eaLnBrk="0" fontAlgn="base" latinLnBrk="0" hangingPunct="0">
-              <a:lnSpc>
-                <a:spcPct val="100000"/>
-              </a:lnSpc>
-              <a:spcBef>
-                <a:spcPct val="0"/>
-              </a:spcBef>
-              <a:spcAft>
-                <a:spcPct val="0"/>
-              </a:spcAft>
-              <a:buClrTx/>
-              <a:buSzTx/>
-              <a:buFontTx/>
-              <a:buNone/>
-              <a:tabLst/>
-              <a:defRPr/>
-            </a:pPr>
-            <a:r>
-              <a:rPr kumimoji="0" lang="en-US" altLang="en-US" sz="1600" b="1" i="0" u="none" strike="noStrike" kern="0" cap="none" spc="0" normalizeH="0" baseline="0" noProof="0" dirty="0">
-                <a:ln>
-                  <a:noFill/>
-                </a:ln>
-                <a:solidFill>
-                  <a:srgbClr val="063DE8"/>
-                </a:solidFill>
-                <a:effectLst/>
-                <a:uLnTx/>
-                <a:uFillTx/>
-                <a:latin typeface="Courier New" charset="0"/>
-              </a:rPr>
-              <a:t>// Iterate through all elements of the underlying collection</a:t>
-            </a:r>
-          </a:p>
-          <a:p>
-            <a:pPr marL="0" marR="0" lvl="0" indent="0" defTabSz="914400" eaLnBrk="0" fontAlgn="base" latinLnBrk="0" hangingPunct="0">
-              <a:lnSpc>
-                <a:spcPct val="100000"/>
-              </a:lnSpc>
-              <a:spcBef>
-                <a:spcPct val="0"/>
-              </a:spcBef>
-              <a:spcAft>
-                <a:spcPct val="0"/>
-              </a:spcAft>
-              <a:buClrTx/>
-              <a:buSzTx/>
-              <a:buFontTx/>
-              <a:buNone/>
-              <a:tabLst/>
-              <a:defRPr/>
-            </a:pPr>
-            <a:r>
-              <a:rPr kumimoji="0" lang="en-US" altLang="en-US" sz="1600" b="1" i="0" u="none" strike="noStrike" kern="0" cap="none" spc="0" normalizeH="0" baseline="0" noProof="0" dirty="0">
-                <a:ln>
-                  <a:noFill/>
-                </a:ln>
-                <a:solidFill>
-                  <a:srgbClr val="063DE8"/>
-                </a:solidFill>
-                <a:effectLst/>
-                <a:uLnTx/>
-                <a:uFillTx/>
-                <a:latin typeface="Courier New" charset="0"/>
-              </a:rPr>
-              <a:t>while (</a:t>
-            </a:r>
-            <a:r>
-              <a:rPr kumimoji="0" lang="en-US" altLang="en-US" sz="1600" b="1" i="0" u="none" strike="noStrike" kern="0" cap="none" spc="0" normalizeH="0" baseline="0" noProof="0" dirty="0" err="1">
-                <a:ln>
-                  <a:noFill/>
-                </a:ln>
-                <a:solidFill>
-                  <a:srgbClr val="006600"/>
-                </a:solidFill>
-                <a:effectLst/>
-                <a:uLnTx/>
-                <a:uFillTx/>
-                <a:latin typeface="Courier New" charset="0"/>
-              </a:rPr>
-              <a:t>iter.hasNext</a:t>
-            </a:r>
-            <a:r>
-              <a:rPr kumimoji="0" lang="en-US" altLang="en-US" sz="1600" b="1" i="0" u="none" strike="noStrike" kern="0" cap="none" spc="0" normalizeH="0" baseline="0" noProof="0" dirty="0">
-                <a:ln>
-                  <a:noFill/>
-                </a:ln>
-                <a:solidFill>
-                  <a:srgbClr val="006600"/>
-                </a:solidFill>
-                <a:effectLst/>
-                <a:uLnTx/>
-                <a:uFillTx/>
-                <a:latin typeface="Courier New" charset="0"/>
-              </a:rPr>
-              <a:t>()</a:t>
-            </a:r>
-            <a:r>
-              <a:rPr kumimoji="0" lang="en-US" altLang="en-US" sz="1600" b="1" i="0" u="none" strike="noStrike" kern="0" cap="none" spc="0" normalizeH="0" baseline="0" noProof="0" dirty="0">
-                <a:ln>
-                  <a:noFill/>
-                </a:ln>
-                <a:solidFill>
-                  <a:srgbClr val="063DE8"/>
-                </a:solidFill>
-                <a:effectLst/>
-                <a:uLnTx/>
-                <a:uFillTx/>
-                <a:latin typeface="Courier New" charset="0"/>
-              </a:rPr>
-              <a:t>)</a:t>
-            </a:r>
-          </a:p>
-          <a:p>
-            <a:pPr marL="0" marR="0" lvl="0" indent="0" defTabSz="914400" eaLnBrk="0" fontAlgn="base" latinLnBrk="0" hangingPunct="0">
-              <a:lnSpc>
-                <a:spcPct val="100000"/>
-              </a:lnSpc>
-              <a:spcBef>
-                <a:spcPct val="0"/>
-              </a:spcBef>
-              <a:spcAft>
-                <a:spcPct val="0"/>
-              </a:spcAft>
-              <a:buClrTx/>
-              <a:buSzTx/>
-              <a:buFontTx/>
-              <a:buNone/>
-              <a:tabLst/>
-              <a:defRPr/>
-            </a:pPr>
-            <a:r>
-              <a:rPr kumimoji="0" lang="en-US" altLang="en-US" sz="1600" b="1" i="0" u="none" strike="noStrike" kern="0" cap="none" spc="0" normalizeH="0" baseline="0" noProof="0" dirty="0">
-                <a:ln>
-                  <a:noFill/>
-                </a:ln>
-                <a:solidFill>
-                  <a:srgbClr val="063DE8"/>
-                </a:solidFill>
-                <a:effectLst/>
-                <a:uLnTx/>
-                <a:uFillTx/>
-                <a:latin typeface="Courier New" charset="0"/>
-              </a:rPr>
-              <a:t>{</a:t>
-            </a:r>
-          </a:p>
-          <a:p>
-            <a:pPr marL="0" marR="0" lvl="0" indent="0" defTabSz="914400" eaLnBrk="0" fontAlgn="base" latinLnBrk="0" hangingPunct="0">
-              <a:lnSpc>
-                <a:spcPct val="100000"/>
-              </a:lnSpc>
-              <a:spcBef>
-                <a:spcPct val="0"/>
-              </a:spcBef>
-              <a:spcAft>
-                <a:spcPct val="0"/>
-              </a:spcAft>
-              <a:buClrTx/>
-              <a:buSzTx/>
-              <a:buFontTx/>
-              <a:buNone/>
-              <a:tabLst/>
-              <a:defRPr/>
-            </a:pPr>
-            <a:r>
-              <a:rPr kumimoji="0" lang="en-US" altLang="en-US" sz="1600" b="1" i="0" u="none" strike="noStrike" kern="0" cap="none" spc="0" normalizeH="0" baseline="0" noProof="0" dirty="0">
-                <a:ln>
-                  <a:noFill/>
-                </a:ln>
-                <a:solidFill>
-                  <a:srgbClr val="063DE8"/>
-                </a:solidFill>
-                <a:effectLst/>
-                <a:uLnTx/>
-                <a:uFillTx/>
-                <a:latin typeface="Courier New" charset="0"/>
-              </a:rPr>
-              <a:t>   // Get the next element of the underlying collection</a:t>
-            </a:r>
-          </a:p>
-          <a:p>
-            <a:pPr marL="0" marR="0" lvl="0" indent="0" defTabSz="914400" eaLnBrk="0" fontAlgn="base" latinLnBrk="0" hangingPunct="0">
-              <a:lnSpc>
-                <a:spcPct val="100000"/>
-              </a:lnSpc>
-              <a:spcBef>
-                <a:spcPct val="0"/>
-              </a:spcBef>
-              <a:spcAft>
-                <a:spcPct val="0"/>
-              </a:spcAft>
-              <a:buClrTx/>
-              <a:buSzTx/>
-              <a:buFontTx/>
-              <a:buNone/>
-              <a:tabLst/>
-              <a:defRPr/>
-            </a:pPr>
-            <a:r>
-              <a:rPr kumimoji="0" lang="en-US" altLang="en-US" sz="1600" b="1" i="0" u="none" strike="noStrike" kern="0" cap="none" spc="0" normalizeH="0" baseline="0" noProof="0" dirty="0">
-                <a:ln>
-                  <a:noFill/>
-                </a:ln>
-                <a:solidFill>
-                  <a:srgbClr val="063DE8"/>
-                </a:solidFill>
-                <a:effectLst/>
-                <a:uLnTx/>
-                <a:uFillTx/>
-                <a:latin typeface="Courier New" charset="0"/>
-              </a:rPr>
-              <a:t>   Object element = </a:t>
-            </a:r>
-            <a:r>
-              <a:rPr kumimoji="0" lang="en-US" altLang="en-US" sz="1600" b="1" i="0" u="none" strike="noStrike" kern="0" cap="none" spc="0" normalizeH="0" baseline="0" noProof="0" dirty="0" err="1">
-                <a:ln>
-                  <a:noFill/>
-                </a:ln>
-                <a:solidFill>
-                  <a:srgbClr val="006600"/>
-                </a:solidFill>
-                <a:effectLst/>
-                <a:uLnTx/>
-                <a:uFillTx/>
-                <a:latin typeface="Courier New" charset="0"/>
-              </a:rPr>
-              <a:t>iter.next</a:t>
-            </a:r>
-            <a:r>
-              <a:rPr kumimoji="0" lang="en-US" altLang="en-US" sz="1600" b="1" i="0" u="none" strike="noStrike" kern="0" cap="none" spc="0" normalizeH="0" baseline="0" noProof="0" dirty="0">
-                <a:ln>
-                  <a:noFill/>
-                </a:ln>
-                <a:solidFill>
-                  <a:srgbClr val="006600"/>
-                </a:solidFill>
-                <a:effectLst/>
-                <a:uLnTx/>
-                <a:uFillTx/>
-                <a:latin typeface="Courier New" charset="0"/>
-              </a:rPr>
-              <a:t>()</a:t>
-            </a:r>
-            <a:r>
-              <a:rPr kumimoji="0" lang="en-US" altLang="en-US" sz="1600" b="1" i="0" u="none" strike="noStrike" kern="0" cap="none" spc="0" normalizeH="0" baseline="0" noProof="0" dirty="0">
-                <a:ln>
-                  <a:noFill/>
-                </a:ln>
-                <a:solidFill>
-                  <a:srgbClr val="063DE8"/>
-                </a:solidFill>
-                <a:effectLst/>
-                <a:uLnTx/>
-                <a:uFillTx/>
-                <a:latin typeface="Courier New" charset="0"/>
-              </a:rPr>
-              <a:t>;</a:t>
-            </a:r>
-          </a:p>
-          <a:p>
-            <a:pPr marL="0" marR="0" lvl="0" indent="0" defTabSz="914400" eaLnBrk="0" fontAlgn="base" latinLnBrk="0" hangingPunct="0">
-              <a:lnSpc>
-                <a:spcPct val="100000"/>
-              </a:lnSpc>
-              <a:spcBef>
-                <a:spcPct val="0"/>
-              </a:spcBef>
-              <a:spcAft>
-                <a:spcPct val="0"/>
-              </a:spcAft>
-              <a:buClrTx/>
-              <a:buSzTx/>
-              <a:buFontTx/>
-              <a:buNone/>
-              <a:tabLst/>
-              <a:defRPr/>
-            </a:pPr>
-            <a:r>
-              <a:rPr kumimoji="0" lang="en-US" altLang="en-US" sz="1600" b="1" i="0" u="none" strike="noStrike" kern="0" cap="none" spc="0" normalizeH="0" baseline="0" noProof="0" dirty="0">
-                <a:ln>
-                  <a:noFill/>
-                </a:ln>
-                <a:solidFill>
-                  <a:srgbClr val="063DE8"/>
-                </a:solidFill>
-                <a:effectLst/>
-                <a:uLnTx/>
-                <a:uFillTx/>
-                <a:latin typeface="Courier New" charset="0"/>
-              </a:rPr>
-              <a:t>   // remove the element returned by the last next()</a:t>
-            </a:r>
-          </a:p>
-          <a:p>
-            <a:pPr marL="0" marR="0" lvl="0" indent="0" defTabSz="914400" eaLnBrk="0" fontAlgn="base" latinLnBrk="0" hangingPunct="0">
-              <a:lnSpc>
-                <a:spcPct val="100000"/>
-              </a:lnSpc>
-              <a:spcBef>
-                <a:spcPct val="0"/>
-              </a:spcBef>
-              <a:spcAft>
-                <a:spcPct val="0"/>
-              </a:spcAft>
-              <a:buClrTx/>
-              <a:buSzTx/>
-              <a:buFontTx/>
-              <a:buNone/>
-              <a:tabLst/>
-              <a:defRPr/>
-            </a:pPr>
-            <a:r>
-              <a:rPr kumimoji="0" lang="en-US" altLang="en-US" sz="1600" b="1" i="0" u="none" strike="noStrike" kern="0" cap="none" spc="0" normalizeH="0" baseline="0" noProof="0" dirty="0">
-                <a:ln>
-                  <a:noFill/>
-                </a:ln>
-                <a:solidFill>
-                  <a:srgbClr val="063DE8"/>
-                </a:solidFill>
-                <a:effectLst/>
-                <a:uLnTx/>
-                <a:uFillTx/>
-                <a:latin typeface="Courier New" charset="0"/>
-              </a:rPr>
-              <a:t>   </a:t>
-            </a:r>
-            <a:r>
-              <a:rPr kumimoji="0" lang="en-US" altLang="en-US" sz="1600" b="1" i="0" u="none" strike="noStrike" kern="0" cap="none" spc="0" normalizeH="0" baseline="0" noProof="0" dirty="0" err="1">
-                <a:ln>
-                  <a:noFill/>
-                </a:ln>
-                <a:solidFill>
-                  <a:srgbClr val="006600"/>
-                </a:solidFill>
-                <a:effectLst/>
-                <a:uLnTx/>
-                <a:uFillTx/>
-                <a:latin typeface="Courier New" charset="0"/>
-              </a:rPr>
-              <a:t>iter.remove</a:t>
-            </a:r>
-            <a:r>
-              <a:rPr kumimoji="0" lang="en-US" altLang="en-US" sz="1600" b="1" i="0" u="none" strike="noStrike" kern="0" cap="none" spc="0" normalizeH="0" baseline="0" noProof="0" dirty="0">
-                <a:ln>
-                  <a:noFill/>
-                </a:ln>
-                <a:solidFill>
-                  <a:srgbClr val="006600"/>
-                </a:solidFill>
-                <a:effectLst/>
-                <a:uLnTx/>
-                <a:uFillTx/>
-                <a:latin typeface="Courier New" charset="0"/>
-              </a:rPr>
-              <a:t>()</a:t>
-            </a:r>
-            <a:r>
-              <a:rPr kumimoji="0" lang="en-US" altLang="en-US" sz="1600" b="1" i="0" u="none" strike="noStrike" kern="0" cap="none" spc="0" normalizeH="0" baseline="0" noProof="0" dirty="0">
-                <a:ln>
-                  <a:noFill/>
-                </a:ln>
-                <a:solidFill>
-                  <a:srgbClr val="063DE8"/>
-                </a:solidFill>
-                <a:effectLst/>
-                <a:uLnTx/>
-                <a:uFillTx/>
-                <a:latin typeface="Courier New" charset="0"/>
-              </a:rPr>
-              <a:t>;</a:t>
-            </a:r>
-          </a:p>
-          <a:p>
-            <a:pPr marL="0" marR="0" lvl="0" indent="0" defTabSz="914400" eaLnBrk="0" fontAlgn="base" latinLnBrk="0" hangingPunct="0">
-              <a:lnSpc>
-                <a:spcPct val="100000"/>
-              </a:lnSpc>
-              <a:spcBef>
-                <a:spcPct val="0"/>
-              </a:spcBef>
-              <a:spcAft>
-                <a:spcPct val="0"/>
-              </a:spcAft>
-              <a:buClrTx/>
-              <a:buSzTx/>
-              <a:buFontTx/>
-              <a:buNone/>
-              <a:tabLst/>
-              <a:defRPr/>
-            </a:pPr>
-            <a:r>
-              <a:rPr kumimoji="0" lang="en-US" altLang="en-US" sz="1600" b="1" i="0" u="none" strike="noStrike" kern="0" cap="none" spc="0" normalizeH="0" baseline="0" noProof="0" dirty="0">
-                <a:ln>
-                  <a:noFill/>
-                </a:ln>
-                <a:solidFill>
-                  <a:srgbClr val="063DE8"/>
-                </a:solidFill>
-                <a:effectLst/>
-                <a:uLnTx/>
-                <a:uFillTx/>
-                <a:latin typeface="Courier New" charset="0"/>
-              </a:rPr>
-              <a:t>}</a:t>
+          <a:bodyPr/>
+          <a:lstStyle/>
+          <a:p>
+            <a:r>
+              <a:rPr lang="en-CA" dirty="0"/>
+              <a:t>CS321: Advanced Programming Techniques</a:t>
             </a:r>
           </a:p>
         </p:txBody>
@@ -11097,7 +10204,7 @@
     </p:spTree>
     <p:extLst>
       <p:ext uri="{BB962C8B-B14F-4D97-AF65-F5344CB8AC3E}">
-        <p14:creationId xmlns="" xmlns:p14="http://schemas.microsoft.com/office/powerpoint/2010/main" val="2052681984"/>
+        <p14:creationId xmlns:p14="http://schemas.microsoft.com/office/powerpoint/2010/main" xmlns="" val="2701822725"/>
       </p:ext>
     </p:extLst>
   </p:cSld>
@@ -11143,14 +10250,26 @@
         </p:nvSpPr>
         <p:spPr/>
         <p:txBody>
-          <a:bodyPr/>
-          <a:lstStyle/>
-          <a:p>
-            <a:r>
-              <a:rPr lang="en-US" altLang="en-US" dirty="0"/>
-              <a:t>Preconditions</a:t>
-            </a:r>
-            <a:endParaRPr lang="en-CA" dirty="0"/>
+          <a:bodyPr>
+            <a:normAutofit/>
+          </a:bodyPr>
+          <a:lstStyle/>
+          <a:p>
+            <a:r>
+              <a:rPr lang="en-US" altLang="en-US" sz="4000" dirty="0"/>
+              <a:t>Java Iterators (in </a:t>
+            </a:r>
+            <a:r>
+              <a:rPr lang="en-US" altLang="en-US" sz="4000" b="0" dirty="0" err="1">
+                <a:latin typeface="Courier New" charset="0"/>
+              </a:rPr>
+              <a:t>java.util</a:t>
+            </a:r>
+            <a:r>
+              <a:rPr lang="en-US" altLang="en-US" sz="4000" dirty="0"/>
+              <a:t>)</a:t>
+            </a:r>
+            <a:endParaRPr lang="en-CA" sz="4000" dirty="0"/>
           </a:p>
         </p:txBody>
       </p:sp>
@@ -11172,17 +10291,95 @@
         </p:spPr>
         <p:txBody>
           <a:bodyPr>
-            <a:normAutofit/>
+            <a:normAutofit fontScale="92500" lnSpcReduction="10000"/>
           </a:bodyPr>
           <a:lstStyle/>
           <a:p>
-            <a:pPr marL="0" indent="0">
-              <a:buNone/>
+            <a:pPr marL="342900" indent="-342900">
               <a:defRPr/>
             </a:pPr>
-            <a:r>
-              <a:rPr lang="en-US" altLang="en-US" sz="1400" dirty="0"/>
-              <a:t> (conditions to satisfy before usage)</a:t>
+            <a:endParaRPr lang="en-US" altLang="en-US" dirty="0"/>
+          </a:p>
+          <a:p>
+            <a:pPr marL="342900" indent="-342900">
+              <a:defRPr/>
+            </a:pPr>
+            <a:endParaRPr lang="en-US" altLang="en-US" dirty="0"/>
+          </a:p>
+          <a:p>
+            <a:pPr marL="342900" indent="-342900">
+              <a:defRPr/>
+            </a:pPr>
+            <a:endParaRPr lang="en-US" altLang="en-US" dirty="0"/>
+          </a:p>
+          <a:p>
+            <a:pPr marL="342900" indent="-342900">
+              <a:defRPr/>
+            </a:pPr>
+            <a:endParaRPr lang="en-US" altLang="en-US" dirty="0"/>
+          </a:p>
+          <a:p>
+            <a:pPr marL="342900" indent="-342900">
+              <a:defRPr/>
+            </a:pPr>
+            <a:endParaRPr lang="en-US" altLang="en-US" dirty="0"/>
+          </a:p>
+          <a:p>
+            <a:pPr marL="342900" indent="-342900">
+              <a:defRPr/>
+            </a:pPr>
+            <a:endParaRPr lang="en-US" altLang="en-US" dirty="0"/>
+          </a:p>
+          <a:p>
+            <a:pPr marL="342900" indent="-342900">
+              <a:defRPr/>
+            </a:pPr>
+            <a:r>
+              <a:rPr lang="en-US" altLang="en-US" dirty="0"/>
+              <a:t>remove safely deletes the object most recently accessed with next.</a:t>
+            </a:r>
+          </a:p>
+          <a:p>
+            <a:pPr marL="800100" lvl="1" indent="-342900">
+              <a:defRPr/>
+            </a:pPr>
+            <a:r>
+              <a:rPr lang="en-US" altLang="en-US" dirty="0"/>
+              <a:t>remove need not be supported.</a:t>
+            </a:r>
+          </a:p>
+          <a:p>
+            <a:pPr marL="342900" indent="-342900">
+              <a:defRPr/>
+            </a:pPr>
+            <a:endParaRPr lang="en-US" altLang="en-US" dirty="0"/>
+          </a:p>
+          <a:p>
+            <a:pPr marL="342900" indent="-342900">
+              <a:defRPr/>
+            </a:pPr>
+            <a:r>
+              <a:rPr lang="en-US" altLang="en-US" dirty="0" err="1"/>
+              <a:t>hasNext</a:t>
+            </a:r>
+            <a:r>
+              <a:rPr lang="en-US" altLang="en-US" dirty="0"/>
+              <a:t> returns true if there are more items in a collection.</a:t>
+            </a:r>
+          </a:p>
+          <a:p>
+            <a:pPr marL="342900" indent="-342900">
+              <a:defRPr/>
+            </a:pPr>
+            <a:endParaRPr lang="en-US" altLang="en-US" dirty="0"/>
+          </a:p>
+          <a:p>
+            <a:pPr marL="342900" indent="-342900">
+              <a:defRPr/>
+            </a:pPr>
+            <a:r>
+              <a:rPr lang="en-US" altLang="en-US" dirty="0"/>
+              <a:t>next will return the next item in a collection</a:t>
             </a:r>
           </a:p>
         </p:txBody>
@@ -11238,10 +10435,10 @@
       </p:sp>
       <p:sp>
         <p:nvSpPr>
-          <p:cNvPr id="8" name="Text Box 2">
+          <p:cNvPr id="7" name="Text Box 2">
             <a:extLst>
               <a:ext uri="{FF2B5EF4-FFF2-40B4-BE49-F238E27FC236}">
-                <a16:creationId xmlns="" xmlns:a16="http://schemas.microsoft.com/office/drawing/2014/main" id="{5B1405A6-0C74-4EF0-8929-81614C79A953}"/>
+                <a16:creationId xmlns:a16="http://schemas.microsoft.com/office/drawing/2014/main" xmlns="" id="{FCE9DDDC-8F7E-44FA-97F1-BF6F02C1B1A8}"/>
               </a:ext>
             </a:extLst>
           </p:cNvPr>
@@ -11252,42 +10449,19 @@
         </p:nvSpPr>
         <p:spPr bwMode="auto">
           <a:xfrm>
-            <a:off x="2135979" y="1735393"/>
-            <a:ext cx="7620000" cy="825500"/>
+            <a:off x="3286432" y="1622323"/>
+            <a:ext cx="4549775" cy="1314450"/>
           </a:xfrm>
           <a:prstGeom prst="rect">
             <a:avLst/>
           </a:prstGeom>
           <a:solidFill>
-            <a:srgbClr val="FAFD00"/>
+            <a:srgbClr val="FFFF00"/>
           </a:solidFill>
           <a:ln>
             <a:noFill/>
           </a:ln>
           <a:effectLst/>
-          <a:extLst>
-            <a:ext uri="{91240B29-F687-4F45-9708-019B960494DF}">
-              <a14:hiddenLine xmlns="" xmlns:a14="http://schemas.microsoft.com/office/drawing/2010/main" w="9525">
-                <a:solidFill>
-                  <a:schemeClr val="tx1"/>
-                </a:solidFill>
-                <a:miter lim="800000"/>
-                <a:headEnd/>
-                <a:tailEnd/>
-              </a14:hiddenLine>
-            </a:ext>
-            <a:ext uri="{AF507438-7753-43E0-B8FC-AC1667EBCBE1}">
-              <a14:hiddenEffects xmlns="" xmlns:a14="http://schemas.microsoft.com/office/drawing/2010/main">
-                <a:effectLst>
-                  <a:outerShdw blurRad="63500" dist="38099" dir="2700000" algn="ctr" rotWithShape="0">
-                    <a:schemeClr val="bg2">
-                      <a:alpha val="74998"/>
-                    </a:schemeClr>
-                  </a:outerShdw>
-                </a:effectLst>
-              </a14:hiddenEffects>
-            </a:ext>
-          </a:extLst>
         </p:spPr>
         <p:txBody>
           <a:bodyPr>
@@ -11295,344 +10469,76 @@
           </a:bodyPr>
           <a:lstStyle/>
           <a:p>
-            <a:pPr marL="0" marR="0" lvl="0" indent="0" defTabSz="914400" eaLnBrk="0" fontAlgn="base" latinLnBrk="0" hangingPunct="0">
-              <a:lnSpc>
-                <a:spcPct val="100000"/>
-              </a:lnSpc>
-              <a:spcBef>
-                <a:spcPct val="0"/>
-              </a:spcBef>
-              <a:spcAft>
-                <a:spcPct val="0"/>
-              </a:spcAft>
-              <a:buClrTx/>
-              <a:buSzTx/>
-              <a:buFontTx/>
-              <a:buNone/>
-              <a:tabLst/>
+            <a:pPr>
               <a:defRPr/>
             </a:pPr>
             <a:r>
-              <a:rPr kumimoji="0" lang="en-US" altLang="en-US" sz="1600" b="1" i="0" u="none" strike="noStrike" kern="0" cap="none" spc="0" normalizeH="0" baseline="0" noProof="0">
-                <a:ln>
-                  <a:noFill/>
-                </a:ln>
-                <a:solidFill>
-                  <a:srgbClr val="063DE8"/>
-                </a:solidFill>
-                <a:effectLst/>
-                <a:uLnTx/>
-                <a:uFillTx/>
+              <a:rPr lang="en-US" altLang="en-US" sz="1600" b="1" dirty="0">
                 <a:latin typeface="Courier New" charset="0"/>
               </a:rPr>
-              <a:t>public boolean hasNext()</a:t>
-            </a:r>
-          </a:p>
-          <a:p>
-            <a:pPr marL="0" marR="0" lvl="0" indent="0" defTabSz="914400" eaLnBrk="0" fontAlgn="base" latinLnBrk="0" hangingPunct="0">
-              <a:lnSpc>
-                <a:spcPct val="100000"/>
-              </a:lnSpc>
-              <a:spcBef>
-                <a:spcPct val="0"/>
-              </a:spcBef>
-              <a:spcAft>
-                <a:spcPct val="0"/>
-              </a:spcAft>
-              <a:buClrTx/>
-              <a:buSzTx/>
-              <a:buFontTx/>
-              <a:buNone/>
-              <a:tabLst/>
+              <a:t>public </a:t>
+            </a:r>
+            <a:r>
+              <a:rPr lang="en-US" altLang="en-US" sz="1600" b="1" dirty="0" err="1">
+                <a:latin typeface="Courier New" charset="0"/>
+              </a:rPr>
+              <a:t>boolean</a:t>
+            </a:r>
+            <a:r>
+              <a:rPr lang="en-US" altLang="en-US" sz="1600" b="1" dirty="0">
+                <a:latin typeface="Courier New" charset="0"/>
+              </a:rPr>
+              <a:t> </a:t>
+            </a:r>
+            <a:r>
+              <a:rPr lang="en-US" altLang="en-US" sz="1600" b="1" dirty="0" err="1">
+                <a:latin typeface="Courier New" charset="0"/>
+              </a:rPr>
+              <a:t>hasNext</a:t>
+            </a:r>
+            <a:r>
+              <a:rPr lang="en-US" altLang="en-US" sz="1600" b="1" dirty="0">
+                <a:latin typeface="Courier New" charset="0"/>
+              </a:rPr>
+              <a:t>()</a:t>
+            </a:r>
+          </a:p>
+          <a:p>
+            <a:pPr>
               <a:defRPr/>
             </a:pPr>
-            <a:endParaRPr kumimoji="0" lang="en-US" altLang="en-US" sz="1600" b="1" i="0" u="none" strike="noStrike" kern="0" cap="none" spc="0" normalizeH="0" baseline="0" noProof="0">
-              <a:ln>
-                <a:noFill/>
-              </a:ln>
-              <a:solidFill>
-                <a:srgbClr val="063DE8"/>
-              </a:solidFill>
-              <a:effectLst/>
-              <a:uLnTx/>
-              <a:uFillTx/>
+            <a:endParaRPr lang="en-US" altLang="en-US" sz="1600" b="1" dirty="0">
               <a:latin typeface="Courier New" charset="0"/>
             </a:endParaRPr>
           </a:p>
           <a:p>
-            <a:pPr marL="0" marR="0" lvl="0" indent="0" defTabSz="914400" eaLnBrk="0" fontAlgn="base" latinLnBrk="0" hangingPunct="0">
-              <a:lnSpc>
-                <a:spcPct val="100000"/>
-              </a:lnSpc>
-              <a:spcBef>
-                <a:spcPct val="0"/>
-              </a:spcBef>
-              <a:spcAft>
-                <a:spcPct val="0"/>
-              </a:spcAft>
-              <a:buClrTx/>
-              <a:buSzTx/>
-              <a:buFontTx/>
-              <a:buNone/>
-              <a:tabLst/>
+            <a:pPr>
               <a:defRPr/>
             </a:pPr>
             <a:r>
-              <a:rPr kumimoji="0" lang="en-US" altLang="en-US" sz="1600" b="1" i="0" u="none" strike="noStrike" kern="0" cap="none" spc="0" normalizeH="0" baseline="0" noProof="0">
-                <a:ln>
-                  <a:noFill/>
-                </a:ln>
-                <a:solidFill>
-                  <a:srgbClr val="063DE8"/>
-                </a:solidFill>
-                <a:effectLst/>
-                <a:uLnTx/>
-                <a:uFillTx/>
+              <a:rPr lang="en-US" altLang="en-US" sz="1600" b="1" dirty="0">
                 <a:latin typeface="Courier New" charset="0"/>
               </a:rPr>
               <a:t>public Object next()</a:t>
             </a:r>
           </a:p>
-        </p:txBody>
-      </p:sp>
-      <p:sp>
-        <p:nvSpPr>
-          <p:cNvPr id="9" name="Text Box 4">
-            <a:extLst>
-              <a:ext uri="{FF2B5EF4-FFF2-40B4-BE49-F238E27FC236}">
-                <a16:creationId xmlns="" xmlns:a16="http://schemas.microsoft.com/office/drawing/2014/main" id="{CCB8AA77-4B0D-4B6B-82D7-3BA5489CF8EC}"/>
-              </a:ext>
-            </a:extLst>
-          </p:cNvPr>
-          <p:cNvSpPr txBox="1">
-            <a:spLocks noChangeArrowheads="1"/>
-          </p:cNvSpPr>
-          <p:nvPr/>
-        </p:nvSpPr>
-        <p:spPr bwMode="auto">
-          <a:xfrm>
-            <a:off x="2196304" y="2864106"/>
-            <a:ext cx="7875588" cy="2647950"/>
-          </a:xfrm>
-          <a:prstGeom prst="rect">
-            <a:avLst/>
-          </a:prstGeom>
-          <a:noFill/>
-          <a:ln>
-            <a:noFill/>
-          </a:ln>
-          <a:effectLst/>
-          <a:extLst>
-            <a:ext uri="{909E8E84-426E-40DD-AFC4-6F175D3DCCD1}">
-              <a14:hiddenFill xmlns="" xmlns:a14="http://schemas.microsoft.com/office/drawing/2010/main">
-                <a:solidFill>
-                  <a:schemeClr val="accent1"/>
-                </a:solidFill>
-              </a14:hiddenFill>
-            </a:ext>
-            <a:ext uri="{91240B29-F687-4F45-9708-019B960494DF}">
-              <a14:hiddenLine xmlns="" xmlns:a14="http://schemas.microsoft.com/office/drawing/2010/main" w="9525">
-                <a:solidFill>
-                  <a:schemeClr val="tx1"/>
-                </a:solidFill>
-                <a:miter lim="800000"/>
-                <a:headEnd/>
-                <a:tailEnd/>
-              </a14:hiddenLine>
-            </a:ext>
-            <a:ext uri="{AF507438-7753-43E0-B8FC-AC1667EBCBE1}">
-              <a14:hiddenEffects xmlns="" xmlns:a14="http://schemas.microsoft.com/office/drawing/2010/main">
-                <a:effectLst>
-                  <a:outerShdw blurRad="63500" dist="38099" dir="2700000" algn="ctr" rotWithShape="0">
-                    <a:schemeClr val="bg2">
-                      <a:alpha val="74998"/>
-                    </a:schemeClr>
-                  </a:outerShdw>
-                </a:effectLst>
-              </a14:hiddenEffects>
-            </a:ext>
-          </a:extLst>
-        </p:spPr>
-        <p:txBody>
-          <a:bodyPr wrap="none">
-            <a:spAutoFit/>
-          </a:bodyPr>
-          <a:lstStyle/>
-          <a:p>
-            <a:pPr eaLnBrk="0" fontAlgn="base" hangingPunct="0">
-              <a:spcBef>
-                <a:spcPct val="0"/>
-              </a:spcBef>
-              <a:spcAft>
-                <a:spcPct val="0"/>
-              </a:spcAft>
+          <a:p>
+            <a:pPr>
               <a:defRPr/>
             </a:pPr>
-            <a:r>
-              <a:rPr lang="en-US" altLang="en-US" sz="2400" b="1" dirty="0" err="1">
-                <a:solidFill>
-                  <a:srgbClr val="0A0E55"/>
-                </a:solidFill>
-                <a:latin typeface="Courier New" charset="0"/>
-              </a:rPr>
-              <a:t>hasNext</a:t>
-            </a:r>
-            <a:r>
-              <a:rPr lang="en-US" altLang="en-US" sz="2400" dirty="0">
-                <a:solidFill>
-                  <a:srgbClr val="0A0E55"/>
-                </a:solidFill>
-                <a:latin typeface="Times New Roman" charset="0"/>
-              </a:rPr>
-              <a:t> has no preconditions</a:t>
-            </a:r>
-          </a:p>
-          <a:p>
-            <a:pPr eaLnBrk="0" fontAlgn="base" hangingPunct="0">
-              <a:spcBef>
-                <a:spcPct val="0"/>
-              </a:spcBef>
-              <a:spcAft>
-                <a:spcPct val="0"/>
-              </a:spcAft>
+            <a:endParaRPr lang="en-US" altLang="en-US" sz="1600" b="1" dirty="0">
+              <a:latin typeface="Courier New" charset="0"/>
+            </a:endParaRPr>
+          </a:p>
+          <a:p>
+            <a:pPr>
               <a:defRPr/>
             </a:pPr>
-            <a:endParaRPr lang="en-US" altLang="en-US" sz="2400" dirty="0">
-              <a:solidFill>
-                <a:srgbClr val="0A0E55"/>
-              </a:solidFill>
-              <a:latin typeface="Times New Roman" charset="0"/>
-            </a:endParaRPr>
-          </a:p>
-          <a:p>
-            <a:pPr eaLnBrk="0" fontAlgn="base" hangingPunct="0">
-              <a:spcBef>
-                <a:spcPct val="0"/>
-              </a:spcBef>
-              <a:spcAft>
-                <a:spcPct val="0"/>
-              </a:spcAft>
-              <a:defRPr/>
-            </a:pPr>
-            <a:r>
-              <a:rPr lang="en-US" altLang="en-US" sz="2400" b="1" dirty="0">
-                <a:solidFill>
-                  <a:srgbClr val="0A0E55"/>
-                </a:solidFill>
+            <a:r>
+              <a:rPr lang="en-US" altLang="en-US" sz="1600" b="1" dirty="0">
                 <a:latin typeface="Courier New" charset="0"/>
               </a:rPr>
-              <a:t>next</a:t>
-            </a:r>
-            <a:r>
-              <a:rPr lang="en-US" altLang="en-US" sz="2400" dirty="0">
-                <a:solidFill>
-                  <a:srgbClr val="0A0E55"/>
-                </a:solidFill>
-                <a:latin typeface="Times New Roman" charset="0"/>
-              </a:rPr>
-              <a:t> has two preconditions:</a:t>
-            </a:r>
-          </a:p>
-          <a:p>
-            <a:pPr lvl="1" eaLnBrk="0" fontAlgn="base" hangingPunct="0">
-              <a:spcBef>
-                <a:spcPct val="0"/>
-              </a:spcBef>
-              <a:spcAft>
-                <a:spcPct val="0"/>
-              </a:spcAft>
-              <a:buFontTx/>
-              <a:buChar char="•"/>
-              <a:defRPr/>
-            </a:pPr>
-            <a:r>
-              <a:rPr lang="en-US" altLang="en-US" sz="2400" dirty="0">
-                <a:solidFill>
-                  <a:srgbClr val="0A0E55"/>
-                </a:solidFill>
-                <a:latin typeface="Times New Roman" charset="0"/>
-              </a:rPr>
-              <a:t> </a:t>
-            </a:r>
-            <a:r>
-              <a:rPr lang="en-US" altLang="en-US" sz="2400" b="1" dirty="0" err="1">
-                <a:solidFill>
-                  <a:srgbClr val="0A0E55"/>
-                </a:solidFill>
-                <a:latin typeface="Courier New" charset="0"/>
-              </a:rPr>
-              <a:t>hasNext</a:t>
-            </a:r>
-            <a:r>
-              <a:rPr lang="en-US" altLang="en-US" sz="2400" dirty="0">
-                <a:solidFill>
-                  <a:srgbClr val="0A0E55"/>
-                </a:solidFill>
-                <a:latin typeface="Times New Roman" charset="0"/>
-              </a:rPr>
-              <a:t> returns true</a:t>
-            </a:r>
-          </a:p>
-          <a:p>
-            <a:pPr lvl="1" eaLnBrk="0" fontAlgn="base" hangingPunct="0">
-              <a:spcBef>
-                <a:spcPct val="0"/>
-              </a:spcBef>
-              <a:spcAft>
-                <a:spcPct val="0"/>
-              </a:spcAft>
-              <a:buFontTx/>
-              <a:buChar char="•"/>
-              <a:defRPr/>
-            </a:pPr>
-            <a:r>
-              <a:rPr lang="en-US" altLang="en-US" sz="2400" dirty="0">
-                <a:solidFill>
-                  <a:srgbClr val="0A0E55"/>
-                </a:solidFill>
-                <a:latin typeface="Times New Roman" charset="0"/>
-              </a:rPr>
-              <a:t> the underlying collection has not been modified by one of</a:t>
-            </a:r>
-          </a:p>
-          <a:p>
-            <a:pPr lvl="1" eaLnBrk="0" fontAlgn="base" hangingPunct="0">
-              <a:spcBef>
-                <a:spcPct val="0"/>
-              </a:spcBef>
-              <a:spcAft>
-                <a:spcPct val="0"/>
-              </a:spcAft>
-              <a:defRPr/>
-            </a:pPr>
-            <a:r>
-              <a:rPr lang="en-US" altLang="en-US" sz="2400" dirty="0">
-                <a:solidFill>
-                  <a:srgbClr val="0A0E55"/>
-                </a:solidFill>
-                <a:latin typeface="Times New Roman" charset="0"/>
-              </a:rPr>
-              <a:t>   that collection’s mutators during the lifetime of that</a:t>
-            </a:r>
-          </a:p>
-          <a:p>
-            <a:pPr lvl="1" eaLnBrk="0" fontAlgn="base" hangingPunct="0">
-              <a:spcBef>
-                <a:spcPct val="0"/>
-              </a:spcBef>
-              <a:spcAft>
-                <a:spcPct val="0"/>
-              </a:spcAft>
-              <a:defRPr/>
-            </a:pPr>
-            <a:r>
-              <a:rPr lang="en-US" altLang="en-US" sz="2400" dirty="0">
-                <a:solidFill>
-                  <a:srgbClr val="0A0E55"/>
-                </a:solidFill>
-                <a:latin typeface="Times New Roman" charset="0"/>
-              </a:rPr>
-              <a:t>   iterator</a:t>
+              <a:t>public void remove()</a:t>
             </a:r>
           </a:p>
         </p:txBody>
@@ -11640,7 +10546,7 @@
     </p:spTree>
     <p:extLst>
       <p:ext uri="{BB962C8B-B14F-4D97-AF65-F5344CB8AC3E}">
-        <p14:creationId xmlns="" xmlns:p14="http://schemas.microsoft.com/office/powerpoint/2010/main" val="1983291541"/>
+        <p14:creationId xmlns:p14="http://schemas.microsoft.com/office/powerpoint/2010/main" xmlns="" val="3854217108"/>
       </p:ext>
     </p:extLst>
   </p:cSld>
@@ -11676,13 +10582,7 @@
       </p:grpSpPr>
       <p:sp>
         <p:nvSpPr>
-          <p:cNvPr id="2" name="Title 1">
-            <a:extLst>
-              <a:ext uri="{FF2B5EF4-FFF2-40B4-BE49-F238E27FC236}">
-                <a16:creationId xmlns="" xmlns:a16="http://schemas.microsoft.com/office/drawing/2014/main" id="{0A921011-18FC-475B-B283-A4E0D7C676E2}"/>
-              </a:ext>
-            </a:extLst>
-          </p:cNvPr>
+          <p:cNvPr id="2" name="Title 1"/>
           <p:cNvSpPr>
             <a:spLocks noGrp="1"/>
           </p:cNvSpPr>
@@ -11696,72 +10596,72 @@
           <a:lstStyle/>
           <a:p>
             <a:r>
+              <a:rPr lang="en-US" dirty="0"/>
+              <a:t>Using an Iterator</a:t>
+            </a:r>
+            <a:endParaRPr lang="en-CA" dirty="0"/>
+          </a:p>
+        </p:txBody>
+      </p:sp>
+      <p:sp>
+        <p:nvSpPr>
+          <p:cNvPr id="3" name="Content Placeholder 2"/>
+          <p:cNvSpPr>
+            <a:spLocks noGrp="1"/>
+          </p:cNvSpPr>
+          <p:nvPr>
+            <p:ph idx="1"/>
+          </p:nvPr>
+        </p:nvSpPr>
+        <p:spPr>
+          <a:xfrm>
+            <a:off x="640874" y="1168400"/>
+            <a:ext cx="10515600" cy="5405435"/>
+          </a:xfrm>
+        </p:spPr>
+        <p:txBody>
+          <a:bodyPr>
+            <a:normAutofit/>
+          </a:bodyPr>
+          <a:lstStyle/>
+          <a:p>
+            <a:pPr marL="0" indent="0">
+              <a:buNone/>
+              <a:defRPr/>
+            </a:pPr>
+            <a:r>
+              <a:rPr lang="en-US" altLang="en-US" dirty="0"/>
+              <a:t> </a:t>
+            </a:r>
+            <a:endParaRPr lang="en-US" altLang="en-US" sz="2800" dirty="0"/>
+          </a:p>
+        </p:txBody>
+      </p:sp>
+      <p:sp>
+        <p:nvSpPr>
+          <p:cNvPr id="10" name="Footer Placeholder 9"/>
+          <p:cNvSpPr>
+            <a:spLocks noGrp="1"/>
+          </p:cNvSpPr>
+          <p:nvPr>
+            <p:ph type="ftr" sz="quarter" idx="3"/>
+          </p:nvPr>
+        </p:nvSpPr>
+        <p:spPr/>
+        <p:txBody>
+          <a:bodyPr/>
+          <a:lstStyle/>
+          <a:p>
+            <a:r>
               <a:rPr lang="en-CA" dirty="0"/>
-              <a:t>Why use Iterators</a:t>
-            </a:r>
-          </a:p>
-        </p:txBody>
-      </p:sp>
-      <p:sp>
-        <p:nvSpPr>
-          <p:cNvPr id="3" name="Content Placeholder 2">
-            <a:extLst>
-              <a:ext uri="{FF2B5EF4-FFF2-40B4-BE49-F238E27FC236}">
-                <a16:creationId xmlns="" xmlns:a16="http://schemas.microsoft.com/office/drawing/2014/main" id="{E519EC20-1B41-4FDC-B979-74F142F690A2}"/>
-              </a:ext>
-            </a:extLst>
-          </p:cNvPr>
-          <p:cNvSpPr>
-            <a:spLocks noGrp="1"/>
-          </p:cNvSpPr>
-          <p:nvPr>
-            <p:ph idx="1"/>
-          </p:nvPr>
-        </p:nvSpPr>
-        <p:spPr/>
-        <p:txBody>
-          <a:bodyPr/>
-          <a:lstStyle/>
-          <a:p>
-            <a:r>
-              <a:rPr lang="en-CA" dirty="0"/>
-              <a:t>A single interface to iterate through any Collections or Lists of objects.</a:t>
-            </a:r>
-          </a:p>
-          <a:p>
-            <a:endParaRPr lang="en-CA" dirty="0"/>
-          </a:p>
-          <a:p>
-            <a:r>
-              <a:rPr lang="en-CA" dirty="0"/>
-              <a:t>Otherwise, you’ll need to start checking the list/collection type before iterating over elements in these object arrays (e.g. one method for iterating through an </a:t>
-            </a:r>
-            <a:r>
-              <a:rPr lang="en-CA" dirty="0" err="1"/>
-              <a:t>ArrayList</a:t>
-            </a:r>
-            <a:r>
-              <a:rPr lang="en-CA" dirty="0"/>
-              <a:t>, and another for a Collection)</a:t>
-            </a:r>
-          </a:p>
-          <a:p>
-            <a:endParaRPr lang="en-CA" dirty="0"/>
-          </a:p>
-          <a:p>
-            <a:endParaRPr lang="en-CA" dirty="0"/>
-          </a:p>
-        </p:txBody>
-      </p:sp>
-      <p:sp>
-        <p:nvSpPr>
-          <p:cNvPr id="6" name="Slide Number Placeholder 5">
-            <a:extLst>
-              <a:ext uri="{FF2B5EF4-FFF2-40B4-BE49-F238E27FC236}">
-                <a16:creationId xmlns="" xmlns:a16="http://schemas.microsoft.com/office/drawing/2014/main" id="{2BFBBD55-E3C1-4C22-8665-BC6CC0B5B10F}"/>
-              </a:ext>
-            </a:extLst>
-          </p:cNvPr>
+              <a:t>CS321: Advanced Programming Techniques</a:t>
+            </a:r>
+          </a:p>
+        </p:txBody>
+      </p:sp>
+      <p:sp>
+        <p:nvSpPr>
+          <p:cNvPr id="12" name="Slide Number Placeholder 11"/>
           <p:cNvSpPr>
             <a:spLocks noGrp="1"/>
           </p:cNvSpPr>
@@ -11780,36 +10680,794 @@
               <a:t>29</a:t>
             </a:fld>
             <a:r>
-              <a:rPr lang="en-CA"/>
-              <a:t> / 32</a:t>
-            </a:r>
-            <a:endParaRPr lang="en-CA" dirty="0"/>
-          </a:p>
-        </p:txBody>
-      </p:sp>
-      <p:sp>
-        <p:nvSpPr>
-          <p:cNvPr id="7" name="Footer Placeholder 9"/>
-          <p:cNvSpPr>
-            <a:spLocks noGrp="1"/>
-          </p:cNvSpPr>
-          <p:nvPr>
-            <p:ph type="ftr" sz="quarter" idx="3"/>
-          </p:nvPr>
-        </p:nvSpPr>
-        <p:spPr>
+              <a:rPr lang="en-CA" dirty="0"/>
+              <a:t> </a:t>
+            </a:r>
+          </a:p>
+        </p:txBody>
+      </p:sp>
+      <p:sp>
+        <p:nvSpPr>
+          <p:cNvPr id="7" name="Text Box 2">
+            <a:extLst>
+              <a:ext uri="{FF2B5EF4-FFF2-40B4-BE49-F238E27FC236}">
+                <a16:creationId xmlns:a16="http://schemas.microsoft.com/office/drawing/2014/main" xmlns="" id="{F5F1EF1B-FDCC-44CE-90EB-0CB7313C951B}"/>
+              </a:ext>
+            </a:extLst>
+          </p:cNvPr>
+          <p:cNvSpPr txBox="1">
+            <a:spLocks noChangeArrowheads="1"/>
+          </p:cNvSpPr>
+          <p:nvPr/>
+        </p:nvSpPr>
+        <p:spPr bwMode="auto">
           <a:xfrm>
-            <a:off x="52387" y="6573836"/>
-            <a:ext cx="2986087" cy="365125"/>
+            <a:off x="1941871" y="1420761"/>
+            <a:ext cx="8153400" cy="3759200"/>
           </a:xfrm>
+          <a:prstGeom prst="rect">
+            <a:avLst/>
+          </a:prstGeom>
+          <a:solidFill>
+            <a:srgbClr val="FAFD00"/>
+          </a:solidFill>
+          <a:ln>
+            <a:noFill/>
+          </a:ln>
+          <a:effectLst/>
+          <a:extLst>
+            <a:ext uri="{91240B29-F687-4F45-9708-019B960494DF}">
+              <a14:hiddenLine xmlns:a14="http://schemas.microsoft.com/office/drawing/2010/main" xmlns="" w="9525">
+                <a:solidFill>
+                  <a:schemeClr val="tx1"/>
+                </a:solidFill>
+                <a:miter lim="800000"/>
+                <a:headEnd/>
+                <a:tailEnd/>
+              </a14:hiddenLine>
+            </a:ext>
+            <a:ext uri="{AF507438-7753-43E0-B8FC-AC1667EBCBE1}">
+              <a14:hiddenEffects xmlns:a14="http://schemas.microsoft.com/office/drawing/2010/main" xmlns="">
+                <a:effectLst>
+                  <a:outerShdw blurRad="63500" dist="38099" dir="2700000" algn="ctr" rotWithShape="0">
+                    <a:schemeClr val="bg2">
+                      <a:alpha val="74998"/>
+                    </a:schemeClr>
+                  </a:outerShdw>
+                </a:effectLst>
+              </a14:hiddenEffects>
+            </a:ext>
+          </a:extLst>
         </p:spPr>
         <p:txBody>
-          <a:bodyPr/>
-          <a:lstStyle/>
-          <a:p>
-            <a:r>
-              <a:rPr lang="en-CA" dirty="0"/>
-              <a:t>CS321: Advanced Programming Techniques</a:t>
+          <a:bodyPr>
+            <a:spAutoFit/>
+          </a:bodyPr>
+          <a:lstStyle/>
+          <a:p>
+            <a:pPr marL="0" marR="0" lvl="0" indent="0" defTabSz="914400" eaLnBrk="0" fontAlgn="base" latinLnBrk="0" hangingPunct="0">
+              <a:lnSpc>
+                <a:spcPct val="100000"/>
+              </a:lnSpc>
+              <a:spcBef>
+                <a:spcPct val="0"/>
+              </a:spcBef>
+              <a:spcAft>
+                <a:spcPct val="0"/>
+              </a:spcAft>
+              <a:buClrTx/>
+              <a:buSzTx/>
+              <a:buFontTx/>
+              <a:buNone/>
+              <a:tabLst/>
+              <a:defRPr/>
+            </a:pPr>
+            <a:r>
+              <a:rPr kumimoji="0" lang="en-US" altLang="en-US" sz="1600" b="1" i="0" u="none" strike="noStrike" kern="0" cap="none" spc="0" normalizeH="0" baseline="0" noProof="0" dirty="0">
+                <a:ln>
+                  <a:noFill/>
+                </a:ln>
+                <a:solidFill>
+                  <a:srgbClr val="063DE8"/>
+                </a:solidFill>
+                <a:effectLst/>
+                <a:uLnTx/>
+                <a:uFillTx/>
+                <a:latin typeface="Courier New" charset="0"/>
+              </a:rPr>
+              <a:t>Collection </a:t>
+            </a:r>
+            <a:r>
+              <a:rPr kumimoji="0" lang="en-US" altLang="en-US" sz="1600" b="1" i="0" u="none" strike="noStrike" kern="0" cap="none" spc="0" normalizeH="0" baseline="0" noProof="0" dirty="0" err="1">
+                <a:ln>
+                  <a:noFill/>
+                </a:ln>
+                <a:solidFill>
+                  <a:srgbClr val="063DE8"/>
+                </a:solidFill>
+                <a:effectLst/>
+                <a:uLnTx/>
+                <a:uFillTx/>
+                <a:latin typeface="Courier New" charset="0"/>
+              </a:rPr>
+              <a:t>tcol</a:t>
+            </a:r>
+            <a:r>
+              <a:rPr kumimoji="0" lang="en-US" altLang="en-US" sz="1600" b="1" i="0" u="none" strike="noStrike" kern="0" cap="none" spc="0" normalizeH="0" baseline="0" noProof="0" dirty="0">
+                <a:ln>
+                  <a:noFill/>
+                </a:ln>
+                <a:solidFill>
+                  <a:srgbClr val="063DE8"/>
+                </a:solidFill>
+                <a:effectLst/>
+                <a:uLnTx/>
+                <a:uFillTx/>
+                <a:latin typeface="Courier New" charset="0"/>
+              </a:rPr>
+              <a:t> = . . .;</a:t>
+            </a:r>
+          </a:p>
+          <a:p>
+            <a:pPr marL="0" marR="0" lvl="0" indent="0" defTabSz="914400" eaLnBrk="0" fontAlgn="base" latinLnBrk="0" hangingPunct="0">
+              <a:lnSpc>
+                <a:spcPct val="100000"/>
+              </a:lnSpc>
+              <a:spcBef>
+                <a:spcPct val="0"/>
+              </a:spcBef>
+              <a:spcAft>
+                <a:spcPct val="0"/>
+              </a:spcAft>
+              <a:buClrTx/>
+              <a:buSzTx/>
+              <a:buFontTx/>
+              <a:buNone/>
+              <a:tabLst/>
+              <a:defRPr/>
+            </a:pPr>
+            <a:endParaRPr kumimoji="0" lang="en-US" altLang="en-US" sz="1600" b="1" i="0" u="none" strike="noStrike" kern="0" cap="none" spc="0" normalizeH="0" baseline="0" noProof="0" dirty="0">
+              <a:ln>
+                <a:noFill/>
+              </a:ln>
+              <a:solidFill>
+                <a:srgbClr val="063DE8"/>
+              </a:solidFill>
+              <a:effectLst/>
+              <a:uLnTx/>
+              <a:uFillTx/>
+              <a:latin typeface="Courier New" charset="0"/>
+            </a:endParaRPr>
+          </a:p>
+          <a:p>
+            <a:pPr marL="0" marR="0" lvl="0" indent="0" defTabSz="914400" eaLnBrk="0" fontAlgn="base" latinLnBrk="0" hangingPunct="0">
+              <a:lnSpc>
+                <a:spcPct val="100000"/>
+              </a:lnSpc>
+              <a:spcBef>
+                <a:spcPct val="0"/>
+              </a:spcBef>
+              <a:spcAft>
+                <a:spcPct val="0"/>
+              </a:spcAft>
+              <a:buClrTx/>
+              <a:buSzTx/>
+              <a:buFontTx/>
+              <a:buNone/>
+              <a:tabLst/>
+              <a:defRPr/>
+            </a:pPr>
+            <a:r>
+              <a:rPr kumimoji="0" lang="en-US" altLang="en-US" sz="1600" b="1" i="0" u="none" strike="noStrike" kern="0" cap="none" spc="0" normalizeH="0" baseline="0" noProof="0" dirty="0">
+                <a:ln>
+                  <a:noFill/>
+                </a:ln>
+                <a:solidFill>
+                  <a:srgbClr val="063DE8"/>
+                </a:solidFill>
+                <a:effectLst/>
+                <a:uLnTx/>
+                <a:uFillTx/>
+                <a:latin typeface="Courier New" charset="0"/>
+              </a:rPr>
+              <a:t>/*** Remove all elements of the collection ***/</a:t>
+            </a:r>
+          </a:p>
+          <a:p>
+            <a:pPr marL="0" marR="0" lvl="0" indent="0" defTabSz="914400" eaLnBrk="0" fontAlgn="base" latinLnBrk="0" hangingPunct="0">
+              <a:lnSpc>
+                <a:spcPct val="100000"/>
+              </a:lnSpc>
+              <a:spcBef>
+                <a:spcPct val="0"/>
+              </a:spcBef>
+              <a:spcAft>
+                <a:spcPct val="0"/>
+              </a:spcAft>
+              <a:buClrTx/>
+              <a:buSzTx/>
+              <a:buFontTx/>
+              <a:buNone/>
+              <a:tabLst/>
+              <a:defRPr/>
+            </a:pPr>
+            <a:endParaRPr kumimoji="0" lang="en-US" altLang="en-US" sz="1600" b="1" i="0" u="none" strike="noStrike" kern="0" cap="none" spc="0" normalizeH="0" baseline="0" noProof="0" dirty="0">
+              <a:ln>
+                <a:noFill/>
+              </a:ln>
+              <a:solidFill>
+                <a:srgbClr val="063DE8"/>
+              </a:solidFill>
+              <a:effectLst/>
+              <a:uLnTx/>
+              <a:uFillTx/>
+              <a:latin typeface="Courier New" charset="0"/>
+            </a:endParaRPr>
+          </a:p>
+          <a:p>
+            <a:pPr marL="0" marR="0" lvl="0" indent="0" defTabSz="914400" eaLnBrk="0" fontAlgn="base" latinLnBrk="0" hangingPunct="0">
+              <a:lnSpc>
+                <a:spcPct val="100000"/>
+              </a:lnSpc>
+              <a:spcBef>
+                <a:spcPct val="0"/>
+              </a:spcBef>
+              <a:spcAft>
+                <a:spcPct val="0"/>
+              </a:spcAft>
+              <a:buClrTx/>
+              <a:buSzTx/>
+              <a:buFontTx/>
+              <a:buNone/>
+              <a:tabLst/>
+              <a:defRPr/>
+            </a:pPr>
+            <a:r>
+              <a:rPr kumimoji="0" lang="en-US" altLang="en-US" sz="1600" b="1" i="0" u="none" strike="noStrike" kern="0" cap="none" spc="0" normalizeH="0" baseline="0" noProof="0" dirty="0">
+                <a:ln>
+                  <a:noFill/>
+                </a:ln>
+                <a:solidFill>
+                  <a:srgbClr val="063DE8"/>
+                </a:solidFill>
+                <a:effectLst/>
+                <a:uLnTx/>
+                <a:uFillTx/>
+                <a:latin typeface="Courier New" charset="0"/>
+              </a:rPr>
+              <a:t>// Declare an iterator over the collection</a:t>
+            </a:r>
+          </a:p>
+          <a:p>
+            <a:pPr marL="0" marR="0" lvl="0" indent="0" defTabSz="914400" eaLnBrk="0" fontAlgn="base" latinLnBrk="0" hangingPunct="0">
+              <a:lnSpc>
+                <a:spcPct val="100000"/>
+              </a:lnSpc>
+              <a:spcBef>
+                <a:spcPct val="0"/>
+              </a:spcBef>
+              <a:spcAft>
+                <a:spcPct val="0"/>
+              </a:spcAft>
+              <a:buClrTx/>
+              <a:buSzTx/>
+              <a:buFontTx/>
+              <a:buNone/>
+              <a:tabLst/>
+              <a:defRPr/>
+            </a:pPr>
+            <a:r>
+              <a:rPr kumimoji="0" lang="en-US" altLang="en-US" sz="1600" b="1" i="0" u="none" strike="noStrike" kern="0" cap="none" spc="0" normalizeH="0" baseline="0" noProof="0" dirty="0">
+                <a:ln>
+                  <a:noFill/>
+                </a:ln>
+                <a:solidFill>
+                  <a:srgbClr val="063DE8"/>
+                </a:solidFill>
+                <a:effectLst/>
+                <a:uLnTx/>
+                <a:uFillTx/>
+                <a:latin typeface="Courier New" charset="0"/>
+              </a:rPr>
+              <a:t>Iterator </a:t>
+            </a:r>
+            <a:r>
+              <a:rPr kumimoji="0" lang="en-US" altLang="en-US" sz="1600" b="1" i="0" u="none" strike="noStrike" kern="0" cap="none" spc="0" normalizeH="0" baseline="0" noProof="0" dirty="0" err="1">
+                <a:ln>
+                  <a:noFill/>
+                </a:ln>
+                <a:solidFill>
+                  <a:srgbClr val="063DE8"/>
+                </a:solidFill>
+                <a:effectLst/>
+                <a:uLnTx/>
+                <a:uFillTx/>
+                <a:latin typeface="Courier New" charset="0"/>
+              </a:rPr>
+              <a:t>iter</a:t>
+            </a:r>
+            <a:r>
+              <a:rPr kumimoji="0" lang="en-US" altLang="en-US" sz="1600" b="1" i="0" u="none" strike="noStrike" kern="0" cap="none" spc="0" normalizeH="0" baseline="0" noProof="0" dirty="0">
+                <a:ln>
+                  <a:noFill/>
+                </a:ln>
+                <a:solidFill>
+                  <a:srgbClr val="063DE8"/>
+                </a:solidFill>
+                <a:effectLst/>
+                <a:uLnTx/>
+                <a:uFillTx/>
+                <a:latin typeface="Courier New" charset="0"/>
+              </a:rPr>
+              <a:t> = </a:t>
+            </a:r>
+            <a:r>
+              <a:rPr kumimoji="0" lang="en-US" altLang="en-US" sz="1600" b="1" i="0" u="none" strike="noStrike" kern="0" cap="none" spc="0" normalizeH="0" baseline="0" noProof="0" dirty="0" err="1">
+                <a:ln>
+                  <a:noFill/>
+                </a:ln>
+                <a:solidFill>
+                  <a:srgbClr val="063DE8"/>
+                </a:solidFill>
+                <a:effectLst/>
+                <a:uLnTx/>
+                <a:uFillTx/>
+                <a:latin typeface="Courier New" charset="0"/>
+              </a:rPr>
+              <a:t>tcol.iterator</a:t>
+            </a:r>
+            <a:r>
+              <a:rPr kumimoji="0" lang="en-US" altLang="en-US" sz="1600" b="1" i="0" u="none" strike="noStrike" kern="0" cap="none" spc="0" normalizeH="0" baseline="0" noProof="0" dirty="0">
+                <a:ln>
+                  <a:noFill/>
+                </a:ln>
+                <a:solidFill>
+                  <a:srgbClr val="063DE8"/>
+                </a:solidFill>
+                <a:effectLst/>
+                <a:uLnTx/>
+                <a:uFillTx/>
+                <a:latin typeface="Courier New" charset="0"/>
+              </a:rPr>
+              <a:t>();</a:t>
+            </a:r>
+          </a:p>
+          <a:p>
+            <a:pPr marL="0" marR="0" lvl="0" indent="0" defTabSz="914400" eaLnBrk="0" fontAlgn="base" latinLnBrk="0" hangingPunct="0">
+              <a:lnSpc>
+                <a:spcPct val="100000"/>
+              </a:lnSpc>
+              <a:spcBef>
+                <a:spcPct val="0"/>
+              </a:spcBef>
+              <a:spcAft>
+                <a:spcPct val="0"/>
+              </a:spcAft>
+              <a:buClrTx/>
+              <a:buSzTx/>
+              <a:buFontTx/>
+              <a:buNone/>
+              <a:tabLst/>
+              <a:defRPr/>
+            </a:pPr>
+            <a:endParaRPr kumimoji="0" lang="en-US" altLang="en-US" sz="1600" b="1" i="0" u="none" strike="noStrike" kern="0" cap="none" spc="0" normalizeH="0" baseline="0" noProof="0" dirty="0">
+              <a:ln>
+                <a:noFill/>
+              </a:ln>
+              <a:solidFill>
+                <a:srgbClr val="063DE8"/>
+              </a:solidFill>
+              <a:effectLst/>
+              <a:uLnTx/>
+              <a:uFillTx/>
+              <a:latin typeface="Courier New" charset="0"/>
+            </a:endParaRPr>
+          </a:p>
+          <a:p>
+            <a:pPr marL="0" marR="0" lvl="0" indent="0" defTabSz="914400" eaLnBrk="0" fontAlgn="base" latinLnBrk="0" hangingPunct="0">
+              <a:lnSpc>
+                <a:spcPct val="100000"/>
+              </a:lnSpc>
+              <a:spcBef>
+                <a:spcPct val="0"/>
+              </a:spcBef>
+              <a:spcAft>
+                <a:spcPct val="0"/>
+              </a:spcAft>
+              <a:buClrTx/>
+              <a:buSzTx/>
+              <a:buFontTx/>
+              <a:buNone/>
+              <a:tabLst/>
+              <a:defRPr/>
+            </a:pPr>
+            <a:r>
+              <a:rPr kumimoji="0" lang="en-US" altLang="en-US" sz="1600" b="1" i="0" u="none" strike="noStrike" kern="0" cap="none" spc="0" normalizeH="0" baseline="0" noProof="0" dirty="0">
+                <a:ln>
+                  <a:noFill/>
+                </a:ln>
+                <a:solidFill>
+                  <a:srgbClr val="063DE8"/>
+                </a:solidFill>
+                <a:effectLst/>
+                <a:uLnTx/>
+                <a:uFillTx/>
+                <a:latin typeface="Courier New" charset="0"/>
+              </a:rPr>
+              <a:t>// Iterate through all elements of the underlying collection</a:t>
+            </a:r>
+          </a:p>
+          <a:p>
+            <a:pPr marL="0" marR="0" lvl="0" indent="0" defTabSz="914400" eaLnBrk="0" fontAlgn="base" latinLnBrk="0" hangingPunct="0">
+              <a:lnSpc>
+                <a:spcPct val="100000"/>
+              </a:lnSpc>
+              <a:spcBef>
+                <a:spcPct val="0"/>
+              </a:spcBef>
+              <a:spcAft>
+                <a:spcPct val="0"/>
+              </a:spcAft>
+              <a:buClrTx/>
+              <a:buSzTx/>
+              <a:buFontTx/>
+              <a:buNone/>
+              <a:tabLst/>
+              <a:defRPr/>
+            </a:pPr>
+            <a:r>
+              <a:rPr kumimoji="0" lang="en-US" altLang="en-US" sz="1600" b="1" i="0" u="none" strike="noStrike" kern="0" cap="none" spc="0" normalizeH="0" baseline="0" noProof="0" dirty="0">
+                <a:ln>
+                  <a:noFill/>
+                </a:ln>
+                <a:solidFill>
+                  <a:srgbClr val="063DE8"/>
+                </a:solidFill>
+                <a:effectLst/>
+                <a:uLnTx/>
+                <a:uFillTx/>
+                <a:latin typeface="Courier New" charset="0"/>
+              </a:rPr>
+              <a:t>while (</a:t>
+            </a:r>
+            <a:r>
+              <a:rPr kumimoji="0" lang="en-US" altLang="en-US" sz="1600" b="1" i="0" u="none" strike="noStrike" kern="0" cap="none" spc="0" normalizeH="0" baseline="0" noProof="0" dirty="0" err="1">
+                <a:ln>
+                  <a:noFill/>
+                </a:ln>
+                <a:solidFill>
+                  <a:srgbClr val="006600"/>
+                </a:solidFill>
+                <a:effectLst/>
+                <a:uLnTx/>
+                <a:uFillTx/>
+                <a:latin typeface="Courier New" charset="0"/>
+              </a:rPr>
+              <a:t>iter.hasNext</a:t>
+            </a:r>
+            <a:r>
+              <a:rPr kumimoji="0" lang="en-US" altLang="en-US" sz="1600" b="1" i="0" u="none" strike="noStrike" kern="0" cap="none" spc="0" normalizeH="0" baseline="0" noProof="0" dirty="0">
+                <a:ln>
+                  <a:noFill/>
+                </a:ln>
+                <a:solidFill>
+                  <a:srgbClr val="006600"/>
+                </a:solidFill>
+                <a:effectLst/>
+                <a:uLnTx/>
+                <a:uFillTx/>
+                <a:latin typeface="Courier New" charset="0"/>
+              </a:rPr>
+              <a:t>()</a:t>
+            </a:r>
+            <a:r>
+              <a:rPr kumimoji="0" lang="en-US" altLang="en-US" sz="1600" b="1" i="0" u="none" strike="noStrike" kern="0" cap="none" spc="0" normalizeH="0" baseline="0" noProof="0" dirty="0">
+                <a:ln>
+                  <a:noFill/>
+                </a:ln>
+                <a:solidFill>
+                  <a:srgbClr val="063DE8"/>
+                </a:solidFill>
+                <a:effectLst/>
+                <a:uLnTx/>
+                <a:uFillTx/>
+                <a:latin typeface="Courier New" charset="0"/>
+              </a:rPr>
+              <a:t>)</a:t>
+            </a:r>
+          </a:p>
+          <a:p>
+            <a:pPr marL="0" marR="0" lvl="0" indent="0" defTabSz="914400" eaLnBrk="0" fontAlgn="base" latinLnBrk="0" hangingPunct="0">
+              <a:lnSpc>
+                <a:spcPct val="100000"/>
+              </a:lnSpc>
+              <a:spcBef>
+                <a:spcPct val="0"/>
+              </a:spcBef>
+              <a:spcAft>
+                <a:spcPct val="0"/>
+              </a:spcAft>
+              <a:buClrTx/>
+              <a:buSzTx/>
+              <a:buFontTx/>
+              <a:buNone/>
+              <a:tabLst/>
+              <a:defRPr/>
+            </a:pPr>
+            <a:r>
+              <a:rPr kumimoji="0" lang="en-US" altLang="en-US" sz="1600" b="1" i="0" u="none" strike="noStrike" kern="0" cap="none" spc="0" normalizeH="0" baseline="0" noProof="0" dirty="0">
+                <a:ln>
+                  <a:noFill/>
+                </a:ln>
+                <a:solidFill>
+                  <a:srgbClr val="063DE8"/>
+                </a:solidFill>
+                <a:effectLst/>
+                <a:uLnTx/>
+                <a:uFillTx/>
+                <a:latin typeface="Courier New" charset="0"/>
+              </a:rPr>
+              <a:t>{</a:t>
+            </a:r>
+          </a:p>
+          <a:p>
+            <a:pPr marL="0" marR="0" lvl="0" indent="0" defTabSz="914400" eaLnBrk="0" fontAlgn="base" latinLnBrk="0" hangingPunct="0">
+              <a:lnSpc>
+                <a:spcPct val="100000"/>
+              </a:lnSpc>
+              <a:spcBef>
+                <a:spcPct val="0"/>
+              </a:spcBef>
+              <a:spcAft>
+                <a:spcPct val="0"/>
+              </a:spcAft>
+              <a:buClrTx/>
+              <a:buSzTx/>
+              <a:buFontTx/>
+              <a:buNone/>
+              <a:tabLst/>
+              <a:defRPr/>
+            </a:pPr>
+            <a:r>
+              <a:rPr kumimoji="0" lang="en-US" altLang="en-US" sz="1600" b="1" i="0" u="none" strike="noStrike" kern="0" cap="none" spc="0" normalizeH="0" baseline="0" noProof="0" dirty="0">
+                <a:ln>
+                  <a:noFill/>
+                </a:ln>
+                <a:solidFill>
+                  <a:srgbClr val="063DE8"/>
+                </a:solidFill>
+                <a:effectLst/>
+                <a:uLnTx/>
+                <a:uFillTx/>
+                <a:latin typeface="Courier New" charset="0"/>
+              </a:rPr>
+              <a:t>   // Get the next element of the underlying collection</a:t>
+            </a:r>
+          </a:p>
+          <a:p>
+            <a:pPr marL="0" marR="0" lvl="0" indent="0" defTabSz="914400" eaLnBrk="0" fontAlgn="base" latinLnBrk="0" hangingPunct="0">
+              <a:lnSpc>
+                <a:spcPct val="100000"/>
+              </a:lnSpc>
+              <a:spcBef>
+                <a:spcPct val="0"/>
+              </a:spcBef>
+              <a:spcAft>
+                <a:spcPct val="0"/>
+              </a:spcAft>
+              <a:buClrTx/>
+              <a:buSzTx/>
+              <a:buFontTx/>
+              <a:buNone/>
+              <a:tabLst/>
+              <a:defRPr/>
+            </a:pPr>
+            <a:r>
+              <a:rPr kumimoji="0" lang="en-US" altLang="en-US" sz="1600" b="1" i="0" u="none" strike="noStrike" kern="0" cap="none" spc="0" normalizeH="0" baseline="0" noProof="0" dirty="0">
+                <a:ln>
+                  <a:noFill/>
+                </a:ln>
+                <a:solidFill>
+                  <a:srgbClr val="063DE8"/>
+                </a:solidFill>
+                <a:effectLst/>
+                <a:uLnTx/>
+                <a:uFillTx/>
+                <a:latin typeface="Courier New" charset="0"/>
+              </a:rPr>
+              <a:t>   Object element = </a:t>
+            </a:r>
+            <a:r>
+              <a:rPr kumimoji="0" lang="en-US" altLang="en-US" sz="1600" b="1" i="0" u="none" strike="noStrike" kern="0" cap="none" spc="0" normalizeH="0" baseline="0" noProof="0" dirty="0" err="1">
+                <a:ln>
+                  <a:noFill/>
+                </a:ln>
+                <a:solidFill>
+                  <a:srgbClr val="006600"/>
+                </a:solidFill>
+                <a:effectLst/>
+                <a:uLnTx/>
+                <a:uFillTx/>
+                <a:latin typeface="Courier New" charset="0"/>
+              </a:rPr>
+              <a:t>iter.next</a:t>
+            </a:r>
+            <a:r>
+              <a:rPr kumimoji="0" lang="en-US" altLang="en-US" sz="1600" b="1" i="0" u="none" strike="noStrike" kern="0" cap="none" spc="0" normalizeH="0" baseline="0" noProof="0" dirty="0">
+                <a:ln>
+                  <a:noFill/>
+                </a:ln>
+                <a:solidFill>
+                  <a:srgbClr val="006600"/>
+                </a:solidFill>
+                <a:effectLst/>
+                <a:uLnTx/>
+                <a:uFillTx/>
+                <a:latin typeface="Courier New" charset="0"/>
+              </a:rPr>
+              <a:t>()</a:t>
+            </a:r>
+            <a:r>
+              <a:rPr kumimoji="0" lang="en-US" altLang="en-US" sz="1600" b="1" i="0" u="none" strike="noStrike" kern="0" cap="none" spc="0" normalizeH="0" baseline="0" noProof="0" dirty="0">
+                <a:ln>
+                  <a:noFill/>
+                </a:ln>
+                <a:solidFill>
+                  <a:srgbClr val="063DE8"/>
+                </a:solidFill>
+                <a:effectLst/>
+                <a:uLnTx/>
+                <a:uFillTx/>
+                <a:latin typeface="Courier New" charset="0"/>
+              </a:rPr>
+              <a:t>;</a:t>
+            </a:r>
+          </a:p>
+          <a:p>
+            <a:pPr marL="0" marR="0" lvl="0" indent="0" defTabSz="914400" eaLnBrk="0" fontAlgn="base" latinLnBrk="0" hangingPunct="0">
+              <a:lnSpc>
+                <a:spcPct val="100000"/>
+              </a:lnSpc>
+              <a:spcBef>
+                <a:spcPct val="0"/>
+              </a:spcBef>
+              <a:spcAft>
+                <a:spcPct val="0"/>
+              </a:spcAft>
+              <a:buClrTx/>
+              <a:buSzTx/>
+              <a:buFontTx/>
+              <a:buNone/>
+              <a:tabLst/>
+              <a:defRPr/>
+            </a:pPr>
+            <a:r>
+              <a:rPr kumimoji="0" lang="en-US" altLang="en-US" sz="1600" b="1" i="0" u="none" strike="noStrike" kern="0" cap="none" spc="0" normalizeH="0" baseline="0" noProof="0" dirty="0">
+                <a:ln>
+                  <a:noFill/>
+                </a:ln>
+                <a:solidFill>
+                  <a:srgbClr val="063DE8"/>
+                </a:solidFill>
+                <a:effectLst/>
+                <a:uLnTx/>
+                <a:uFillTx/>
+                <a:latin typeface="Courier New" charset="0"/>
+              </a:rPr>
+              <a:t>   // remove the element returned by the last next()</a:t>
+            </a:r>
+          </a:p>
+          <a:p>
+            <a:pPr marL="0" marR="0" lvl="0" indent="0" defTabSz="914400" eaLnBrk="0" fontAlgn="base" latinLnBrk="0" hangingPunct="0">
+              <a:lnSpc>
+                <a:spcPct val="100000"/>
+              </a:lnSpc>
+              <a:spcBef>
+                <a:spcPct val="0"/>
+              </a:spcBef>
+              <a:spcAft>
+                <a:spcPct val="0"/>
+              </a:spcAft>
+              <a:buClrTx/>
+              <a:buSzTx/>
+              <a:buFontTx/>
+              <a:buNone/>
+              <a:tabLst/>
+              <a:defRPr/>
+            </a:pPr>
+            <a:r>
+              <a:rPr kumimoji="0" lang="en-US" altLang="en-US" sz="1600" b="1" i="0" u="none" strike="noStrike" kern="0" cap="none" spc="0" normalizeH="0" baseline="0" noProof="0" dirty="0">
+                <a:ln>
+                  <a:noFill/>
+                </a:ln>
+                <a:solidFill>
+                  <a:srgbClr val="063DE8"/>
+                </a:solidFill>
+                <a:effectLst/>
+                <a:uLnTx/>
+                <a:uFillTx/>
+                <a:latin typeface="Courier New" charset="0"/>
+              </a:rPr>
+              <a:t>   </a:t>
+            </a:r>
+            <a:r>
+              <a:rPr kumimoji="0" lang="en-US" altLang="en-US" sz="1600" b="1" i="0" u="none" strike="noStrike" kern="0" cap="none" spc="0" normalizeH="0" baseline="0" noProof="0" dirty="0" err="1">
+                <a:ln>
+                  <a:noFill/>
+                </a:ln>
+                <a:solidFill>
+                  <a:srgbClr val="006600"/>
+                </a:solidFill>
+                <a:effectLst/>
+                <a:uLnTx/>
+                <a:uFillTx/>
+                <a:latin typeface="Courier New" charset="0"/>
+              </a:rPr>
+              <a:t>iter.remove</a:t>
+            </a:r>
+            <a:r>
+              <a:rPr kumimoji="0" lang="en-US" altLang="en-US" sz="1600" b="1" i="0" u="none" strike="noStrike" kern="0" cap="none" spc="0" normalizeH="0" baseline="0" noProof="0" dirty="0">
+                <a:ln>
+                  <a:noFill/>
+                </a:ln>
+                <a:solidFill>
+                  <a:srgbClr val="006600"/>
+                </a:solidFill>
+                <a:effectLst/>
+                <a:uLnTx/>
+                <a:uFillTx/>
+                <a:latin typeface="Courier New" charset="0"/>
+              </a:rPr>
+              <a:t>()</a:t>
+            </a:r>
+            <a:r>
+              <a:rPr kumimoji="0" lang="en-US" altLang="en-US" sz="1600" b="1" i="0" u="none" strike="noStrike" kern="0" cap="none" spc="0" normalizeH="0" baseline="0" noProof="0" dirty="0">
+                <a:ln>
+                  <a:noFill/>
+                </a:ln>
+                <a:solidFill>
+                  <a:srgbClr val="063DE8"/>
+                </a:solidFill>
+                <a:effectLst/>
+                <a:uLnTx/>
+                <a:uFillTx/>
+                <a:latin typeface="Courier New" charset="0"/>
+              </a:rPr>
+              <a:t>;</a:t>
+            </a:r>
+          </a:p>
+          <a:p>
+            <a:pPr marL="0" marR="0" lvl="0" indent="0" defTabSz="914400" eaLnBrk="0" fontAlgn="base" latinLnBrk="0" hangingPunct="0">
+              <a:lnSpc>
+                <a:spcPct val="100000"/>
+              </a:lnSpc>
+              <a:spcBef>
+                <a:spcPct val="0"/>
+              </a:spcBef>
+              <a:spcAft>
+                <a:spcPct val="0"/>
+              </a:spcAft>
+              <a:buClrTx/>
+              <a:buSzTx/>
+              <a:buFontTx/>
+              <a:buNone/>
+              <a:tabLst/>
+              <a:defRPr/>
+            </a:pPr>
+            <a:r>
+              <a:rPr kumimoji="0" lang="en-US" altLang="en-US" sz="1600" b="1" i="0" u="none" strike="noStrike" kern="0" cap="none" spc="0" normalizeH="0" baseline="0" noProof="0" dirty="0">
+                <a:ln>
+                  <a:noFill/>
+                </a:ln>
+                <a:solidFill>
+                  <a:srgbClr val="063DE8"/>
+                </a:solidFill>
+                <a:effectLst/>
+                <a:uLnTx/>
+                <a:uFillTx/>
+                <a:latin typeface="Courier New" charset="0"/>
+              </a:rPr>
+              <a:t>}</a:t>
             </a:r>
           </a:p>
         </p:txBody>
@@ -11817,7 +11475,7 @@
     </p:spTree>
     <p:extLst>
       <p:ext uri="{BB962C8B-B14F-4D97-AF65-F5344CB8AC3E}">
-        <p14:creationId xmlns="" xmlns:p14="http://schemas.microsoft.com/office/powerpoint/2010/main" val="2735913249"/>
+        <p14:creationId xmlns:p14="http://schemas.microsoft.com/office/powerpoint/2010/main" xmlns="" val="2052681984"/>
       </p:ext>
     </p:extLst>
   </p:cSld>
@@ -12016,7 +11674,7 @@
     </p:spTree>
     <p:extLst>
       <p:ext uri="{BB962C8B-B14F-4D97-AF65-F5344CB8AC3E}">
-        <p14:creationId xmlns="" xmlns:p14="http://schemas.microsoft.com/office/powerpoint/2010/main" val="51204498"/>
+        <p14:creationId xmlns:p14="http://schemas.microsoft.com/office/powerpoint/2010/main" xmlns="" val="51204498"/>
       </p:ext>
     </p:extLst>
   </p:cSld>
@@ -12066,8 +11724,8 @@
           <a:lstStyle/>
           <a:p>
             <a:r>
-              <a:rPr lang="en-US" dirty="0"/>
-              <a:t>Linting (or Static Analysis)</a:t>
+              <a:rPr lang="en-US" altLang="en-US" dirty="0"/>
+              <a:t>Preconditions</a:t>
             </a:r>
             <a:endParaRPr lang="en-CA" dirty="0"/>
           </a:p>
@@ -12085,8 +11743,8 @@
         </p:nvSpPr>
         <p:spPr>
           <a:xfrm>
-            <a:off x="640874" y="1168401"/>
-            <a:ext cx="10515600" cy="5252064"/>
+            <a:off x="640874" y="1168400"/>
+            <a:ext cx="10515600" cy="5405435"/>
           </a:xfrm>
         </p:spPr>
         <p:txBody>
@@ -12095,139 +11753,13 @@
           </a:bodyPr>
           <a:lstStyle/>
           <a:p>
-            <a:r>
-              <a:rPr lang="en-US" b="1" dirty="0"/>
-              <a:t>Static Analysis </a:t>
-            </a:r>
-            <a:r>
-              <a:rPr lang="en-US" dirty="0"/>
-              <a:t>of your code</a:t>
-            </a:r>
-          </a:p>
-          <a:p>
-            <a:pPr lvl="1"/>
-            <a:r>
-              <a:rPr lang="en-US" dirty="0"/>
-              <a:t>Analyzes the static aspect (e.g. the code, file names etc.) of your program</a:t>
-            </a:r>
-          </a:p>
-          <a:p>
-            <a:pPr lvl="1"/>
-            <a:r>
-              <a:rPr lang="en-US" dirty="0"/>
-              <a:t>Doesn’t care about what your code does at runtime</a:t>
-            </a:r>
-          </a:p>
-          <a:p>
-            <a:pPr lvl="1"/>
-            <a:r>
-              <a:rPr lang="en-US" dirty="0"/>
-              <a:t>Only cares if it looks right, and could compile it as well</a:t>
-            </a:r>
-          </a:p>
-          <a:p>
-            <a:pPr lvl="1"/>
-            <a:r>
-              <a:rPr lang="en-US" dirty="0"/>
-              <a:t>Examples: </a:t>
-            </a:r>
-          </a:p>
-          <a:p>
-            <a:pPr lvl="2"/>
-            <a:r>
-              <a:rPr lang="en-US" dirty="0">
-                <a:hlinkClick r:id="rId2"/>
-              </a:rPr>
-              <a:t>PEP-8</a:t>
-            </a:r>
-            <a:r>
-              <a:rPr lang="en-US" dirty="0"/>
-              <a:t> in Python</a:t>
-            </a:r>
-          </a:p>
-          <a:p>
-            <a:pPr lvl="2"/>
-            <a:r>
-              <a:rPr lang="en-US" dirty="0"/>
-              <a:t>IntelliJ-</a:t>
-            </a:r>
-            <a:r>
-              <a:rPr lang="en-US" dirty="0" err="1"/>
-              <a:t>builtin</a:t>
-            </a:r>
-            <a:r>
-              <a:rPr lang="en-US" dirty="0"/>
-              <a:t>, &amp; </a:t>
-            </a:r>
-            <a:r>
-              <a:rPr lang="en-US" dirty="0">
-                <a:hlinkClick r:id="rId3"/>
-              </a:rPr>
-              <a:t>Google Style</a:t>
-            </a:r>
-            <a:r>
-              <a:rPr lang="en-US" dirty="0"/>
-              <a:t> in Java</a:t>
-            </a:r>
-          </a:p>
-          <a:p>
-            <a:pPr lvl="2"/>
-            <a:r>
-              <a:rPr lang="en-US" dirty="0" err="1">
-                <a:hlinkClick r:id="rId4"/>
-              </a:rPr>
-              <a:t>ESLint</a:t>
-            </a:r>
-            <a:r>
-              <a:rPr lang="en-US" dirty="0"/>
-              <a:t>, &amp; </a:t>
-            </a:r>
-            <a:r>
-              <a:rPr lang="en-US" dirty="0">
-                <a:hlinkClick r:id="rId5"/>
-              </a:rPr>
-              <a:t>Mozilla Style</a:t>
-            </a:r>
-            <a:r>
-              <a:rPr lang="en-US" dirty="0"/>
-              <a:t> in </a:t>
-            </a:r>
-            <a:r>
-              <a:rPr lang="en-US" dirty="0" err="1"/>
-              <a:t>Javascript</a:t>
-            </a:r>
-            <a:endParaRPr lang="en-US" dirty="0"/>
-          </a:p>
-          <a:p>
-            <a:pPr lvl="2"/>
-            <a:r>
-              <a:rPr lang="en-US" dirty="0"/>
-              <a:t>Custom Validators</a:t>
-            </a:r>
-          </a:p>
-          <a:p>
-            <a:pPr lvl="1"/>
-            <a:endParaRPr lang="en-US" dirty="0"/>
-          </a:p>
-          <a:p>
-            <a:r>
-              <a:rPr lang="en-US" dirty="0"/>
-              <a:t>In contrast, </a:t>
-            </a:r>
-            <a:r>
-              <a:rPr lang="en-US" b="1" dirty="0"/>
-              <a:t>dynamic analysis </a:t>
-            </a:r>
-            <a:r>
-              <a:rPr lang="en-US" dirty="0"/>
-              <a:t>involves analyzing your code during runtime</a:t>
-            </a:r>
-          </a:p>
-          <a:p>
-            <a:pPr lvl="1"/>
-            <a:r>
-              <a:rPr lang="en-US" dirty="0"/>
-              <a:t>Example: Code Coverage</a:t>
+            <a:pPr marL="0" indent="0">
+              <a:buNone/>
+              <a:defRPr/>
+            </a:pPr>
+            <a:r>
+              <a:rPr lang="en-US" altLang="en-US" sz="1400" dirty="0"/>
+              <a:t> (conditions to satisfy before usage)</a:t>
             </a:r>
           </a:p>
         </p:txBody>
@@ -12281,10 +11813,411 @@
           </a:p>
         </p:txBody>
       </p:sp>
+      <p:sp>
+        <p:nvSpPr>
+          <p:cNvPr id="8" name="Text Box 2">
+            <a:extLst>
+              <a:ext uri="{FF2B5EF4-FFF2-40B4-BE49-F238E27FC236}">
+                <a16:creationId xmlns:a16="http://schemas.microsoft.com/office/drawing/2014/main" xmlns="" id="{5B1405A6-0C74-4EF0-8929-81614C79A953}"/>
+              </a:ext>
+            </a:extLst>
+          </p:cNvPr>
+          <p:cNvSpPr txBox="1">
+            <a:spLocks noChangeArrowheads="1"/>
+          </p:cNvSpPr>
+          <p:nvPr/>
+        </p:nvSpPr>
+        <p:spPr bwMode="auto">
+          <a:xfrm>
+            <a:off x="2135979" y="1735393"/>
+            <a:ext cx="7620000" cy="825500"/>
+          </a:xfrm>
+          <a:prstGeom prst="rect">
+            <a:avLst/>
+          </a:prstGeom>
+          <a:solidFill>
+            <a:srgbClr val="FAFD00"/>
+          </a:solidFill>
+          <a:ln>
+            <a:noFill/>
+          </a:ln>
+          <a:effectLst/>
+          <a:extLst>
+            <a:ext uri="{91240B29-F687-4F45-9708-019B960494DF}">
+              <a14:hiddenLine xmlns:a14="http://schemas.microsoft.com/office/drawing/2010/main" xmlns="" w="9525">
+                <a:solidFill>
+                  <a:schemeClr val="tx1"/>
+                </a:solidFill>
+                <a:miter lim="800000"/>
+                <a:headEnd/>
+                <a:tailEnd/>
+              </a14:hiddenLine>
+            </a:ext>
+            <a:ext uri="{AF507438-7753-43E0-B8FC-AC1667EBCBE1}">
+              <a14:hiddenEffects xmlns:a14="http://schemas.microsoft.com/office/drawing/2010/main" xmlns="">
+                <a:effectLst>
+                  <a:outerShdw blurRad="63500" dist="38099" dir="2700000" algn="ctr" rotWithShape="0">
+                    <a:schemeClr val="bg2">
+                      <a:alpha val="74998"/>
+                    </a:schemeClr>
+                  </a:outerShdw>
+                </a:effectLst>
+              </a14:hiddenEffects>
+            </a:ext>
+          </a:extLst>
+        </p:spPr>
+        <p:txBody>
+          <a:bodyPr>
+            <a:spAutoFit/>
+          </a:bodyPr>
+          <a:lstStyle/>
+          <a:p>
+            <a:pPr marL="0" marR="0" lvl="0" indent="0" defTabSz="914400" eaLnBrk="0" fontAlgn="base" latinLnBrk="0" hangingPunct="0">
+              <a:lnSpc>
+                <a:spcPct val="100000"/>
+              </a:lnSpc>
+              <a:spcBef>
+                <a:spcPct val="0"/>
+              </a:spcBef>
+              <a:spcAft>
+                <a:spcPct val="0"/>
+              </a:spcAft>
+              <a:buClrTx/>
+              <a:buSzTx/>
+              <a:buFontTx/>
+              <a:buNone/>
+              <a:tabLst/>
+              <a:defRPr/>
+            </a:pPr>
+            <a:r>
+              <a:rPr kumimoji="0" lang="en-US" altLang="en-US" sz="1600" b="1" i="0" u="none" strike="noStrike" kern="0" cap="none" spc="0" normalizeH="0" baseline="0" noProof="0">
+                <a:ln>
+                  <a:noFill/>
+                </a:ln>
+                <a:solidFill>
+                  <a:srgbClr val="063DE8"/>
+                </a:solidFill>
+                <a:effectLst/>
+                <a:uLnTx/>
+                <a:uFillTx/>
+                <a:latin typeface="Courier New" charset="0"/>
+              </a:rPr>
+              <a:t>public boolean hasNext()</a:t>
+            </a:r>
+          </a:p>
+          <a:p>
+            <a:pPr marL="0" marR="0" lvl="0" indent="0" defTabSz="914400" eaLnBrk="0" fontAlgn="base" latinLnBrk="0" hangingPunct="0">
+              <a:lnSpc>
+                <a:spcPct val="100000"/>
+              </a:lnSpc>
+              <a:spcBef>
+                <a:spcPct val="0"/>
+              </a:spcBef>
+              <a:spcAft>
+                <a:spcPct val="0"/>
+              </a:spcAft>
+              <a:buClrTx/>
+              <a:buSzTx/>
+              <a:buFontTx/>
+              <a:buNone/>
+              <a:tabLst/>
+              <a:defRPr/>
+            </a:pPr>
+            <a:endParaRPr kumimoji="0" lang="en-US" altLang="en-US" sz="1600" b="1" i="0" u="none" strike="noStrike" kern="0" cap="none" spc="0" normalizeH="0" baseline="0" noProof="0">
+              <a:ln>
+                <a:noFill/>
+              </a:ln>
+              <a:solidFill>
+                <a:srgbClr val="063DE8"/>
+              </a:solidFill>
+              <a:effectLst/>
+              <a:uLnTx/>
+              <a:uFillTx/>
+              <a:latin typeface="Courier New" charset="0"/>
+            </a:endParaRPr>
+          </a:p>
+          <a:p>
+            <a:pPr marL="0" marR="0" lvl="0" indent="0" defTabSz="914400" eaLnBrk="0" fontAlgn="base" latinLnBrk="0" hangingPunct="0">
+              <a:lnSpc>
+                <a:spcPct val="100000"/>
+              </a:lnSpc>
+              <a:spcBef>
+                <a:spcPct val="0"/>
+              </a:spcBef>
+              <a:spcAft>
+                <a:spcPct val="0"/>
+              </a:spcAft>
+              <a:buClrTx/>
+              <a:buSzTx/>
+              <a:buFontTx/>
+              <a:buNone/>
+              <a:tabLst/>
+              <a:defRPr/>
+            </a:pPr>
+            <a:r>
+              <a:rPr kumimoji="0" lang="en-US" altLang="en-US" sz="1600" b="1" i="0" u="none" strike="noStrike" kern="0" cap="none" spc="0" normalizeH="0" baseline="0" noProof="0">
+                <a:ln>
+                  <a:noFill/>
+                </a:ln>
+                <a:solidFill>
+                  <a:srgbClr val="063DE8"/>
+                </a:solidFill>
+                <a:effectLst/>
+                <a:uLnTx/>
+                <a:uFillTx/>
+                <a:latin typeface="Courier New" charset="0"/>
+              </a:rPr>
+              <a:t>public Object next()</a:t>
+            </a:r>
+          </a:p>
+        </p:txBody>
+      </p:sp>
+      <p:sp>
+        <p:nvSpPr>
+          <p:cNvPr id="9" name="Text Box 4">
+            <a:extLst>
+              <a:ext uri="{FF2B5EF4-FFF2-40B4-BE49-F238E27FC236}">
+                <a16:creationId xmlns:a16="http://schemas.microsoft.com/office/drawing/2014/main" xmlns="" id="{CCB8AA77-4B0D-4B6B-82D7-3BA5489CF8EC}"/>
+              </a:ext>
+            </a:extLst>
+          </p:cNvPr>
+          <p:cNvSpPr txBox="1">
+            <a:spLocks noChangeArrowheads="1"/>
+          </p:cNvSpPr>
+          <p:nvPr/>
+        </p:nvSpPr>
+        <p:spPr bwMode="auto">
+          <a:xfrm>
+            <a:off x="2196304" y="2864106"/>
+            <a:ext cx="7875588" cy="2647950"/>
+          </a:xfrm>
+          <a:prstGeom prst="rect">
+            <a:avLst/>
+          </a:prstGeom>
+          <a:noFill/>
+          <a:ln>
+            <a:noFill/>
+          </a:ln>
+          <a:effectLst/>
+          <a:extLst>
+            <a:ext uri="{909E8E84-426E-40DD-AFC4-6F175D3DCCD1}">
+              <a14:hiddenFill xmlns:a14="http://schemas.microsoft.com/office/drawing/2010/main" xmlns="">
+                <a:solidFill>
+                  <a:schemeClr val="accent1"/>
+                </a:solidFill>
+              </a14:hiddenFill>
+            </a:ext>
+            <a:ext uri="{91240B29-F687-4F45-9708-019B960494DF}">
+              <a14:hiddenLine xmlns:a14="http://schemas.microsoft.com/office/drawing/2010/main" xmlns="" w="9525">
+                <a:solidFill>
+                  <a:schemeClr val="tx1"/>
+                </a:solidFill>
+                <a:miter lim="800000"/>
+                <a:headEnd/>
+                <a:tailEnd/>
+              </a14:hiddenLine>
+            </a:ext>
+            <a:ext uri="{AF507438-7753-43E0-B8FC-AC1667EBCBE1}">
+              <a14:hiddenEffects xmlns:a14="http://schemas.microsoft.com/office/drawing/2010/main" xmlns="">
+                <a:effectLst>
+                  <a:outerShdw blurRad="63500" dist="38099" dir="2700000" algn="ctr" rotWithShape="0">
+                    <a:schemeClr val="bg2">
+                      <a:alpha val="74998"/>
+                    </a:schemeClr>
+                  </a:outerShdw>
+                </a:effectLst>
+              </a14:hiddenEffects>
+            </a:ext>
+          </a:extLst>
+        </p:spPr>
+        <p:txBody>
+          <a:bodyPr wrap="none">
+            <a:spAutoFit/>
+          </a:bodyPr>
+          <a:lstStyle/>
+          <a:p>
+            <a:pPr eaLnBrk="0" fontAlgn="base" hangingPunct="0">
+              <a:spcBef>
+                <a:spcPct val="0"/>
+              </a:spcBef>
+              <a:spcAft>
+                <a:spcPct val="0"/>
+              </a:spcAft>
+              <a:defRPr/>
+            </a:pPr>
+            <a:r>
+              <a:rPr lang="en-US" altLang="en-US" sz="2400" b="1" dirty="0" err="1">
+                <a:solidFill>
+                  <a:srgbClr val="0A0E55"/>
+                </a:solidFill>
+                <a:latin typeface="Courier New" charset="0"/>
+              </a:rPr>
+              <a:t>hasNext</a:t>
+            </a:r>
+            <a:r>
+              <a:rPr lang="en-US" altLang="en-US" sz="2400" dirty="0">
+                <a:solidFill>
+                  <a:srgbClr val="0A0E55"/>
+                </a:solidFill>
+                <a:latin typeface="Times New Roman" charset="0"/>
+              </a:rPr>
+              <a:t> has no preconditions</a:t>
+            </a:r>
+          </a:p>
+          <a:p>
+            <a:pPr eaLnBrk="0" fontAlgn="base" hangingPunct="0">
+              <a:spcBef>
+                <a:spcPct val="0"/>
+              </a:spcBef>
+              <a:spcAft>
+                <a:spcPct val="0"/>
+              </a:spcAft>
+              <a:defRPr/>
+            </a:pPr>
+            <a:endParaRPr lang="en-US" altLang="en-US" sz="2400" dirty="0">
+              <a:solidFill>
+                <a:srgbClr val="0A0E55"/>
+              </a:solidFill>
+              <a:latin typeface="Times New Roman" charset="0"/>
+            </a:endParaRPr>
+          </a:p>
+          <a:p>
+            <a:pPr eaLnBrk="0" fontAlgn="base" hangingPunct="0">
+              <a:spcBef>
+                <a:spcPct val="0"/>
+              </a:spcBef>
+              <a:spcAft>
+                <a:spcPct val="0"/>
+              </a:spcAft>
+              <a:defRPr/>
+            </a:pPr>
+            <a:r>
+              <a:rPr lang="en-US" altLang="en-US" sz="2400" b="1" dirty="0">
+                <a:solidFill>
+                  <a:srgbClr val="0A0E55"/>
+                </a:solidFill>
+                <a:latin typeface="Courier New" charset="0"/>
+              </a:rPr>
+              <a:t>next</a:t>
+            </a:r>
+            <a:r>
+              <a:rPr lang="en-US" altLang="en-US" sz="2400" dirty="0">
+                <a:solidFill>
+                  <a:srgbClr val="0A0E55"/>
+                </a:solidFill>
+                <a:latin typeface="Times New Roman" charset="0"/>
+              </a:rPr>
+              <a:t> has two preconditions:</a:t>
+            </a:r>
+          </a:p>
+          <a:p>
+            <a:pPr lvl="1" eaLnBrk="0" fontAlgn="base" hangingPunct="0">
+              <a:spcBef>
+                <a:spcPct val="0"/>
+              </a:spcBef>
+              <a:spcAft>
+                <a:spcPct val="0"/>
+              </a:spcAft>
+              <a:buFontTx/>
+              <a:buChar char="•"/>
+              <a:defRPr/>
+            </a:pPr>
+            <a:r>
+              <a:rPr lang="en-US" altLang="en-US" sz="2400" dirty="0">
+                <a:solidFill>
+                  <a:srgbClr val="0A0E55"/>
+                </a:solidFill>
+                <a:latin typeface="Times New Roman" charset="0"/>
+              </a:rPr>
+              <a:t> </a:t>
+            </a:r>
+            <a:r>
+              <a:rPr lang="en-US" altLang="en-US" sz="2400" b="1" dirty="0" err="1">
+                <a:solidFill>
+                  <a:srgbClr val="0A0E55"/>
+                </a:solidFill>
+                <a:latin typeface="Courier New" charset="0"/>
+              </a:rPr>
+              <a:t>hasNext</a:t>
+            </a:r>
+            <a:r>
+              <a:rPr lang="en-US" altLang="en-US" sz="2400" dirty="0">
+                <a:solidFill>
+                  <a:srgbClr val="0A0E55"/>
+                </a:solidFill>
+                <a:latin typeface="Times New Roman" charset="0"/>
+              </a:rPr>
+              <a:t> returns true</a:t>
+            </a:r>
+          </a:p>
+          <a:p>
+            <a:pPr lvl="1" eaLnBrk="0" fontAlgn="base" hangingPunct="0">
+              <a:spcBef>
+                <a:spcPct val="0"/>
+              </a:spcBef>
+              <a:spcAft>
+                <a:spcPct val="0"/>
+              </a:spcAft>
+              <a:buFontTx/>
+              <a:buChar char="•"/>
+              <a:defRPr/>
+            </a:pPr>
+            <a:r>
+              <a:rPr lang="en-US" altLang="en-US" sz="2400" dirty="0">
+                <a:solidFill>
+                  <a:srgbClr val="0A0E55"/>
+                </a:solidFill>
+                <a:latin typeface="Times New Roman" charset="0"/>
+              </a:rPr>
+              <a:t> the underlying collection has not been modified by one of</a:t>
+            </a:r>
+          </a:p>
+          <a:p>
+            <a:pPr lvl="1" eaLnBrk="0" fontAlgn="base" hangingPunct="0">
+              <a:spcBef>
+                <a:spcPct val="0"/>
+              </a:spcBef>
+              <a:spcAft>
+                <a:spcPct val="0"/>
+              </a:spcAft>
+              <a:defRPr/>
+            </a:pPr>
+            <a:r>
+              <a:rPr lang="en-US" altLang="en-US" sz="2400" dirty="0">
+                <a:solidFill>
+                  <a:srgbClr val="0A0E55"/>
+                </a:solidFill>
+                <a:latin typeface="Times New Roman" charset="0"/>
+              </a:rPr>
+              <a:t>   that collection’s mutators during the lifetime of that</a:t>
+            </a:r>
+          </a:p>
+          <a:p>
+            <a:pPr lvl="1" eaLnBrk="0" fontAlgn="base" hangingPunct="0">
+              <a:spcBef>
+                <a:spcPct val="0"/>
+              </a:spcBef>
+              <a:spcAft>
+                <a:spcPct val="0"/>
+              </a:spcAft>
+              <a:defRPr/>
+            </a:pPr>
+            <a:r>
+              <a:rPr lang="en-US" altLang="en-US" sz="2400" dirty="0">
+                <a:solidFill>
+                  <a:srgbClr val="0A0E55"/>
+                </a:solidFill>
+                <a:latin typeface="Times New Roman" charset="0"/>
+              </a:rPr>
+              <a:t>   iterator</a:t>
+            </a:r>
+          </a:p>
+        </p:txBody>
+      </p:sp>
     </p:spTree>
     <p:extLst>
       <p:ext uri="{BB962C8B-B14F-4D97-AF65-F5344CB8AC3E}">
-        <p14:creationId xmlns="" xmlns:p14="http://schemas.microsoft.com/office/powerpoint/2010/main" val="355146014"/>
+        <p14:creationId xmlns:p14="http://schemas.microsoft.com/office/powerpoint/2010/main" xmlns="" val="1983291541"/>
       </p:ext>
     </p:extLst>
   </p:cSld>
@@ -12320,7 +12253,13 @@
       </p:grpSpPr>
       <p:sp>
         <p:nvSpPr>
-          <p:cNvPr id="2" name="Title 1"/>
+          <p:cNvPr id="2" name="Title 1">
+            <a:extLst>
+              <a:ext uri="{FF2B5EF4-FFF2-40B4-BE49-F238E27FC236}">
+                <a16:creationId xmlns:a16="http://schemas.microsoft.com/office/drawing/2014/main" xmlns="" id="{0A921011-18FC-475B-B283-A4E0D7C676E2}"/>
+              </a:ext>
+            </a:extLst>
+          </p:cNvPr>
           <p:cNvSpPr>
             <a:spLocks noGrp="1"/>
           </p:cNvSpPr>
@@ -12334,109 +12273,72 @@
           <a:lstStyle/>
           <a:p>
             <a:r>
-              <a:rPr lang="en-US" dirty="0"/>
-              <a:t>Advantages to using Linters</a:t>
-            </a:r>
+              <a:rPr lang="en-CA" dirty="0"/>
+              <a:t>Why use Iterators</a:t>
+            </a:r>
+          </a:p>
+        </p:txBody>
+      </p:sp>
+      <p:sp>
+        <p:nvSpPr>
+          <p:cNvPr id="3" name="Content Placeholder 2">
+            <a:extLst>
+              <a:ext uri="{FF2B5EF4-FFF2-40B4-BE49-F238E27FC236}">
+                <a16:creationId xmlns:a16="http://schemas.microsoft.com/office/drawing/2014/main" xmlns="" id="{E519EC20-1B41-4FDC-B979-74F142F690A2}"/>
+              </a:ext>
+            </a:extLst>
+          </p:cNvPr>
+          <p:cNvSpPr>
+            <a:spLocks noGrp="1"/>
+          </p:cNvSpPr>
+          <p:nvPr>
+            <p:ph idx="1"/>
+          </p:nvPr>
+        </p:nvSpPr>
+        <p:spPr/>
+        <p:txBody>
+          <a:bodyPr/>
+          <a:lstStyle/>
+          <a:p>
+            <a:r>
+              <a:rPr lang="en-CA" dirty="0"/>
+              <a:t>A single interface to iterate through any Collections or Lists of objects.</a:t>
+            </a:r>
+          </a:p>
+          <a:p>
             <a:endParaRPr lang="en-CA" dirty="0"/>
           </a:p>
-        </p:txBody>
-      </p:sp>
-      <p:sp>
-        <p:nvSpPr>
-          <p:cNvPr id="3" name="Content Placeholder 2"/>
-          <p:cNvSpPr>
-            <a:spLocks noGrp="1"/>
-          </p:cNvSpPr>
-          <p:nvPr>
-            <p:ph idx="1"/>
-          </p:nvPr>
-        </p:nvSpPr>
-        <p:spPr>
-          <a:xfrm>
-            <a:off x="640874" y="1168401"/>
-            <a:ext cx="10515600" cy="4399753"/>
-          </a:xfrm>
-        </p:spPr>
-        <p:txBody>
-          <a:bodyPr>
-            <a:normAutofit/>
-          </a:bodyPr>
-          <a:lstStyle/>
-          <a:p>
-            <a:r>
-              <a:rPr lang="en-US" dirty="0"/>
-              <a:t>Quicker, and more powerful code reviews</a:t>
-            </a:r>
-          </a:p>
-          <a:p>
-            <a:pPr lvl="1"/>
-            <a:r>
-              <a:rPr lang="en-US" dirty="0"/>
-              <a:t>People can spend more time on the internals rather than the structure</a:t>
-            </a:r>
-          </a:p>
-          <a:p>
-            <a:pPr lvl="1"/>
-            <a:endParaRPr lang="en-US" dirty="0"/>
-          </a:p>
-          <a:p>
-            <a:r>
-              <a:rPr lang="en-US" dirty="0"/>
-              <a:t>Consistent code quality</a:t>
-            </a:r>
-          </a:p>
-          <a:p>
-            <a:endParaRPr lang="en-US" dirty="0"/>
-          </a:p>
-          <a:p>
-            <a:r>
-              <a:rPr lang="en-US" dirty="0"/>
-              <a:t>Enforcement of organizational standards</a:t>
-            </a:r>
-          </a:p>
-          <a:p>
-            <a:endParaRPr lang="en-US" dirty="0"/>
-          </a:p>
-          <a:p>
-            <a:r>
-              <a:rPr lang="en-US" dirty="0"/>
-              <a:t>No need to stress about your formatting anymore</a:t>
-            </a:r>
-          </a:p>
-          <a:p>
-            <a:pPr lvl="1"/>
-            <a:r>
-              <a:rPr lang="en-US" dirty="0"/>
-              <a:t>E.g. a misplaced curly brace `{` on line 10,276</a:t>
-            </a:r>
-          </a:p>
-        </p:txBody>
-      </p:sp>
-      <p:sp>
-        <p:nvSpPr>
-          <p:cNvPr id="10" name="Footer Placeholder 9"/>
-          <p:cNvSpPr>
-            <a:spLocks noGrp="1"/>
-          </p:cNvSpPr>
-          <p:nvPr>
-            <p:ph type="ftr" sz="quarter" idx="3"/>
-          </p:nvPr>
-        </p:nvSpPr>
-        <p:spPr/>
-        <p:txBody>
-          <a:bodyPr/>
-          <a:lstStyle/>
           <a:p>
             <a:r>
               <a:rPr lang="en-CA" dirty="0"/>
-              <a:t>CS321: Advanced Programming Techniques</a:t>
-            </a:r>
-          </a:p>
-        </p:txBody>
-      </p:sp>
-      <p:sp>
-        <p:nvSpPr>
-          <p:cNvPr id="12" name="Slide Number Placeholder 11"/>
+              <a:t>Otherwise, you’ll need to start checking the list/collection type before iterating over elements in these object arrays (e.g. one method for iterating through an </a:t>
+            </a:r>
+            <a:r>
+              <a:rPr lang="en-CA" dirty="0" err="1"/>
+              <a:t>ArrayList</a:t>
+            </a:r>
+            <a:r>
+              <a:rPr lang="en-CA" dirty="0"/>
+              <a:t>, and another for a Collection)</a:t>
+            </a:r>
+          </a:p>
+          <a:p>
+            <a:endParaRPr lang="en-CA" dirty="0"/>
+          </a:p>
+          <a:p>
+            <a:endParaRPr lang="en-CA" dirty="0"/>
+          </a:p>
+        </p:txBody>
+      </p:sp>
+      <p:sp>
+        <p:nvSpPr>
+          <p:cNvPr id="6" name="Slide Number Placeholder 5">
+            <a:extLst>
+              <a:ext uri="{FF2B5EF4-FFF2-40B4-BE49-F238E27FC236}">
+                <a16:creationId xmlns:a16="http://schemas.microsoft.com/office/drawing/2014/main" xmlns="" id="{2BFBBD55-E3C1-4C22-8665-BC6CC0B5B10F}"/>
+              </a:ext>
+            </a:extLst>
+          </p:cNvPr>
           <p:cNvSpPr>
             <a:spLocks noGrp="1"/>
           </p:cNvSpPr>
@@ -12455,8 +12357,36 @@
               <a:t>31</a:t>
             </a:fld>
             <a:r>
+              <a:rPr lang="en-CA"/>
+              <a:t> / 32</a:t>
+            </a:r>
+            <a:endParaRPr lang="en-CA" dirty="0"/>
+          </a:p>
+        </p:txBody>
+      </p:sp>
+      <p:sp>
+        <p:nvSpPr>
+          <p:cNvPr id="7" name="Footer Placeholder 9"/>
+          <p:cNvSpPr>
+            <a:spLocks noGrp="1"/>
+          </p:cNvSpPr>
+          <p:nvPr>
+            <p:ph type="ftr" sz="quarter" idx="3"/>
+          </p:nvPr>
+        </p:nvSpPr>
+        <p:spPr>
+          <a:xfrm>
+            <a:off x="52387" y="6573836"/>
+            <a:ext cx="2986087" cy="365125"/>
+          </a:xfrm>
+        </p:spPr>
+        <p:txBody>
+          <a:bodyPr/>
+          <a:lstStyle/>
+          <a:p>
+            <a:r>
               <a:rPr lang="en-CA" dirty="0"/>
-              <a:t> </a:t>
+              <a:t>CS321: Advanced Programming Techniques</a:t>
             </a:r>
           </a:p>
         </p:txBody>
@@ -12464,7 +12394,7 @@
     </p:spTree>
     <p:extLst>
       <p:ext uri="{BB962C8B-B14F-4D97-AF65-F5344CB8AC3E}">
-        <p14:creationId xmlns="" xmlns:p14="http://schemas.microsoft.com/office/powerpoint/2010/main" val="2425407270"/>
+        <p14:creationId xmlns:p14="http://schemas.microsoft.com/office/powerpoint/2010/main" xmlns="" val="2735913249"/>
       </p:ext>
     </p:extLst>
   </p:cSld>
@@ -12515,7 +12445,7 @@
           <a:p>
             <a:r>
               <a:rPr lang="en-US" dirty="0"/>
-              <a:t>Key Points for Errors/Exceptions</a:t>
+              <a:t>Linting (or Static Analysis)</a:t>
             </a:r>
             <a:endParaRPr lang="en-CA" dirty="0"/>
           </a:p>
@@ -12534,7 +12464,7 @@
         <p:spPr>
           <a:xfrm>
             <a:off x="640874" y="1168401"/>
-            <a:ext cx="10515600" cy="4966928"/>
+            <a:ext cx="10515600" cy="5252064"/>
           </a:xfrm>
         </p:spPr>
         <p:txBody>
@@ -12544,75 +12474,139 @@
           <a:lstStyle/>
           <a:p>
             <a:r>
-              <a:rPr lang="en-US" altLang="en-US" dirty="0">
-                <a:ea typeface="ＭＳ Ｐゴシック" panose="020B0600070205080204" pitchFamily="34" charset="-128"/>
-              </a:rPr>
-              <a:t>Errors are internal, exceptions are external</a:t>
-            </a:r>
-          </a:p>
-          <a:p>
-            <a:endParaRPr lang="en-US" altLang="en-US" dirty="0">
-              <a:ea typeface="ＭＳ Ｐゴシック" panose="020B0600070205080204" pitchFamily="34" charset="-128"/>
-            </a:endParaRPr>
-          </a:p>
-          <a:p>
-            <a:r>
-              <a:rPr lang="en-US" altLang="en-US" dirty="0">
-                <a:ea typeface="ＭＳ Ｐゴシック" panose="020B0600070205080204" pitchFamily="34" charset="-128"/>
-              </a:rPr>
-              <a:t>Check and sanitize input before doing anything</a:t>
+              <a:rPr lang="en-US" b="1" dirty="0"/>
+              <a:t>Static Analysis </a:t>
+            </a:r>
+            <a:r>
+              <a:rPr lang="en-US" dirty="0"/>
+              <a:t>of your code</a:t>
             </a:r>
           </a:p>
           <a:p>
             <a:pPr lvl="1"/>
             <a:r>
-              <a:rPr lang="en-US" altLang="en-US" dirty="0">
-                <a:ea typeface="ＭＳ Ｐゴシック" panose="020B0600070205080204" pitchFamily="34" charset="-128"/>
-              </a:rPr>
-              <a:t>Setup default values if needed</a:t>
+              <a:rPr lang="en-US" dirty="0"/>
+              <a:t>Analyzes the static aspect (e.g. the code, file names etc.) of your program</a:t>
             </a:r>
           </a:p>
           <a:p>
             <a:pPr lvl="1"/>
             <a:r>
-              <a:rPr lang="en-US" altLang="en-US" dirty="0">
-                <a:ea typeface="ＭＳ Ｐゴシック" panose="020B0600070205080204" pitchFamily="34" charset="-128"/>
-              </a:rPr>
-              <a:t>Raise exceptions when you can’t set a default value.</a:t>
+              <a:rPr lang="en-US" dirty="0"/>
+              <a:t>Doesn’t care about what your code does at runtime</a:t>
             </a:r>
           </a:p>
           <a:p>
             <a:pPr lvl="1"/>
-            <a:endParaRPr lang="en-US" altLang="en-US" dirty="0">
-              <a:ea typeface="ＭＳ Ｐゴシック" panose="020B0600070205080204" pitchFamily="34" charset="-128"/>
-            </a:endParaRPr>
-          </a:p>
-          <a:p>
-            <a:r>
-              <a:rPr lang="en-US" altLang="en-US" dirty="0">
-                <a:ea typeface="ＭＳ Ｐゴシック" panose="020B0600070205080204" pitchFamily="34" charset="-128"/>
-              </a:rPr>
-              <a:t>Put try/catch around crucial pieces of code that can potentially crash your program, not everything.</a:t>
+            <a:r>
+              <a:rPr lang="en-US" dirty="0"/>
+              <a:t>Only cares if it looks right, and could compile it as well</a:t>
             </a:r>
           </a:p>
           <a:p>
             <a:pPr lvl="1"/>
             <a:r>
-              <a:rPr lang="en-US" altLang="en-US" dirty="0">
-                <a:ea typeface="ＭＳ Ｐゴシック" panose="020B0600070205080204" pitchFamily="34" charset="-128"/>
-              </a:rPr>
-              <a:t>These are areas that you have less control over (e.g. making a network request, file manipulations, using source-code from dependencies, running external programs).</a:t>
-            </a:r>
-          </a:p>
-          <a:p>
-            <a:endParaRPr lang="en-US" altLang="en-US" dirty="0">
-              <a:ea typeface="ＭＳ Ｐゴシック" panose="020B0600070205080204" pitchFamily="34" charset="-128"/>
-            </a:endParaRPr>
-          </a:p>
-          <a:p>
-            <a:endParaRPr lang="en-US" altLang="en-US" dirty="0">
-              <a:ea typeface="ＭＳ Ｐゴシック" panose="020B0600070205080204" pitchFamily="34" charset="-128"/>
-            </a:endParaRPr>
+              <a:rPr lang="en-US" dirty="0"/>
+              <a:t>Examples: </a:t>
+            </a:r>
+          </a:p>
+          <a:p>
+            <a:pPr lvl="2"/>
+            <a:r>
+              <a:rPr lang="en-US" dirty="0">
+                <a:hlinkClick r:id="rId2"/>
+              </a:rPr>
+              <a:t>PEP-8</a:t>
+            </a:r>
+            <a:r>
+              <a:rPr lang="en-US" dirty="0"/>
+              <a:t> in Python</a:t>
+            </a:r>
+          </a:p>
+          <a:p>
+            <a:pPr lvl="2"/>
+            <a:r>
+              <a:rPr lang="en-US" dirty="0"/>
+              <a:t>IntelliJ-</a:t>
+            </a:r>
+            <a:r>
+              <a:rPr lang="en-US" dirty="0" err="1"/>
+              <a:t>builtin</a:t>
+            </a:r>
+            <a:r>
+              <a:rPr lang="en-US" dirty="0"/>
+              <a:t>, &amp; </a:t>
+            </a:r>
+            <a:r>
+              <a:rPr lang="en-US" dirty="0">
+                <a:hlinkClick r:id="rId3"/>
+              </a:rPr>
+              <a:t>Google Style</a:t>
+            </a:r>
+            <a:r>
+              <a:rPr lang="en-US" dirty="0"/>
+              <a:t> in Java</a:t>
+            </a:r>
+          </a:p>
+          <a:p>
+            <a:pPr lvl="2"/>
+            <a:r>
+              <a:rPr lang="en-US" dirty="0" err="1">
+                <a:hlinkClick r:id="rId4"/>
+              </a:rPr>
+              <a:t>ESLint</a:t>
+            </a:r>
+            <a:r>
+              <a:rPr lang="en-US" dirty="0"/>
+              <a:t>, &amp; </a:t>
+            </a:r>
+            <a:r>
+              <a:rPr lang="en-US" dirty="0">
+                <a:hlinkClick r:id="rId5"/>
+              </a:rPr>
+              <a:t>Mozilla Style</a:t>
+            </a:r>
+            <a:r>
+              <a:rPr lang="en-US" dirty="0"/>
+              <a:t> in </a:t>
+            </a:r>
+            <a:r>
+              <a:rPr lang="en-US" dirty="0" err="1"/>
+              <a:t>Javascript</a:t>
+            </a:r>
+            <a:endParaRPr lang="en-US" dirty="0"/>
+          </a:p>
+          <a:p>
+            <a:pPr lvl="2"/>
+            <a:r>
+              <a:rPr lang="en-US" dirty="0"/>
+              <a:t>Custom Validators</a:t>
+            </a:r>
+          </a:p>
+          <a:p>
+            <a:pPr lvl="1"/>
+            <a:endParaRPr lang="en-US" dirty="0"/>
+          </a:p>
+          <a:p>
+            <a:r>
+              <a:rPr lang="en-US" dirty="0"/>
+              <a:t>In contrast, </a:t>
+            </a:r>
+            <a:r>
+              <a:rPr lang="en-US" b="1" dirty="0"/>
+              <a:t>dynamic analysis </a:t>
+            </a:r>
+            <a:r>
+              <a:rPr lang="en-US" dirty="0"/>
+              <a:t>involves analyzing your code during runtime</a:t>
+            </a:r>
+          </a:p>
+          <a:p>
+            <a:pPr lvl="1"/>
+            <a:r>
+              <a:rPr lang="en-US" dirty="0"/>
+              <a:t>Example: Code Coverage</a:t>
+            </a:r>
           </a:p>
         </p:txBody>
       </p:sp>
@@ -12668,7 +12662,7 @@
     </p:spTree>
     <p:extLst>
       <p:ext uri="{BB962C8B-B14F-4D97-AF65-F5344CB8AC3E}">
-        <p14:creationId xmlns="" xmlns:p14="http://schemas.microsoft.com/office/powerpoint/2010/main" val="839201425"/>
+        <p14:creationId xmlns:p14="http://schemas.microsoft.com/office/powerpoint/2010/main" xmlns="" val="355146014"/>
       </p:ext>
     </p:extLst>
   </p:cSld>
@@ -12719,7 +12713,7 @@
           <a:p>
             <a:r>
               <a:rPr lang="en-US" dirty="0"/>
-              <a:t>Key Points for Errors/Exceptions</a:t>
+              <a:t>Advantages to using Linters</a:t>
             </a:r>
             <a:endParaRPr lang="en-CA" dirty="0"/>
           </a:p>
@@ -12738,7 +12732,7 @@
         <p:spPr>
           <a:xfrm>
             <a:off x="640874" y="1168401"/>
-            <a:ext cx="10515600" cy="4966928"/>
+            <a:ext cx="10515600" cy="4399753"/>
           </a:xfrm>
         </p:spPr>
         <p:txBody>
@@ -12748,29 +12742,51 @@
           <a:lstStyle/>
           <a:p>
             <a:r>
-              <a:rPr lang="en-US" altLang="en-US" dirty="0">
-                <a:ea typeface="ＭＳ Ｐゴシック" panose="020B0600070205080204" pitchFamily="34" charset="-128"/>
-              </a:rPr>
-              <a:t>When building large programs, remember where you generate and catch exceptions. Sometimes you maybe duplicating code and some catch code becomes unreachable as you always catch an exception earlier.</a:t>
-            </a:r>
-          </a:p>
-          <a:p>
-            <a:endParaRPr lang="en-US" altLang="en-US" dirty="0">
-              <a:ea typeface="ＭＳ Ｐゴシック" panose="020B0600070205080204" pitchFamily="34" charset="-128"/>
-            </a:endParaRPr>
-          </a:p>
-          <a:p>
-            <a:r>
-              <a:rPr lang="en-US" altLang="en-US" dirty="0">
-                <a:ea typeface="ＭＳ Ｐゴシック" panose="020B0600070205080204" pitchFamily="34" charset="-128"/>
-              </a:rPr>
-              <a:t>Logging is incredibly important for debugging errors!</a:t>
-            </a:r>
-          </a:p>
-          <a:p>
-            <a:endParaRPr lang="en-US" altLang="en-US" dirty="0">
-              <a:ea typeface="ＭＳ Ｐゴシック" panose="020B0600070205080204" pitchFamily="34" charset="-128"/>
-            </a:endParaRPr>
+              <a:rPr lang="en-US" dirty="0"/>
+              <a:t>Quicker, and more powerful code reviews</a:t>
+            </a:r>
+          </a:p>
+          <a:p>
+            <a:pPr lvl="1"/>
+            <a:r>
+              <a:rPr lang="en-US" dirty="0"/>
+              <a:t>People can spend more time on the internals rather than the structure</a:t>
+            </a:r>
+          </a:p>
+          <a:p>
+            <a:pPr lvl="1"/>
+            <a:endParaRPr lang="en-US" dirty="0"/>
+          </a:p>
+          <a:p>
+            <a:r>
+              <a:rPr lang="en-US" dirty="0"/>
+              <a:t>Consistent code quality</a:t>
+            </a:r>
+          </a:p>
+          <a:p>
+            <a:endParaRPr lang="en-US" dirty="0"/>
+          </a:p>
+          <a:p>
+            <a:r>
+              <a:rPr lang="en-US" dirty="0"/>
+              <a:t>Enforcement of organizational standards</a:t>
+            </a:r>
+          </a:p>
+          <a:p>
+            <a:endParaRPr lang="en-US" dirty="0"/>
+          </a:p>
+          <a:p>
+            <a:r>
+              <a:rPr lang="en-US" dirty="0"/>
+              <a:t>No need to stress about your formatting anymore</a:t>
+            </a:r>
+          </a:p>
+          <a:p>
+            <a:pPr lvl="1"/>
+            <a:r>
+              <a:rPr lang="en-US" dirty="0"/>
+              <a:t>E.g. a misplaced curly brace `{` on line 10,276</a:t>
+            </a:r>
           </a:p>
         </p:txBody>
       </p:sp>
@@ -12826,7 +12842,7 @@
     </p:spTree>
     <p:extLst>
       <p:ext uri="{BB962C8B-B14F-4D97-AF65-F5344CB8AC3E}">
-        <p14:creationId xmlns="" xmlns:p14="http://schemas.microsoft.com/office/powerpoint/2010/main" val="2336250104"/>
+        <p14:creationId xmlns:p14="http://schemas.microsoft.com/office/powerpoint/2010/main" xmlns="" val="2425407270"/>
       </p:ext>
     </p:extLst>
   </p:cSld>
@@ -12896,7 +12912,7 @@
         <p:spPr>
           <a:xfrm>
             <a:off x="640874" y="1168401"/>
-            <a:ext cx="10515600" cy="4399753"/>
+            <a:ext cx="10515600" cy="4966928"/>
           </a:xfrm>
         </p:spPr>
         <p:txBody>
@@ -12909,16 +12925,20 @@
               <a:rPr lang="en-US" altLang="en-US" dirty="0">
                 <a:ea typeface="ＭＳ Ｐゴシック" panose="020B0600070205080204" pitchFamily="34" charset="-128"/>
               </a:rPr>
-              <a:t>These become really important in weakly-typed languages!</a:t>
-            </a:r>
-          </a:p>
-          <a:p>
-            <a:pPr lvl="1"/>
+              <a:t>Errors are internal, exceptions are external</a:t>
+            </a:r>
+          </a:p>
+          <a:p>
+            <a:endParaRPr lang="en-US" altLang="en-US" dirty="0">
+              <a:ea typeface="ＭＳ Ｐゴシック" panose="020B0600070205080204" pitchFamily="34" charset="-128"/>
+            </a:endParaRPr>
+          </a:p>
+          <a:p>
             <a:r>
               <a:rPr lang="en-US" altLang="en-US" dirty="0">
                 <a:ea typeface="ＭＳ Ｐゴシック" panose="020B0600070205080204" pitchFamily="34" charset="-128"/>
               </a:rPr>
-              <a:t>You can pass any type as any parameter in any method</a:t>
+              <a:t>Check and sanitize input before doing anything</a:t>
             </a:r>
           </a:p>
           <a:p>
@@ -12927,8 +12947,45 @@
               <a:rPr lang="en-US" altLang="en-US" dirty="0">
                 <a:ea typeface="ＭＳ Ｐゴシック" panose="020B0600070205080204" pitchFamily="34" charset="-128"/>
               </a:rPr>
-              <a:t>Exceptions will help</a:t>
-            </a:r>
+              <a:t>Setup default values if needed</a:t>
+            </a:r>
+          </a:p>
+          <a:p>
+            <a:pPr lvl="1"/>
+            <a:r>
+              <a:rPr lang="en-US" altLang="en-US" dirty="0">
+                <a:ea typeface="ＭＳ Ｐゴシック" panose="020B0600070205080204" pitchFamily="34" charset="-128"/>
+              </a:rPr>
+              <a:t>Raise exceptions when you can’t set a default value.</a:t>
+            </a:r>
+          </a:p>
+          <a:p>
+            <a:pPr lvl="1"/>
+            <a:endParaRPr lang="en-US" altLang="en-US" dirty="0">
+              <a:ea typeface="ＭＳ Ｐゴシック" panose="020B0600070205080204" pitchFamily="34" charset="-128"/>
+            </a:endParaRPr>
+          </a:p>
+          <a:p>
+            <a:r>
+              <a:rPr lang="en-US" altLang="en-US" dirty="0">
+                <a:ea typeface="ＭＳ Ｐゴシック" panose="020B0600070205080204" pitchFamily="34" charset="-128"/>
+              </a:rPr>
+              <a:t>Put try/catch around crucial pieces of code that can potentially crash your program, not everything.</a:t>
+            </a:r>
+          </a:p>
+          <a:p>
+            <a:pPr lvl="1"/>
+            <a:r>
+              <a:rPr lang="en-US" altLang="en-US" dirty="0">
+                <a:ea typeface="ＭＳ Ｐゴシック" panose="020B0600070205080204" pitchFamily="34" charset="-128"/>
+              </a:rPr>
+              <a:t>These are areas that you have less control over (e.g. making a network request, file manipulations, using source-code from dependencies, running external programs).</a:t>
+            </a:r>
+          </a:p>
+          <a:p>
+            <a:endParaRPr lang="en-US" altLang="en-US" dirty="0">
+              <a:ea typeface="ＭＳ Ｐゴシック" panose="020B0600070205080204" pitchFamily="34" charset="-128"/>
+            </a:endParaRPr>
           </a:p>
           <a:p>
             <a:endParaRPr lang="en-US" altLang="en-US" dirty="0">
@@ -12989,7 +13046,7 @@
     </p:spTree>
     <p:extLst>
       <p:ext uri="{BB962C8B-B14F-4D97-AF65-F5344CB8AC3E}">
-        <p14:creationId xmlns="" xmlns:p14="http://schemas.microsoft.com/office/powerpoint/2010/main" val="51877935"/>
+        <p14:creationId xmlns:p14="http://schemas.microsoft.com/office/powerpoint/2010/main" xmlns="" val="839201425"/>
       </p:ext>
     </p:extLst>
   </p:cSld>
@@ -13059,7 +13116,7 @@
         <p:spPr>
           <a:xfrm>
             <a:off x="640874" y="1168401"/>
-            <a:ext cx="10515600" cy="4399753"/>
+            <a:ext cx="10515600" cy="4966928"/>
           </a:xfrm>
         </p:spPr>
         <p:txBody>
@@ -13072,56 +13129,26 @@
               <a:rPr lang="en-US" altLang="en-US" dirty="0">
                 <a:ea typeface="ＭＳ Ｐゴシック" panose="020B0600070205080204" pitchFamily="34" charset="-128"/>
               </a:rPr>
-              <a:t>Keyboard Interrupts (</a:t>
-            </a:r>
-            <a:r>
-              <a:rPr lang="en-US" altLang="en-US" dirty="0" err="1">
-                <a:ea typeface="ＭＳ Ｐゴシック" panose="020B0600070205080204" pitchFamily="34" charset="-128"/>
-              </a:rPr>
-              <a:t>Ctrl+C</a:t>
-            </a:r>
-            <a:r>
-              <a:rPr lang="en-US" altLang="en-US" dirty="0">
-                <a:ea typeface="ＭＳ Ｐゴシック" panose="020B0600070205080204" pitchFamily="34" charset="-128"/>
-              </a:rPr>
-              <a:t>) </a:t>
-            </a:r>
-          </a:p>
-          <a:p>
-            <a:pPr lvl="1"/>
-            <a:r>
-              <a:rPr lang="en-US" altLang="en-US" dirty="0">
-                <a:ea typeface="ＭＳ Ｐゴシック" panose="020B0600070205080204" pitchFamily="34" charset="-128"/>
-              </a:rPr>
-              <a:t>There are cases where you absolutely want to catch these to prevent data corruption</a:t>
-            </a:r>
-          </a:p>
-          <a:p>
-            <a:pPr lvl="1"/>
+              <a:t>When building large programs, remember where you generate and catch exceptions. Sometimes you maybe duplicating code and some catch code becomes unreachable as you always catch an exception earlier.</a:t>
+            </a:r>
+          </a:p>
+          <a:p>
             <a:endParaRPr lang="en-US" altLang="en-US" dirty="0">
               <a:ea typeface="ＭＳ Ｐゴシック" panose="020B0600070205080204" pitchFamily="34" charset="-128"/>
             </a:endParaRPr>
           </a:p>
           <a:p>
-            <a:pPr lvl="1"/>
             <a:r>
               <a:rPr lang="en-US" altLang="en-US" dirty="0">
                 <a:ea typeface="ＭＳ Ｐゴシック" panose="020B0600070205080204" pitchFamily="34" charset="-128"/>
               </a:rPr>
-              <a:t>In general, don’t catch these or make a routine that handles a special shutdown on (</a:t>
-            </a:r>
-            <a:r>
-              <a:rPr lang="en-US" altLang="en-US" dirty="0" err="1">
-                <a:ea typeface="ＭＳ Ｐゴシック" panose="020B0600070205080204" pitchFamily="34" charset="-128"/>
-              </a:rPr>
-              <a:t>Ctrl+C</a:t>
-            </a:r>
-            <a:r>
-              <a:rPr lang="en-US" altLang="en-US" dirty="0">
-                <a:ea typeface="ＭＳ Ｐゴシック" panose="020B0600070205080204" pitchFamily="34" charset="-128"/>
-              </a:rPr>
-              <a:t>) for critical pieces</a:t>
-            </a:r>
+              <a:t>Logging is incredibly important for debugging errors!</a:t>
+            </a:r>
+          </a:p>
+          <a:p>
+            <a:endParaRPr lang="en-US" altLang="en-US" dirty="0">
+              <a:ea typeface="ＭＳ Ｐゴシック" panose="020B0600070205080204" pitchFamily="34" charset="-128"/>
+            </a:endParaRPr>
           </a:p>
         </p:txBody>
       </p:sp>
@@ -13177,7 +13204,7 @@
     </p:spTree>
     <p:extLst>
       <p:ext uri="{BB962C8B-B14F-4D97-AF65-F5344CB8AC3E}">
-        <p14:creationId xmlns="" xmlns:p14="http://schemas.microsoft.com/office/powerpoint/2010/main" val="739683668"/>
+        <p14:creationId xmlns:p14="http://schemas.microsoft.com/office/powerpoint/2010/main" xmlns="" val="2336250104"/>
       </p:ext>
     </p:extLst>
   </p:cSld>
@@ -13228,7 +13255,7 @@
           <a:p>
             <a:r>
               <a:rPr lang="en-US" dirty="0"/>
-              <a:t>Generics</a:t>
+              <a:t>Key Points for Errors/Exceptions</a:t>
             </a:r>
             <a:endParaRPr lang="en-CA" dirty="0"/>
           </a:p>
@@ -13260,34 +13287,31 @@
               <a:rPr lang="en-US" altLang="en-US" dirty="0">
                 <a:ea typeface="ＭＳ Ｐゴシック" panose="020B0600070205080204" pitchFamily="34" charset="-128"/>
               </a:rPr>
-              <a:t>A way to build classes with arbitrary or unknown types (classes) that may or may not need to define a particular set of methods.</a:t>
+              <a:t>These become really important in weakly-typed languages!</a:t>
+            </a:r>
+          </a:p>
+          <a:p>
+            <a:pPr lvl="1"/>
+            <a:r>
+              <a:rPr lang="en-US" altLang="en-US" dirty="0">
+                <a:ea typeface="ＭＳ Ｐゴシック" panose="020B0600070205080204" pitchFamily="34" charset="-128"/>
+              </a:rPr>
+              <a:t>You can pass any type as any parameter in any method</a:t>
+            </a:r>
+          </a:p>
+          <a:p>
+            <a:pPr lvl="1"/>
+            <a:r>
+              <a:rPr lang="en-US" altLang="en-US" dirty="0">
+                <a:ea typeface="ＭＳ Ｐゴシック" panose="020B0600070205080204" pitchFamily="34" charset="-128"/>
+              </a:rPr>
+              <a:t>Exceptions will help</a:t>
             </a:r>
           </a:p>
           <a:p>
             <a:endParaRPr lang="en-US" altLang="en-US" dirty="0">
               <a:ea typeface="ＭＳ Ｐゴシック" panose="020B0600070205080204" pitchFamily="34" charset="-128"/>
             </a:endParaRPr>
-          </a:p>
-          <a:p>
-            <a:r>
-              <a:rPr lang="en-US" altLang="en-US" dirty="0">
-                <a:ea typeface="ＭＳ Ｐゴシック" panose="020B0600070205080204" pitchFamily="34" charset="-128"/>
-              </a:rPr>
-              <a:t>Useful for building methods that can be used on any type (think the max method which uses the Comparable interface)</a:t>
-            </a:r>
-          </a:p>
-          <a:p>
-            <a:endParaRPr lang="en-US" altLang="en-US" dirty="0">
-              <a:ea typeface="ＭＳ Ｐゴシック" panose="020B0600070205080204" pitchFamily="34" charset="-128"/>
-            </a:endParaRPr>
-          </a:p>
-          <a:p>
-            <a:r>
-              <a:rPr lang="en-US" altLang="en-US" dirty="0">
-                <a:ea typeface="ＭＳ Ｐゴシック" panose="020B0600070205080204" pitchFamily="34" charset="-128"/>
-              </a:rPr>
-              <a:t>Useful for building classes that perform operations on or with a parametrized type (superhero/villain example)</a:t>
-            </a:r>
           </a:p>
         </p:txBody>
       </p:sp>
@@ -13343,7 +13367,7 @@
     </p:spTree>
     <p:extLst>
       <p:ext uri="{BB962C8B-B14F-4D97-AF65-F5344CB8AC3E}">
-        <p14:creationId xmlns="" xmlns:p14="http://schemas.microsoft.com/office/powerpoint/2010/main" val="1261194124"/>
+        <p14:creationId xmlns:p14="http://schemas.microsoft.com/office/powerpoint/2010/main" xmlns="" val="51877935"/>
       </p:ext>
     </p:extLst>
   </p:cSld>
@@ -13387,6 +13411,360 @@
             <p:ph type="title"/>
           </p:nvPr>
         </p:nvSpPr>
+        <p:spPr/>
+        <p:txBody>
+          <a:bodyPr/>
+          <a:lstStyle/>
+          <a:p>
+            <a:r>
+              <a:rPr lang="en-US" dirty="0"/>
+              <a:t>Key Points for Errors/Exceptions</a:t>
+            </a:r>
+            <a:endParaRPr lang="en-CA" dirty="0"/>
+          </a:p>
+        </p:txBody>
+      </p:sp>
+      <p:sp>
+        <p:nvSpPr>
+          <p:cNvPr id="3" name="Content Placeholder 2"/>
+          <p:cNvSpPr>
+            <a:spLocks noGrp="1"/>
+          </p:cNvSpPr>
+          <p:nvPr>
+            <p:ph idx="1"/>
+          </p:nvPr>
+        </p:nvSpPr>
+        <p:spPr>
+          <a:xfrm>
+            <a:off x="640874" y="1168401"/>
+            <a:ext cx="10515600" cy="4399753"/>
+          </a:xfrm>
+        </p:spPr>
+        <p:txBody>
+          <a:bodyPr>
+            <a:normAutofit/>
+          </a:bodyPr>
+          <a:lstStyle/>
+          <a:p>
+            <a:r>
+              <a:rPr lang="en-US" altLang="en-US" dirty="0">
+                <a:ea typeface="ＭＳ Ｐゴシック" panose="020B0600070205080204" pitchFamily="34" charset="-128"/>
+              </a:rPr>
+              <a:t>Keyboard Interrupts (</a:t>
+            </a:r>
+            <a:r>
+              <a:rPr lang="en-US" altLang="en-US" dirty="0" err="1">
+                <a:ea typeface="ＭＳ Ｐゴシック" panose="020B0600070205080204" pitchFamily="34" charset="-128"/>
+              </a:rPr>
+              <a:t>Ctrl+C</a:t>
+            </a:r>
+            <a:r>
+              <a:rPr lang="en-US" altLang="en-US" dirty="0">
+                <a:ea typeface="ＭＳ Ｐゴシック" panose="020B0600070205080204" pitchFamily="34" charset="-128"/>
+              </a:rPr>
+              <a:t>) </a:t>
+            </a:r>
+          </a:p>
+          <a:p>
+            <a:pPr lvl="1"/>
+            <a:r>
+              <a:rPr lang="en-US" altLang="en-US" dirty="0">
+                <a:ea typeface="ＭＳ Ｐゴシック" panose="020B0600070205080204" pitchFamily="34" charset="-128"/>
+              </a:rPr>
+              <a:t>There are cases where you absolutely want to catch these to prevent data corruption</a:t>
+            </a:r>
+          </a:p>
+          <a:p>
+            <a:pPr lvl="1"/>
+            <a:endParaRPr lang="en-US" altLang="en-US" dirty="0">
+              <a:ea typeface="ＭＳ Ｐゴシック" panose="020B0600070205080204" pitchFamily="34" charset="-128"/>
+            </a:endParaRPr>
+          </a:p>
+          <a:p>
+            <a:pPr lvl="1"/>
+            <a:r>
+              <a:rPr lang="en-US" altLang="en-US" dirty="0">
+                <a:ea typeface="ＭＳ Ｐゴシック" panose="020B0600070205080204" pitchFamily="34" charset="-128"/>
+              </a:rPr>
+              <a:t>In general, don’t catch these or make a routine that handles a special shutdown on (</a:t>
+            </a:r>
+            <a:r>
+              <a:rPr lang="en-US" altLang="en-US" dirty="0" err="1">
+                <a:ea typeface="ＭＳ Ｐゴシック" panose="020B0600070205080204" pitchFamily="34" charset="-128"/>
+              </a:rPr>
+              <a:t>Ctrl+C</a:t>
+            </a:r>
+            <a:r>
+              <a:rPr lang="en-US" altLang="en-US" dirty="0">
+                <a:ea typeface="ＭＳ Ｐゴシック" panose="020B0600070205080204" pitchFamily="34" charset="-128"/>
+              </a:rPr>
+              <a:t>) for critical pieces</a:t>
+            </a:r>
+          </a:p>
+        </p:txBody>
+      </p:sp>
+      <p:sp>
+        <p:nvSpPr>
+          <p:cNvPr id="10" name="Footer Placeholder 9"/>
+          <p:cNvSpPr>
+            <a:spLocks noGrp="1"/>
+          </p:cNvSpPr>
+          <p:nvPr>
+            <p:ph type="ftr" sz="quarter" idx="3"/>
+          </p:nvPr>
+        </p:nvSpPr>
+        <p:spPr/>
+        <p:txBody>
+          <a:bodyPr/>
+          <a:lstStyle/>
+          <a:p>
+            <a:r>
+              <a:rPr lang="en-CA" dirty="0"/>
+              <a:t>CS321: Advanced Programming Techniques</a:t>
+            </a:r>
+          </a:p>
+        </p:txBody>
+      </p:sp>
+      <p:sp>
+        <p:nvSpPr>
+          <p:cNvPr id="12" name="Slide Number Placeholder 11"/>
+          <p:cNvSpPr>
+            <a:spLocks noGrp="1"/>
+          </p:cNvSpPr>
+          <p:nvPr>
+            <p:ph type="sldNum" sz="quarter" idx="4"/>
+          </p:nvPr>
+        </p:nvSpPr>
+        <p:spPr/>
+        <p:txBody>
+          <a:bodyPr/>
+          <a:lstStyle/>
+          <a:p>
+            <a:fld id="{5174927E-2439-42C0-9720-7BBCA09BF46F}" type="slidenum">
+              <a:rPr lang="en-CA" smtClean="0"/>
+              <a:pPr/>
+              <a:t>37</a:t>
+            </a:fld>
+            <a:r>
+              <a:rPr lang="en-CA" dirty="0"/>
+              <a:t> </a:t>
+            </a:r>
+          </a:p>
+        </p:txBody>
+      </p:sp>
+    </p:spTree>
+    <p:extLst>
+      <p:ext uri="{BB962C8B-B14F-4D97-AF65-F5344CB8AC3E}">
+        <p14:creationId xmlns:p14="http://schemas.microsoft.com/office/powerpoint/2010/main" xmlns="" val="739683668"/>
+      </p:ext>
+    </p:extLst>
+  </p:cSld>
+  <p:clrMapOvr>
+    <a:masterClrMapping/>
+  </p:clrMapOvr>
+  <p:timing>
+    <p:tnLst>
+      <p:par>
+        <p:cTn id="1" dur="indefinite" restart="never" nodeType="tmRoot"/>
+      </p:par>
+    </p:tnLst>
+  </p:timing>
+</p:sld>
+</file>
+
+<file path=ppt/slides/slide38.xml><?xml version="1.0" encoding="utf-8"?>
+<p:sld xmlns:a="http://schemas.openxmlformats.org/drawingml/2006/main" xmlns:r="http://schemas.openxmlformats.org/officeDocument/2006/relationships" xmlns:p="http://schemas.openxmlformats.org/presentationml/2006/main">
+  <p:cSld>
+    <p:spTree>
+      <p:nvGrpSpPr>
+        <p:cNvPr id="1" name=""/>
+        <p:cNvGrpSpPr/>
+        <p:nvPr/>
+      </p:nvGrpSpPr>
+      <p:grpSpPr>
+        <a:xfrm>
+          <a:off x="0" y="0"/>
+          <a:ext cx="0" cy="0"/>
+          <a:chOff x="0" y="0"/>
+          <a:chExt cx="0" cy="0"/>
+        </a:xfrm>
+      </p:grpSpPr>
+      <p:sp>
+        <p:nvSpPr>
+          <p:cNvPr id="2" name="Title 1"/>
+          <p:cNvSpPr>
+            <a:spLocks noGrp="1"/>
+          </p:cNvSpPr>
+          <p:nvPr>
+            <p:ph type="title"/>
+          </p:nvPr>
+        </p:nvSpPr>
+        <p:spPr/>
+        <p:txBody>
+          <a:bodyPr/>
+          <a:lstStyle/>
+          <a:p>
+            <a:r>
+              <a:rPr lang="en-US" dirty="0"/>
+              <a:t>Generics</a:t>
+            </a:r>
+            <a:endParaRPr lang="en-CA" dirty="0"/>
+          </a:p>
+        </p:txBody>
+      </p:sp>
+      <p:sp>
+        <p:nvSpPr>
+          <p:cNvPr id="3" name="Content Placeholder 2"/>
+          <p:cNvSpPr>
+            <a:spLocks noGrp="1"/>
+          </p:cNvSpPr>
+          <p:nvPr>
+            <p:ph idx="1"/>
+          </p:nvPr>
+        </p:nvSpPr>
+        <p:spPr>
+          <a:xfrm>
+            <a:off x="640874" y="1168401"/>
+            <a:ext cx="10515600" cy="4399753"/>
+          </a:xfrm>
+        </p:spPr>
+        <p:txBody>
+          <a:bodyPr>
+            <a:normAutofit/>
+          </a:bodyPr>
+          <a:lstStyle/>
+          <a:p>
+            <a:r>
+              <a:rPr lang="en-US" altLang="en-US" dirty="0">
+                <a:ea typeface="ＭＳ Ｐゴシック" panose="020B0600070205080204" pitchFamily="34" charset="-128"/>
+              </a:rPr>
+              <a:t>A way to build classes with arbitrary or unknown types (classes) that may or may not need to define a particular set of methods.</a:t>
+            </a:r>
+          </a:p>
+          <a:p>
+            <a:endParaRPr lang="en-US" altLang="en-US" dirty="0">
+              <a:ea typeface="ＭＳ Ｐゴシック" panose="020B0600070205080204" pitchFamily="34" charset="-128"/>
+            </a:endParaRPr>
+          </a:p>
+          <a:p>
+            <a:r>
+              <a:rPr lang="en-US" altLang="en-US" dirty="0">
+                <a:ea typeface="ＭＳ Ｐゴシック" panose="020B0600070205080204" pitchFamily="34" charset="-128"/>
+              </a:rPr>
+              <a:t>Useful for building methods that can be used on any type (think the max method which uses the Comparable interface)</a:t>
+            </a:r>
+          </a:p>
+          <a:p>
+            <a:endParaRPr lang="en-US" altLang="en-US" dirty="0">
+              <a:ea typeface="ＭＳ Ｐゴシック" panose="020B0600070205080204" pitchFamily="34" charset="-128"/>
+            </a:endParaRPr>
+          </a:p>
+          <a:p>
+            <a:r>
+              <a:rPr lang="en-US" altLang="en-US" dirty="0">
+                <a:ea typeface="ＭＳ Ｐゴシック" panose="020B0600070205080204" pitchFamily="34" charset="-128"/>
+              </a:rPr>
+              <a:t>Useful for building classes that perform operations on or with a parametrized type (superhero/villain example)</a:t>
+            </a:r>
+          </a:p>
+        </p:txBody>
+      </p:sp>
+      <p:sp>
+        <p:nvSpPr>
+          <p:cNvPr id="10" name="Footer Placeholder 9"/>
+          <p:cNvSpPr>
+            <a:spLocks noGrp="1"/>
+          </p:cNvSpPr>
+          <p:nvPr>
+            <p:ph type="ftr" sz="quarter" idx="3"/>
+          </p:nvPr>
+        </p:nvSpPr>
+        <p:spPr/>
+        <p:txBody>
+          <a:bodyPr/>
+          <a:lstStyle/>
+          <a:p>
+            <a:r>
+              <a:rPr lang="en-CA" dirty="0"/>
+              <a:t>CS321: Advanced Programming Techniques</a:t>
+            </a:r>
+          </a:p>
+        </p:txBody>
+      </p:sp>
+      <p:sp>
+        <p:nvSpPr>
+          <p:cNvPr id="12" name="Slide Number Placeholder 11"/>
+          <p:cNvSpPr>
+            <a:spLocks noGrp="1"/>
+          </p:cNvSpPr>
+          <p:nvPr>
+            <p:ph type="sldNum" sz="quarter" idx="4"/>
+          </p:nvPr>
+        </p:nvSpPr>
+        <p:spPr/>
+        <p:txBody>
+          <a:bodyPr/>
+          <a:lstStyle/>
+          <a:p>
+            <a:fld id="{5174927E-2439-42C0-9720-7BBCA09BF46F}" type="slidenum">
+              <a:rPr lang="en-CA" smtClean="0"/>
+              <a:pPr/>
+              <a:t>38</a:t>
+            </a:fld>
+            <a:r>
+              <a:rPr lang="en-CA" dirty="0"/>
+              <a:t> </a:t>
+            </a:r>
+          </a:p>
+        </p:txBody>
+      </p:sp>
+    </p:spTree>
+    <p:extLst>
+      <p:ext uri="{BB962C8B-B14F-4D97-AF65-F5344CB8AC3E}">
+        <p14:creationId xmlns:p14="http://schemas.microsoft.com/office/powerpoint/2010/main" xmlns="" val="1261194124"/>
+      </p:ext>
+    </p:extLst>
+  </p:cSld>
+  <p:clrMapOvr>
+    <a:masterClrMapping/>
+  </p:clrMapOvr>
+  <p:timing>
+    <p:tnLst>
+      <p:par>
+        <p:cTn id="1" dur="indefinite" restart="never" nodeType="tmRoot"/>
+      </p:par>
+    </p:tnLst>
+  </p:timing>
+</p:sld>
+</file>
+
+<file path=ppt/slides/slide39.xml><?xml version="1.0" encoding="utf-8"?>
+<p:sld xmlns:a="http://schemas.openxmlformats.org/drawingml/2006/main" xmlns:r="http://schemas.openxmlformats.org/officeDocument/2006/relationships" xmlns:p="http://schemas.openxmlformats.org/presentationml/2006/main">
+  <p:cSld>
+    <p:spTree>
+      <p:nvGrpSpPr>
+        <p:cNvPr id="1" name=""/>
+        <p:cNvGrpSpPr/>
+        <p:nvPr/>
+      </p:nvGrpSpPr>
+      <p:grpSpPr>
+        <a:xfrm>
+          <a:off x="0" y="0"/>
+          <a:ext cx="0" cy="0"/>
+          <a:chOff x="0" y="0"/>
+          <a:chExt cx="0" cy="0"/>
+        </a:xfrm>
+      </p:grpSpPr>
+      <p:sp>
+        <p:nvSpPr>
+          <p:cNvPr id="2" name="Title 1"/>
+          <p:cNvSpPr>
+            <a:spLocks noGrp="1"/>
+          </p:cNvSpPr>
+          <p:nvPr>
+            <p:ph type="title"/>
+          </p:nvPr>
+        </p:nvSpPr>
         <p:spPr>
           <a:xfrm>
             <a:off x="0" y="-157162"/>
@@ -13830,7 +14208,7 @@
             <a:fld id="{5174927E-2439-42C0-9720-7BBCA09BF46F}" type="slidenum">
               <a:rPr lang="en-CA" smtClean="0"/>
               <a:pPr/>
-              <a:t>37</a:t>
+              <a:t>39</a:t>
             </a:fld>
             <a:r>
               <a:rPr lang="en-CA" dirty="0"/>
@@ -13842,7 +14220,7 @@
     </p:spTree>
     <p:extLst>
       <p:ext uri="{BB962C8B-B14F-4D97-AF65-F5344CB8AC3E}">
-        <p14:creationId xmlns="" xmlns:p14="http://schemas.microsoft.com/office/powerpoint/2010/main" val="2928778702"/>
+        <p14:creationId xmlns:p14="http://schemas.microsoft.com/office/powerpoint/2010/main" xmlns="" val="2928778702"/>
       </p:ext>
     </p:extLst>
   </p:cSld>
@@ -13859,7 +14237,7 @@
 </p:sld>
 </file>
 
-<file path=ppt/slides/slide38.xml><?xml version="1.0" encoding="utf-8"?>
+<file path=ppt/slides/slide4.xml><?xml version="1.0" encoding="utf-8"?>
 <p:sld xmlns:a="http://schemas.openxmlformats.org/drawingml/2006/main" xmlns:r="http://schemas.openxmlformats.org/officeDocument/2006/relationships" xmlns:p="http://schemas.openxmlformats.org/presentationml/2006/main">
   <p:cSld>
     <p:spTree>
@@ -13886,6 +14264,180 @@
             <p:ph type="title"/>
           </p:nvPr>
         </p:nvSpPr>
+        <p:spPr/>
+        <p:txBody>
+          <a:bodyPr/>
+          <a:lstStyle/>
+          <a:p>
+            <a:r>
+              <a:rPr lang="en-US" dirty="0"/>
+              <a:t>Basics</a:t>
+            </a:r>
+            <a:endParaRPr lang="en-CA" dirty="0"/>
+          </a:p>
+        </p:txBody>
+      </p:sp>
+      <p:sp>
+        <p:nvSpPr>
+          <p:cNvPr id="3" name="Content Placeholder 2"/>
+          <p:cNvSpPr>
+            <a:spLocks noGrp="1"/>
+          </p:cNvSpPr>
+          <p:nvPr>
+            <p:ph idx="1"/>
+          </p:nvPr>
+        </p:nvSpPr>
+        <p:spPr>
+          <a:xfrm>
+            <a:off x="640874" y="1168401"/>
+            <a:ext cx="10515600" cy="4399753"/>
+          </a:xfrm>
+        </p:spPr>
+        <p:txBody>
+          <a:bodyPr>
+            <a:normAutofit/>
+          </a:bodyPr>
+          <a:lstStyle/>
+          <a:p>
+            <a:r>
+              <a:rPr lang="en-US" altLang="en-US" dirty="0">
+                <a:ea typeface="ＭＳ Ｐゴシック" panose="020B0600070205080204" pitchFamily="34" charset="-128"/>
+              </a:rPr>
+              <a:t>DON’T make a while loop that has the potential to run infinitely</a:t>
+            </a:r>
+          </a:p>
+          <a:p>
+            <a:endParaRPr lang="en-US" altLang="en-US" dirty="0">
+              <a:ea typeface="ＭＳ Ｐゴシック" panose="020B0600070205080204" pitchFamily="34" charset="-128"/>
+            </a:endParaRPr>
+          </a:p>
+          <a:p>
+            <a:r>
+              <a:rPr lang="en-US" altLang="en-US" dirty="0">
+                <a:ea typeface="ＭＳ Ｐゴシック" panose="020B0600070205080204" pitchFamily="34" charset="-128"/>
+              </a:rPr>
+              <a:t>Always have a timeout on your while loops when their ending is ambiguous</a:t>
+            </a:r>
+          </a:p>
+          <a:p>
+            <a:endParaRPr lang="en-US" altLang="en-US" dirty="0">
+              <a:ea typeface="ＭＳ Ｐゴシック" panose="020B0600070205080204" pitchFamily="34" charset="-128"/>
+            </a:endParaRPr>
+          </a:p>
+          <a:p>
+            <a:r>
+              <a:rPr lang="en-US" altLang="en-US" dirty="0">
+                <a:ea typeface="ＭＳ Ｐゴシック" panose="020B0600070205080204" pitchFamily="34" charset="-128"/>
+              </a:rPr>
+              <a:t>Overusing if/switch statements is a sign of bad programming</a:t>
+            </a:r>
+          </a:p>
+          <a:p>
+            <a:pPr marL="0" indent="0">
+              <a:buNone/>
+            </a:pPr>
+            <a:endParaRPr lang="en-US" altLang="en-US" dirty="0">
+              <a:ea typeface="ＭＳ Ｐゴシック" panose="020B0600070205080204" pitchFamily="34" charset="-128"/>
+            </a:endParaRPr>
+          </a:p>
+        </p:txBody>
+      </p:sp>
+      <p:sp>
+        <p:nvSpPr>
+          <p:cNvPr id="10" name="Footer Placeholder 9"/>
+          <p:cNvSpPr>
+            <a:spLocks noGrp="1"/>
+          </p:cNvSpPr>
+          <p:nvPr>
+            <p:ph type="ftr" sz="quarter" idx="3"/>
+          </p:nvPr>
+        </p:nvSpPr>
+        <p:spPr/>
+        <p:txBody>
+          <a:bodyPr/>
+          <a:lstStyle/>
+          <a:p>
+            <a:r>
+              <a:rPr lang="en-CA" dirty="0"/>
+              <a:t>CS321: Advanced Programming Techniques</a:t>
+            </a:r>
+          </a:p>
+        </p:txBody>
+      </p:sp>
+      <p:sp>
+        <p:nvSpPr>
+          <p:cNvPr id="12" name="Slide Number Placeholder 11"/>
+          <p:cNvSpPr>
+            <a:spLocks noGrp="1"/>
+          </p:cNvSpPr>
+          <p:nvPr>
+            <p:ph type="sldNum" sz="quarter" idx="4"/>
+          </p:nvPr>
+        </p:nvSpPr>
+        <p:spPr/>
+        <p:txBody>
+          <a:bodyPr/>
+          <a:lstStyle/>
+          <a:p>
+            <a:fld id="{5174927E-2439-42C0-9720-7BBCA09BF46F}" type="slidenum">
+              <a:rPr lang="en-CA" smtClean="0"/>
+              <a:pPr/>
+              <a:t>4</a:t>
+            </a:fld>
+            <a:r>
+              <a:rPr lang="en-CA" dirty="0"/>
+              <a:t> </a:t>
+            </a:r>
+          </a:p>
+        </p:txBody>
+      </p:sp>
+    </p:spTree>
+    <p:extLst>
+      <p:ext uri="{BB962C8B-B14F-4D97-AF65-F5344CB8AC3E}">
+        <p14:creationId xmlns:p14="http://schemas.microsoft.com/office/powerpoint/2010/main" xmlns="" val="224240828"/>
+      </p:ext>
+    </p:extLst>
+  </p:cSld>
+  <p:clrMapOvr>
+    <a:masterClrMapping/>
+  </p:clrMapOvr>
+  <p:timing>
+    <p:tnLst>
+      <p:par>
+        <p:cTn id="1" dur="indefinite" restart="never" nodeType="tmRoot"/>
+      </p:par>
+    </p:tnLst>
+  </p:timing>
+</p:sld>
+</file>
+
+<file path=ppt/slides/slide40.xml><?xml version="1.0" encoding="utf-8"?>
+<p:sld xmlns:a="http://schemas.openxmlformats.org/drawingml/2006/main" xmlns:r="http://schemas.openxmlformats.org/officeDocument/2006/relationships" xmlns:p="http://schemas.openxmlformats.org/presentationml/2006/main">
+  <p:cSld>
+    <p:spTree>
+      <p:nvGrpSpPr>
+        <p:cNvPr id="1" name=""/>
+        <p:cNvGrpSpPr/>
+        <p:nvPr/>
+      </p:nvGrpSpPr>
+      <p:grpSpPr>
+        <a:xfrm>
+          <a:off x="0" y="0"/>
+          <a:ext cx="0" cy="0"/>
+          <a:chOff x="0" y="0"/>
+          <a:chExt cx="0" cy="0"/>
+        </a:xfrm>
+      </p:grpSpPr>
+      <p:sp>
+        <p:nvSpPr>
+          <p:cNvPr id="2" name="Title 1"/>
+          <p:cNvSpPr>
+            <a:spLocks noGrp="1"/>
+          </p:cNvSpPr>
+          <p:nvPr>
+            <p:ph type="title"/>
+          </p:nvPr>
+        </p:nvSpPr>
         <p:spPr>
           <a:xfrm>
             <a:off x="0" y="-157162"/>
@@ -13942,7 +14494,7 @@
             <a:fld id="{5174927E-2439-42C0-9720-7BBCA09BF46F}" type="slidenum">
               <a:rPr lang="en-CA" smtClean="0"/>
               <a:pPr/>
-              <a:t>38</a:t>
+              <a:t>40</a:t>
             </a:fld>
             <a:r>
               <a:rPr lang="en-CA" dirty="0"/>
@@ -13956,7 +14508,7 @@
           <p:cNvPr id="3" name="Content Placeholder 2">
             <a:extLst>
               <a:ext uri="{FF2B5EF4-FFF2-40B4-BE49-F238E27FC236}">
-                <a16:creationId xmlns="" xmlns:a16="http://schemas.microsoft.com/office/drawing/2014/main" id="{02D9390E-2D69-457A-8A63-8012338D7B7D}"/>
+                <a16:creationId xmlns:a16="http://schemas.microsoft.com/office/drawing/2014/main" xmlns="" id="{02D9390E-2D69-457A-8A63-8012338D7B7D}"/>
               </a:ext>
             </a:extLst>
           </p:cNvPr>
@@ -13987,7 +14539,7 @@
           <p:cNvPr id="7" name="Rectangle 3">
             <a:extLst>
               <a:ext uri="{FF2B5EF4-FFF2-40B4-BE49-F238E27FC236}">
-                <a16:creationId xmlns="" xmlns:a16="http://schemas.microsoft.com/office/drawing/2014/main" id="{FA306D2D-5583-40F8-B92D-FC2433F89369}"/>
+                <a16:creationId xmlns:a16="http://schemas.microsoft.com/office/drawing/2014/main" xmlns="" id="{FA306D2D-5583-40F8-B92D-FC2433F89369}"/>
               </a:ext>
             </a:extLst>
           </p:cNvPr>
@@ -14010,14 +14562,14 @@
           </a:ln>
           <a:extLst>
             <a:ext uri="{909E8E84-426E-40DD-AFC4-6F175D3DCCD1}">
-              <a14:hiddenFill xmlns="" xmlns:a14="http://schemas.microsoft.com/office/drawing/2010/main">
+              <a14:hiddenFill xmlns:a14="http://schemas.microsoft.com/office/drawing/2010/main" xmlns="">
                 <a:solidFill>
                   <a:srgbClr val="FFFFFF"/>
                 </a:solidFill>
               </a14:hiddenFill>
             </a:ext>
             <a:ext uri="{91240B29-F687-4F45-9708-019B960494DF}">
-              <a14:hiddenLine xmlns="" xmlns:a14="http://schemas.microsoft.com/office/drawing/2010/main" w="9525">
+              <a14:hiddenLine xmlns:a14="http://schemas.microsoft.com/office/drawing/2010/main" xmlns="" w="9525">
                 <a:solidFill>
                   <a:srgbClr val="000000"/>
                 </a:solidFill>
@@ -14847,7 +15399,7 @@
           <p:cNvPr id="8" name="Rectangle 4">
             <a:extLst>
               <a:ext uri="{FF2B5EF4-FFF2-40B4-BE49-F238E27FC236}">
-                <a16:creationId xmlns="" xmlns:a16="http://schemas.microsoft.com/office/drawing/2014/main" id="{5AC9BB54-4D92-4420-9C28-A540F9048C51}"/>
+                <a16:creationId xmlns:a16="http://schemas.microsoft.com/office/drawing/2014/main" xmlns="" id="{5AC9BB54-4D92-4420-9C28-A540F9048C51}"/>
               </a:ext>
             </a:extLst>
           </p:cNvPr>
@@ -14875,7 +15427,7 @@
           </a:ln>
           <a:extLst>
             <a:ext uri="{909E8E84-426E-40DD-AFC4-6F175D3DCCD1}">
-              <a14:hiddenFill xmlns="" xmlns:a14="http://schemas.microsoft.com/office/drawing/2010/main">
+              <a14:hiddenFill xmlns:a14="http://schemas.microsoft.com/office/drawing/2010/main" xmlns="">
                 <a:solidFill>
                   <a:srgbClr val="FFFFFF"/>
                 </a:solidFill>
@@ -15080,7 +15632,7 @@
     </p:spTree>
     <p:extLst>
       <p:ext uri="{BB962C8B-B14F-4D97-AF65-F5344CB8AC3E}">
-        <p14:creationId xmlns="" xmlns:p14="http://schemas.microsoft.com/office/powerpoint/2010/main" val="3326900570"/>
+        <p14:creationId xmlns:p14="http://schemas.microsoft.com/office/powerpoint/2010/main" xmlns="" val="3326900570"/>
       </p:ext>
     </p:extLst>
   </p:cSld>
@@ -15097,7 +15649,7 @@
 </p:sld>
 </file>
 
-<file path=ppt/slides/slide39.xml><?xml version="1.0" encoding="utf-8"?>
+<file path=ppt/slides/slide41.xml><?xml version="1.0" encoding="utf-8"?>
 <p:sld xmlns:a="http://schemas.openxmlformats.org/drawingml/2006/main" xmlns:r="http://schemas.openxmlformats.org/officeDocument/2006/relationships" xmlns:p="http://schemas.openxmlformats.org/presentationml/2006/main">
   <p:cSld>
     <p:spTree>
@@ -15180,7 +15732,7 @@
             <a:fld id="{5174927E-2439-42C0-9720-7BBCA09BF46F}" type="slidenum">
               <a:rPr lang="en-CA" smtClean="0"/>
               <a:pPr/>
-              <a:t>39</a:t>
+              <a:t>41</a:t>
             </a:fld>
             <a:r>
               <a:rPr lang="en-CA" dirty="0"/>
@@ -15194,7 +15746,7 @@
           <p:cNvPr id="3" name="Content Placeholder 2">
             <a:extLst>
               <a:ext uri="{FF2B5EF4-FFF2-40B4-BE49-F238E27FC236}">
-                <a16:creationId xmlns="" xmlns:a16="http://schemas.microsoft.com/office/drawing/2014/main" id="{02D9390E-2D69-457A-8A63-8012338D7B7D}"/>
+                <a16:creationId xmlns:a16="http://schemas.microsoft.com/office/drawing/2014/main" xmlns="" id="{02D9390E-2D69-457A-8A63-8012338D7B7D}"/>
               </a:ext>
             </a:extLst>
           </p:cNvPr>
@@ -15225,7 +15777,7 @@
           <p:cNvPr id="7" name="Rectangle 3">
             <a:extLst>
               <a:ext uri="{FF2B5EF4-FFF2-40B4-BE49-F238E27FC236}">
-                <a16:creationId xmlns="" xmlns:a16="http://schemas.microsoft.com/office/drawing/2014/main" id="{03CC276D-5B37-4716-AE20-1AA4B3D1DC58}"/>
+                <a16:creationId xmlns:a16="http://schemas.microsoft.com/office/drawing/2014/main" xmlns="" id="{03CC276D-5B37-4716-AE20-1AA4B3D1DC58}"/>
               </a:ext>
             </a:extLst>
           </p:cNvPr>
@@ -15248,14 +15800,14 @@
           </a:ln>
           <a:extLst>
             <a:ext uri="{909E8E84-426E-40DD-AFC4-6F175D3DCCD1}">
-              <a14:hiddenFill xmlns="" xmlns:a14="http://schemas.microsoft.com/office/drawing/2010/main">
+              <a14:hiddenFill xmlns:a14="http://schemas.microsoft.com/office/drawing/2010/main" xmlns="">
                 <a:solidFill>
                   <a:srgbClr val="FFFFFF"/>
                 </a:solidFill>
               </a14:hiddenFill>
             </a:ext>
             <a:ext uri="{91240B29-F687-4F45-9708-019B960494DF}">
-              <a14:hiddenLine xmlns="" xmlns:a14="http://schemas.microsoft.com/office/drawing/2010/main" w="9525">
+              <a14:hiddenLine xmlns:a14="http://schemas.microsoft.com/office/drawing/2010/main" xmlns="" w="9525">
                 <a:solidFill>
                   <a:srgbClr val="000000"/>
                 </a:solidFill>
@@ -16165,7 +16717,7 @@
           <p:cNvPr id="8" name="Rectangle 4">
             <a:extLst>
               <a:ext uri="{FF2B5EF4-FFF2-40B4-BE49-F238E27FC236}">
-                <a16:creationId xmlns="" xmlns:a16="http://schemas.microsoft.com/office/drawing/2014/main" id="{22C667BB-BE1A-4E42-9202-F22A6A773D4C}"/>
+                <a16:creationId xmlns:a16="http://schemas.microsoft.com/office/drawing/2014/main" xmlns="" id="{22C667BB-BE1A-4E42-9202-F22A6A773D4C}"/>
               </a:ext>
             </a:extLst>
           </p:cNvPr>
@@ -16193,7 +16745,7 @@
           </a:ln>
           <a:extLst>
             <a:ext uri="{909E8E84-426E-40DD-AFC4-6F175D3DCCD1}">
-              <a14:hiddenFill xmlns="" xmlns:a14="http://schemas.microsoft.com/office/drawing/2010/main">
+              <a14:hiddenFill xmlns:a14="http://schemas.microsoft.com/office/drawing/2010/main" xmlns="">
                 <a:solidFill>
                   <a:srgbClr val="FFFFFF"/>
                 </a:solidFill>
@@ -16400,7 +16952,7 @@
           <p:cNvPr id="9" name="Rectangle 5">
             <a:extLst>
               <a:ext uri="{FF2B5EF4-FFF2-40B4-BE49-F238E27FC236}">
-                <a16:creationId xmlns="" xmlns:a16="http://schemas.microsoft.com/office/drawing/2014/main" id="{26416BC4-D089-4138-8185-34999288BB74}"/>
+                <a16:creationId xmlns:a16="http://schemas.microsoft.com/office/drawing/2014/main" xmlns="" id="{26416BC4-D089-4138-8185-34999288BB74}"/>
               </a:ext>
             </a:extLst>
           </p:cNvPr>
@@ -16629,7 +17181,7 @@
           <p:cNvPr id="11" name="AutoShape 6">
             <a:extLst>
               <a:ext uri="{FF2B5EF4-FFF2-40B4-BE49-F238E27FC236}">
-                <a16:creationId xmlns="" xmlns:a16="http://schemas.microsoft.com/office/drawing/2014/main" id="{ADBF95C5-E277-4203-9C8D-C04057A6329D}"/>
+                <a16:creationId xmlns:a16="http://schemas.microsoft.com/office/drawing/2014/main" xmlns="" id="{ADBF95C5-E277-4203-9C8D-C04057A6329D}"/>
               </a:ext>
             </a:extLst>
           </p:cNvPr>
@@ -16858,181 +17410,7 @@
     </p:spTree>
     <p:extLst>
       <p:ext uri="{BB962C8B-B14F-4D97-AF65-F5344CB8AC3E}">
-        <p14:creationId xmlns="" xmlns:p14="http://schemas.microsoft.com/office/powerpoint/2010/main" val="151665903"/>
-      </p:ext>
-    </p:extLst>
-  </p:cSld>
-  <p:clrMapOvr>
-    <a:masterClrMapping/>
-  </p:clrMapOvr>
-  <p:timing>
-    <p:tnLst>
-      <p:par>
-        <p:cTn id="1" dur="indefinite" restart="never" nodeType="tmRoot"/>
-      </p:par>
-    </p:tnLst>
-  </p:timing>
-</p:sld>
-</file>
-
-<file path=ppt/slides/slide4.xml><?xml version="1.0" encoding="utf-8"?>
-<p:sld xmlns:a="http://schemas.openxmlformats.org/drawingml/2006/main" xmlns:r="http://schemas.openxmlformats.org/officeDocument/2006/relationships" xmlns:p="http://schemas.openxmlformats.org/presentationml/2006/main">
-  <p:cSld>
-    <p:spTree>
-      <p:nvGrpSpPr>
-        <p:cNvPr id="1" name=""/>
-        <p:cNvGrpSpPr/>
-        <p:nvPr/>
-      </p:nvGrpSpPr>
-      <p:grpSpPr>
-        <a:xfrm>
-          <a:off x="0" y="0"/>
-          <a:ext cx="0" cy="0"/>
-          <a:chOff x="0" y="0"/>
-          <a:chExt cx="0" cy="0"/>
-        </a:xfrm>
-      </p:grpSpPr>
-      <p:sp>
-        <p:nvSpPr>
-          <p:cNvPr id="2" name="Title 1"/>
-          <p:cNvSpPr>
-            <a:spLocks noGrp="1"/>
-          </p:cNvSpPr>
-          <p:nvPr>
-            <p:ph type="title"/>
-          </p:nvPr>
-        </p:nvSpPr>
-        <p:spPr/>
-        <p:txBody>
-          <a:bodyPr/>
-          <a:lstStyle/>
-          <a:p>
-            <a:r>
-              <a:rPr lang="en-US" dirty="0"/>
-              <a:t>Basics</a:t>
-            </a:r>
-            <a:endParaRPr lang="en-CA" dirty="0"/>
-          </a:p>
-        </p:txBody>
-      </p:sp>
-      <p:sp>
-        <p:nvSpPr>
-          <p:cNvPr id="3" name="Content Placeholder 2"/>
-          <p:cNvSpPr>
-            <a:spLocks noGrp="1"/>
-          </p:cNvSpPr>
-          <p:nvPr>
-            <p:ph idx="1"/>
-          </p:nvPr>
-        </p:nvSpPr>
-        <p:spPr>
-          <a:xfrm>
-            <a:off x="640874" y="1168401"/>
-            <a:ext cx="10515600" cy="4399753"/>
-          </a:xfrm>
-        </p:spPr>
-        <p:txBody>
-          <a:bodyPr>
-            <a:normAutofit/>
-          </a:bodyPr>
-          <a:lstStyle/>
-          <a:p>
-            <a:r>
-              <a:rPr lang="en-US" altLang="en-US" dirty="0">
-                <a:ea typeface="ＭＳ Ｐゴシック" panose="020B0600070205080204" pitchFamily="34" charset="-128"/>
-              </a:rPr>
-              <a:t>DON’T make a while loop that has the potential to run infinitely</a:t>
-            </a:r>
-          </a:p>
-          <a:p>
-            <a:endParaRPr lang="en-US" altLang="en-US" dirty="0">
-              <a:ea typeface="ＭＳ Ｐゴシック" panose="020B0600070205080204" pitchFamily="34" charset="-128"/>
-            </a:endParaRPr>
-          </a:p>
-          <a:p>
-            <a:r>
-              <a:rPr lang="en-US" altLang="en-US" dirty="0">
-                <a:ea typeface="ＭＳ Ｐゴシック" panose="020B0600070205080204" pitchFamily="34" charset="-128"/>
-              </a:rPr>
-              <a:t>Always have a timeout on your while loops when their ending is ambiguous</a:t>
-            </a:r>
-          </a:p>
-          <a:p>
-            <a:endParaRPr lang="en-US" altLang="en-US" dirty="0">
-              <a:ea typeface="ＭＳ Ｐゴシック" panose="020B0600070205080204" pitchFamily="34" charset="-128"/>
-            </a:endParaRPr>
-          </a:p>
-          <a:p>
-            <a:r>
-              <a:rPr lang="en-US" altLang="en-US" dirty="0">
-                <a:ea typeface="ＭＳ Ｐゴシック" panose="020B0600070205080204" pitchFamily="34" charset="-128"/>
-              </a:rPr>
-              <a:t>Overusing if/switch statements is a sign of bad programming</a:t>
-            </a:r>
-          </a:p>
-          <a:p>
-            <a:pPr marL="0" indent="0">
-              <a:buNone/>
-            </a:pPr>
-            <a:endParaRPr lang="en-US" altLang="en-US" dirty="0">
-              <a:ea typeface="ＭＳ Ｐゴシック" panose="020B0600070205080204" pitchFamily="34" charset="-128"/>
-            </a:endParaRPr>
-          </a:p>
-        </p:txBody>
-      </p:sp>
-      <p:sp>
-        <p:nvSpPr>
-          <p:cNvPr id="10" name="Footer Placeholder 9"/>
-          <p:cNvSpPr>
-            <a:spLocks noGrp="1"/>
-          </p:cNvSpPr>
-          <p:nvPr>
-            <p:ph type="ftr" sz="quarter" idx="3"/>
-          </p:nvPr>
-        </p:nvSpPr>
-        <p:spPr/>
-        <p:txBody>
-          <a:bodyPr/>
-          <a:lstStyle/>
-          <a:p>
-            <a:r>
-              <a:rPr lang="en-CA" dirty="0"/>
-              <a:t>CS321: Advanced Programming Techniques</a:t>
-            </a:r>
-          </a:p>
-        </p:txBody>
-      </p:sp>
-      <p:sp>
-        <p:nvSpPr>
-          <p:cNvPr id="12" name="Slide Number Placeholder 11"/>
-          <p:cNvSpPr>
-            <a:spLocks noGrp="1"/>
-          </p:cNvSpPr>
-          <p:nvPr>
-            <p:ph type="sldNum" sz="quarter" idx="4"/>
-          </p:nvPr>
-        </p:nvSpPr>
-        <p:spPr/>
-        <p:txBody>
-          <a:bodyPr/>
-          <a:lstStyle/>
-          <a:p>
-            <a:fld id="{5174927E-2439-42C0-9720-7BBCA09BF46F}" type="slidenum">
-              <a:rPr lang="en-CA" smtClean="0"/>
-              <a:pPr/>
-              <a:t>4</a:t>
-            </a:fld>
-            <a:r>
-              <a:rPr lang="en-CA" dirty="0"/>
-              <a:t> </a:t>
-            </a:r>
-          </a:p>
-        </p:txBody>
-      </p:sp>
-    </p:spTree>
-    <p:extLst>
-      <p:ext uri="{BB962C8B-B14F-4D97-AF65-F5344CB8AC3E}">
-        <p14:creationId xmlns="" xmlns:p14="http://schemas.microsoft.com/office/powerpoint/2010/main" val="224240828"/>
+        <p14:creationId xmlns:p14="http://schemas.microsoft.com/office/powerpoint/2010/main" xmlns="" val="151665903"/>
       </p:ext>
     </p:extLst>
   </p:cSld>
@@ -17241,7 +17619,7 @@
     </p:spTree>
     <p:extLst>
       <p:ext uri="{BB962C8B-B14F-4D97-AF65-F5344CB8AC3E}">
-        <p14:creationId xmlns="" xmlns:p14="http://schemas.microsoft.com/office/powerpoint/2010/main" val="599512483"/>
+        <p14:creationId xmlns:p14="http://schemas.microsoft.com/office/powerpoint/2010/main" xmlns="" val="599512483"/>
       </p:ext>
     </p:extLst>
   </p:cSld>
@@ -17412,7 +17790,7 @@
     </p:spTree>
     <p:extLst>
       <p:ext uri="{BB962C8B-B14F-4D97-AF65-F5344CB8AC3E}">
-        <p14:creationId xmlns="" xmlns:p14="http://schemas.microsoft.com/office/powerpoint/2010/main" val="1244983263"/>
+        <p14:creationId xmlns:p14="http://schemas.microsoft.com/office/powerpoint/2010/main" xmlns="" val="1244983263"/>
       </p:ext>
     </p:extLst>
   </p:cSld>
@@ -17583,7 +17961,7 @@
     </p:spTree>
     <p:extLst>
       <p:ext uri="{BB962C8B-B14F-4D97-AF65-F5344CB8AC3E}">
-        <p14:creationId xmlns="" xmlns:p14="http://schemas.microsoft.com/office/powerpoint/2010/main" val="1819476712"/>
+        <p14:creationId xmlns:p14="http://schemas.microsoft.com/office/powerpoint/2010/main" xmlns="" val="1819476712"/>
       </p:ext>
     </p:extLst>
   </p:cSld>
@@ -17725,7 +18103,7 @@
           <p:cNvPr id="5" name="Picture 4">
             <a:extLst>
               <a:ext uri="{FF2B5EF4-FFF2-40B4-BE49-F238E27FC236}">
-                <a16:creationId xmlns="" xmlns:a16="http://schemas.microsoft.com/office/drawing/2014/main" id="{803B4936-45A2-413F-AB8F-8C23C7A392C9}"/>
+                <a16:creationId xmlns:a16="http://schemas.microsoft.com/office/drawing/2014/main" xmlns="" id="{803B4936-45A2-413F-AB8F-8C23C7A392C9}"/>
               </a:ext>
             </a:extLst>
           </p:cNvPr>
@@ -17738,10 +18116,10 @@
           <a:blip r:embed="rId2" cstate="print">
             <a:extLst>
               <a:ext uri="{28A0092B-C50C-407E-A947-70E740481C1C}">
-                <a14:useLocalDpi xmlns="" xmlns:a14="http://schemas.microsoft.com/office/drawing/2010/main" val="0"/>
+                <a14:useLocalDpi xmlns:a14="http://schemas.microsoft.com/office/drawing/2010/main" xmlns="" val="0"/>
               </a:ext>
               <a:ext uri="{837473B0-CC2E-450A-ABE3-18F120FF3D39}">
-                <a1611:picAttrSrcUrl xmlns="" xmlns:a1611="http://schemas.microsoft.com/office/drawing/2016/11/main" r:id="rId3"/>
+                <a1611:picAttrSrcUrl xmlns:a1611="http://schemas.microsoft.com/office/drawing/2016/11/main" xmlns="" r:id="rId3"/>
               </a:ext>
             </a:extLst>
           </a:blip>
@@ -17764,7 +18142,7 @@
           <p:cNvPr id="13" name="Picture 12">
             <a:extLst>
               <a:ext uri="{FF2B5EF4-FFF2-40B4-BE49-F238E27FC236}">
-                <a16:creationId xmlns="" xmlns:a16="http://schemas.microsoft.com/office/drawing/2014/main" id="{27FEF2F8-9EEA-48B5-B21F-E3999BCF99AB}"/>
+                <a16:creationId xmlns:a16="http://schemas.microsoft.com/office/drawing/2014/main" xmlns="" id="{27FEF2F8-9EEA-48B5-B21F-E3999BCF99AB}"/>
               </a:ext>
             </a:extLst>
           </p:cNvPr>
@@ -17777,10 +18155,10 @@
           <a:blip r:embed="rId4" cstate="print">
             <a:extLst>
               <a:ext uri="{28A0092B-C50C-407E-A947-70E740481C1C}">
-                <a14:useLocalDpi xmlns="" xmlns:a14="http://schemas.microsoft.com/office/drawing/2010/main" val="0"/>
+                <a14:useLocalDpi xmlns:a14="http://schemas.microsoft.com/office/drawing/2010/main" xmlns="" val="0"/>
               </a:ext>
               <a:ext uri="{837473B0-CC2E-450A-ABE3-18F120FF3D39}">
-                <a1611:picAttrSrcUrl xmlns="" xmlns:a1611="http://schemas.microsoft.com/office/drawing/2016/11/main" r:id="rId5"/>
+                <a1611:picAttrSrcUrl xmlns:a1611="http://schemas.microsoft.com/office/drawing/2016/11/main" xmlns="" r:id="rId5"/>
               </a:ext>
             </a:extLst>
           </a:blip>
@@ -17803,7 +18181,7 @@
           <p:cNvPr id="15" name="Picture 14">
             <a:extLst>
               <a:ext uri="{FF2B5EF4-FFF2-40B4-BE49-F238E27FC236}">
-                <a16:creationId xmlns="" xmlns:a16="http://schemas.microsoft.com/office/drawing/2014/main" id="{61C04142-3366-49EB-9FEC-88FF5368D17D}"/>
+                <a16:creationId xmlns:a16="http://schemas.microsoft.com/office/drawing/2014/main" xmlns="" id="{61C04142-3366-49EB-9FEC-88FF5368D17D}"/>
               </a:ext>
             </a:extLst>
           </p:cNvPr>
@@ -17816,10 +18194,10 @@
           <a:blip r:embed="rId6" cstate="print">
             <a:extLst>
               <a:ext uri="{28A0092B-C50C-407E-A947-70E740481C1C}">
-                <a14:useLocalDpi xmlns="" xmlns:a14="http://schemas.microsoft.com/office/drawing/2010/main" val="0"/>
+                <a14:useLocalDpi xmlns:a14="http://schemas.microsoft.com/office/drawing/2010/main" xmlns="" val="0"/>
               </a:ext>
               <a:ext uri="{837473B0-CC2E-450A-ABE3-18F120FF3D39}">
-                <a1611:picAttrSrcUrl xmlns="" xmlns:a1611="http://schemas.microsoft.com/office/drawing/2016/11/main" r:id="rId7"/>
+                <a1611:picAttrSrcUrl xmlns:a1611="http://schemas.microsoft.com/office/drawing/2016/11/main" xmlns="" r:id="rId7"/>
               </a:ext>
             </a:extLst>
           </a:blip>
@@ -17840,7 +18218,7 @@
     </p:spTree>
     <p:extLst>
       <p:ext uri="{BB962C8B-B14F-4D97-AF65-F5344CB8AC3E}">
-        <p14:creationId xmlns="" xmlns:p14="http://schemas.microsoft.com/office/powerpoint/2010/main" val="793235412"/>
+        <p14:creationId xmlns:p14="http://schemas.microsoft.com/office/powerpoint/2010/main" xmlns="" val="793235412"/>
       </p:ext>
     </p:extLst>
   </p:cSld>
@@ -17982,7 +18360,7 @@
           <p:cNvPr id="15" name="Picture 14">
             <a:extLst>
               <a:ext uri="{FF2B5EF4-FFF2-40B4-BE49-F238E27FC236}">
-                <a16:creationId xmlns="" xmlns:a16="http://schemas.microsoft.com/office/drawing/2014/main" id="{61C04142-3366-49EB-9FEC-88FF5368D17D}"/>
+                <a16:creationId xmlns:a16="http://schemas.microsoft.com/office/drawing/2014/main" xmlns="" id="{61C04142-3366-49EB-9FEC-88FF5368D17D}"/>
               </a:ext>
             </a:extLst>
           </p:cNvPr>
@@ -17995,10 +18373,10 @@
           <a:blip r:embed="rId2" cstate="print">
             <a:extLst>
               <a:ext uri="{28A0092B-C50C-407E-A947-70E740481C1C}">
-                <a14:useLocalDpi xmlns="" xmlns:a14="http://schemas.microsoft.com/office/drawing/2010/main" val="0"/>
+                <a14:useLocalDpi xmlns:a14="http://schemas.microsoft.com/office/drawing/2010/main" xmlns="" val="0"/>
               </a:ext>
               <a:ext uri="{837473B0-CC2E-450A-ABE3-18F120FF3D39}">
-                <a1611:picAttrSrcUrl xmlns="" xmlns:a1611="http://schemas.microsoft.com/office/drawing/2016/11/main" r:id="rId3"/>
+                <a1611:picAttrSrcUrl xmlns:a1611="http://schemas.microsoft.com/office/drawing/2016/11/main" xmlns="" r:id="rId3"/>
               </a:ext>
             </a:extLst>
           </a:blip>
@@ -18021,7 +18399,7 @@
           <p:cNvPr id="4" name="TextBox 3">
             <a:extLst>
               <a:ext uri="{FF2B5EF4-FFF2-40B4-BE49-F238E27FC236}">
-                <a16:creationId xmlns="" xmlns:a16="http://schemas.microsoft.com/office/drawing/2014/main" id="{065F8F52-C484-420F-8838-9BA9EB24F06F}"/>
+                <a16:creationId xmlns:a16="http://schemas.microsoft.com/office/drawing/2014/main" xmlns="" id="{065F8F52-C484-420F-8838-9BA9EB24F06F}"/>
               </a:ext>
             </a:extLst>
           </p:cNvPr>
@@ -18056,7 +18434,7 @@
           <p:cNvPr id="14" name="TextBox 13">
             <a:extLst>
               <a:ext uri="{FF2B5EF4-FFF2-40B4-BE49-F238E27FC236}">
-                <a16:creationId xmlns="" xmlns:a16="http://schemas.microsoft.com/office/drawing/2014/main" id="{545FB07B-3C17-49FB-8188-00D3D635E234}"/>
+                <a16:creationId xmlns:a16="http://schemas.microsoft.com/office/drawing/2014/main" xmlns="" id="{545FB07B-3C17-49FB-8188-00D3D635E234}"/>
               </a:ext>
             </a:extLst>
           </p:cNvPr>
@@ -18091,7 +18469,7 @@
           <p:cNvPr id="16" name="TextBox 15">
             <a:extLst>
               <a:ext uri="{FF2B5EF4-FFF2-40B4-BE49-F238E27FC236}">
-                <a16:creationId xmlns="" xmlns:a16="http://schemas.microsoft.com/office/drawing/2014/main" id="{FE719AD3-1761-492D-823C-0AA513693A5E}"/>
+                <a16:creationId xmlns:a16="http://schemas.microsoft.com/office/drawing/2014/main" xmlns="" id="{FE719AD3-1761-492D-823C-0AA513693A5E}"/>
               </a:ext>
             </a:extLst>
           </p:cNvPr>
@@ -18126,7 +18504,7 @@
           <p:cNvPr id="17" name="TextBox 16">
             <a:extLst>
               <a:ext uri="{FF2B5EF4-FFF2-40B4-BE49-F238E27FC236}">
-                <a16:creationId xmlns="" xmlns:a16="http://schemas.microsoft.com/office/drawing/2014/main" id="{0AECDDDD-9C69-4208-AA1C-905C5B95F22C}"/>
+                <a16:creationId xmlns:a16="http://schemas.microsoft.com/office/drawing/2014/main" xmlns="" id="{0AECDDDD-9C69-4208-AA1C-905C5B95F22C}"/>
               </a:ext>
             </a:extLst>
           </p:cNvPr>
@@ -18161,7 +18539,7 @@
           <p:cNvPr id="8" name="Straight Arrow Connector 7">
             <a:extLst>
               <a:ext uri="{FF2B5EF4-FFF2-40B4-BE49-F238E27FC236}">
-                <a16:creationId xmlns="" xmlns:a16="http://schemas.microsoft.com/office/drawing/2014/main" id="{8DDBEF33-54E1-493E-BF2F-6C758455DB2F}"/>
+                <a16:creationId xmlns:a16="http://schemas.microsoft.com/office/drawing/2014/main" xmlns="" id="{8DDBEF33-54E1-493E-BF2F-6C758455DB2F}"/>
               </a:ext>
             </a:extLst>
           </p:cNvPr>
@@ -18206,7 +18584,7 @@
           <p:cNvPr id="18" name="Straight Arrow Connector 17">
             <a:extLst>
               <a:ext uri="{FF2B5EF4-FFF2-40B4-BE49-F238E27FC236}">
-                <a16:creationId xmlns="" xmlns:a16="http://schemas.microsoft.com/office/drawing/2014/main" id="{F1E47557-78F8-4490-9DC2-B232D55FD35C}"/>
+                <a16:creationId xmlns:a16="http://schemas.microsoft.com/office/drawing/2014/main" xmlns="" id="{F1E47557-78F8-4490-9DC2-B232D55FD35C}"/>
               </a:ext>
             </a:extLst>
           </p:cNvPr>
@@ -18250,7 +18628,7 @@
           <p:cNvPr id="22" name="Straight Arrow Connector 21">
             <a:extLst>
               <a:ext uri="{FF2B5EF4-FFF2-40B4-BE49-F238E27FC236}">
-                <a16:creationId xmlns="" xmlns:a16="http://schemas.microsoft.com/office/drawing/2014/main" id="{54728F14-6E5A-45E2-AC4A-EFD14011F60B}"/>
+                <a16:creationId xmlns:a16="http://schemas.microsoft.com/office/drawing/2014/main" xmlns="" id="{54728F14-6E5A-45E2-AC4A-EFD14011F60B}"/>
               </a:ext>
             </a:extLst>
           </p:cNvPr>
@@ -18295,7 +18673,7 @@
           <p:cNvPr id="25" name="Straight Arrow Connector 24">
             <a:extLst>
               <a:ext uri="{FF2B5EF4-FFF2-40B4-BE49-F238E27FC236}">
-                <a16:creationId xmlns="" xmlns:a16="http://schemas.microsoft.com/office/drawing/2014/main" id="{D54D66D9-20DA-42BE-9E8F-546A8ED2AA32}"/>
+                <a16:creationId xmlns:a16="http://schemas.microsoft.com/office/drawing/2014/main" xmlns="" id="{D54D66D9-20DA-42BE-9E8F-546A8ED2AA32}"/>
               </a:ext>
             </a:extLst>
           </p:cNvPr>
@@ -18340,7 +18718,7 @@
           <p:cNvPr id="27" name="Straight Arrow Connector 26">
             <a:extLst>
               <a:ext uri="{FF2B5EF4-FFF2-40B4-BE49-F238E27FC236}">
-                <a16:creationId xmlns="" xmlns:a16="http://schemas.microsoft.com/office/drawing/2014/main" id="{104F6FC2-E13D-4097-9667-8F4A154A8D80}"/>
+                <a16:creationId xmlns:a16="http://schemas.microsoft.com/office/drawing/2014/main" xmlns="" id="{104F6FC2-E13D-4097-9667-8F4A154A8D80}"/>
               </a:ext>
             </a:extLst>
           </p:cNvPr>
@@ -18384,7 +18762,7 @@
           <p:cNvPr id="28" name="Straight Arrow Connector 27">
             <a:extLst>
               <a:ext uri="{FF2B5EF4-FFF2-40B4-BE49-F238E27FC236}">
-                <a16:creationId xmlns="" xmlns:a16="http://schemas.microsoft.com/office/drawing/2014/main" id="{29780F90-A07F-4BB0-9F2F-AAC340DC9D38}"/>
+                <a16:creationId xmlns:a16="http://schemas.microsoft.com/office/drawing/2014/main" xmlns="" id="{29780F90-A07F-4BB0-9F2F-AAC340DC9D38}"/>
               </a:ext>
             </a:extLst>
           </p:cNvPr>
@@ -18428,7 +18806,7 @@
           <p:cNvPr id="31" name="TextBox 30">
             <a:extLst>
               <a:ext uri="{FF2B5EF4-FFF2-40B4-BE49-F238E27FC236}">
-                <a16:creationId xmlns="" xmlns:a16="http://schemas.microsoft.com/office/drawing/2014/main" id="{4C6058E9-F453-4FCC-9697-02D88A979F2A}"/>
+                <a16:creationId xmlns:a16="http://schemas.microsoft.com/office/drawing/2014/main" xmlns="" id="{4C6058E9-F453-4FCC-9697-02D88A979F2A}"/>
               </a:ext>
             </a:extLst>
           </p:cNvPr>
@@ -18464,7 +18842,7 @@
           <p:cNvPr id="32" name="TextBox 31">
             <a:extLst>
               <a:ext uri="{FF2B5EF4-FFF2-40B4-BE49-F238E27FC236}">
-                <a16:creationId xmlns="" xmlns:a16="http://schemas.microsoft.com/office/drawing/2014/main" id="{78EDB91B-C071-4D7E-B239-6F5257BFA37A}"/>
+                <a16:creationId xmlns:a16="http://schemas.microsoft.com/office/drawing/2014/main" xmlns="" id="{78EDB91B-C071-4D7E-B239-6F5257BFA37A}"/>
               </a:ext>
             </a:extLst>
           </p:cNvPr>
@@ -18500,7 +18878,7 @@
           <p:cNvPr id="19" name="Group 18">
             <a:extLst>
               <a:ext uri="{FF2B5EF4-FFF2-40B4-BE49-F238E27FC236}">
-                <a16:creationId xmlns="" xmlns:a16="http://schemas.microsoft.com/office/drawing/2014/main" id="{6F513CEE-2FED-431E-B171-29AD4FD8073D}"/>
+                <a16:creationId xmlns:a16="http://schemas.microsoft.com/office/drawing/2014/main" xmlns="" id="{6F513CEE-2FED-431E-B171-29AD4FD8073D}"/>
               </a:ext>
             </a:extLst>
           </p:cNvPr>
@@ -18520,7 +18898,7 @@
             <p:cNvPr id="33" name="Straight Arrow Connector 32">
               <a:extLst>
                 <a:ext uri="{FF2B5EF4-FFF2-40B4-BE49-F238E27FC236}">
-                  <a16:creationId xmlns="" xmlns:a16="http://schemas.microsoft.com/office/drawing/2014/main" id="{760F0522-E927-4EF6-875E-2DADA29693AC}"/>
+                  <a16:creationId xmlns:a16="http://schemas.microsoft.com/office/drawing/2014/main" xmlns="" id="{760F0522-E927-4EF6-875E-2DADA29693AC}"/>
                 </a:ext>
               </a:extLst>
             </p:cNvPr>
@@ -18564,7 +18942,7 @@
             <p:cNvPr id="34" name="TextBox 33">
               <a:extLst>
                 <a:ext uri="{FF2B5EF4-FFF2-40B4-BE49-F238E27FC236}">
-                  <a16:creationId xmlns="" xmlns:a16="http://schemas.microsoft.com/office/drawing/2014/main" id="{E096BC95-CF89-477C-A149-CADD8535D70D}"/>
+                  <a16:creationId xmlns:a16="http://schemas.microsoft.com/office/drawing/2014/main" xmlns="" id="{E096BC95-CF89-477C-A149-CADD8535D70D}"/>
                 </a:ext>
               </a:extLst>
             </p:cNvPr>
@@ -18600,7 +18978,7 @@
             <p:cNvPr id="35" name="Straight Arrow Connector 34">
               <a:extLst>
                 <a:ext uri="{FF2B5EF4-FFF2-40B4-BE49-F238E27FC236}">
-                  <a16:creationId xmlns="" xmlns:a16="http://schemas.microsoft.com/office/drawing/2014/main" id="{16A5DB64-6D02-469B-8ECF-1AC120A06DE3}"/>
+                  <a16:creationId xmlns:a16="http://schemas.microsoft.com/office/drawing/2014/main" xmlns="" id="{16A5DB64-6D02-469B-8ECF-1AC120A06DE3}"/>
                 </a:ext>
               </a:extLst>
             </p:cNvPr>
@@ -18644,7 +19022,7 @@
             <p:cNvPr id="37" name="TextBox 36">
               <a:extLst>
                 <a:ext uri="{FF2B5EF4-FFF2-40B4-BE49-F238E27FC236}">
-                  <a16:creationId xmlns="" xmlns:a16="http://schemas.microsoft.com/office/drawing/2014/main" id="{85C4C53D-D5CB-4E7F-937C-C49212F44A70}"/>
+                  <a16:creationId xmlns:a16="http://schemas.microsoft.com/office/drawing/2014/main" xmlns="" id="{85C4C53D-D5CB-4E7F-937C-C49212F44A70}"/>
                 </a:ext>
               </a:extLst>
             </p:cNvPr>
@@ -18681,7 +19059,7 @@
           <p:cNvPr id="38" name="Straight Arrow Connector 37">
             <a:extLst>
               <a:ext uri="{FF2B5EF4-FFF2-40B4-BE49-F238E27FC236}">
-                <a16:creationId xmlns="" xmlns:a16="http://schemas.microsoft.com/office/drawing/2014/main" id="{5D867792-63F2-4767-BC8D-917B88AC05E1}"/>
+                <a16:creationId xmlns:a16="http://schemas.microsoft.com/office/drawing/2014/main" xmlns="" id="{5D867792-63F2-4767-BC8D-917B88AC05E1}"/>
               </a:ext>
             </a:extLst>
           </p:cNvPr>
@@ -18725,7 +19103,7 @@
           <p:cNvPr id="39" name="TextBox 38">
             <a:extLst>
               <a:ext uri="{FF2B5EF4-FFF2-40B4-BE49-F238E27FC236}">
-                <a16:creationId xmlns="" xmlns:a16="http://schemas.microsoft.com/office/drawing/2014/main" id="{94708DE2-B64C-48F4-8076-59A108D618A6}"/>
+                <a16:creationId xmlns:a16="http://schemas.microsoft.com/office/drawing/2014/main" xmlns="" id="{94708DE2-B64C-48F4-8076-59A108D618A6}"/>
               </a:ext>
             </a:extLst>
           </p:cNvPr>
@@ -18761,7 +19139,7 @@
           <p:cNvPr id="40" name="Straight Arrow Connector 39">
             <a:extLst>
               <a:ext uri="{FF2B5EF4-FFF2-40B4-BE49-F238E27FC236}">
-                <a16:creationId xmlns="" xmlns:a16="http://schemas.microsoft.com/office/drawing/2014/main" id="{5CA8617A-911B-4C68-B5F4-CED221D4F758}"/>
+                <a16:creationId xmlns:a16="http://schemas.microsoft.com/office/drawing/2014/main" xmlns="" id="{5CA8617A-911B-4C68-B5F4-CED221D4F758}"/>
               </a:ext>
             </a:extLst>
           </p:cNvPr>
@@ -18805,7 +19183,7 @@
           <p:cNvPr id="42" name="TextBox 41">
             <a:extLst>
               <a:ext uri="{FF2B5EF4-FFF2-40B4-BE49-F238E27FC236}">
-                <a16:creationId xmlns="" xmlns:a16="http://schemas.microsoft.com/office/drawing/2014/main" id="{10573C7C-31D3-4491-9B05-DACBB0B02145}"/>
+                <a16:creationId xmlns:a16="http://schemas.microsoft.com/office/drawing/2014/main" xmlns="" id="{10573C7C-31D3-4491-9B05-DACBB0B02145}"/>
               </a:ext>
             </a:extLst>
           </p:cNvPr>
@@ -18840,7 +19218,7 @@
           <p:cNvPr id="43" name="Straight Arrow Connector 42">
             <a:extLst>
               <a:ext uri="{FF2B5EF4-FFF2-40B4-BE49-F238E27FC236}">
-                <a16:creationId xmlns="" xmlns:a16="http://schemas.microsoft.com/office/drawing/2014/main" id="{BF01DE0F-75F5-4498-A057-FE68F1F8E4FB}"/>
+                <a16:creationId xmlns:a16="http://schemas.microsoft.com/office/drawing/2014/main" xmlns="" id="{BF01DE0F-75F5-4498-A057-FE68F1F8E4FB}"/>
               </a:ext>
             </a:extLst>
           </p:cNvPr>
@@ -18884,7 +19262,7 @@
           <p:cNvPr id="44" name="TextBox 43">
             <a:extLst>
               <a:ext uri="{FF2B5EF4-FFF2-40B4-BE49-F238E27FC236}">
-                <a16:creationId xmlns="" xmlns:a16="http://schemas.microsoft.com/office/drawing/2014/main" id="{21D961B1-8920-45A2-B7B6-24C52F68A83D}"/>
+                <a16:creationId xmlns:a16="http://schemas.microsoft.com/office/drawing/2014/main" xmlns="" id="{21D961B1-8920-45A2-B7B6-24C52F68A83D}"/>
               </a:ext>
             </a:extLst>
           </p:cNvPr>
@@ -18920,7 +19298,7 @@
           <p:cNvPr id="45" name="Straight Arrow Connector 44">
             <a:extLst>
               <a:ext uri="{FF2B5EF4-FFF2-40B4-BE49-F238E27FC236}">
-                <a16:creationId xmlns="" xmlns:a16="http://schemas.microsoft.com/office/drawing/2014/main" id="{C1FAEF9C-B2F6-4215-9812-69CE9F14BAFC}"/>
+                <a16:creationId xmlns:a16="http://schemas.microsoft.com/office/drawing/2014/main" xmlns="" id="{C1FAEF9C-B2F6-4215-9812-69CE9F14BAFC}"/>
               </a:ext>
             </a:extLst>
           </p:cNvPr>
@@ -18964,7 +19342,7 @@
           <p:cNvPr id="47" name="TextBox 46">
             <a:extLst>
               <a:ext uri="{FF2B5EF4-FFF2-40B4-BE49-F238E27FC236}">
-                <a16:creationId xmlns="" xmlns:a16="http://schemas.microsoft.com/office/drawing/2014/main" id="{5B05E545-DCBA-4D82-8B24-9CA55C349478}"/>
+                <a16:creationId xmlns:a16="http://schemas.microsoft.com/office/drawing/2014/main" xmlns="" id="{5B05E545-DCBA-4D82-8B24-9CA55C349478}"/>
               </a:ext>
             </a:extLst>
           </p:cNvPr>
@@ -18999,7 +19377,7 @@
           <p:cNvPr id="48" name="Straight Arrow Connector 47">
             <a:extLst>
               <a:ext uri="{FF2B5EF4-FFF2-40B4-BE49-F238E27FC236}">
-                <a16:creationId xmlns="" xmlns:a16="http://schemas.microsoft.com/office/drawing/2014/main" id="{3598B223-2123-426C-8451-717BE628A163}"/>
+                <a16:creationId xmlns:a16="http://schemas.microsoft.com/office/drawing/2014/main" xmlns="" id="{3598B223-2123-426C-8451-717BE628A163}"/>
               </a:ext>
             </a:extLst>
           </p:cNvPr>
@@ -19044,7 +19422,7 @@
           <p:cNvPr id="50" name="TextBox 49">
             <a:extLst>
               <a:ext uri="{FF2B5EF4-FFF2-40B4-BE49-F238E27FC236}">
-                <a16:creationId xmlns="" xmlns:a16="http://schemas.microsoft.com/office/drawing/2014/main" id="{548A5FC5-8E8D-4334-94CA-553E93958E21}"/>
+                <a16:creationId xmlns:a16="http://schemas.microsoft.com/office/drawing/2014/main" xmlns="" id="{548A5FC5-8E8D-4334-94CA-553E93958E21}"/>
               </a:ext>
             </a:extLst>
           </p:cNvPr>
@@ -19079,7 +19457,7 @@
           <p:cNvPr id="53" name="Straight Arrow Connector 52">
             <a:extLst>
               <a:ext uri="{FF2B5EF4-FFF2-40B4-BE49-F238E27FC236}">
-                <a16:creationId xmlns="" xmlns:a16="http://schemas.microsoft.com/office/drawing/2014/main" id="{90BB1FB3-601E-4C1C-B25F-639594D36DF0}"/>
+                <a16:creationId xmlns:a16="http://schemas.microsoft.com/office/drawing/2014/main" xmlns="" id="{90BB1FB3-601E-4C1C-B25F-639594D36DF0}"/>
               </a:ext>
             </a:extLst>
           </p:cNvPr>
@@ -19123,7 +19501,7 @@
           <p:cNvPr id="56" name="TextBox 55">
             <a:extLst>
               <a:ext uri="{FF2B5EF4-FFF2-40B4-BE49-F238E27FC236}">
-                <a16:creationId xmlns="" xmlns:a16="http://schemas.microsoft.com/office/drawing/2014/main" id="{126170BE-DBB8-41CA-A9D4-23D0210E7F14}"/>
+                <a16:creationId xmlns:a16="http://schemas.microsoft.com/office/drawing/2014/main" xmlns="" id="{126170BE-DBB8-41CA-A9D4-23D0210E7F14}"/>
               </a:ext>
             </a:extLst>
           </p:cNvPr>
@@ -19158,7 +19536,7 @@
           <p:cNvPr id="57" name="Straight Arrow Connector 56">
             <a:extLst>
               <a:ext uri="{FF2B5EF4-FFF2-40B4-BE49-F238E27FC236}">
-                <a16:creationId xmlns="" xmlns:a16="http://schemas.microsoft.com/office/drawing/2014/main" id="{B0C578F6-714B-4824-9ECE-5015FB620964}"/>
+                <a16:creationId xmlns:a16="http://schemas.microsoft.com/office/drawing/2014/main" xmlns="" id="{B0C578F6-714B-4824-9ECE-5015FB620964}"/>
               </a:ext>
             </a:extLst>
           </p:cNvPr>
@@ -19202,7 +19580,7 @@
           <p:cNvPr id="58" name="Straight Arrow Connector 57">
             <a:extLst>
               <a:ext uri="{FF2B5EF4-FFF2-40B4-BE49-F238E27FC236}">
-                <a16:creationId xmlns="" xmlns:a16="http://schemas.microsoft.com/office/drawing/2014/main" id="{850D419C-9C5F-43B0-9494-8C763B70C8D8}"/>
+                <a16:creationId xmlns:a16="http://schemas.microsoft.com/office/drawing/2014/main" xmlns="" id="{850D419C-9C5F-43B0-9494-8C763B70C8D8}"/>
               </a:ext>
             </a:extLst>
           </p:cNvPr>
@@ -19246,7 +19624,7 @@
           <p:cNvPr id="60" name="TextBox 59">
             <a:extLst>
               <a:ext uri="{FF2B5EF4-FFF2-40B4-BE49-F238E27FC236}">
-                <a16:creationId xmlns="" xmlns:a16="http://schemas.microsoft.com/office/drawing/2014/main" id="{00FCB261-BF63-40FC-B508-C6E3BDD9E269}"/>
+                <a16:creationId xmlns:a16="http://schemas.microsoft.com/office/drawing/2014/main" xmlns="" id="{00FCB261-BF63-40FC-B508-C6E3BDD9E269}"/>
               </a:ext>
             </a:extLst>
           </p:cNvPr>
@@ -19281,7 +19659,7 @@
           <p:cNvPr id="61" name="TextBox 60">
             <a:extLst>
               <a:ext uri="{FF2B5EF4-FFF2-40B4-BE49-F238E27FC236}">
-                <a16:creationId xmlns="" xmlns:a16="http://schemas.microsoft.com/office/drawing/2014/main" id="{9F61E270-C94A-40B7-A722-8E8BDDC11047}"/>
+                <a16:creationId xmlns:a16="http://schemas.microsoft.com/office/drawing/2014/main" xmlns="" id="{9F61E270-C94A-40B7-A722-8E8BDDC11047}"/>
               </a:ext>
             </a:extLst>
           </p:cNvPr>
@@ -19317,7 +19695,7 @@
           <p:cNvPr id="62" name="Straight Arrow Connector 61">
             <a:extLst>
               <a:ext uri="{FF2B5EF4-FFF2-40B4-BE49-F238E27FC236}">
-                <a16:creationId xmlns="" xmlns:a16="http://schemas.microsoft.com/office/drawing/2014/main" id="{CFF82DD4-5FF5-4264-902D-D7599D1875D6}"/>
+                <a16:creationId xmlns:a16="http://schemas.microsoft.com/office/drawing/2014/main" xmlns="" id="{CFF82DD4-5FF5-4264-902D-D7599D1875D6}"/>
               </a:ext>
             </a:extLst>
           </p:cNvPr>
@@ -19361,7 +19739,7 @@
           <p:cNvPr id="63" name="Straight Arrow Connector 62">
             <a:extLst>
               <a:ext uri="{FF2B5EF4-FFF2-40B4-BE49-F238E27FC236}">
-                <a16:creationId xmlns="" xmlns:a16="http://schemas.microsoft.com/office/drawing/2014/main" id="{D0F66810-2AF9-4236-95FB-FFBF82C4FD8E}"/>
+                <a16:creationId xmlns:a16="http://schemas.microsoft.com/office/drawing/2014/main" xmlns="" id="{D0F66810-2AF9-4236-95FB-FFBF82C4FD8E}"/>
               </a:ext>
             </a:extLst>
           </p:cNvPr>
@@ -19405,7 +19783,7 @@
           <p:cNvPr id="65" name="TextBox 64">
             <a:extLst>
               <a:ext uri="{FF2B5EF4-FFF2-40B4-BE49-F238E27FC236}">
-                <a16:creationId xmlns="" xmlns:a16="http://schemas.microsoft.com/office/drawing/2014/main" id="{83B2A0EA-96AE-46DE-9582-415750498B5B}"/>
+                <a16:creationId xmlns:a16="http://schemas.microsoft.com/office/drawing/2014/main" xmlns="" id="{83B2A0EA-96AE-46DE-9582-415750498B5B}"/>
               </a:ext>
             </a:extLst>
           </p:cNvPr>
@@ -19441,7 +19819,7 @@
           <p:cNvPr id="66" name="TextBox 65">
             <a:extLst>
               <a:ext uri="{FF2B5EF4-FFF2-40B4-BE49-F238E27FC236}">
-                <a16:creationId xmlns="" xmlns:a16="http://schemas.microsoft.com/office/drawing/2014/main" id="{D520A455-DE89-4DDE-8FC6-85DD4E5E4D49}"/>
+                <a16:creationId xmlns:a16="http://schemas.microsoft.com/office/drawing/2014/main" xmlns="" id="{D520A455-DE89-4DDE-8FC6-85DD4E5E4D49}"/>
               </a:ext>
             </a:extLst>
           </p:cNvPr>
@@ -19477,7 +19855,7 @@
           <p:cNvPr id="46" name="TextBox 45">
             <a:extLst>
               <a:ext uri="{FF2B5EF4-FFF2-40B4-BE49-F238E27FC236}">
-                <a16:creationId xmlns="" xmlns:a16="http://schemas.microsoft.com/office/drawing/2014/main" id="{AED62D3E-1C93-4BB9-81AF-99B4E63BC8E3}"/>
+                <a16:creationId xmlns:a16="http://schemas.microsoft.com/office/drawing/2014/main" xmlns="" id="{AED62D3E-1C93-4BB9-81AF-99B4E63BC8E3}"/>
               </a:ext>
             </a:extLst>
           </p:cNvPr>
@@ -19514,7 +19892,7 @@
     </p:spTree>
     <p:extLst>
       <p:ext uri="{BB962C8B-B14F-4D97-AF65-F5344CB8AC3E}">
-        <p14:creationId xmlns="" xmlns:p14="http://schemas.microsoft.com/office/powerpoint/2010/main" val="2779966150"/>
+        <p14:creationId xmlns:p14="http://schemas.microsoft.com/office/powerpoint/2010/main" xmlns="" val="2779966150"/>
       </p:ext>
     </p:extLst>
   </p:cSld>
@@ -19820,7 +20198,7 @@
   <a:extraClrSchemeLst/>
   <a:extLst>
     <a:ext uri="{05A4C25C-085E-4340-85A3-A5531E510DB2}">
-      <thm15:themeFamily xmlns="" xmlns:thm15="http://schemas.microsoft.com/office/thememl/2012/main" name="eye_tracker_presentation" id="{00ED1D97-A04B-46A0-BB71-88655A6B057F}" vid="{F36189FA-3966-4852-951E-5734674D1C7B}"/>
+      <thm15:themeFamily xmlns:thm15="http://schemas.microsoft.com/office/thememl/2012/main" xmlns="" name="eye_tracker_presentation" id="{00ED1D97-A04B-46A0-BB71-88655A6B057F}" vid="{F36189FA-3966-4852-951E-5734674D1C7B}"/>
     </a:ext>
   </a:extLst>
 </a:theme>
@@ -20115,7 +20493,7 @@
   <a:extraClrSchemeLst/>
   <a:extLst>
     <a:ext uri="{05A4C25C-085E-4340-85A3-A5531E510DB2}">
-      <thm15:themeFamily xmlns="" xmlns:thm15="http://schemas.microsoft.com/office/thememl/2012/main" name="Office Theme" id="{62F939B6-93AF-4DB8-9C6B-D6C7DFDC589F}" vid="{4A3C46E8-61CC-4603-A589-7422A47A8E4A}"/>
+      <thm15:themeFamily xmlns:thm15="http://schemas.microsoft.com/office/thememl/2012/main" xmlns="" name="Office Theme" id="{62F939B6-93AF-4DB8-9C6B-D6C7DFDC589F}" vid="{4A3C46E8-61CC-4603-A589-7422A47A8E4A}"/>
     </a:ext>
   </a:extLst>
 </a:theme>

--- a/bishops/cs321/resources/CS321_Lecture_12.pptx
+++ b/bishops/cs321/resources/CS321_Lecture_12.pptx
@@ -5,7 +5,7 @@
     <p:sldMasterId id="2147483648" r:id="rId1"/>
   </p:sldMasterIdLst>
   <p:notesMasterIdLst>
-    <p:notesMasterId r:id="rId43"/>
+    <p:notesMasterId r:id="rId41"/>
   </p:notesMasterIdLst>
   <p:sldIdLst>
     <p:sldId id="256" r:id="rId2"/>
@@ -31,24 +31,22 @@
     <p:sldId id="341" r:id="rId22"/>
     <p:sldId id="282" r:id="rId23"/>
     <p:sldId id="309" r:id="rId24"/>
-    <p:sldId id="347" r:id="rId25"/>
-    <p:sldId id="348" r:id="rId26"/>
-    <p:sldId id="311" r:id="rId27"/>
-    <p:sldId id="342" r:id="rId28"/>
-    <p:sldId id="268" r:id="rId29"/>
-    <p:sldId id="269" r:id="rId30"/>
-    <p:sldId id="270" r:id="rId31"/>
-    <p:sldId id="344" r:id="rId32"/>
-    <p:sldId id="260" r:id="rId33"/>
-    <p:sldId id="265" r:id="rId34"/>
-    <p:sldId id="326" r:id="rId35"/>
-    <p:sldId id="328" r:id="rId36"/>
-    <p:sldId id="345" r:id="rId37"/>
-    <p:sldId id="329" r:id="rId38"/>
-    <p:sldId id="346" r:id="rId39"/>
-    <p:sldId id="297" r:id="rId40"/>
-    <p:sldId id="323" r:id="rId41"/>
-    <p:sldId id="325" r:id="rId42"/>
+    <p:sldId id="311" r:id="rId25"/>
+    <p:sldId id="342" r:id="rId26"/>
+    <p:sldId id="268" r:id="rId27"/>
+    <p:sldId id="269" r:id="rId28"/>
+    <p:sldId id="270" r:id="rId29"/>
+    <p:sldId id="344" r:id="rId30"/>
+    <p:sldId id="260" r:id="rId31"/>
+    <p:sldId id="265" r:id="rId32"/>
+    <p:sldId id="326" r:id="rId33"/>
+    <p:sldId id="328" r:id="rId34"/>
+    <p:sldId id="345" r:id="rId35"/>
+    <p:sldId id="329" r:id="rId36"/>
+    <p:sldId id="346" r:id="rId37"/>
+    <p:sldId id="297" r:id="rId38"/>
+    <p:sldId id="323" r:id="rId39"/>
+    <p:sldId id="325" r:id="rId40"/>
   </p:sldIdLst>
   <p:sldSz cx="12192000" cy="6858000"/>
   <p:notesSz cx="6858000" cy="9144000"/>
@@ -9470,7 +9468,13 @@
       </p:grpSpPr>
       <p:sp>
         <p:nvSpPr>
-          <p:cNvPr id="2" name="Title 1"/>
+          <p:cNvPr id="2" name="Title 1">
+            <a:extLst>
+              <a:ext uri="{FF2B5EF4-FFF2-40B4-BE49-F238E27FC236}">
+                <a16:creationId xmlns:a16="http://schemas.microsoft.com/office/drawing/2014/main" xmlns="" id="{D3144BBF-69E2-47B3-A5D4-FB03B54F0F96}"/>
+              </a:ext>
+            </a:extLst>
+          </p:cNvPr>
           <p:cNvSpPr>
             <a:spLocks noGrp="1"/>
           </p:cNvSpPr>
@@ -9483,92 +9487,112 @@
           <a:bodyPr/>
           <a:lstStyle/>
           <a:p>
-            <a:pPr>
-              <a:buClr>
-                <a:srgbClr val="000000"/>
-              </a:buClr>
-              <a:buSzPct val="38000"/>
-              <a:buFont typeface="StarBats" charset="0"/>
+            <a:r>
+              <a:rPr lang="en-CA" dirty="0"/>
+              <a:t>UML, &amp; Version Control Systems</a:t>
+            </a:r>
+          </a:p>
+        </p:txBody>
+      </p:sp>
+      <p:sp>
+        <p:nvSpPr>
+          <p:cNvPr id="3" name="Content Placeholder 2">
+            <a:extLst>
+              <a:ext uri="{FF2B5EF4-FFF2-40B4-BE49-F238E27FC236}">
+                <a16:creationId xmlns:a16="http://schemas.microsoft.com/office/drawing/2014/main" xmlns="" id="{B981305C-A702-4FE5-A134-6B1E026A73CE}"/>
+              </a:ext>
+            </a:extLst>
+          </p:cNvPr>
+          <p:cNvSpPr>
+            <a:spLocks noGrp="1"/>
+          </p:cNvSpPr>
+          <p:nvPr>
+            <p:ph idx="1"/>
+          </p:nvPr>
+        </p:nvSpPr>
+        <p:spPr/>
+        <p:txBody>
+          <a:bodyPr/>
+          <a:lstStyle/>
+          <a:p>
+            <a:r>
+              <a:rPr lang="en-CA" dirty="0"/>
+              <a:t>UML</a:t>
+            </a:r>
+          </a:p>
+          <a:p>
+            <a:pPr lvl="1"/>
+            <a:r>
+              <a:rPr lang="en-CA" dirty="0"/>
+              <a:t>Useful for conveying complex architectural solutions</a:t>
+            </a:r>
+          </a:p>
+          <a:p>
+            <a:pPr lvl="1"/>
+            <a:r>
+              <a:rPr lang="en-CA" dirty="0"/>
+              <a:t>Plenty of tools available online to help you build them and properly follow the conventions</a:t>
+            </a:r>
+          </a:p>
+          <a:p>
+            <a:r>
+              <a:rPr lang="en-CA" dirty="0"/>
+              <a:t>Version Control Systems</a:t>
+            </a:r>
+          </a:p>
+          <a:p>
+            <a:pPr lvl="1"/>
+            <a:r>
+              <a:rPr lang="en-CA" dirty="0"/>
+              <a:t>Immutable history</a:t>
+            </a:r>
+          </a:p>
+          <a:p>
+            <a:pPr lvl="1"/>
+            <a:r>
+              <a:rPr lang="en-CA" dirty="0"/>
+              <a:t>Many kinds, with Git and Mercurial being a couple of the most popular</a:t>
+            </a:r>
+          </a:p>
+          <a:p>
+            <a:pPr lvl="1"/>
+            <a:r>
+              <a:rPr lang="en-CA" dirty="0"/>
+              <a:t>Git is the VCS</a:t>
+            </a:r>
+          </a:p>
+          <a:p>
+            <a:pPr lvl="1"/>
+            <a:r>
+              <a:rPr lang="en-CA" dirty="0" err="1"/>
+              <a:t>Github</a:t>
+            </a:r>
+            <a:r>
+              <a:rPr lang="en-CA" dirty="0"/>
+              <a:t> is a host for Git repositories</a:t>
+            </a:r>
+          </a:p>
+          <a:p>
+            <a:pPr marL="457200" lvl="1" indent="0">
               <a:buNone/>
             </a:pPr>
-            <a:r>
-              <a:rPr lang="en-US" altLang="en-US" sz="4400" i="0" dirty="0" smtClean="0"/>
-              <a:t>Key Acronyms: DRY</a:t>
-            </a:r>
-            <a:endParaRPr lang="en-US" altLang="en-US" sz="4400" i="0" dirty="0"/>
-          </a:p>
-        </p:txBody>
-      </p:sp>
-      <p:sp>
-        <p:nvSpPr>
-          <p:cNvPr id="3" name="Content Placeholder 2"/>
-          <p:cNvSpPr>
-            <a:spLocks noGrp="1"/>
-          </p:cNvSpPr>
-          <p:nvPr>
-            <p:ph idx="1"/>
-          </p:nvPr>
-        </p:nvSpPr>
-        <p:spPr>
-          <a:xfrm>
-            <a:off x="640874" y="1168400"/>
-            <a:ext cx="10515600" cy="5378703"/>
-          </a:xfrm>
-        </p:spPr>
-        <p:txBody>
-          <a:bodyPr>
-            <a:normAutofit/>
-          </a:bodyPr>
-          <a:lstStyle/>
-          <a:p>
-            <a:r>
-              <a:rPr lang="en-US" b="1" dirty="0" smtClean="0"/>
-              <a:t>DRY</a:t>
-            </a:r>
-            <a:r>
-              <a:rPr lang="en-US" dirty="0" smtClean="0"/>
-              <a:t>: Don’t repeat yourself</a:t>
-            </a:r>
+            <a:endParaRPr lang="en-CA" dirty="0"/>
           </a:p>
           <a:p>
             <a:pPr lvl="1"/>
-            <a:r>
-              <a:rPr lang="en-CA" dirty="0" smtClean="0"/>
-              <a:t>The idea that you shouldn’t repeat the same code in multiple areas.</a:t>
-            </a:r>
-            <a:endParaRPr lang="en-US" dirty="0" smtClean="0"/>
-          </a:p>
-          <a:p>
-            <a:pPr lvl="1"/>
-            <a:endParaRPr lang="en-US" dirty="0"/>
-          </a:p>
-        </p:txBody>
-      </p:sp>
-      <p:sp>
-        <p:nvSpPr>
-          <p:cNvPr id="10" name="Footer Placeholder 9"/>
-          <p:cNvSpPr>
-            <a:spLocks noGrp="1"/>
-          </p:cNvSpPr>
-          <p:nvPr>
-            <p:ph type="ftr" sz="quarter" idx="3"/>
-          </p:nvPr>
-        </p:nvSpPr>
-        <p:spPr/>
-        <p:txBody>
-          <a:bodyPr/>
-          <a:lstStyle/>
-          <a:p>
-            <a:r>
-              <a:rPr lang="en-CA" dirty="0"/>
-              <a:t>CS321: Advanced Programming Techniques</a:t>
-            </a:r>
-          </a:p>
-        </p:txBody>
-      </p:sp>
-      <p:sp>
-        <p:nvSpPr>
-          <p:cNvPr id="12" name="Slide Number Placeholder 11"/>
+            <a:endParaRPr lang="en-CA" dirty="0"/>
+          </a:p>
+        </p:txBody>
+      </p:sp>
+      <p:sp>
+        <p:nvSpPr>
+          <p:cNvPr id="6" name="Slide Number Placeholder 5">
+            <a:extLst>
+              <a:ext uri="{FF2B5EF4-FFF2-40B4-BE49-F238E27FC236}">
+                <a16:creationId xmlns:a16="http://schemas.microsoft.com/office/drawing/2014/main" xmlns="" id="{E0B06360-FB4C-4A3F-AFC2-967508E6478B}"/>
+              </a:ext>
+            </a:extLst>
+          </p:cNvPr>
           <p:cNvSpPr>
             <a:spLocks noGrp="1"/>
           </p:cNvSpPr>
@@ -9593,10 +9617,37 @@
           </a:p>
         </p:txBody>
       </p:sp>
+      <p:sp>
+        <p:nvSpPr>
+          <p:cNvPr id="7" name="Footer Placeholder 9"/>
+          <p:cNvSpPr>
+            <a:spLocks noGrp="1"/>
+          </p:cNvSpPr>
+          <p:nvPr>
+            <p:ph type="ftr" sz="quarter" idx="3"/>
+          </p:nvPr>
+        </p:nvSpPr>
+        <p:spPr>
+          <a:xfrm>
+            <a:off x="52387" y="6573836"/>
+            <a:ext cx="2986087" cy="365125"/>
+          </a:xfrm>
+        </p:spPr>
+        <p:txBody>
+          <a:bodyPr/>
+          <a:lstStyle/>
+          <a:p>
+            <a:r>
+              <a:rPr lang="en-CA" dirty="0"/>
+              <a:t>CS321: Advanced Programming Techniques</a:t>
+            </a:r>
+          </a:p>
+        </p:txBody>
+      </p:sp>
     </p:spTree>
     <p:extLst>
       <p:ext uri="{BB962C8B-B14F-4D97-AF65-F5344CB8AC3E}">
-        <p14:creationId xmlns:p14="http://schemas.microsoft.com/office/powerpoint/2010/main" xmlns="" val="2325078793"/>
+        <p14:creationId xmlns:p14="http://schemas.microsoft.com/office/powerpoint/2010/main" xmlns="" val="154311472"/>
       </p:ext>
     </p:extLst>
   </p:cSld>
@@ -9632,7 +9683,13 @@
       </p:grpSpPr>
       <p:sp>
         <p:nvSpPr>
-          <p:cNvPr id="2" name="Title 1"/>
+          <p:cNvPr id="2" name="Title 1">
+            <a:extLst>
+              <a:ext uri="{FF2B5EF4-FFF2-40B4-BE49-F238E27FC236}">
+                <a16:creationId xmlns:a16="http://schemas.microsoft.com/office/drawing/2014/main" xmlns="" id="{0A921011-18FC-475B-B283-A4E0D7C676E2}"/>
+              </a:ext>
+            </a:extLst>
+          </p:cNvPr>
           <p:cNvSpPr>
             <a:spLocks noGrp="1"/>
           </p:cNvSpPr>
@@ -9645,25 +9702,22 @@
           <a:bodyPr/>
           <a:lstStyle/>
           <a:p>
-            <a:pPr>
-              <a:buClr>
-                <a:srgbClr val="000000"/>
-              </a:buClr>
-              <a:buSzPct val="38000"/>
-              <a:buFont typeface="StarBats" charset="0"/>
-              <a:buNone/>
-            </a:pPr>
-            <a:r>
-              <a:rPr lang="en-US" altLang="en-US" sz="4400" i="0" dirty="0" smtClean="0"/>
-              <a:t>Key Acronyms: SOLID</a:t>
-            </a:r>
-            <a:endParaRPr lang="en-US" altLang="en-US" sz="4400" i="0" dirty="0"/>
-          </a:p>
-        </p:txBody>
-      </p:sp>
-      <p:sp>
-        <p:nvSpPr>
-          <p:cNvPr id="3" name="Content Placeholder 2"/>
+            <a:r>
+              <a:rPr lang="en-CA" dirty="0"/>
+              <a:t>Inner and Anonymous Classes/Methods</a:t>
+            </a:r>
+          </a:p>
+        </p:txBody>
+      </p:sp>
+      <p:sp>
+        <p:nvSpPr>
+          <p:cNvPr id="3" name="Content Placeholder 2">
+            <a:extLst>
+              <a:ext uri="{FF2B5EF4-FFF2-40B4-BE49-F238E27FC236}">
+                <a16:creationId xmlns:a16="http://schemas.microsoft.com/office/drawing/2014/main" xmlns="" id="{E519EC20-1B41-4FDC-B979-74F142F690A2}"/>
+              </a:ext>
+            </a:extLst>
+          </p:cNvPr>
           <p:cNvSpPr>
             <a:spLocks noGrp="1"/>
           </p:cNvSpPr>
@@ -9671,103 +9725,6 @@
             <p:ph idx="1"/>
           </p:nvPr>
         </p:nvSpPr>
-        <p:spPr>
-          <a:xfrm>
-            <a:off x="640874" y="1168400"/>
-            <a:ext cx="10515600" cy="5378703"/>
-          </a:xfrm>
-        </p:spPr>
-        <p:txBody>
-          <a:bodyPr>
-            <a:normAutofit/>
-          </a:bodyPr>
-          <a:lstStyle/>
-          <a:p>
-            <a:r>
-              <a:rPr lang="en-US" b="1" dirty="0" smtClean="0"/>
-              <a:t>SOLID</a:t>
-            </a:r>
-            <a:r>
-              <a:rPr lang="en-US" dirty="0" smtClean="0"/>
-              <a:t>: </a:t>
-            </a:r>
-          </a:p>
-          <a:p>
-            <a:pPr lvl="1"/>
-            <a:r>
-              <a:rPr lang="en-CA" b="1" dirty="0" smtClean="0"/>
-              <a:t>Single Responsibility Principle</a:t>
-            </a:r>
-            <a:r>
-              <a:rPr lang="en-CA" dirty="0" smtClean="0"/>
-              <a:t>: Classes/objects only have one responsibility/job.</a:t>
-            </a:r>
-          </a:p>
-          <a:p>
-            <a:pPr lvl="1"/>
-            <a:r>
-              <a:rPr lang="en-CA" b="1" dirty="0" smtClean="0"/>
-              <a:t>Open-Closed Principle</a:t>
-            </a:r>
-            <a:r>
-              <a:rPr lang="en-CA" dirty="0" smtClean="0"/>
-              <a:t>:  Classes should be open for extension, but closed for modification.</a:t>
-            </a:r>
-          </a:p>
-          <a:p>
-            <a:pPr lvl="1"/>
-            <a:r>
-              <a:rPr lang="en-CA" b="1" dirty="0" err="1" smtClean="0"/>
-              <a:t>Liskov</a:t>
-            </a:r>
-            <a:r>
-              <a:rPr lang="en-CA" b="1" dirty="0" smtClean="0"/>
-              <a:t> Substitution Principle</a:t>
-            </a:r>
-            <a:r>
-              <a:rPr lang="en-CA" dirty="0" smtClean="0"/>
-              <a:t>: Given a parent class and a subclass, the subclass can be used anywhere a parent class is with no issues and should behave in an indistinguishable manner.</a:t>
-            </a:r>
-          </a:p>
-          <a:p>
-            <a:pPr lvl="1"/>
-            <a:r>
-              <a:rPr lang="en-CA" b="1" dirty="0" smtClean="0"/>
-              <a:t>Interface Segregation Principle</a:t>
-            </a:r>
-            <a:r>
-              <a:rPr lang="en-CA" dirty="0" smtClean="0"/>
-              <a:t>: Users of a class should not be forced to depend on interfaces they don’t need/use.</a:t>
-            </a:r>
-          </a:p>
-          <a:p>
-            <a:pPr lvl="1"/>
-            <a:r>
-              <a:rPr lang="en-CA" b="1" dirty="0" smtClean="0"/>
-              <a:t>Dependency Inversion Principle</a:t>
-            </a:r>
-            <a:r>
-              <a:rPr lang="en-CA" dirty="0" smtClean="0"/>
-              <a:t>: Classes/objects in use shouldn’t depend on other concrete classes, instead depend on abstractions. In other words, concrete high-level modules should not depend on concrete low-level modules – depend on abstractions of the low-level modules instead.</a:t>
-            </a:r>
-            <a:endParaRPr lang="en-CA" b="1" dirty="0" smtClean="0"/>
-          </a:p>
-          <a:p>
-            <a:pPr lvl="1"/>
-            <a:endParaRPr lang="en-US" dirty="0"/>
-          </a:p>
-        </p:txBody>
-      </p:sp>
-      <p:sp>
-        <p:nvSpPr>
-          <p:cNvPr id="10" name="Footer Placeholder 9"/>
-          <p:cNvSpPr>
-            <a:spLocks noGrp="1"/>
-          </p:cNvSpPr>
-          <p:nvPr>
-            <p:ph type="ftr" sz="quarter" idx="3"/>
-          </p:nvPr>
-        </p:nvSpPr>
         <p:spPr/>
         <p:txBody>
           <a:bodyPr/>
@@ -9775,14 +9732,46 @@
           <a:p>
             <a:r>
               <a:rPr lang="en-CA" dirty="0"/>
-              <a:t>CS321: Advanced Programming Techniques</a:t>
-            </a:r>
-          </a:p>
-        </p:txBody>
-      </p:sp>
-      <p:sp>
-        <p:nvSpPr>
-          <p:cNvPr id="12" name="Slide Number Placeholder 11"/>
+              <a:t>Exists in many languages</a:t>
+            </a:r>
+          </a:p>
+          <a:p>
+            <a:endParaRPr lang="en-CA" dirty="0"/>
+          </a:p>
+          <a:p>
+            <a:r>
+              <a:rPr lang="en-CA" dirty="0"/>
+              <a:t>Useful to hide (encapsulate) and organize functionality within an outer class (e.g. </a:t>
+            </a:r>
+            <a:r>
+              <a:rPr lang="en-CA" dirty="0" err="1"/>
+              <a:t>LinkedListCell</a:t>
+            </a:r>
+            <a:r>
+              <a:rPr lang="en-CA" dirty="0"/>
+              <a:t> in a LinkedList, Node in a Tree)</a:t>
+            </a:r>
+          </a:p>
+          <a:p>
+            <a:endParaRPr lang="en-CA" dirty="0"/>
+          </a:p>
+          <a:p>
+            <a:r>
+              <a:rPr lang="en-CA" dirty="0"/>
+              <a:t>Quickly create an object that inherits from an interface as a method argument</a:t>
+            </a:r>
+          </a:p>
+        </p:txBody>
+      </p:sp>
+      <p:sp>
+        <p:nvSpPr>
+          <p:cNvPr id="6" name="Slide Number Placeholder 5">
+            <a:extLst>
+              <a:ext uri="{FF2B5EF4-FFF2-40B4-BE49-F238E27FC236}">
+                <a16:creationId xmlns:a16="http://schemas.microsoft.com/office/drawing/2014/main" xmlns="" id="{2BFBBD55-E3C1-4C22-8665-BC6CC0B5B10F}"/>
+              </a:ext>
+            </a:extLst>
+          </p:cNvPr>
           <p:cNvSpPr>
             <a:spLocks noGrp="1"/>
           </p:cNvSpPr>
@@ -9807,10 +9796,37 @@
           </a:p>
         </p:txBody>
       </p:sp>
+      <p:sp>
+        <p:nvSpPr>
+          <p:cNvPr id="7" name="Footer Placeholder 9"/>
+          <p:cNvSpPr>
+            <a:spLocks noGrp="1"/>
+          </p:cNvSpPr>
+          <p:nvPr>
+            <p:ph type="ftr" sz="quarter" idx="3"/>
+          </p:nvPr>
+        </p:nvSpPr>
+        <p:spPr>
+          <a:xfrm>
+            <a:off x="52387" y="6573836"/>
+            <a:ext cx="2986087" cy="365125"/>
+          </a:xfrm>
+        </p:spPr>
+        <p:txBody>
+          <a:bodyPr/>
+          <a:lstStyle/>
+          <a:p>
+            <a:r>
+              <a:rPr lang="en-CA" dirty="0"/>
+              <a:t>CS321: Advanced Programming Techniques</a:t>
+            </a:r>
+          </a:p>
+        </p:txBody>
+      </p:sp>
     </p:spTree>
     <p:extLst>
       <p:ext uri="{BB962C8B-B14F-4D97-AF65-F5344CB8AC3E}">
-        <p14:creationId xmlns:p14="http://schemas.microsoft.com/office/powerpoint/2010/main" xmlns="" val="2325078793"/>
+        <p14:creationId xmlns:p14="http://schemas.microsoft.com/office/powerpoint/2010/main" xmlns="" val="2701822725"/>
       </p:ext>
     </p:extLst>
   </p:cSld>
@@ -9846,13 +9862,7 @@
       </p:grpSpPr>
       <p:sp>
         <p:nvSpPr>
-          <p:cNvPr id="2" name="Title 1">
-            <a:extLst>
-              <a:ext uri="{FF2B5EF4-FFF2-40B4-BE49-F238E27FC236}">
-                <a16:creationId xmlns:a16="http://schemas.microsoft.com/office/drawing/2014/main" xmlns="" id="{D3144BBF-69E2-47B3-A5D4-FB03B54F0F96}"/>
-              </a:ext>
-            </a:extLst>
-          </p:cNvPr>
+          <p:cNvPr id="2" name="Title 1"/>
           <p:cNvSpPr>
             <a:spLocks noGrp="1"/>
           </p:cNvSpPr>
@@ -9862,115 +9872,165 @@
         </p:nvSpPr>
         <p:spPr/>
         <p:txBody>
+          <a:bodyPr>
+            <a:normAutofit/>
+          </a:bodyPr>
+          <a:lstStyle/>
+          <a:p>
+            <a:r>
+              <a:rPr lang="en-US" altLang="en-US" sz="4000" dirty="0"/>
+              <a:t>Java Iterators (in </a:t>
+            </a:r>
+            <a:r>
+              <a:rPr lang="en-US" altLang="en-US" sz="4000" b="0" dirty="0" err="1">
+                <a:latin typeface="Courier New" charset="0"/>
+              </a:rPr>
+              <a:t>java.util</a:t>
+            </a:r>
+            <a:r>
+              <a:rPr lang="en-US" altLang="en-US" sz="4000" dirty="0"/>
+              <a:t>)</a:t>
+            </a:r>
+            <a:endParaRPr lang="en-CA" sz="4000" dirty="0"/>
+          </a:p>
+        </p:txBody>
+      </p:sp>
+      <p:sp>
+        <p:nvSpPr>
+          <p:cNvPr id="3" name="Content Placeholder 2"/>
+          <p:cNvSpPr>
+            <a:spLocks noGrp="1"/>
+          </p:cNvSpPr>
+          <p:nvPr>
+            <p:ph idx="1"/>
+          </p:nvPr>
+        </p:nvSpPr>
+        <p:spPr>
+          <a:xfrm>
+            <a:off x="640874" y="1168400"/>
+            <a:ext cx="10515600" cy="5405435"/>
+          </a:xfrm>
+        </p:spPr>
+        <p:txBody>
+          <a:bodyPr>
+            <a:normAutofit fontScale="92500" lnSpcReduction="10000"/>
+          </a:bodyPr>
+          <a:lstStyle/>
+          <a:p>
+            <a:pPr marL="342900" indent="-342900">
+              <a:defRPr/>
+            </a:pPr>
+            <a:endParaRPr lang="en-US" altLang="en-US" dirty="0"/>
+          </a:p>
+          <a:p>
+            <a:pPr marL="342900" indent="-342900">
+              <a:defRPr/>
+            </a:pPr>
+            <a:endParaRPr lang="en-US" altLang="en-US" dirty="0"/>
+          </a:p>
+          <a:p>
+            <a:pPr marL="342900" indent="-342900">
+              <a:defRPr/>
+            </a:pPr>
+            <a:endParaRPr lang="en-US" altLang="en-US" dirty="0"/>
+          </a:p>
+          <a:p>
+            <a:pPr marL="342900" indent="-342900">
+              <a:defRPr/>
+            </a:pPr>
+            <a:endParaRPr lang="en-US" altLang="en-US" dirty="0"/>
+          </a:p>
+          <a:p>
+            <a:pPr marL="342900" indent="-342900">
+              <a:defRPr/>
+            </a:pPr>
+            <a:endParaRPr lang="en-US" altLang="en-US" dirty="0"/>
+          </a:p>
+          <a:p>
+            <a:pPr marL="342900" indent="-342900">
+              <a:defRPr/>
+            </a:pPr>
+            <a:endParaRPr lang="en-US" altLang="en-US" dirty="0"/>
+          </a:p>
+          <a:p>
+            <a:pPr marL="342900" indent="-342900">
+              <a:defRPr/>
+            </a:pPr>
+            <a:r>
+              <a:rPr lang="en-US" altLang="en-US" dirty="0"/>
+              <a:t>remove safely deletes the object most recently accessed with next.</a:t>
+            </a:r>
+          </a:p>
+          <a:p>
+            <a:pPr marL="800100" lvl="1" indent="-342900">
+              <a:defRPr/>
+            </a:pPr>
+            <a:r>
+              <a:rPr lang="en-US" altLang="en-US" dirty="0"/>
+              <a:t>remove need not be supported.</a:t>
+            </a:r>
+          </a:p>
+          <a:p>
+            <a:pPr marL="342900" indent="-342900">
+              <a:defRPr/>
+            </a:pPr>
+            <a:endParaRPr lang="en-US" altLang="en-US" dirty="0"/>
+          </a:p>
+          <a:p>
+            <a:pPr marL="342900" indent="-342900">
+              <a:defRPr/>
+            </a:pPr>
+            <a:r>
+              <a:rPr lang="en-US" altLang="en-US" dirty="0" err="1"/>
+              <a:t>hasNext</a:t>
+            </a:r>
+            <a:r>
+              <a:rPr lang="en-US" altLang="en-US" dirty="0"/>
+              <a:t> returns true if there are more items in a collection.</a:t>
+            </a:r>
+          </a:p>
+          <a:p>
+            <a:pPr marL="342900" indent="-342900">
+              <a:defRPr/>
+            </a:pPr>
+            <a:endParaRPr lang="en-US" altLang="en-US" dirty="0"/>
+          </a:p>
+          <a:p>
+            <a:pPr marL="342900" indent="-342900">
+              <a:defRPr/>
+            </a:pPr>
+            <a:r>
+              <a:rPr lang="en-US" altLang="en-US" dirty="0"/>
+              <a:t>next will return the next item in a collection</a:t>
+            </a:r>
+          </a:p>
+        </p:txBody>
+      </p:sp>
+      <p:sp>
+        <p:nvSpPr>
+          <p:cNvPr id="10" name="Footer Placeholder 9"/>
+          <p:cNvSpPr>
+            <a:spLocks noGrp="1"/>
+          </p:cNvSpPr>
+          <p:nvPr>
+            <p:ph type="ftr" sz="quarter" idx="3"/>
+          </p:nvPr>
+        </p:nvSpPr>
+        <p:spPr/>
+        <p:txBody>
           <a:bodyPr/>
           <a:lstStyle/>
           <a:p>
             <a:r>
               <a:rPr lang="en-CA" dirty="0"/>
-              <a:t>UML, &amp; Version Control Systems</a:t>
-            </a:r>
-          </a:p>
-        </p:txBody>
-      </p:sp>
-      <p:sp>
-        <p:nvSpPr>
-          <p:cNvPr id="3" name="Content Placeholder 2">
-            <a:extLst>
-              <a:ext uri="{FF2B5EF4-FFF2-40B4-BE49-F238E27FC236}">
-                <a16:creationId xmlns:a16="http://schemas.microsoft.com/office/drawing/2014/main" xmlns="" id="{B981305C-A702-4FE5-A134-6B1E026A73CE}"/>
-              </a:ext>
-            </a:extLst>
-          </p:cNvPr>
-          <p:cNvSpPr>
-            <a:spLocks noGrp="1"/>
-          </p:cNvSpPr>
-          <p:nvPr>
-            <p:ph idx="1"/>
-          </p:nvPr>
-        </p:nvSpPr>
-        <p:spPr/>
-        <p:txBody>
-          <a:bodyPr/>
-          <a:lstStyle/>
-          <a:p>
-            <a:r>
-              <a:rPr lang="en-CA" dirty="0"/>
-              <a:t>UML</a:t>
-            </a:r>
-          </a:p>
-          <a:p>
-            <a:pPr lvl="1"/>
-            <a:r>
-              <a:rPr lang="en-CA" dirty="0"/>
-              <a:t>Useful for conveying complex architectural solutions</a:t>
-            </a:r>
-          </a:p>
-          <a:p>
-            <a:pPr lvl="1"/>
-            <a:r>
-              <a:rPr lang="en-CA" dirty="0"/>
-              <a:t>Plenty of tools available online to help you build them and properly follow the conventions</a:t>
-            </a:r>
-          </a:p>
-          <a:p>
-            <a:r>
-              <a:rPr lang="en-CA" dirty="0"/>
-              <a:t>Version Control Systems</a:t>
-            </a:r>
-          </a:p>
-          <a:p>
-            <a:pPr lvl="1"/>
-            <a:r>
-              <a:rPr lang="en-CA" dirty="0"/>
-              <a:t>Immutable history</a:t>
-            </a:r>
-          </a:p>
-          <a:p>
-            <a:pPr lvl="1"/>
-            <a:r>
-              <a:rPr lang="en-CA" dirty="0"/>
-              <a:t>Many kinds, with Git and Mercurial being a couple of the most popular</a:t>
-            </a:r>
-          </a:p>
-          <a:p>
-            <a:pPr lvl="1"/>
-            <a:r>
-              <a:rPr lang="en-CA" dirty="0"/>
-              <a:t>Git is the VCS</a:t>
-            </a:r>
-          </a:p>
-          <a:p>
-            <a:pPr lvl="1"/>
-            <a:r>
-              <a:rPr lang="en-CA" dirty="0" err="1"/>
-              <a:t>Github</a:t>
-            </a:r>
-            <a:r>
-              <a:rPr lang="en-CA" dirty="0"/>
-              <a:t> is a host for Git repositories</a:t>
-            </a:r>
-          </a:p>
-          <a:p>
-            <a:pPr marL="457200" lvl="1" indent="0">
-              <a:buNone/>
-            </a:pPr>
-            <a:endParaRPr lang="en-CA" dirty="0"/>
-          </a:p>
-          <a:p>
-            <a:pPr lvl="1"/>
-            <a:endParaRPr lang="en-CA" dirty="0"/>
-          </a:p>
-        </p:txBody>
-      </p:sp>
-      <p:sp>
-        <p:nvSpPr>
-          <p:cNvPr id="6" name="Slide Number Placeholder 5">
-            <a:extLst>
-              <a:ext uri="{FF2B5EF4-FFF2-40B4-BE49-F238E27FC236}">
-                <a16:creationId xmlns:a16="http://schemas.microsoft.com/office/drawing/2014/main" xmlns="" id="{E0B06360-FB4C-4A3F-AFC2-967508E6478B}"/>
-              </a:ext>
-            </a:extLst>
-          </p:cNvPr>
+              <a:t>CS321: Advanced Programming Techniques</a:t>
+            </a:r>
+          </a:p>
+        </p:txBody>
+      </p:sp>
+      <p:sp>
+        <p:nvSpPr>
+          <p:cNvPr id="12" name="Slide Number Placeholder 11"/>
           <p:cNvSpPr>
             <a:spLocks noGrp="1"/>
           </p:cNvSpPr>
@@ -9997,27 +10057,110 @@
       </p:sp>
       <p:sp>
         <p:nvSpPr>
-          <p:cNvPr id="7" name="Footer Placeholder 9"/>
-          <p:cNvSpPr>
-            <a:spLocks noGrp="1"/>
-          </p:cNvSpPr>
-          <p:nvPr>
-            <p:ph type="ftr" sz="quarter" idx="3"/>
-          </p:nvPr>
-        </p:nvSpPr>
-        <p:spPr>
+          <p:cNvPr id="7" name="Text Box 2">
+            <a:extLst>
+              <a:ext uri="{FF2B5EF4-FFF2-40B4-BE49-F238E27FC236}">
+                <a16:creationId xmlns:a16="http://schemas.microsoft.com/office/drawing/2014/main" xmlns="" id="{FCE9DDDC-8F7E-44FA-97F1-BF6F02C1B1A8}"/>
+              </a:ext>
+            </a:extLst>
+          </p:cNvPr>
+          <p:cNvSpPr txBox="1">
+            <a:spLocks noChangeArrowheads="1"/>
+          </p:cNvSpPr>
+          <p:nvPr/>
+        </p:nvSpPr>
+        <p:spPr bwMode="auto">
           <a:xfrm>
-            <a:off x="52387" y="6573836"/>
-            <a:ext cx="2986087" cy="365125"/>
+            <a:off x="3286432" y="1622323"/>
+            <a:ext cx="4549775" cy="1314450"/>
           </a:xfrm>
+          <a:prstGeom prst="rect">
+            <a:avLst/>
+          </a:prstGeom>
+          <a:solidFill>
+            <a:srgbClr val="FFFF00"/>
+          </a:solidFill>
+          <a:ln>
+            <a:noFill/>
+          </a:ln>
+          <a:effectLst/>
         </p:spPr>
         <p:txBody>
-          <a:bodyPr/>
-          <a:lstStyle/>
-          <a:p>
-            <a:r>
-              <a:rPr lang="en-CA" dirty="0"/>
-              <a:t>CS321: Advanced Programming Techniques</a:t>
+          <a:bodyPr>
+            <a:spAutoFit/>
+          </a:bodyPr>
+          <a:lstStyle/>
+          <a:p>
+            <a:pPr>
+              <a:defRPr/>
+            </a:pPr>
+            <a:r>
+              <a:rPr lang="en-US" altLang="en-US" sz="1600" b="1" dirty="0">
+                <a:latin typeface="Courier New" charset="0"/>
+              </a:rPr>
+              <a:t>public </a:t>
+            </a:r>
+            <a:r>
+              <a:rPr lang="en-US" altLang="en-US" sz="1600" b="1" dirty="0" err="1">
+                <a:latin typeface="Courier New" charset="0"/>
+              </a:rPr>
+              <a:t>boolean</a:t>
+            </a:r>
+            <a:r>
+              <a:rPr lang="en-US" altLang="en-US" sz="1600" b="1" dirty="0">
+                <a:latin typeface="Courier New" charset="0"/>
+              </a:rPr>
+              <a:t> </a:t>
+            </a:r>
+            <a:r>
+              <a:rPr lang="en-US" altLang="en-US" sz="1600" b="1" dirty="0" err="1">
+                <a:latin typeface="Courier New" charset="0"/>
+              </a:rPr>
+              <a:t>hasNext</a:t>
+            </a:r>
+            <a:r>
+              <a:rPr lang="en-US" altLang="en-US" sz="1600" b="1" dirty="0">
+                <a:latin typeface="Courier New" charset="0"/>
+              </a:rPr>
+              <a:t>()</a:t>
+            </a:r>
+          </a:p>
+          <a:p>
+            <a:pPr>
+              <a:defRPr/>
+            </a:pPr>
+            <a:endParaRPr lang="en-US" altLang="en-US" sz="1600" b="1" dirty="0">
+              <a:latin typeface="Courier New" charset="0"/>
+            </a:endParaRPr>
+          </a:p>
+          <a:p>
+            <a:pPr>
+              <a:defRPr/>
+            </a:pPr>
+            <a:r>
+              <a:rPr lang="en-US" altLang="en-US" sz="1600" b="1" dirty="0">
+                <a:latin typeface="Courier New" charset="0"/>
+              </a:rPr>
+              <a:t>public Object next()</a:t>
+            </a:r>
+          </a:p>
+          <a:p>
+            <a:pPr>
+              <a:defRPr/>
+            </a:pPr>
+            <a:endParaRPr lang="en-US" altLang="en-US" sz="1600" b="1" dirty="0">
+              <a:latin typeface="Courier New" charset="0"/>
+            </a:endParaRPr>
+          </a:p>
+          <a:p>
+            <a:pPr>
+              <a:defRPr/>
+            </a:pPr>
+            <a:r>
+              <a:rPr lang="en-US" altLang="en-US" sz="1600" b="1" dirty="0">
+                <a:latin typeface="Courier New" charset="0"/>
+              </a:rPr>
+              <a:t>public void remove()</a:t>
             </a:r>
           </a:p>
         </p:txBody>
@@ -10025,7 +10168,7 @@
     </p:spTree>
     <p:extLst>
       <p:ext uri="{BB962C8B-B14F-4D97-AF65-F5344CB8AC3E}">
-        <p14:creationId xmlns:p14="http://schemas.microsoft.com/office/powerpoint/2010/main" xmlns="" val="154311472"/>
+        <p14:creationId xmlns:p14="http://schemas.microsoft.com/office/powerpoint/2010/main" xmlns="" val="3854217108"/>
       </p:ext>
     </p:extLst>
   </p:cSld>
@@ -10061,13 +10204,7 @@
       </p:grpSpPr>
       <p:sp>
         <p:nvSpPr>
-          <p:cNvPr id="2" name="Title 1">
-            <a:extLst>
-              <a:ext uri="{FF2B5EF4-FFF2-40B4-BE49-F238E27FC236}">
-                <a16:creationId xmlns:a16="http://schemas.microsoft.com/office/drawing/2014/main" xmlns="" id="{0A921011-18FC-475B-B283-A4E0D7C676E2}"/>
-              </a:ext>
-            </a:extLst>
-          </p:cNvPr>
+          <p:cNvPr id="2" name="Title 1"/>
           <p:cNvSpPr>
             <a:spLocks noGrp="1"/>
           </p:cNvSpPr>
@@ -10081,195 +10218,10 @@
           <a:lstStyle/>
           <a:p>
             <a:r>
-              <a:rPr lang="en-CA" dirty="0"/>
-              <a:t>Inner and Anonymous Classes/Methods</a:t>
-            </a:r>
-          </a:p>
-        </p:txBody>
-      </p:sp>
-      <p:sp>
-        <p:nvSpPr>
-          <p:cNvPr id="3" name="Content Placeholder 2">
-            <a:extLst>
-              <a:ext uri="{FF2B5EF4-FFF2-40B4-BE49-F238E27FC236}">
-                <a16:creationId xmlns:a16="http://schemas.microsoft.com/office/drawing/2014/main" xmlns="" id="{E519EC20-1B41-4FDC-B979-74F142F690A2}"/>
-              </a:ext>
-            </a:extLst>
-          </p:cNvPr>
-          <p:cNvSpPr>
-            <a:spLocks noGrp="1"/>
-          </p:cNvSpPr>
-          <p:nvPr>
-            <p:ph idx="1"/>
-          </p:nvPr>
-        </p:nvSpPr>
-        <p:spPr/>
-        <p:txBody>
-          <a:bodyPr/>
-          <a:lstStyle/>
-          <a:p>
-            <a:r>
-              <a:rPr lang="en-CA" dirty="0"/>
-              <a:t>Exists in many languages</a:t>
-            </a:r>
-          </a:p>
-          <a:p>
+              <a:rPr lang="en-US" dirty="0"/>
+              <a:t>Using an Iterator</a:t>
+            </a:r>
             <a:endParaRPr lang="en-CA" dirty="0"/>
-          </a:p>
-          <a:p>
-            <a:r>
-              <a:rPr lang="en-CA" dirty="0"/>
-              <a:t>Useful to hide (encapsulate) and organize functionality within an outer class (e.g. </a:t>
-            </a:r>
-            <a:r>
-              <a:rPr lang="en-CA" dirty="0" err="1"/>
-              <a:t>LinkedListCell</a:t>
-            </a:r>
-            <a:r>
-              <a:rPr lang="en-CA" dirty="0"/>
-              <a:t> in a LinkedList, Node in a Tree)</a:t>
-            </a:r>
-          </a:p>
-          <a:p>
-            <a:endParaRPr lang="en-CA" dirty="0"/>
-          </a:p>
-          <a:p>
-            <a:r>
-              <a:rPr lang="en-CA" dirty="0"/>
-              <a:t>Quickly create an object that inherits from an interface as a method argument</a:t>
-            </a:r>
-          </a:p>
-        </p:txBody>
-      </p:sp>
-      <p:sp>
-        <p:nvSpPr>
-          <p:cNvPr id="6" name="Slide Number Placeholder 5">
-            <a:extLst>
-              <a:ext uri="{FF2B5EF4-FFF2-40B4-BE49-F238E27FC236}">
-                <a16:creationId xmlns:a16="http://schemas.microsoft.com/office/drawing/2014/main" xmlns="" id="{2BFBBD55-E3C1-4C22-8665-BC6CC0B5B10F}"/>
-              </a:ext>
-            </a:extLst>
-          </p:cNvPr>
-          <p:cNvSpPr>
-            <a:spLocks noGrp="1"/>
-          </p:cNvSpPr>
-          <p:nvPr>
-            <p:ph type="sldNum" sz="quarter" idx="4"/>
-          </p:nvPr>
-        </p:nvSpPr>
-        <p:spPr/>
-        <p:txBody>
-          <a:bodyPr/>
-          <a:lstStyle/>
-          <a:p>
-            <a:fld id="{5174927E-2439-42C0-9720-7BBCA09BF46F}" type="slidenum">
-              <a:rPr lang="en-CA" smtClean="0"/>
-              <a:pPr/>
-              <a:t>27</a:t>
-            </a:fld>
-            <a:r>
-              <a:rPr lang="en-CA" dirty="0"/>
-              <a:t> </a:t>
-            </a:r>
-          </a:p>
-        </p:txBody>
-      </p:sp>
-      <p:sp>
-        <p:nvSpPr>
-          <p:cNvPr id="7" name="Footer Placeholder 9"/>
-          <p:cNvSpPr>
-            <a:spLocks noGrp="1"/>
-          </p:cNvSpPr>
-          <p:nvPr>
-            <p:ph type="ftr" sz="quarter" idx="3"/>
-          </p:nvPr>
-        </p:nvSpPr>
-        <p:spPr>
-          <a:xfrm>
-            <a:off x="52387" y="6573836"/>
-            <a:ext cx="2986087" cy="365125"/>
-          </a:xfrm>
-        </p:spPr>
-        <p:txBody>
-          <a:bodyPr/>
-          <a:lstStyle/>
-          <a:p>
-            <a:r>
-              <a:rPr lang="en-CA" dirty="0"/>
-              <a:t>CS321: Advanced Programming Techniques</a:t>
-            </a:r>
-          </a:p>
-        </p:txBody>
-      </p:sp>
-    </p:spTree>
-    <p:extLst>
-      <p:ext uri="{BB962C8B-B14F-4D97-AF65-F5344CB8AC3E}">
-        <p14:creationId xmlns:p14="http://schemas.microsoft.com/office/powerpoint/2010/main" xmlns="" val="2701822725"/>
-      </p:ext>
-    </p:extLst>
-  </p:cSld>
-  <p:clrMapOvr>
-    <a:masterClrMapping/>
-  </p:clrMapOvr>
-  <p:timing>
-    <p:tnLst>
-      <p:par>
-        <p:cTn id="1" dur="indefinite" restart="never" nodeType="tmRoot"/>
-      </p:par>
-    </p:tnLst>
-  </p:timing>
-</p:sld>
-</file>
-
-<file path=ppt/slides/slide28.xml><?xml version="1.0" encoding="utf-8"?>
-<p:sld xmlns:a="http://schemas.openxmlformats.org/drawingml/2006/main" xmlns:r="http://schemas.openxmlformats.org/officeDocument/2006/relationships" xmlns:p="http://schemas.openxmlformats.org/presentationml/2006/main">
-  <p:cSld>
-    <p:spTree>
-      <p:nvGrpSpPr>
-        <p:cNvPr id="1" name=""/>
-        <p:cNvGrpSpPr/>
-        <p:nvPr/>
-      </p:nvGrpSpPr>
-      <p:grpSpPr>
-        <a:xfrm>
-          <a:off x="0" y="0"/>
-          <a:ext cx="0" cy="0"/>
-          <a:chOff x="0" y="0"/>
-          <a:chExt cx="0" cy="0"/>
-        </a:xfrm>
-      </p:grpSpPr>
-      <p:sp>
-        <p:nvSpPr>
-          <p:cNvPr id="2" name="Title 1"/>
-          <p:cNvSpPr>
-            <a:spLocks noGrp="1"/>
-          </p:cNvSpPr>
-          <p:nvPr>
-            <p:ph type="title"/>
-          </p:nvPr>
-        </p:nvSpPr>
-        <p:spPr/>
-        <p:txBody>
-          <a:bodyPr>
-            <a:normAutofit/>
-          </a:bodyPr>
-          <a:lstStyle/>
-          <a:p>
-            <a:r>
-              <a:rPr lang="en-US" altLang="en-US" sz="4000" dirty="0"/>
-              <a:t>Java Iterators (in </a:t>
-            </a:r>
-            <a:r>
-              <a:rPr lang="en-US" altLang="en-US" sz="4000" b="0" dirty="0" err="1">
-                <a:latin typeface="Courier New" charset="0"/>
-              </a:rPr>
-              <a:t>java.util</a:t>
-            </a:r>
-            <a:r>
-              <a:rPr lang="en-US" altLang="en-US" sz="4000" dirty="0"/>
-              <a:t>)</a:t>
-            </a:r>
-            <a:endParaRPr lang="en-CA" sz="4000" dirty="0"/>
           </a:p>
         </p:txBody>
       </p:sp>
@@ -10291,336 +10243,6 @@
         </p:spPr>
         <p:txBody>
           <a:bodyPr>
-            <a:normAutofit fontScale="92500" lnSpcReduction="10000"/>
-          </a:bodyPr>
-          <a:lstStyle/>
-          <a:p>
-            <a:pPr marL="342900" indent="-342900">
-              <a:defRPr/>
-            </a:pPr>
-            <a:endParaRPr lang="en-US" altLang="en-US" dirty="0"/>
-          </a:p>
-          <a:p>
-            <a:pPr marL="342900" indent="-342900">
-              <a:defRPr/>
-            </a:pPr>
-            <a:endParaRPr lang="en-US" altLang="en-US" dirty="0"/>
-          </a:p>
-          <a:p>
-            <a:pPr marL="342900" indent="-342900">
-              <a:defRPr/>
-            </a:pPr>
-            <a:endParaRPr lang="en-US" altLang="en-US" dirty="0"/>
-          </a:p>
-          <a:p>
-            <a:pPr marL="342900" indent="-342900">
-              <a:defRPr/>
-            </a:pPr>
-            <a:endParaRPr lang="en-US" altLang="en-US" dirty="0"/>
-          </a:p>
-          <a:p>
-            <a:pPr marL="342900" indent="-342900">
-              <a:defRPr/>
-            </a:pPr>
-            <a:endParaRPr lang="en-US" altLang="en-US" dirty="0"/>
-          </a:p>
-          <a:p>
-            <a:pPr marL="342900" indent="-342900">
-              <a:defRPr/>
-            </a:pPr>
-            <a:endParaRPr lang="en-US" altLang="en-US" dirty="0"/>
-          </a:p>
-          <a:p>
-            <a:pPr marL="342900" indent="-342900">
-              <a:defRPr/>
-            </a:pPr>
-            <a:r>
-              <a:rPr lang="en-US" altLang="en-US" dirty="0"/>
-              <a:t>remove safely deletes the object most recently accessed with next.</a:t>
-            </a:r>
-          </a:p>
-          <a:p>
-            <a:pPr marL="800100" lvl="1" indent="-342900">
-              <a:defRPr/>
-            </a:pPr>
-            <a:r>
-              <a:rPr lang="en-US" altLang="en-US" dirty="0"/>
-              <a:t>remove need not be supported.</a:t>
-            </a:r>
-          </a:p>
-          <a:p>
-            <a:pPr marL="342900" indent="-342900">
-              <a:defRPr/>
-            </a:pPr>
-            <a:endParaRPr lang="en-US" altLang="en-US" dirty="0"/>
-          </a:p>
-          <a:p>
-            <a:pPr marL="342900" indent="-342900">
-              <a:defRPr/>
-            </a:pPr>
-            <a:r>
-              <a:rPr lang="en-US" altLang="en-US" dirty="0" err="1"/>
-              <a:t>hasNext</a:t>
-            </a:r>
-            <a:r>
-              <a:rPr lang="en-US" altLang="en-US" dirty="0"/>
-              <a:t> returns true if there are more items in a collection.</a:t>
-            </a:r>
-          </a:p>
-          <a:p>
-            <a:pPr marL="342900" indent="-342900">
-              <a:defRPr/>
-            </a:pPr>
-            <a:endParaRPr lang="en-US" altLang="en-US" dirty="0"/>
-          </a:p>
-          <a:p>
-            <a:pPr marL="342900" indent="-342900">
-              <a:defRPr/>
-            </a:pPr>
-            <a:r>
-              <a:rPr lang="en-US" altLang="en-US" dirty="0"/>
-              <a:t>next will return the next item in a collection</a:t>
-            </a:r>
-          </a:p>
-        </p:txBody>
-      </p:sp>
-      <p:sp>
-        <p:nvSpPr>
-          <p:cNvPr id="10" name="Footer Placeholder 9"/>
-          <p:cNvSpPr>
-            <a:spLocks noGrp="1"/>
-          </p:cNvSpPr>
-          <p:nvPr>
-            <p:ph type="ftr" sz="quarter" idx="3"/>
-          </p:nvPr>
-        </p:nvSpPr>
-        <p:spPr/>
-        <p:txBody>
-          <a:bodyPr/>
-          <a:lstStyle/>
-          <a:p>
-            <a:r>
-              <a:rPr lang="en-CA" dirty="0"/>
-              <a:t>CS321: Advanced Programming Techniques</a:t>
-            </a:r>
-          </a:p>
-        </p:txBody>
-      </p:sp>
-      <p:sp>
-        <p:nvSpPr>
-          <p:cNvPr id="12" name="Slide Number Placeholder 11"/>
-          <p:cNvSpPr>
-            <a:spLocks noGrp="1"/>
-          </p:cNvSpPr>
-          <p:nvPr>
-            <p:ph type="sldNum" sz="quarter" idx="4"/>
-          </p:nvPr>
-        </p:nvSpPr>
-        <p:spPr/>
-        <p:txBody>
-          <a:bodyPr/>
-          <a:lstStyle/>
-          <a:p>
-            <a:fld id="{5174927E-2439-42C0-9720-7BBCA09BF46F}" type="slidenum">
-              <a:rPr lang="en-CA" smtClean="0"/>
-              <a:pPr/>
-              <a:t>28</a:t>
-            </a:fld>
-            <a:r>
-              <a:rPr lang="en-CA" dirty="0"/>
-              <a:t> </a:t>
-            </a:r>
-          </a:p>
-        </p:txBody>
-      </p:sp>
-      <p:sp>
-        <p:nvSpPr>
-          <p:cNvPr id="7" name="Text Box 2">
-            <a:extLst>
-              <a:ext uri="{FF2B5EF4-FFF2-40B4-BE49-F238E27FC236}">
-                <a16:creationId xmlns:a16="http://schemas.microsoft.com/office/drawing/2014/main" xmlns="" id="{FCE9DDDC-8F7E-44FA-97F1-BF6F02C1B1A8}"/>
-              </a:ext>
-            </a:extLst>
-          </p:cNvPr>
-          <p:cNvSpPr txBox="1">
-            <a:spLocks noChangeArrowheads="1"/>
-          </p:cNvSpPr>
-          <p:nvPr/>
-        </p:nvSpPr>
-        <p:spPr bwMode="auto">
-          <a:xfrm>
-            <a:off x="3286432" y="1622323"/>
-            <a:ext cx="4549775" cy="1314450"/>
-          </a:xfrm>
-          <a:prstGeom prst="rect">
-            <a:avLst/>
-          </a:prstGeom>
-          <a:solidFill>
-            <a:srgbClr val="FFFF00"/>
-          </a:solidFill>
-          <a:ln>
-            <a:noFill/>
-          </a:ln>
-          <a:effectLst/>
-        </p:spPr>
-        <p:txBody>
-          <a:bodyPr>
-            <a:spAutoFit/>
-          </a:bodyPr>
-          <a:lstStyle/>
-          <a:p>
-            <a:pPr>
-              <a:defRPr/>
-            </a:pPr>
-            <a:r>
-              <a:rPr lang="en-US" altLang="en-US" sz="1600" b="1" dirty="0">
-                <a:latin typeface="Courier New" charset="0"/>
-              </a:rPr>
-              <a:t>public </a:t>
-            </a:r>
-            <a:r>
-              <a:rPr lang="en-US" altLang="en-US" sz="1600" b="1" dirty="0" err="1">
-                <a:latin typeface="Courier New" charset="0"/>
-              </a:rPr>
-              <a:t>boolean</a:t>
-            </a:r>
-            <a:r>
-              <a:rPr lang="en-US" altLang="en-US" sz="1600" b="1" dirty="0">
-                <a:latin typeface="Courier New" charset="0"/>
-              </a:rPr>
-              <a:t> </a:t>
-            </a:r>
-            <a:r>
-              <a:rPr lang="en-US" altLang="en-US" sz="1600" b="1" dirty="0" err="1">
-                <a:latin typeface="Courier New" charset="0"/>
-              </a:rPr>
-              <a:t>hasNext</a:t>
-            </a:r>
-            <a:r>
-              <a:rPr lang="en-US" altLang="en-US" sz="1600" b="1" dirty="0">
-                <a:latin typeface="Courier New" charset="0"/>
-              </a:rPr>
-              <a:t>()</a:t>
-            </a:r>
-          </a:p>
-          <a:p>
-            <a:pPr>
-              <a:defRPr/>
-            </a:pPr>
-            <a:endParaRPr lang="en-US" altLang="en-US" sz="1600" b="1" dirty="0">
-              <a:latin typeface="Courier New" charset="0"/>
-            </a:endParaRPr>
-          </a:p>
-          <a:p>
-            <a:pPr>
-              <a:defRPr/>
-            </a:pPr>
-            <a:r>
-              <a:rPr lang="en-US" altLang="en-US" sz="1600" b="1" dirty="0">
-                <a:latin typeface="Courier New" charset="0"/>
-              </a:rPr>
-              <a:t>public Object next()</a:t>
-            </a:r>
-          </a:p>
-          <a:p>
-            <a:pPr>
-              <a:defRPr/>
-            </a:pPr>
-            <a:endParaRPr lang="en-US" altLang="en-US" sz="1600" b="1" dirty="0">
-              <a:latin typeface="Courier New" charset="0"/>
-            </a:endParaRPr>
-          </a:p>
-          <a:p>
-            <a:pPr>
-              <a:defRPr/>
-            </a:pPr>
-            <a:r>
-              <a:rPr lang="en-US" altLang="en-US" sz="1600" b="1" dirty="0">
-                <a:latin typeface="Courier New" charset="0"/>
-              </a:rPr>
-              <a:t>public void remove()</a:t>
-            </a:r>
-          </a:p>
-        </p:txBody>
-      </p:sp>
-    </p:spTree>
-    <p:extLst>
-      <p:ext uri="{BB962C8B-B14F-4D97-AF65-F5344CB8AC3E}">
-        <p14:creationId xmlns:p14="http://schemas.microsoft.com/office/powerpoint/2010/main" xmlns="" val="3854217108"/>
-      </p:ext>
-    </p:extLst>
-  </p:cSld>
-  <p:clrMapOvr>
-    <a:masterClrMapping/>
-  </p:clrMapOvr>
-  <p:timing>
-    <p:tnLst>
-      <p:par>
-        <p:cTn id="1" dur="indefinite" restart="never" nodeType="tmRoot"/>
-      </p:par>
-    </p:tnLst>
-  </p:timing>
-</p:sld>
-</file>
-
-<file path=ppt/slides/slide29.xml><?xml version="1.0" encoding="utf-8"?>
-<p:sld xmlns:a="http://schemas.openxmlformats.org/drawingml/2006/main" xmlns:r="http://schemas.openxmlformats.org/officeDocument/2006/relationships" xmlns:p="http://schemas.openxmlformats.org/presentationml/2006/main">
-  <p:cSld>
-    <p:spTree>
-      <p:nvGrpSpPr>
-        <p:cNvPr id="1" name=""/>
-        <p:cNvGrpSpPr/>
-        <p:nvPr/>
-      </p:nvGrpSpPr>
-      <p:grpSpPr>
-        <a:xfrm>
-          <a:off x="0" y="0"/>
-          <a:ext cx="0" cy="0"/>
-          <a:chOff x="0" y="0"/>
-          <a:chExt cx="0" cy="0"/>
-        </a:xfrm>
-      </p:grpSpPr>
-      <p:sp>
-        <p:nvSpPr>
-          <p:cNvPr id="2" name="Title 1"/>
-          <p:cNvSpPr>
-            <a:spLocks noGrp="1"/>
-          </p:cNvSpPr>
-          <p:nvPr>
-            <p:ph type="title"/>
-          </p:nvPr>
-        </p:nvSpPr>
-        <p:spPr/>
-        <p:txBody>
-          <a:bodyPr/>
-          <a:lstStyle/>
-          <a:p>
-            <a:r>
-              <a:rPr lang="en-US" dirty="0"/>
-              <a:t>Using an Iterator</a:t>
-            </a:r>
-            <a:endParaRPr lang="en-CA" dirty="0"/>
-          </a:p>
-        </p:txBody>
-      </p:sp>
-      <p:sp>
-        <p:nvSpPr>
-          <p:cNvPr id="3" name="Content Placeholder 2"/>
-          <p:cNvSpPr>
-            <a:spLocks noGrp="1"/>
-          </p:cNvSpPr>
-          <p:nvPr>
-            <p:ph idx="1"/>
-          </p:nvPr>
-        </p:nvSpPr>
-        <p:spPr>
-          <a:xfrm>
-            <a:off x="640874" y="1168400"/>
-            <a:ext cx="10515600" cy="5405435"/>
-          </a:xfrm>
-        </p:spPr>
-        <p:txBody>
-          <a:bodyPr>
             <a:normAutofit/>
           </a:bodyPr>
           <a:lstStyle/>
@@ -10677,7 +10299,7 @@
             <a:fld id="{5174927E-2439-42C0-9720-7BBCA09BF46F}" type="slidenum">
               <a:rPr lang="en-CA" smtClean="0"/>
               <a:pPr/>
-              <a:t>29</a:t>
+              <a:t>27</a:t>
             </a:fld>
             <a:r>
               <a:rPr lang="en-CA" dirty="0"/>
@@ -11492,7 +11114,7 @@
 </p:sld>
 </file>
 
-<file path=ppt/slides/slide3.xml><?xml version="1.0" encoding="utf-8"?>
+<file path=ppt/slides/slide28.xml><?xml version="1.0" encoding="utf-8"?>
 <p:sld xmlns:a="http://schemas.openxmlformats.org/drawingml/2006/main" xmlns:r="http://schemas.openxmlformats.org/officeDocument/2006/relationships" xmlns:p="http://schemas.openxmlformats.org/presentationml/2006/main">
   <p:cSld>
     <p:spTree>
@@ -11525,205 +11147,6 @@
           <a:lstStyle/>
           <a:p>
             <a:r>
-              <a:rPr lang="en-US" dirty="0"/>
-              <a:t>Basics</a:t>
-            </a:r>
-            <a:endParaRPr lang="en-CA" dirty="0"/>
-          </a:p>
-        </p:txBody>
-      </p:sp>
-      <p:sp>
-        <p:nvSpPr>
-          <p:cNvPr id="3" name="Content Placeholder 2"/>
-          <p:cNvSpPr>
-            <a:spLocks noGrp="1"/>
-          </p:cNvSpPr>
-          <p:nvPr>
-            <p:ph idx="1"/>
-          </p:nvPr>
-        </p:nvSpPr>
-        <p:spPr>
-          <a:xfrm>
-            <a:off x="640874" y="1168401"/>
-            <a:ext cx="10515600" cy="4399753"/>
-          </a:xfrm>
-        </p:spPr>
-        <p:txBody>
-          <a:bodyPr>
-            <a:normAutofit/>
-          </a:bodyPr>
-          <a:lstStyle/>
-          <a:p>
-            <a:r>
-              <a:rPr lang="en-US" altLang="en-US" dirty="0">
-                <a:ea typeface="ＭＳ Ｐゴシック" panose="020B0600070205080204" pitchFamily="34" charset="-128"/>
-              </a:rPr>
-              <a:t>Use for loops when you know the number of things you are iterating over, otherwise use while loops.</a:t>
-            </a:r>
-          </a:p>
-          <a:p>
-            <a:endParaRPr lang="en-US" altLang="en-US" dirty="0">
-              <a:ea typeface="ＭＳ Ｐゴシック" panose="020B0600070205080204" pitchFamily="34" charset="-128"/>
-            </a:endParaRPr>
-          </a:p>
-          <a:p>
-            <a:r>
-              <a:rPr lang="en-US" altLang="en-US" dirty="0">
-                <a:ea typeface="ＭＳ Ｐゴシック" panose="020B0600070205080204" pitchFamily="34" charset="-128"/>
-              </a:rPr>
-              <a:t>Documentation is your friend! Use it.</a:t>
-            </a:r>
-          </a:p>
-          <a:p>
-            <a:endParaRPr lang="en-US" altLang="en-US" dirty="0">
-              <a:ea typeface="ＭＳ Ｐゴシック" panose="020B0600070205080204" pitchFamily="34" charset="-128"/>
-            </a:endParaRPr>
-          </a:p>
-          <a:p>
-            <a:r>
-              <a:rPr lang="en-US" altLang="en-US" dirty="0">
-                <a:ea typeface="ＭＳ Ｐゴシック" panose="020B0600070205080204" pitchFamily="34" charset="-128"/>
-              </a:rPr>
-              <a:t>Variable and class naming have language-specific conventions</a:t>
-            </a:r>
-          </a:p>
-          <a:p>
-            <a:pPr lvl="1"/>
-            <a:r>
-              <a:rPr lang="en-US" altLang="en-US" dirty="0">
-                <a:ea typeface="ＭＳ Ｐゴシック" panose="020B0600070205080204" pitchFamily="34" charset="-128"/>
-              </a:rPr>
-              <a:t>In Java, we use </a:t>
-            </a:r>
-            <a:r>
-              <a:rPr lang="en-US" altLang="en-US" dirty="0" err="1">
-                <a:ea typeface="ＭＳ Ｐゴシック" panose="020B0600070205080204" pitchFamily="34" charset="-128"/>
-              </a:rPr>
-              <a:t>camelCaseFormatting</a:t>
-            </a:r>
-            <a:r>
-              <a:rPr lang="en-US" altLang="en-US" dirty="0">
-                <a:ea typeface="ＭＳ Ｐゴシック" panose="020B0600070205080204" pitchFamily="34" charset="-128"/>
-              </a:rPr>
-              <a:t> for variables, and </a:t>
-            </a:r>
-            <a:r>
-              <a:rPr lang="en-US" altLang="en-US" dirty="0" err="1">
-                <a:ea typeface="ＭＳ Ｐゴシック" panose="020B0600070205080204" pitchFamily="34" charset="-128"/>
-              </a:rPr>
-              <a:t>FirstLetterUpperCase</a:t>
-            </a:r>
-            <a:r>
-              <a:rPr lang="en-US" altLang="en-US" dirty="0">
-                <a:ea typeface="ＭＳ Ｐゴシック" panose="020B0600070205080204" pitchFamily="34" charset="-128"/>
-              </a:rPr>
-              <a:t> for classes.</a:t>
-            </a:r>
-          </a:p>
-        </p:txBody>
-      </p:sp>
-      <p:sp>
-        <p:nvSpPr>
-          <p:cNvPr id="10" name="Footer Placeholder 9"/>
-          <p:cNvSpPr>
-            <a:spLocks noGrp="1"/>
-          </p:cNvSpPr>
-          <p:nvPr>
-            <p:ph type="ftr" sz="quarter" idx="3"/>
-          </p:nvPr>
-        </p:nvSpPr>
-        <p:spPr/>
-        <p:txBody>
-          <a:bodyPr/>
-          <a:lstStyle/>
-          <a:p>
-            <a:r>
-              <a:rPr lang="en-CA" dirty="0"/>
-              <a:t>CS321: Advanced Programming Techniques</a:t>
-            </a:r>
-          </a:p>
-        </p:txBody>
-      </p:sp>
-      <p:sp>
-        <p:nvSpPr>
-          <p:cNvPr id="12" name="Slide Number Placeholder 11"/>
-          <p:cNvSpPr>
-            <a:spLocks noGrp="1"/>
-          </p:cNvSpPr>
-          <p:nvPr>
-            <p:ph type="sldNum" sz="quarter" idx="4"/>
-          </p:nvPr>
-        </p:nvSpPr>
-        <p:spPr/>
-        <p:txBody>
-          <a:bodyPr/>
-          <a:lstStyle/>
-          <a:p>
-            <a:fld id="{5174927E-2439-42C0-9720-7BBCA09BF46F}" type="slidenum">
-              <a:rPr lang="en-CA" smtClean="0"/>
-              <a:pPr/>
-              <a:t>3</a:t>
-            </a:fld>
-            <a:r>
-              <a:rPr lang="en-CA" dirty="0"/>
-              <a:t> </a:t>
-            </a:r>
-          </a:p>
-        </p:txBody>
-      </p:sp>
-    </p:spTree>
-    <p:extLst>
-      <p:ext uri="{BB962C8B-B14F-4D97-AF65-F5344CB8AC3E}">
-        <p14:creationId xmlns:p14="http://schemas.microsoft.com/office/powerpoint/2010/main" xmlns="" val="51204498"/>
-      </p:ext>
-    </p:extLst>
-  </p:cSld>
-  <p:clrMapOvr>
-    <a:masterClrMapping/>
-  </p:clrMapOvr>
-  <p:timing>
-    <p:tnLst>
-      <p:par>
-        <p:cTn id="1" dur="indefinite" restart="never" nodeType="tmRoot"/>
-      </p:par>
-    </p:tnLst>
-  </p:timing>
-</p:sld>
-</file>
-
-<file path=ppt/slides/slide30.xml><?xml version="1.0" encoding="utf-8"?>
-<p:sld xmlns:a="http://schemas.openxmlformats.org/drawingml/2006/main" xmlns:r="http://schemas.openxmlformats.org/officeDocument/2006/relationships" xmlns:p="http://schemas.openxmlformats.org/presentationml/2006/main">
-  <p:cSld>
-    <p:spTree>
-      <p:nvGrpSpPr>
-        <p:cNvPr id="1" name=""/>
-        <p:cNvGrpSpPr/>
-        <p:nvPr/>
-      </p:nvGrpSpPr>
-      <p:grpSpPr>
-        <a:xfrm>
-          <a:off x="0" y="0"/>
-          <a:ext cx="0" cy="0"/>
-          <a:chOff x="0" y="0"/>
-          <a:chExt cx="0" cy="0"/>
-        </a:xfrm>
-      </p:grpSpPr>
-      <p:sp>
-        <p:nvSpPr>
-          <p:cNvPr id="2" name="Title 1"/>
-          <p:cNvSpPr>
-            <a:spLocks noGrp="1"/>
-          </p:cNvSpPr>
-          <p:nvPr>
-            <p:ph type="title"/>
-          </p:nvPr>
-        </p:nvSpPr>
-        <p:spPr/>
-        <p:txBody>
-          <a:bodyPr/>
-          <a:lstStyle/>
-          <a:p>
-            <a:r>
               <a:rPr lang="en-US" altLang="en-US" dirty="0"/>
               <a:t>Preconditions</a:t>
             </a:r>
@@ -11804,7 +11227,7 @@
             <a:fld id="{5174927E-2439-42C0-9720-7BBCA09BF46F}" type="slidenum">
               <a:rPr lang="en-CA" smtClean="0"/>
               <a:pPr/>
-              <a:t>30</a:t>
+              <a:t>28</a:t>
             </a:fld>
             <a:r>
               <a:rPr lang="en-CA" dirty="0"/>
@@ -12234,6 +11657,650 @@
 </p:sld>
 </file>
 
+<file path=ppt/slides/slide29.xml><?xml version="1.0" encoding="utf-8"?>
+<p:sld xmlns:a="http://schemas.openxmlformats.org/drawingml/2006/main" xmlns:r="http://schemas.openxmlformats.org/officeDocument/2006/relationships" xmlns:p="http://schemas.openxmlformats.org/presentationml/2006/main">
+  <p:cSld>
+    <p:spTree>
+      <p:nvGrpSpPr>
+        <p:cNvPr id="1" name=""/>
+        <p:cNvGrpSpPr/>
+        <p:nvPr/>
+      </p:nvGrpSpPr>
+      <p:grpSpPr>
+        <a:xfrm>
+          <a:off x="0" y="0"/>
+          <a:ext cx="0" cy="0"/>
+          <a:chOff x="0" y="0"/>
+          <a:chExt cx="0" cy="0"/>
+        </a:xfrm>
+      </p:grpSpPr>
+      <p:sp>
+        <p:nvSpPr>
+          <p:cNvPr id="2" name="Title 1">
+            <a:extLst>
+              <a:ext uri="{FF2B5EF4-FFF2-40B4-BE49-F238E27FC236}">
+                <a16:creationId xmlns:a16="http://schemas.microsoft.com/office/drawing/2014/main" xmlns="" id="{0A921011-18FC-475B-B283-A4E0D7C676E2}"/>
+              </a:ext>
+            </a:extLst>
+          </p:cNvPr>
+          <p:cNvSpPr>
+            <a:spLocks noGrp="1"/>
+          </p:cNvSpPr>
+          <p:nvPr>
+            <p:ph type="title"/>
+          </p:nvPr>
+        </p:nvSpPr>
+        <p:spPr/>
+        <p:txBody>
+          <a:bodyPr/>
+          <a:lstStyle/>
+          <a:p>
+            <a:r>
+              <a:rPr lang="en-CA" dirty="0"/>
+              <a:t>Why use Iterators</a:t>
+            </a:r>
+          </a:p>
+        </p:txBody>
+      </p:sp>
+      <p:sp>
+        <p:nvSpPr>
+          <p:cNvPr id="3" name="Content Placeholder 2">
+            <a:extLst>
+              <a:ext uri="{FF2B5EF4-FFF2-40B4-BE49-F238E27FC236}">
+                <a16:creationId xmlns:a16="http://schemas.microsoft.com/office/drawing/2014/main" xmlns="" id="{E519EC20-1B41-4FDC-B979-74F142F690A2}"/>
+              </a:ext>
+            </a:extLst>
+          </p:cNvPr>
+          <p:cNvSpPr>
+            <a:spLocks noGrp="1"/>
+          </p:cNvSpPr>
+          <p:nvPr>
+            <p:ph idx="1"/>
+          </p:nvPr>
+        </p:nvSpPr>
+        <p:spPr/>
+        <p:txBody>
+          <a:bodyPr/>
+          <a:lstStyle/>
+          <a:p>
+            <a:r>
+              <a:rPr lang="en-CA" dirty="0"/>
+              <a:t>A single interface to iterate through any Collections or Lists of objects.</a:t>
+            </a:r>
+          </a:p>
+          <a:p>
+            <a:endParaRPr lang="en-CA" dirty="0"/>
+          </a:p>
+          <a:p>
+            <a:r>
+              <a:rPr lang="en-CA" dirty="0"/>
+              <a:t>Otherwise, you’ll need to start checking the list/collection type before iterating over elements in these object arrays (e.g. one method for iterating through an </a:t>
+            </a:r>
+            <a:r>
+              <a:rPr lang="en-CA" dirty="0" err="1"/>
+              <a:t>ArrayList</a:t>
+            </a:r>
+            <a:r>
+              <a:rPr lang="en-CA" dirty="0"/>
+              <a:t>, and another for a Collection)</a:t>
+            </a:r>
+          </a:p>
+          <a:p>
+            <a:endParaRPr lang="en-CA" dirty="0"/>
+          </a:p>
+          <a:p>
+            <a:endParaRPr lang="en-CA" dirty="0"/>
+          </a:p>
+        </p:txBody>
+      </p:sp>
+      <p:sp>
+        <p:nvSpPr>
+          <p:cNvPr id="6" name="Slide Number Placeholder 5">
+            <a:extLst>
+              <a:ext uri="{FF2B5EF4-FFF2-40B4-BE49-F238E27FC236}">
+                <a16:creationId xmlns:a16="http://schemas.microsoft.com/office/drawing/2014/main" xmlns="" id="{2BFBBD55-E3C1-4C22-8665-BC6CC0B5B10F}"/>
+              </a:ext>
+            </a:extLst>
+          </p:cNvPr>
+          <p:cNvSpPr>
+            <a:spLocks noGrp="1"/>
+          </p:cNvSpPr>
+          <p:nvPr>
+            <p:ph type="sldNum" sz="quarter" idx="4"/>
+          </p:nvPr>
+        </p:nvSpPr>
+        <p:spPr/>
+        <p:txBody>
+          <a:bodyPr/>
+          <a:lstStyle/>
+          <a:p>
+            <a:fld id="{5174927E-2439-42C0-9720-7BBCA09BF46F}" type="slidenum">
+              <a:rPr lang="en-CA" smtClean="0"/>
+              <a:pPr/>
+              <a:t>29</a:t>
+            </a:fld>
+            <a:r>
+              <a:rPr lang="en-CA"/>
+              <a:t> / 32</a:t>
+            </a:r>
+            <a:endParaRPr lang="en-CA" dirty="0"/>
+          </a:p>
+        </p:txBody>
+      </p:sp>
+      <p:sp>
+        <p:nvSpPr>
+          <p:cNvPr id="7" name="Footer Placeholder 9"/>
+          <p:cNvSpPr>
+            <a:spLocks noGrp="1"/>
+          </p:cNvSpPr>
+          <p:nvPr>
+            <p:ph type="ftr" sz="quarter" idx="3"/>
+          </p:nvPr>
+        </p:nvSpPr>
+        <p:spPr>
+          <a:xfrm>
+            <a:off x="52387" y="6573836"/>
+            <a:ext cx="2986087" cy="365125"/>
+          </a:xfrm>
+        </p:spPr>
+        <p:txBody>
+          <a:bodyPr/>
+          <a:lstStyle/>
+          <a:p>
+            <a:r>
+              <a:rPr lang="en-CA" dirty="0"/>
+              <a:t>CS321: Advanced Programming Techniques</a:t>
+            </a:r>
+          </a:p>
+        </p:txBody>
+      </p:sp>
+    </p:spTree>
+    <p:extLst>
+      <p:ext uri="{BB962C8B-B14F-4D97-AF65-F5344CB8AC3E}">
+        <p14:creationId xmlns:p14="http://schemas.microsoft.com/office/powerpoint/2010/main" xmlns="" val="2735913249"/>
+      </p:ext>
+    </p:extLst>
+  </p:cSld>
+  <p:clrMapOvr>
+    <a:masterClrMapping/>
+  </p:clrMapOvr>
+  <p:timing>
+    <p:tnLst>
+      <p:par>
+        <p:cTn id="1" dur="indefinite" restart="never" nodeType="tmRoot"/>
+      </p:par>
+    </p:tnLst>
+  </p:timing>
+</p:sld>
+</file>
+
+<file path=ppt/slides/slide3.xml><?xml version="1.0" encoding="utf-8"?>
+<p:sld xmlns:a="http://schemas.openxmlformats.org/drawingml/2006/main" xmlns:r="http://schemas.openxmlformats.org/officeDocument/2006/relationships" xmlns:p="http://schemas.openxmlformats.org/presentationml/2006/main">
+  <p:cSld>
+    <p:spTree>
+      <p:nvGrpSpPr>
+        <p:cNvPr id="1" name=""/>
+        <p:cNvGrpSpPr/>
+        <p:nvPr/>
+      </p:nvGrpSpPr>
+      <p:grpSpPr>
+        <a:xfrm>
+          <a:off x="0" y="0"/>
+          <a:ext cx="0" cy="0"/>
+          <a:chOff x="0" y="0"/>
+          <a:chExt cx="0" cy="0"/>
+        </a:xfrm>
+      </p:grpSpPr>
+      <p:sp>
+        <p:nvSpPr>
+          <p:cNvPr id="2" name="Title 1"/>
+          <p:cNvSpPr>
+            <a:spLocks noGrp="1"/>
+          </p:cNvSpPr>
+          <p:nvPr>
+            <p:ph type="title"/>
+          </p:nvPr>
+        </p:nvSpPr>
+        <p:spPr/>
+        <p:txBody>
+          <a:bodyPr/>
+          <a:lstStyle/>
+          <a:p>
+            <a:r>
+              <a:rPr lang="en-US" dirty="0"/>
+              <a:t>Basics</a:t>
+            </a:r>
+            <a:endParaRPr lang="en-CA" dirty="0"/>
+          </a:p>
+        </p:txBody>
+      </p:sp>
+      <p:sp>
+        <p:nvSpPr>
+          <p:cNvPr id="3" name="Content Placeholder 2"/>
+          <p:cNvSpPr>
+            <a:spLocks noGrp="1"/>
+          </p:cNvSpPr>
+          <p:nvPr>
+            <p:ph idx="1"/>
+          </p:nvPr>
+        </p:nvSpPr>
+        <p:spPr>
+          <a:xfrm>
+            <a:off x="640874" y="1168401"/>
+            <a:ext cx="10515600" cy="4399753"/>
+          </a:xfrm>
+        </p:spPr>
+        <p:txBody>
+          <a:bodyPr>
+            <a:normAutofit/>
+          </a:bodyPr>
+          <a:lstStyle/>
+          <a:p>
+            <a:r>
+              <a:rPr lang="en-US" altLang="en-US" dirty="0">
+                <a:ea typeface="ＭＳ Ｐゴシック" panose="020B0600070205080204" pitchFamily="34" charset="-128"/>
+              </a:rPr>
+              <a:t>Use for loops when you know the number of things you are iterating over, otherwise use while loops.</a:t>
+            </a:r>
+          </a:p>
+          <a:p>
+            <a:endParaRPr lang="en-US" altLang="en-US" dirty="0">
+              <a:ea typeface="ＭＳ Ｐゴシック" panose="020B0600070205080204" pitchFamily="34" charset="-128"/>
+            </a:endParaRPr>
+          </a:p>
+          <a:p>
+            <a:r>
+              <a:rPr lang="en-US" altLang="en-US" dirty="0">
+                <a:ea typeface="ＭＳ Ｐゴシック" panose="020B0600070205080204" pitchFamily="34" charset="-128"/>
+              </a:rPr>
+              <a:t>Documentation is your friend! Use it.</a:t>
+            </a:r>
+          </a:p>
+          <a:p>
+            <a:endParaRPr lang="en-US" altLang="en-US" dirty="0">
+              <a:ea typeface="ＭＳ Ｐゴシック" panose="020B0600070205080204" pitchFamily="34" charset="-128"/>
+            </a:endParaRPr>
+          </a:p>
+          <a:p>
+            <a:r>
+              <a:rPr lang="en-US" altLang="en-US" dirty="0">
+                <a:ea typeface="ＭＳ Ｐゴシック" panose="020B0600070205080204" pitchFamily="34" charset="-128"/>
+              </a:rPr>
+              <a:t>Variable and class naming have language-specific conventions</a:t>
+            </a:r>
+          </a:p>
+          <a:p>
+            <a:pPr lvl="1"/>
+            <a:r>
+              <a:rPr lang="en-US" altLang="en-US" dirty="0">
+                <a:ea typeface="ＭＳ Ｐゴシック" panose="020B0600070205080204" pitchFamily="34" charset="-128"/>
+              </a:rPr>
+              <a:t>In Java, we use </a:t>
+            </a:r>
+            <a:r>
+              <a:rPr lang="en-US" altLang="en-US" dirty="0" err="1">
+                <a:ea typeface="ＭＳ Ｐゴシック" panose="020B0600070205080204" pitchFamily="34" charset="-128"/>
+              </a:rPr>
+              <a:t>camelCaseFormatting</a:t>
+            </a:r>
+            <a:r>
+              <a:rPr lang="en-US" altLang="en-US" dirty="0">
+                <a:ea typeface="ＭＳ Ｐゴシック" panose="020B0600070205080204" pitchFamily="34" charset="-128"/>
+              </a:rPr>
+              <a:t> for variables, and </a:t>
+            </a:r>
+            <a:r>
+              <a:rPr lang="en-US" altLang="en-US" dirty="0" err="1">
+                <a:ea typeface="ＭＳ Ｐゴシック" panose="020B0600070205080204" pitchFamily="34" charset="-128"/>
+              </a:rPr>
+              <a:t>FirstLetterUpperCase</a:t>
+            </a:r>
+            <a:r>
+              <a:rPr lang="en-US" altLang="en-US" dirty="0">
+                <a:ea typeface="ＭＳ Ｐゴシック" panose="020B0600070205080204" pitchFamily="34" charset="-128"/>
+              </a:rPr>
+              <a:t> for classes.</a:t>
+            </a:r>
+          </a:p>
+        </p:txBody>
+      </p:sp>
+      <p:sp>
+        <p:nvSpPr>
+          <p:cNvPr id="10" name="Footer Placeholder 9"/>
+          <p:cNvSpPr>
+            <a:spLocks noGrp="1"/>
+          </p:cNvSpPr>
+          <p:nvPr>
+            <p:ph type="ftr" sz="quarter" idx="3"/>
+          </p:nvPr>
+        </p:nvSpPr>
+        <p:spPr/>
+        <p:txBody>
+          <a:bodyPr/>
+          <a:lstStyle/>
+          <a:p>
+            <a:r>
+              <a:rPr lang="en-CA" dirty="0"/>
+              <a:t>CS321: Advanced Programming Techniques</a:t>
+            </a:r>
+          </a:p>
+        </p:txBody>
+      </p:sp>
+      <p:sp>
+        <p:nvSpPr>
+          <p:cNvPr id="12" name="Slide Number Placeholder 11"/>
+          <p:cNvSpPr>
+            <a:spLocks noGrp="1"/>
+          </p:cNvSpPr>
+          <p:nvPr>
+            <p:ph type="sldNum" sz="quarter" idx="4"/>
+          </p:nvPr>
+        </p:nvSpPr>
+        <p:spPr/>
+        <p:txBody>
+          <a:bodyPr/>
+          <a:lstStyle/>
+          <a:p>
+            <a:fld id="{5174927E-2439-42C0-9720-7BBCA09BF46F}" type="slidenum">
+              <a:rPr lang="en-CA" smtClean="0"/>
+              <a:pPr/>
+              <a:t>3</a:t>
+            </a:fld>
+            <a:r>
+              <a:rPr lang="en-CA" dirty="0"/>
+              <a:t> </a:t>
+            </a:r>
+          </a:p>
+        </p:txBody>
+      </p:sp>
+    </p:spTree>
+    <p:extLst>
+      <p:ext uri="{BB962C8B-B14F-4D97-AF65-F5344CB8AC3E}">
+        <p14:creationId xmlns:p14="http://schemas.microsoft.com/office/powerpoint/2010/main" xmlns="" val="51204498"/>
+      </p:ext>
+    </p:extLst>
+  </p:cSld>
+  <p:clrMapOvr>
+    <a:masterClrMapping/>
+  </p:clrMapOvr>
+  <p:timing>
+    <p:tnLst>
+      <p:par>
+        <p:cTn id="1" dur="indefinite" restart="never" nodeType="tmRoot"/>
+      </p:par>
+    </p:tnLst>
+  </p:timing>
+</p:sld>
+</file>
+
+<file path=ppt/slides/slide30.xml><?xml version="1.0" encoding="utf-8"?>
+<p:sld xmlns:a="http://schemas.openxmlformats.org/drawingml/2006/main" xmlns:r="http://schemas.openxmlformats.org/officeDocument/2006/relationships" xmlns:p="http://schemas.openxmlformats.org/presentationml/2006/main">
+  <p:cSld>
+    <p:spTree>
+      <p:nvGrpSpPr>
+        <p:cNvPr id="1" name=""/>
+        <p:cNvGrpSpPr/>
+        <p:nvPr/>
+      </p:nvGrpSpPr>
+      <p:grpSpPr>
+        <a:xfrm>
+          <a:off x="0" y="0"/>
+          <a:ext cx="0" cy="0"/>
+          <a:chOff x="0" y="0"/>
+          <a:chExt cx="0" cy="0"/>
+        </a:xfrm>
+      </p:grpSpPr>
+      <p:sp>
+        <p:nvSpPr>
+          <p:cNvPr id="2" name="Title 1"/>
+          <p:cNvSpPr>
+            <a:spLocks noGrp="1"/>
+          </p:cNvSpPr>
+          <p:nvPr>
+            <p:ph type="title"/>
+          </p:nvPr>
+        </p:nvSpPr>
+        <p:spPr/>
+        <p:txBody>
+          <a:bodyPr/>
+          <a:lstStyle/>
+          <a:p>
+            <a:r>
+              <a:rPr lang="en-US" dirty="0"/>
+              <a:t>Linting (or Static Analysis)</a:t>
+            </a:r>
+            <a:endParaRPr lang="en-CA" dirty="0"/>
+          </a:p>
+        </p:txBody>
+      </p:sp>
+      <p:sp>
+        <p:nvSpPr>
+          <p:cNvPr id="3" name="Content Placeholder 2"/>
+          <p:cNvSpPr>
+            <a:spLocks noGrp="1"/>
+          </p:cNvSpPr>
+          <p:nvPr>
+            <p:ph idx="1"/>
+          </p:nvPr>
+        </p:nvSpPr>
+        <p:spPr>
+          <a:xfrm>
+            <a:off x="640874" y="1168401"/>
+            <a:ext cx="10515600" cy="5252064"/>
+          </a:xfrm>
+        </p:spPr>
+        <p:txBody>
+          <a:bodyPr>
+            <a:normAutofit/>
+          </a:bodyPr>
+          <a:lstStyle/>
+          <a:p>
+            <a:r>
+              <a:rPr lang="en-US" b="1" dirty="0"/>
+              <a:t>Static Analysis </a:t>
+            </a:r>
+            <a:r>
+              <a:rPr lang="en-US" dirty="0"/>
+              <a:t>of your code</a:t>
+            </a:r>
+          </a:p>
+          <a:p>
+            <a:pPr lvl="1"/>
+            <a:r>
+              <a:rPr lang="en-US" dirty="0"/>
+              <a:t>Analyzes the static aspect (e.g. the code, file names etc.) of your program</a:t>
+            </a:r>
+          </a:p>
+          <a:p>
+            <a:pPr lvl="1"/>
+            <a:r>
+              <a:rPr lang="en-US" dirty="0"/>
+              <a:t>Doesn’t care about what your code does at runtime</a:t>
+            </a:r>
+          </a:p>
+          <a:p>
+            <a:pPr lvl="1"/>
+            <a:r>
+              <a:rPr lang="en-US" dirty="0"/>
+              <a:t>Only cares if it looks right, and could compile it as well</a:t>
+            </a:r>
+          </a:p>
+          <a:p>
+            <a:pPr lvl="1"/>
+            <a:r>
+              <a:rPr lang="en-US" dirty="0"/>
+              <a:t>Examples: </a:t>
+            </a:r>
+          </a:p>
+          <a:p>
+            <a:pPr lvl="2"/>
+            <a:r>
+              <a:rPr lang="en-US" dirty="0">
+                <a:hlinkClick r:id="rId2"/>
+              </a:rPr>
+              <a:t>PEP-8</a:t>
+            </a:r>
+            <a:r>
+              <a:rPr lang="en-US" dirty="0"/>
+              <a:t> in Python</a:t>
+            </a:r>
+          </a:p>
+          <a:p>
+            <a:pPr lvl="2"/>
+            <a:r>
+              <a:rPr lang="en-US" dirty="0"/>
+              <a:t>IntelliJ-</a:t>
+            </a:r>
+            <a:r>
+              <a:rPr lang="en-US" dirty="0" err="1"/>
+              <a:t>builtin</a:t>
+            </a:r>
+            <a:r>
+              <a:rPr lang="en-US" dirty="0"/>
+              <a:t>, &amp; </a:t>
+            </a:r>
+            <a:r>
+              <a:rPr lang="en-US" dirty="0">
+                <a:hlinkClick r:id="rId3"/>
+              </a:rPr>
+              <a:t>Google Style</a:t>
+            </a:r>
+            <a:r>
+              <a:rPr lang="en-US" dirty="0"/>
+              <a:t> in Java</a:t>
+            </a:r>
+          </a:p>
+          <a:p>
+            <a:pPr lvl="2"/>
+            <a:r>
+              <a:rPr lang="en-US" dirty="0" err="1">
+                <a:hlinkClick r:id="rId4"/>
+              </a:rPr>
+              <a:t>ESLint</a:t>
+            </a:r>
+            <a:r>
+              <a:rPr lang="en-US" dirty="0"/>
+              <a:t>, &amp; </a:t>
+            </a:r>
+            <a:r>
+              <a:rPr lang="en-US" dirty="0">
+                <a:hlinkClick r:id="rId5"/>
+              </a:rPr>
+              <a:t>Mozilla Style</a:t>
+            </a:r>
+            <a:r>
+              <a:rPr lang="en-US" dirty="0"/>
+              <a:t> in </a:t>
+            </a:r>
+            <a:r>
+              <a:rPr lang="en-US" dirty="0" err="1"/>
+              <a:t>Javascript</a:t>
+            </a:r>
+            <a:endParaRPr lang="en-US" dirty="0"/>
+          </a:p>
+          <a:p>
+            <a:pPr lvl="2"/>
+            <a:r>
+              <a:rPr lang="en-US" dirty="0"/>
+              <a:t>Custom Validators</a:t>
+            </a:r>
+          </a:p>
+          <a:p>
+            <a:pPr lvl="1"/>
+            <a:endParaRPr lang="en-US" dirty="0"/>
+          </a:p>
+          <a:p>
+            <a:r>
+              <a:rPr lang="en-US" dirty="0"/>
+              <a:t>In contrast, </a:t>
+            </a:r>
+            <a:r>
+              <a:rPr lang="en-US" b="1" dirty="0"/>
+              <a:t>dynamic analysis </a:t>
+            </a:r>
+            <a:r>
+              <a:rPr lang="en-US" dirty="0"/>
+              <a:t>involves analyzing your code during runtime</a:t>
+            </a:r>
+          </a:p>
+          <a:p>
+            <a:pPr lvl="1"/>
+            <a:r>
+              <a:rPr lang="en-US" dirty="0"/>
+              <a:t>Example: Code Coverage</a:t>
+            </a:r>
+          </a:p>
+        </p:txBody>
+      </p:sp>
+      <p:sp>
+        <p:nvSpPr>
+          <p:cNvPr id="10" name="Footer Placeholder 9"/>
+          <p:cNvSpPr>
+            <a:spLocks noGrp="1"/>
+          </p:cNvSpPr>
+          <p:nvPr>
+            <p:ph type="ftr" sz="quarter" idx="3"/>
+          </p:nvPr>
+        </p:nvSpPr>
+        <p:spPr/>
+        <p:txBody>
+          <a:bodyPr/>
+          <a:lstStyle/>
+          <a:p>
+            <a:r>
+              <a:rPr lang="en-CA" dirty="0"/>
+              <a:t>CS321: Advanced Programming Techniques</a:t>
+            </a:r>
+          </a:p>
+        </p:txBody>
+      </p:sp>
+      <p:sp>
+        <p:nvSpPr>
+          <p:cNvPr id="12" name="Slide Number Placeholder 11"/>
+          <p:cNvSpPr>
+            <a:spLocks noGrp="1"/>
+          </p:cNvSpPr>
+          <p:nvPr>
+            <p:ph type="sldNum" sz="quarter" idx="4"/>
+          </p:nvPr>
+        </p:nvSpPr>
+        <p:spPr/>
+        <p:txBody>
+          <a:bodyPr/>
+          <a:lstStyle/>
+          <a:p>
+            <a:fld id="{5174927E-2439-42C0-9720-7BBCA09BF46F}" type="slidenum">
+              <a:rPr lang="en-CA" smtClean="0"/>
+              <a:pPr/>
+              <a:t>30</a:t>
+            </a:fld>
+            <a:r>
+              <a:rPr lang="en-CA" dirty="0"/>
+              <a:t> </a:t>
+            </a:r>
+          </a:p>
+        </p:txBody>
+      </p:sp>
+    </p:spTree>
+    <p:extLst>
+      <p:ext uri="{BB962C8B-B14F-4D97-AF65-F5344CB8AC3E}">
+        <p14:creationId xmlns:p14="http://schemas.microsoft.com/office/powerpoint/2010/main" xmlns="" val="355146014"/>
+      </p:ext>
+    </p:extLst>
+  </p:cSld>
+  <p:clrMapOvr>
+    <a:masterClrMapping/>
+  </p:clrMapOvr>
+  <p:timing>
+    <p:tnLst>
+      <p:par>
+        <p:cTn id="1" dur="indefinite" restart="never" nodeType="tmRoot"/>
+      </p:par>
+    </p:tnLst>
+  </p:timing>
+</p:sld>
+</file>
+
 <file path=ppt/slides/slide31.xml><?xml version="1.0" encoding="utf-8"?>
 <p:sld xmlns:a="http://schemas.openxmlformats.org/drawingml/2006/main" xmlns:r="http://schemas.openxmlformats.org/officeDocument/2006/relationships" xmlns:p="http://schemas.openxmlformats.org/presentationml/2006/main">
   <p:cSld>
@@ -12253,13 +12320,7 @@
       </p:grpSpPr>
       <p:sp>
         <p:nvSpPr>
-          <p:cNvPr id="2" name="Title 1">
-            <a:extLst>
-              <a:ext uri="{FF2B5EF4-FFF2-40B4-BE49-F238E27FC236}">
-                <a16:creationId xmlns:a16="http://schemas.microsoft.com/office/drawing/2014/main" xmlns="" id="{0A921011-18FC-475B-B283-A4E0D7C676E2}"/>
-              </a:ext>
-            </a:extLst>
-          </p:cNvPr>
+          <p:cNvPr id="2" name="Title 1"/>
           <p:cNvSpPr>
             <a:spLocks noGrp="1"/>
           </p:cNvSpPr>
@@ -12273,72 +12334,109 @@
           <a:lstStyle/>
           <a:p>
             <a:r>
+              <a:rPr lang="en-US" dirty="0"/>
+              <a:t>Advantages to using Linters</a:t>
+            </a:r>
+            <a:endParaRPr lang="en-CA" dirty="0"/>
+          </a:p>
+        </p:txBody>
+      </p:sp>
+      <p:sp>
+        <p:nvSpPr>
+          <p:cNvPr id="3" name="Content Placeholder 2"/>
+          <p:cNvSpPr>
+            <a:spLocks noGrp="1"/>
+          </p:cNvSpPr>
+          <p:nvPr>
+            <p:ph idx="1"/>
+          </p:nvPr>
+        </p:nvSpPr>
+        <p:spPr>
+          <a:xfrm>
+            <a:off x="640874" y="1168401"/>
+            <a:ext cx="10515600" cy="4399753"/>
+          </a:xfrm>
+        </p:spPr>
+        <p:txBody>
+          <a:bodyPr>
+            <a:normAutofit/>
+          </a:bodyPr>
+          <a:lstStyle/>
+          <a:p>
+            <a:r>
+              <a:rPr lang="en-US" dirty="0"/>
+              <a:t>Quicker, and more powerful code reviews</a:t>
+            </a:r>
+          </a:p>
+          <a:p>
+            <a:pPr lvl="1"/>
+            <a:r>
+              <a:rPr lang="en-US" dirty="0"/>
+              <a:t>People can spend more time on the internals rather than the structure</a:t>
+            </a:r>
+          </a:p>
+          <a:p>
+            <a:pPr lvl="1"/>
+            <a:endParaRPr lang="en-US" dirty="0"/>
+          </a:p>
+          <a:p>
+            <a:r>
+              <a:rPr lang="en-US" dirty="0"/>
+              <a:t>Consistent code quality</a:t>
+            </a:r>
+          </a:p>
+          <a:p>
+            <a:endParaRPr lang="en-US" dirty="0"/>
+          </a:p>
+          <a:p>
+            <a:r>
+              <a:rPr lang="en-US" dirty="0"/>
+              <a:t>Enforcement of organizational standards</a:t>
+            </a:r>
+          </a:p>
+          <a:p>
+            <a:endParaRPr lang="en-US" dirty="0"/>
+          </a:p>
+          <a:p>
+            <a:r>
+              <a:rPr lang="en-US" dirty="0"/>
+              <a:t>No need to stress about your formatting anymore</a:t>
+            </a:r>
+          </a:p>
+          <a:p>
+            <a:pPr lvl="1"/>
+            <a:r>
+              <a:rPr lang="en-US" dirty="0"/>
+              <a:t>E.g. a misplaced curly brace `{` on line 10,276</a:t>
+            </a:r>
+          </a:p>
+        </p:txBody>
+      </p:sp>
+      <p:sp>
+        <p:nvSpPr>
+          <p:cNvPr id="10" name="Footer Placeholder 9"/>
+          <p:cNvSpPr>
+            <a:spLocks noGrp="1"/>
+          </p:cNvSpPr>
+          <p:nvPr>
+            <p:ph type="ftr" sz="quarter" idx="3"/>
+          </p:nvPr>
+        </p:nvSpPr>
+        <p:spPr/>
+        <p:txBody>
+          <a:bodyPr/>
+          <a:lstStyle/>
+          <a:p>
+            <a:r>
               <a:rPr lang="en-CA" dirty="0"/>
-              <a:t>Why use Iterators</a:t>
-            </a:r>
-          </a:p>
-        </p:txBody>
-      </p:sp>
-      <p:sp>
-        <p:nvSpPr>
-          <p:cNvPr id="3" name="Content Placeholder 2">
-            <a:extLst>
-              <a:ext uri="{FF2B5EF4-FFF2-40B4-BE49-F238E27FC236}">
-                <a16:creationId xmlns:a16="http://schemas.microsoft.com/office/drawing/2014/main" xmlns="" id="{E519EC20-1B41-4FDC-B979-74F142F690A2}"/>
-              </a:ext>
-            </a:extLst>
-          </p:cNvPr>
-          <p:cNvSpPr>
-            <a:spLocks noGrp="1"/>
-          </p:cNvSpPr>
-          <p:nvPr>
-            <p:ph idx="1"/>
-          </p:nvPr>
-        </p:nvSpPr>
-        <p:spPr/>
-        <p:txBody>
-          <a:bodyPr/>
-          <a:lstStyle/>
-          <a:p>
-            <a:r>
-              <a:rPr lang="en-CA" dirty="0"/>
-              <a:t>A single interface to iterate through any Collections or Lists of objects.</a:t>
-            </a:r>
-          </a:p>
-          <a:p>
-            <a:endParaRPr lang="en-CA" dirty="0"/>
-          </a:p>
-          <a:p>
-            <a:r>
-              <a:rPr lang="en-CA" dirty="0"/>
-              <a:t>Otherwise, you’ll need to start checking the list/collection type before iterating over elements in these object arrays (e.g. one method for iterating through an </a:t>
-            </a:r>
-            <a:r>
-              <a:rPr lang="en-CA" dirty="0" err="1"/>
-              <a:t>ArrayList</a:t>
-            </a:r>
-            <a:r>
-              <a:rPr lang="en-CA" dirty="0"/>
-              <a:t>, and another for a Collection)</a:t>
-            </a:r>
-          </a:p>
-          <a:p>
-            <a:endParaRPr lang="en-CA" dirty="0"/>
-          </a:p>
-          <a:p>
-            <a:endParaRPr lang="en-CA" dirty="0"/>
-          </a:p>
-        </p:txBody>
-      </p:sp>
-      <p:sp>
-        <p:nvSpPr>
-          <p:cNvPr id="6" name="Slide Number Placeholder 5">
-            <a:extLst>
-              <a:ext uri="{FF2B5EF4-FFF2-40B4-BE49-F238E27FC236}">
-                <a16:creationId xmlns:a16="http://schemas.microsoft.com/office/drawing/2014/main" xmlns="" id="{2BFBBD55-E3C1-4C22-8665-BC6CC0B5B10F}"/>
-              </a:ext>
-            </a:extLst>
-          </p:cNvPr>
+              <a:t>CS321: Advanced Programming Techniques</a:t>
+            </a:r>
+          </a:p>
+        </p:txBody>
+      </p:sp>
+      <p:sp>
+        <p:nvSpPr>
+          <p:cNvPr id="12" name="Slide Number Placeholder 11"/>
           <p:cNvSpPr>
             <a:spLocks noGrp="1"/>
           </p:cNvSpPr>
@@ -12357,36 +12455,8 @@
               <a:t>31</a:t>
             </a:fld>
             <a:r>
-              <a:rPr lang="en-CA"/>
-              <a:t> / 32</a:t>
-            </a:r>
-            <a:endParaRPr lang="en-CA" dirty="0"/>
-          </a:p>
-        </p:txBody>
-      </p:sp>
-      <p:sp>
-        <p:nvSpPr>
-          <p:cNvPr id="7" name="Footer Placeholder 9"/>
-          <p:cNvSpPr>
-            <a:spLocks noGrp="1"/>
-          </p:cNvSpPr>
-          <p:nvPr>
-            <p:ph type="ftr" sz="quarter" idx="3"/>
-          </p:nvPr>
-        </p:nvSpPr>
-        <p:spPr>
-          <a:xfrm>
-            <a:off x="52387" y="6573836"/>
-            <a:ext cx="2986087" cy="365125"/>
-          </a:xfrm>
-        </p:spPr>
-        <p:txBody>
-          <a:bodyPr/>
-          <a:lstStyle/>
-          <a:p>
-            <a:r>
               <a:rPr lang="en-CA" dirty="0"/>
-              <a:t>CS321: Advanced Programming Techniques</a:t>
+              <a:t> </a:t>
             </a:r>
           </a:p>
         </p:txBody>
@@ -12394,7 +12464,7 @@
     </p:spTree>
     <p:extLst>
       <p:ext uri="{BB962C8B-B14F-4D97-AF65-F5344CB8AC3E}">
-        <p14:creationId xmlns:p14="http://schemas.microsoft.com/office/powerpoint/2010/main" xmlns="" val="2735913249"/>
+        <p14:creationId xmlns:p14="http://schemas.microsoft.com/office/powerpoint/2010/main" xmlns="" val="2425407270"/>
       </p:ext>
     </p:extLst>
   </p:cSld>
@@ -12445,7 +12515,7 @@
           <a:p>
             <a:r>
               <a:rPr lang="en-US" dirty="0"/>
-              <a:t>Linting (or Static Analysis)</a:t>
+              <a:t>Key Points for Errors/Exceptions</a:t>
             </a:r>
             <a:endParaRPr lang="en-CA" dirty="0"/>
           </a:p>
@@ -12464,7 +12534,7 @@
         <p:spPr>
           <a:xfrm>
             <a:off x="640874" y="1168401"/>
-            <a:ext cx="10515600" cy="5252064"/>
+            <a:ext cx="10515600" cy="4966928"/>
           </a:xfrm>
         </p:spPr>
         <p:txBody>
@@ -12474,139 +12544,75 @@
           <a:lstStyle/>
           <a:p>
             <a:r>
-              <a:rPr lang="en-US" b="1" dirty="0"/>
-              <a:t>Static Analysis </a:t>
-            </a:r>
-            <a:r>
-              <a:rPr lang="en-US" dirty="0"/>
-              <a:t>of your code</a:t>
+              <a:rPr lang="en-US" altLang="en-US" dirty="0">
+                <a:ea typeface="ＭＳ Ｐゴシック" panose="020B0600070205080204" pitchFamily="34" charset="-128"/>
+              </a:rPr>
+              <a:t>Errors are internal, exceptions are external</a:t>
+            </a:r>
+          </a:p>
+          <a:p>
+            <a:endParaRPr lang="en-US" altLang="en-US" dirty="0">
+              <a:ea typeface="ＭＳ Ｐゴシック" panose="020B0600070205080204" pitchFamily="34" charset="-128"/>
+            </a:endParaRPr>
+          </a:p>
+          <a:p>
+            <a:r>
+              <a:rPr lang="en-US" altLang="en-US" dirty="0">
+                <a:ea typeface="ＭＳ Ｐゴシック" panose="020B0600070205080204" pitchFamily="34" charset="-128"/>
+              </a:rPr>
+              <a:t>Check and sanitize input before doing anything</a:t>
             </a:r>
           </a:p>
           <a:p>
             <a:pPr lvl="1"/>
             <a:r>
-              <a:rPr lang="en-US" dirty="0"/>
-              <a:t>Analyzes the static aspect (e.g. the code, file names etc.) of your program</a:t>
+              <a:rPr lang="en-US" altLang="en-US" dirty="0">
+                <a:ea typeface="ＭＳ Ｐゴシック" panose="020B0600070205080204" pitchFamily="34" charset="-128"/>
+              </a:rPr>
+              <a:t>Setup default values if needed</a:t>
             </a:r>
           </a:p>
           <a:p>
             <a:pPr lvl="1"/>
             <a:r>
-              <a:rPr lang="en-US" dirty="0"/>
-              <a:t>Doesn’t care about what your code does at runtime</a:t>
+              <a:rPr lang="en-US" altLang="en-US" dirty="0">
+                <a:ea typeface="ＭＳ Ｐゴシック" panose="020B0600070205080204" pitchFamily="34" charset="-128"/>
+              </a:rPr>
+              <a:t>Raise exceptions when you can’t set a default value.</a:t>
             </a:r>
           </a:p>
           <a:p>
             <a:pPr lvl="1"/>
-            <a:r>
-              <a:rPr lang="en-US" dirty="0"/>
-              <a:t>Only cares if it looks right, and could compile it as well</a:t>
+            <a:endParaRPr lang="en-US" altLang="en-US" dirty="0">
+              <a:ea typeface="ＭＳ Ｐゴシック" panose="020B0600070205080204" pitchFamily="34" charset="-128"/>
+            </a:endParaRPr>
+          </a:p>
+          <a:p>
+            <a:r>
+              <a:rPr lang="en-US" altLang="en-US" dirty="0">
+                <a:ea typeface="ＭＳ Ｐゴシック" panose="020B0600070205080204" pitchFamily="34" charset="-128"/>
+              </a:rPr>
+              <a:t>Put try/catch around crucial pieces of code that can potentially crash your program, not everything.</a:t>
             </a:r>
           </a:p>
           <a:p>
             <a:pPr lvl="1"/>
             <a:r>
-              <a:rPr lang="en-US" dirty="0"/>
-              <a:t>Examples: </a:t>
-            </a:r>
-          </a:p>
-          <a:p>
-            <a:pPr lvl="2"/>
-            <a:r>
-              <a:rPr lang="en-US" dirty="0">
-                <a:hlinkClick r:id="rId2"/>
-              </a:rPr>
-              <a:t>PEP-8</a:t>
-            </a:r>
-            <a:r>
-              <a:rPr lang="en-US" dirty="0"/>
-              <a:t> in Python</a:t>
-            </a:r>
-          </a:p>
-          <a:p>
-            <a:pPr lvl="2"/>
-            <a:r>
-              <a:rPr lang="en-US" dirty="0"/>
-              <a:t>IntelliJ-</a:t>
-            </a:r>
-            <a:r>
-              <a:rPr lang="en-US" dirty="0" err="1"/>
-              <a:t>builtin</a:t>
-            </a:r>
-            <a:r>
-              <a:rPr lang="en-US" dirty="0"/>
-              <a:t>, &amp; </a:t>
-            </a:r>
-            <a:r>
-              <a:rPr lang="en-US" dirty="0">
-                <a:hlinkClick r:id="rId3"/>
-              </a:rPr>
-              <a:t>Google Style</a:t>
-            </a:r>
-            <a:r>
-              <a:rPr lang="en-US" dirty="0"/>
-              <a:t> in Java</a:t>
-            </a:r>
-          </a:p>
-          <a:p>
-            <a:pPr lvl="2"/>
-            <a:r>
-              <a:rPr lang="en-US" dirty="0" err="1">
-                <a:hlinkClick r:id="rId4"/>
-              </a:rPr>
-              <a:t>ESLint</a:t>
-            </a:r>
-            <a:r>
-              <a:rPr lang="en-US" dirty="0"/>
-              <a:t>, &amp; </a:t>
-            </a:r>
-            <a:r>
-              <a:rPr lang="en-US" dirty="0">
-                <a:hlinkClick r:id="rId5"/>
-              </a:rPr>
-              <a:t>Mozilla Style</a:t>
-            </a:r>
-            <a:r>
-              <a:rPr lang="en-US" dirty="0"/>
-              <a:t> in </a:t>
-            </a:r>
-            <a:r>
-              <a:rPr lang="en-US" dirty="0" err="1"/>
-              <a:t>Javascript</a:t>
-            </a:r>
-            <a:endParaRPr lang="en-US" dirty="0"/>
-          </a:p>
-          <a:p>
-            <a:pPr lvl="2"/>
-            <a:r>
-              <a:rPr lang="en-US" dirty="0"/>
-              <a:t>Custom Validators</a:t>
-            </a:r>
-          </a:p>
-          <a:p>
-            <a:pPr lvl="1"/>
-            <a:endParaRPr lang="en-US" dirty="0"/>
-          </a:p>
-          <a:p>
-            <a:r>
-              <a:rPr lang="en-US" dirty="0"/>
-              <a:t>In contrast, </a:t>
-            </a:r>
-            <a:r>
-              <a:rPr lang="en-US" b="1" dirty="0"/>
-              <a:t>dynamic analysis </a:t>
-            </a:r>
-            <a:r>
-              <a:rPr lang="en-US" dirty="0"/>
-              <a:t>involves analyzing your code during runtime</a:t>
-            </a:r>
-          </a:p>
-          <a:p>
-            <a:pPr lvl="1"/>
-            <a:r>
-              <a:rPr lang="en-US" dirty="0"/>
-              <a:t>Example: Code Coverage</a:t>
-            </a:r>
+              <a:rPr lang="en-US" altLang="en-US" dirty="0">
+                <a:ea typeface="ＭＳ Ｐゴシック" panose="020B0600070205080204" pitchFamily="34" charset="-128"/>
+              </a:rPr>
+              <a:t>These are areas that you have less control over (e.g. making a network request, file manipulations, using source-code from dependencies, running external programs).</a:t>
+            </a:r>
+          </a:p>
+          <a:p>
+            <a:endParaRPr lang="en-US" altLang="en-US" dirty="0">
+              <a:ea typeface="ＭＳ Ｐゴシック" panose="020B0600070205080204" pitchFamily="34" charset="-128"/>
+            </a:endParaRPr>
+          </a:p>
+          <a:p>
+            <a:endParaRPr lang="en-US" altLang="en-US" dirty="0">
+              <a:ea typeface="ＭＳ Ｐゴシック" panose="020B0600070205080204" pitchFamily="34" charset="-128"/>
+            </a:endParaRPr>
           </a:p>
         </p:txBody>
       </p:sp>
@@ -12662,7 +12668,7 @@
     </p:spTree>
     <p:extLst>
       <p:ext uri="{BB962C8B-B14F-4D97-AF65-F5344CB8AC3E}">
-        <p14:creationId xmlns:p14="http://schemas.microsoft.com/office/powerpoint/2010/main" xmlns="" val="355146014"/>
+        <p14:creationId xmlns:p14="http://schemas.microsoft.com/office/powerpoint/2010/main" xmlns="" val="839201425"/>
       </p:ext>
     </p:extLst>
   </p:cSld>
@@ -12713,7 +12719,7 @@
           <a:p>
             <a:r>
               <a:rPr lang="en-US" dirty="0"/>
-              <a:t>Advantages to using Linters</a:t>
+              <a:t>Key Points for Errors/Exceptions</a:t>
             </a:r>
             <a:endParaRPr lang="en-CA" dirty="0"/>
           </a:p>
@@ -12732,7 +12738,7 @@
         <p:spPr>
           <a:xfrm>
             <a:off x="640874" y="1168401"/>
-            <a:ext cx="10515600" cy="4399753"/>
+            <a:ext cx="10515600" cy="4966928"/>
           </a:xfrm>
         </p:spPr>
         <p:txBody>
@@ -12742,51 +12748,29 @@
           <a:lstStyle/>
           <a:p>
             <a:r>
-              <a:rPr lang="en-US" dirty="0"/>
-              <a:t>Quicker, and more powerful code reviews</a:t>
-            </a:r>
-          </a:p>
-          <a:p>
-            <a:pPr lvl="1"/>
-            <a:r>
-              <a:rPr lang="en-US" dirty="0"/>
-              <a:t>People can spend more time on the internals rather than the structure</a:t>
-            </a:r>
-          </a:p>
-          <a:p>
-            <a:pPr lvl="1"/>
-            <a:endParaRPr lang="en-US" dirty="0"/>
-          </a:p>
-          <a:p>
-            <a:r>
-              <a:rPr lang="en-US" dirty="0"/>
-              <a:t>Consistent code quality</a:t>
-            </a:r>
-          </a:p>
-          <a:p>
-            <a:endParaRPr lang="en-US" dirty="0"/>
-          </a:p>
-          <a:p>
-            <a:r>
-              <a:rPr lang="en-US" dirty="0"/>
-              <a:t>Enforcement of organizational standards</a:t>
-            </a:r>
-          </a:p>
-          <a:p>
-            <a:endParaRPr lang="en-US" dirty="0"/>
-          </a:p>
-          <a:p>
-            <a:r>
-              <a:rPr lang="en-US" dirty="0"/>
-              <a:t>No need to stress about your formatting anymore</a:t>
-            </a:r>
-          </a:p>
-          <a:p>
-            <a:pPr lvl="1"/>
-            <a:r>
-              <a:rPr lang="en-US" dirty="0"/>
-              <a:t>E.g. a misplaced curly brace `{` on line 10,276</a:t>
-            </a:r>
+              <a:rPr lang="en-US" altLang="en-US" dirty="0">
+                <a:ea typeface="ＭＳ Ｐゴシック" panose="020B0600070205080204" pitchFamily="34" charset="-128"/>
+              </a:rPr>
+              <a:t>When building large programs, remember where you generate and catch exceptions. Sometimes you maybe duplicating code and some catch code becomes unreachable as you always catch an exception earlier.</a:t>
+            </a:r>
+          </a:p>
+          <a:p>
+            <a:endParaRPr lang="en-US" altLang="en-US" dirty="0">
+              <a:ea typeface="ＭＳ Ｐゴシック" panose="020B0600070205080204" pitchFamily="34" charset="-128"/>
+            </a:endParaRPr>
+          </a:p>
+          <a:p>
+            <a:r>
+              <a:rPr lang="en-US" altLang="en-US" dirty="0">
+                <a:ea typeface="ＭＳ Ｐゴシック" panose="020B0600070205080204" pitchFamily="34" charset="-128"/>
+              </a:rPr>
+              <a:t>Logging is incredibly important for debugging errors!</a:t>
+            </a:r>
+          </a:p>
+          <a:p>
+            <a:endParaRPr lang="en-US" altLang="en-US" dirty="0">
+              <a:ea typeface="ＭＳ Ｐゴシック" panose="020B0600070205080204" pitchFamily="34" charset="-128"/>
+            </a:endParaRPr>
           </a:p>
         </p:txBody>
       </p:sp>
@@ -12842,7 +12826,7 @@
     </p:spTree>
     <p:extLst>
       <p:ext uri="{BB962C8B-B14F-4D97-AF65-F5344CB8AC3E}">
-        <p14:creationId xmlns:p14="http://schemas.microsoft.com/office/powerpoint/2010/main" xmlns="" val="2425407270"/>
+        <p14:creationId xmlns:p14="http://schemas.microsoft.com/office/powerpoint/2010/main" xmlns="" val="2336250104"/>
       </p:ext>
     </p:extLst>
   </p:cSld>
@@ -12912,7 +12896,7 @@
         <p:spPr>
           <a:xfrm>
             <a:off x="640874" y="1168401"/>
-            <a:ext cx="10515600" cy="4966928"/>
+            <a:ext cx="10515600" cy="4399753"/>
           </a:xfrm>
         </p:spPr>
         <p:txBody>
@@ -12925,20 +12909,16 @@
               <a:rPr lang="en-US" altLang="en-US" dirty="0">
                 <a:ea typeface="ＭＳ Ｐゴシック" panose="020B0600070205080204" pitchFamily="34" charset="-128"/>
               </a:rPr>
-              <a:t>Errors are internal, exceptions are external</a:t>
-            </a:r>
-          </a:p>
-          <a:p>
-            <a:endParaRPr lang="en-US" altLang="en-US" dirty="0">
-              <a:ea typeface="ＭＳ Ｐゴシック" panose="020B0600070205080204" pitchFamily="34" charset="-128"/>
-            </a:endParaRPr>
-          </a:p>
-          <a:p>
+              <a:t>These become really important in weakly-typed languages!</a:t>
+            </a:r>
+          </a:p>
+          <a:p>
+            <a:pPr lvl="1"/>
             <a:r>
               <a:rPr lang="en-US" altLang="en-US" dirty="0">
                 <a:ea typeface="ＭＳ Ｐゴシック" panose="020B0600070205080204" pitchFamily="34" charset="-128"/>
               </a:rPr>
-              <a:t>Check and sanitize input before doing anything</a:t>
+              <a:t>You can pass any type as any parameter in any method</a:t>
             </a:r>
           </a:p>
           <a:p>
@@ -12947,45 +12927,8 @@
               <a:rPr lang="en-US" altLang="en-US" dirty="0">
                 <a:ea typeface="ＭＳ Ｐゴシック" panose="020B0600070205080204" pitchFamily="34" charset="-128"/>
               </a:rPr>
-              <a:t>Setup default values if needed</a:t>
-            </a:r>
-          </a:p>
-          <a:p>
-            <a:pPr lvl="1"/>
-            <a:r>
-              <a:rPr lang="en-US" altLang="en-US" dirty="0">
-                <a:ea typeface="ＭＳ Ｐゴシック" panose="020B0600070205080204" pitchFamily="34" charset="-128"/>
-              </a:rPr>
-              <a:t>Raise exceptions when you can’t set a default value.</a:t>
-            </a:r>
-          </a:p>
-          <a:p>
-            <a:pPr lvl="1"/>
-            <a:endParaRPr lang="en-US" altLang="en-US" dirty="0">
-              <a:ea typeface="ＭＳ Ｐゴシック" panose="020B0600070205080204" pitchFamily="34" charset="-128"/>
-            </a:endParaRPr>
-          </a:p>
-          <a:p>
-            <a:r>
-              <a:rPr lang="en-US" altLang="en-US" dirty="0">
-                <a:ea typeface="ＭＳ Ｐゴシック" panose="020B0600070205080204" pitchFamily="34" charset="-128"/>
-              </a:rPr>
-              <a:t>Put try/catch around crucial pieces of code that can potentially crash your program, not everything.</a:t>
-            </a:r>
-          </a:p>
-          <a:p>
-            <a:pPr lvl="1"/>
-            <a:r>
-              <a:rPr lang="en-US" altLang="en-US" dirty="0">
-                <a:ea typeface="ＭＳ Ｐゴシック" panose="020B0600070205080204" pitchFamily="34" charset="-128"/>
-              </a:rPr>
-              <a:t>These are areas that you have less control over (e.g. making a network request, file manipulations, using source-code from dependencies, running external programs).</a:t>
-            </a:r>
-          </a:p>
-          <a:p>
-            <a:endParaRPr lang="en-US" altLang="en-US" dirty="0">
-              <a:ea typeface="ＭＳ Ｐゴシック" panose="020B0600070205080204" pitchFamily="34" charset="-128"/>
-            </a:endParaRPr>
+              <a:t>Exceptions will help</a:t>
+            </a:r>
           </a:p>
           <a:p>
             <a:endParaRPr lang="en-US" altLang="en-US" dirty="0">
@@ -13046,7 +12989,7 @@
     </p:spTree>
     <p:extLst>
       <p:ext uri="{BB962C8B-B14F-4D97-AF65-F5344CB8AC3E}">
-        <p14:creationId xmlns:p14="http://schemas.microsoft.com/office/powerpoint/2010/main" xmlns="" val="839201425"/>
+        <p14:creationId xmlns:p14="http://schemas.microsoft.com/office/powerpoint/2010/main" xmlns="" val="51877935"/>
       </p:ext>
     </p:extLst>
   </p:cSld>
@@ -13116,7 +13059,7 @@
         <p:spPr>
           <a:xfrm>
             <a:off x="640874" y="1168401"/>
-            <a:ext cx="10515600" cy="4966928"/>
+            <a:ext cx="10515600" cy="4399753"/>
           </a:xfrm>
         </p:spPr>
         <p:txBody>
@@ -13129,26 +13072,56 @@
               <a:rPr lang="en-US" altLang="en-US" dirty="0">
                 <a:ea typeface="ＭＳ Ｐゴシック" panose="020B0600070205080204" pitchFamily="34" charset="-128"/>
               </a:rPr>
-              <a:t>When building large programs, remember where you generate and catch exceptions. Sometimes you maybe duplicating code and some catch code becomes unreachable as you always catch an exception earlier.</a:t>
-            </a:r>
-          </a:p>
-          <a:p>
+              <a:t>Keyboard Interrupts (</a:t>
+            </a:r>
+            <a:r>
+              <a:rPr lang="en-US" altLang="en-US" dirty="0" err="1">
+                <a:ea typeface="ＭＳ Ｐゴシック" panose="020B0600070205080204" pitchFamily="34" charset="-128"/>
+              </a:rPr>
+              <a:t>Ctrl+C</a:t>
+            </a:r>
+            <a:r>
+              <a:rPr lang="en-US" altLang="en-US" dirty="0">
+                <a:ea typeface="ＭＳ Ｐゴシック" panose="020B0600070205080204" pitchFamily="34" charset="-128"/>
+              </a:rPr>
+              <a:t>) </a:t>
+            </a:r>
+          </a:p>
+          <a:p>
+            <a:pPr lvl="1"/>
+            <a:r>
+              <a:rPr lang="en-US" altLang="en-US" dirty="0">
+                <a:ea typeface="ＭＳ Ｐゴシック" panose="020B0600070205080204" pitchFamily="34" charset="-128"/>
+              </a:rPr>
+              <a:t>There are cases where you absolutely want to catch these to prevent data corruption</a:t>
+            </a:r>
+          </a:p>
+          <a:p>
+            <a:pPr lvl="1"/>
             <a:endParaRPr lang="en-US" altLang="en-US" dirty="0">
               <a:ea typeface="ＭＳ Ｐゴシック" panose="020B0600070205080204" pitchFamily="34" charset="-128"/>
             </a:endParaRPr>
           </a:p>
           <a:p>
+            <a:pPr lvl="1"/>
             <a:r>
               <a:rPr lang="en-US" altLang="en-US" dirty="0">
                 <a:ea typeface="ＭＳ Ｐゴシック" panose="020B0600070205080204" pitchFamily="34" charset="-128"/>
               </a:rPr>
-              <a:t>Logging is incredibly important for debugging errors!</a:t>
-            </a:r>
-          </a:p>
-          <a:p>
-            <a:endParaRPr lang="en-US" altLang="en-US" dirty="0">
-              <a:ea typeface="ＭＳ Ｐゴシック" panose="020B0600070205080204" pitchFamily="34" charset="-128"/>
-            </a:endParaRPr>
+              <a:t>In general, don’t catch these or make a routine that handles a special shutdown on (</a:t>
+            </a:r>
+            <a:r>
+              <a:rPr lang="en-US" altLang="en-US" dirty="0" err="1">
+                <a:ea typeface="ＭＳ Ｐゴシック" panose="020B0600070205080204" pitchFamily="34" charset="-128"/>
+              </a:rPr>
+              <a:t>Ctrl+C</a:t>
+            </a:r>
+            <a:r>
+              <a:rPr lang="en-US" altLang="en-US" dirty="0">
+                <a:ea typeface="ＭＳ Ｐゴシック" panose="020B0600070205080204" pitchFamily="34" charset="-128"/>
+              </a:rPr>
+              <a:t>) for critical pieces</a:t>
+            </a:r>
           </a:p>
         </p:txBody>
       </p:sp>
@@ -13204,7 +13177,7 @@
     </p:spTree>
     <p:extLst>
       <p:ext uri="{BB962C8B-B14F-4D97-AF65-F5344CB8AC3E}">
-        <p14:creationId xmlns:p14="http://schemas.microsoft.com/office/powerpoint/2010/main" xmlns="" val="2336250104"/>
+        <p14:creationId xmlns:p14="http://schemas.microsoft.com/office/powerpoint/2010/main" xmlns="" val="739683668"/>
       </p:ext>
     </p:extLst>
   </p:cSld>
@@ -13255,7 +13228,7 @@
           <a:p>
             <a:r>
               <a:rPr lang="en-US" dirty="0"/>
-              <a:t>Key Points for Errors/Exceptions</a:t>
+              <a:t>Generics</a:t>
             </a:r>
             <a:endParaRPr lang="en-CA" dirty="0"/>
           </a:p>
@@ -13287,31 +13260,34 @@
               <a:rPr lang="en-US" altLang="en-US" dirty="0">
                 <a:ea typeface="ＭＳ Ｐゴシック" panose="020B0600070205080204" pitchFamily="34" charset="-128"/>
               </a:rPr>
-              <a:t>These become really important in weakly-typed languages!</a:t>
-            </a:r>
-          </a:p>
-          <a:p>
-            <a:pPr lvl="1"/>
-            <a:r>
-              <a:rPr lang="en-US" altLang="en-US" dirty="0">
-                <a:ea typeface="ＭＳ Ｐゴシック" panose="020B0600070205080204" pitchFamily="34" charset="-128"/>
-              </a:rPr>
-              <a:t>You can pass any type as any parameter in any method</a:t>
-            </a:r>
-          </a:p>
-          <a:p>
-            <a:pPr lvl="1"/>
-            <a:r>
-              <a:rPr lang="en-US" altLang="en-US" dirty="0">
-                <a:ea typeface="ＭＳ Ｐゴシック" panose="020B0600070205080204" pitchFamily="34" charset="-128"/>
-              </a:rPr>
-              <a:t>Exceptions will help</a:t>
+              <a:t>A way to build classes with arbitrary or unknown types (classes) that may or may not need to define a particular set of methods.</a:t>
             </a:r>
           </a:p>
           <a:p>
             <a:endParaRPr lang="en-US" altLang="en-US" dirty="0">
               <a:ea typeface="ＭＳ Ｐゴシック" panose="020B0600070205080204" pitchFamily="34" charset="-128"/>
             </a:endParaRPr>
+          </a:p>
+          <a:p>
+            <a:r>
+              <a:rPr lang="en-US" altLang="en-US" dirty="0">
+                <a:ea typeface="ＭＳ Ｐゴシック" panose="020B0600070205080204" pitchFamily="34" charset="-128"/>
+              </a:rPr>
+              <a:t>Useful for building methods that can be used on any type (think the max method which uses the Comparable interface)</a:t>
+            </a:r>
+          </a:p>
+          <a:p>
+            <a:endParaRPr lang="en-US" altLang="en-US" dirty="0">
+              <a:ea typeface="ＭＳ Ｐゴシック" panose="020B0600070205080204" pitchFamily="34" charset="-128"/>
+            </a:endParaRPr>
+          </a:p>
+          <a:p>
+            <a:r>
+              <a:rPr lang="en-US" altLang="en-US" dirty="0">
+                <a:ea typeface="ＭＳ Ｐゴシック" panose="020B0600070205080204" pitchFamily="34" charset="-128"/>
+              </a:rPr>
+              <a:t>Useful for building classes that perform operations on or with a parametrized type (superhero/villain example)</a:t>
+            </a:r>
           </a:p>
         </p:txBody>
       </p:sp>
@@ -13367,7 +13343,7 @@
     </p:spTree>
     <p:extLst>
       <p:ext uri="{BB962C8B-B14F-4D97-AF65-F5344CB8AC3E}">
-        <p14:creationId xmlns:p14="http://schemas.microsoft.com/office/powerpoint/2010/main" xmlns="" val="51877935"/>
+        <p14:creationId xmlns:p14="http://schemas.microsoft.com/office/powerpoint/2010/main" xmlns="" val="1261194124"/>
       </p:ext>
     </p:extLst>
   </p:cSld>
@@ -13411,33 +13387,10 @@
             <p:ph type="title"/>
           </p:nvPr>
         </p:nvSpPr>
-        <p:spPr/>
-        <p:txBody>
-          <a:bodyPr/>
-          <a:lstStyle/>
-          <a:p>
-            <a:r>
-              <a:rPr lang="en-US" dirty="0"/>
-              <a:t>Key Points for Errors/Exceptions</a:t>
-            </a:r>
-            <a:endParaRPr lang="en-CA" dirty="0"/>
-          </a:p>
-        </p:txBody>
-      </p:sp>
-      <p:sp>
-        <p:nvSpPr>
-          <p:cNvPr id="3" name="Content Placeholder 2"/>
-          <p:cNvSpPr>
-            <a:spLocks noGrp="1"/>
-          </p:cNvSpPr>
-          <p:nvPr>
-            <p:ph idx="1"/>
-          </p:nvPr>
-        </p:nvSpPr>
         <p:spPr>
           <a:xfrm>
-            <a:off x="640874" y="1168401"/>
-            <a:ext cx="10515600" cy="4399753"/>
+            <a:off x="0" y="-157162"/>
+            <a:ext cx="11012129" cy="1325563"/>
           </a:xfrm>
         </p:spPr>
         <p:txBody>
@@ -13447,58 +13400,392 @@
           <a:lstStyle/>
           <a:p>
             <a:r>
-              <a:rPr lang="en-US" altLang="en-US" dirty="0">
+              <a:rPr lang="en-US" altLang="en-US" dirty="0"/>
+              <a:t>Bounds for Type Parameters</a:t>
+            </a:r>
+            <a:endParaRPr lang="en-CA" dirty="0"/>
+          </a:p>
+        </p:txBody>
+      </p:sp>
+      <p:sp>
+        <p:nvSpPr>
+          <p:cNvPr id="3" name="Content Placeholder 2"/>
+          <p:cNvSpPr>
+            <a:spLocks noGrp="1"/>
+          </p:cNvSpPr>
+          <p:nvPr>
+            <p:ph idx="1"/>
+          </p:nvPr>
+        </p:nvSpPr>
+        <p:spPr>
+          <a:xfrm>
+            <a:off x="660538" y="1168401"/>
+            <a:ext cx="10515600" cy="5025922"/>
+          </a:xfrm>
+        </p:spPr>
+        <p:txBody>
+          <a:bodyPr>
+            <a:normAutofit lnSpcReduction="10000"/>
+          </a:bodyPr>
+          <a:lstStyle/>
+          <a:p>
+            <a:pPr marL="392113" marR="0" lvl="0" indent="-293688" algn="l" defTabSz="414338" rtl="0" eaLnBrk="1" fontAlgn="base" latinLnBrk="0" hangingPunct="1">
+              <a:lnSpc>
+                <a:spcPct val="100000"/>
+              </a:lnSpc>
+              <a:spcBef>
+                <a:spcPct val="0"/>
+              </a:spcBef>
+              <a:spcAft>
+                <a:spcPts val="1288"/>
+              </a:spcAft>
+              <a:buClr>
+                <a:srgbClr val="000000"/>
+              </a:buClr>
+              <a:buSzPct val="45000"/>
+              <a:buFont typeface="StarBats" charset="0"/>
+              <a:buChar char="&quot;"/>
+              <a:tabLst/>
+              <a:defRPr/>
+            </a:pPr>
+            <a:r>
+              <a:rPr kumimoji="0" lang="en-US" altLang="en-US" sz="2500" b="0" i="0" u="none" strike="noStrike" kern="0" cap="none" spc="0" normalizeH="0" baseline="0" noProof="0" dirty="0">
+                <a:ln>
+                  <a:noFill/>
+                </a:ln>
+                <a:solidFill>
+                  <a:srgbClr val="000000"/>
+                </a:solidFill>
+                <a:effectLst/>
+                <a:uLnTx/>
+                <a:uFillTx/>
+                <a:latin typeface="Times"/>
                 <a:ea typeface="ＭＳ Ｐゴシック" panose="020B0600070205080204" pitchFamily="34" charset="-128"/>
-              </a:rPr>
-              <a:t>Keyboard Interrupts (</a:t>
-            </a:r>
-            <a:r>
-              <a:rPr lang="en-US" altLang="en-US" dirty="0" err="1">
+                <a:cs typeface="+mn-cs"/>
+              </a:rPr>
+              <a:t>A bound on a type may be a class name (rather than an interface name)</a:t>
+            </a:r>
+          </a:p>
+          <a:p>
+            <a:pPr marL="782638" marR="0" lvl="1" indent="-260350" algn="l" defTabSz="414338" rtl="0" eaLnBrk="1" fontAlgn="base" latinLnBrk="0" hangingPunct="1">
+              <a:lnSpc>
+                <a:spcPct val="100000"/>
+              </a:lnSpc>
+              <a:spcBef>
+                <a:spcPct val="0"/>
+              </a:spcBef>
+              <a:spcAft>
+                <a:spcPts val="1025"/>
+              </a:spcAft>
+              <a:buClr>
+                <a:srgbClr val="000000"/>
+              </a:buClr>
+              <a:buSzPct val="75000"/>
+              <a:buFont typeface="StarBats" charset="0"/>
+              <a:buChar char=""/>
+              <a:tabLst/>
+              <a:defRPr/>
+            </a:pPr>
+            <a:r>
+              <a:rPr kumimoji="0" lang="en-US" altLang="en-US" sz="1900" b="0" i="0" u="none" strike="noStrike" kern="0" cap="none" spc="0" normalizeH="0" baseline="0" noProof="0" dirty="0">
+                <a:ln>
+                  <a:noFill/>
+                </a:ln>
+                <a:solidFill>
+                  <a:srgbClr val="000000"/>
+                </a:solidFill>
+                <a:effectLst/>
+                <a:uLnTx/>
+                <a:uFillTx/>
+                <a:latin typeface="Times"/>
                 <a:ea typeface="ＭＳ Ｐゴシック" panose="020B0600070205080204" pitchFamily="34" charset="-128"/>
               </a:rPr>
-              <a:t>Ctrl+C</a:t>
-            </a:r>
-            <a:r>
-              <a:rPr lang="en-US" altLang="en-US" dirty="0">
-                <a:ea typeface="ＭＳ Ｐゴシック" panose="020B0600070205080204" pitchFamily="34" charset="-128"/>
-              </a:rPr>
-              <a:t>) </a:t>
-            </a:r>
-          </a:p>
-          <a:p>
-            <a:pPr lvl="1"/>
-            <a:r>
-              <a:rPr lang="en-US" altLang="en-US" dirty="0">
-                <a:ea typeface="ＭＳ Ｐゴシック" panose="020B0600070205080204" pitchFamily="34" charset="-128"/>
-              </a:rPr>
-              <a:t>There are cases where you absolutely want to catch these to prevent data corruption</a:t>
-            </a:r>
-          </a:p>
-          <a:p>
-            <a:pPr lvl="1"/>
-            <a:endParaRPr lang="en-US" altLang="en-US" dirty="0">
+              <a:t>Then only descendent classes of the bounding class may be plugged in for the type parameters:</a:t>
+            </a:r>
+          </a:p>
+          <a:p>
+            <a:pPr marL="782638" marR="0" lvl="1" indent="-260350" algn="l" defTabSz="414338" rtl="0" eaLnBrk="1" fontAlgn="base" latinLnBrk="0" hangingPunct="1">
+              <a:lnSpc>
+                <a:spcPct val="100000"/>
+              </a:lnSpc>
+              <a:spcBef>
+                <a:spcPct val="0"/>
+              </a:spcBef>
+              <a:spcAft>
+                <a:spcPts val="1025"/>
+              </a:spcAft>
+              <a:buClr>
+                <a:srgbClr val="000000"/>
+              </a:buClr>
+              <a:buSzPct val="75000"/>
+              <a:buFont typeface="StarBats" charset="0"/>
+              <a:buChar char=""/>
+              <a:tabLst/>
+              <a:defRPr/>
+            </a:pPr>
+            <a:endParaRPr kumimoji="0" lang="en-US" altLang="en-US" sz="1900" b="0" i="0" u="none" strike="noStrike" kern="0" cap="none" spc="0" normalizeH="0" baseline="0" noProof="0" dirty="0">
+              <a:ln>
+                <a:noFill/>
+              </a:ln>
+              <a:solidFill>
+                <a:srgbClr val="000000"/>
+              </a:solidFill>
+              <a:effectLst/>
+              <a:uLnTx/>
+              <a:uFillTx/>
+              <a:latin typeface="Times"/>
               <a:ea typeface="ＭＳ Ｐゴシック" panose="020B0600070205080204" pitchFamily="34" charset="-128"/>
             </a:endParaRPr>
           </a:p>
           <a:p>
-            <a:pPr lvl="1"/>
-            <a:r>
-              <a:rPr lang="en-US" altLang="en-US" dirty="0">
+            <a:pPr marL="782638" marR="0" lvl="1" indent="-260350" algn="ctr" defTabSz="414338" rtl="0" eaLnBrk="1" fontAlgn="base" latinLnBrk="0" hangingPunct="1">
+              <a:lnSpc>
+                <a:spcPct val="100000"/>
+              </a:lnSpc>
+              <a:spcBef>
+                <a:spcPct val="0"/>
+              </a:spcBef>
+              <a:spcAft>
+                <a:spcPts val="1025"/>
+              </a:spcAft>
+              <a:buClr>
+                <a:srgbClr val="000000"/>
+              </a:buClr>
+              <a:buSzPct val="75000"/>
+              <a:buFontTx/>
+              <a:buNone/>
+              <a:tabLst/>
+              <a:defRPr/>
+            </a:pPr>
+            <a:r>
+              <a:rPr kumimoji="0" lang="en-US" altLang="en-US" sz="1900" b="1" i="0" u="none" strike="noStrike" kern="0" cap="none" spc="0" normalizeH="0" baseline="0" noProof="0" dirty="0">
+                <a:ln>
+                  <a:noFill/>
+                </a:ln>
+                <a:solidFill>
+                  <a:srgbClr val="000000"/>
+                </a:solidFill>
+                <a:effectLst/>
+                <a:uLnTx/>
+                <a:uFillTx/>
+                <a:latin typeface="Courier New" panose="02070309020205020404" pitchFamily="49" charset="0"/>
                 <a:ea typeface="ＭＳ Ｐゴシック" panose="020B0600070205080204" pitchFamily="34" charset="-128"/>
               </a:rPr>
-              <a:t>In general, don’t catch these or make a routine that handles a special shutdown on (</a:t>
-            </a:r>
-            <a:r>
-              <a:rPr lang="en-US" altLang="en-US" dirty="0" err="1">
+              <a:t>public class </a:t>
+            </a:r>
+            <a:r>
+              <a:rPr kumimoji="0" lang="en-US" altLang="en-US" sz="1900" b="1" i="0" u="none" strike="noStrike" kern="0" cap="none" spc="0" normalizeH="0" baseline="0" noProof="0" dirty="0" err="1">
+                <a:ln>
+                  <a:noFill/>
+                </a:ln>
+                <a:solidFill>
+                  <a:srgbClr val="000000"/>
+                </a:solidFill>
+                <a:effectLst/>
+                <a:uLnTx/>
+                <a:uFillTx/>
+                <a:latin typeface="Courier New" panose="02070309020205020404" pitchFamily="49" charset="0"/>
                 <a:ea typeface="ＭＳ Ｐゴシック" panose="020B0600070205080204" pitchFamily="34" charset="-128"/>
               </a:rPr>
-              <a:t>Ctrl+C</a:t>
-            </a:r>
-            <a:r>
-              <a:rPr lang="en-US" altLang="en-US" dirty="0">
+              <a:t>ExClass</a:t>
+            </a:r>
+            <a:r>
+              <a:rPr kumimoji="0" lang="en-US" altLang="en-US" sz="1900" b="1" i="0" u="none" strike="noStrike" kern="0" cap="none" spc="0" normalizeH="0" baseline="0" noProof="0" dirty="0">
+                <a:ln>
+                  <a:noFill/>
+                </a:ln>
+                <a:solidFill>
+                  <a:srgbClr val="000000"/>
+                </a:solidFill>
+                <a:effectLst/>
+                <a:uLnTx/>
+                <a:uFillTx/>
+                <a:latin typeface="Courier New" panose="02070309020205020404" pitchFamily="49" charset="0"/>
                 <a:ea typeface="ＭＳ Ｐゴシック" panose="020B0600070205080204" pitchFamily="34" charset="-128"/>
               </a:rPr>
-              <a:t>) for critical pieces</a:t>
+              <a:t>&lt;T extends Class1&gt;</a:t>
+            </a:r>
+          </a:p>
+          <a:p>
+            <a:pPr marL="392113" marR="0" lvl="0" indent="-293688" algn="l" defTabSz="414338" rtl="0" eaLnBrk="1" fontAlgn="base" latinLnBrk="0" hangingPunct="1">
+              <a:lnSpc>
+                <a:spcPct val="100000"/>
+              </a:lnSpc>
+              <a:spcBef>
+                <a:spcPct val="0"/>
+              </a:spcBef>
+              <a:spcAft>
+                <a:spcPts val="1288"/>
+              </a:spcAft>
+              <a:buClr>
+                <a:srgbClr val="000000"/>
+              </a:buClr>
+              <a:buSzPct val="45000"/>
+              <a:buFont typeface="StarBats" charset="0"/>
+              <a:buChar char="&quot;"/>
+              <a:tabLst/>
+              <a:defRPr/>
+            </a:pPr>
+            <a:r>
+              <a:rPr kumimoji="0" lang="en-US" altLang="en-US" sz="2500" b="0" i="0" u="none" strike="noStrike" kern="0" cap="none" spc="0" normalizeH="0" baseline="0" noProof="0" dirty="0">
+                <a:ln>
+                  <a:noFill/>
+                </a:ln>
+                <a:solidFill>
+                  <a:srgbClr val="000000"/>
+                </a:solidFill>
+                <a:effectLst/>
+                <a:uLnTx/>
+                <a:uFillTx/>
+                <a:latin typeface="Times"/>
+                <a:ea typeface="ＭＳ Ｐゴシック" panose="020B0600070205080204" pitchFamily="34" charset="-128"/>
+                <a:cs typeface="+mn-cs"/>
+              </a:rPr>
+              <a:t>A bounds expression may contain multiple interfaces and up to one class.</a:t>
+            </a:r>
+          </a:p>
+          <a:p>
+            <a:pPr marL="392113" marR="0" lvl="0" indent="-293688" algn="l" defTabSz="414338" rtl="0" eaLnBrk="1" fontAlgn="base" latinLnBrk="0" hangingPunct="1">
+              <a:lnSpc>
+                <a:spcPct val="100000"/>
+              </a:lnSpc>
+              <a:spcBef>
+                <a:spcPct val="0"/>
+              </a:spcBef>
+              <a:spcAft>
+                <a:spcPts val="1288"/>
+              </a:spcAft>
+              <a:buClr>
+                <a:srgbClr val="000000"/>
+              </a:buClr>
+              <a:buSzPct val="45000"/>
+              <a:buFont typeface="StarBats" charset="0"/>
+              <a:buChar char="&quot;"/>
+              <a:tabLst/>
+              <a:defRPr/>
+            </a:pPr>
+            <a:endParaRPr kumimoji="0" lang="en-US" altLang="en-US" sz="2500" b="0" i="0" u="none" strike="noStrike" kern="0" cap="none" spc="0" normalizeH="0" baseline="0" noProof="0" dirty="0">
+              <a:ln>
+                <a:noFill/>
+              </a:ln>
+              <a:solidFill>
+                <a:srgbClr val="000000"/>
+              </a:solidFill>
+              <a:effectLst/>
+              <a:uLnTx/>
+              <a:uFillTx/>
+              <a:latin typeface="Times"/>
+              <a:ea typeface="ＭＳ Ｐゴシック" panose="020B0600070205080204" pitchFamily="34" charset="-128"/>
+              <a:cs typeface="+mn-cs"/>
+            </a:endParaRPr>
+          </a:p>
+          <a:p>
+            <a:pPr marL="392113" marR="0" lvl="0" indent="-293688" algn="l" defTabSz="414338" rtl="0" eaLnBrk="1" fontAlgn="base" latinLnBrk="0" hangingPunct="1">
+              <a:lnSpc>
+                <a:spcPct val="100000"/>
+              </a:lnSpc>
+              <a:spcBef>
+                <a:spcPct val="0"/>
+              </a:spcBef>
+              <a:spcAft>
+                <a:spcPts val="1288"/>
+              </a:spcAft>
+              <a:buClr>
+                <a:srgbClr val="000000"/>
+              </a:buClr>
+              <a:buSzPct val="45000"/>
+              <a:buFont typeface="StarBats" charset="0"/>
+              <a:buChar char="&quot;"/>
+              <a:tabLst/>
+              <a:defRPr/>
+            </a:pPr>
+            <a:r>
+              <a:rPr kumimoji="0" lang="en-US" altLang="en-US" sz="2500" b="0" i="0" u="none" strike="noStrike" kern="0" cap="none" spc="0" normalizeH="0" baseline="0" noProof="0" dirty="0">
+                <a:ln>
+                  <a:noFill/>
+                </a:ln>
+                <a:solidFill>
+                  <a:srgbClr val="000000"/>
+                </a:solidFill>
+                <a:effectLst/>
+                <a:uLnTx/>
+                <a:uFillTx/>
+                <a:latin typeface="Times"/>
+                <a:ea typeface="ＭＳ Ｐゴシック" panose="020B0600070205080204" pitchFamily="34" charset="-128"/>
+                <a:cs typeface="+mn-cs"/>
+              </a:rPr>
+              <a:t>If there is more than one type parameter, the syntax is as follows:</a:t>
+            </a:r>
+          </a:p>
+          <a:p>
+            <a:pPr marL="782638" marR="0" lvl="1" indent="-260350" algn="l" defTabSz="414338" rtl="0" eaLnBrk="1" fontAlgn="base" latinLnBrk="0" hangingPunct="1">
+              <a:lnSpc>
+                <a:spcPct val="100000"/>
+              </a:lnSpc>
+              <a:spcBef>
+                <a:spcPct val="0"/>
+              </a:spcBef>
+              <a:spcAft>
+                <a:spcPts val="1025"/>
+              </a:spcAft>
+              <a:buClr>
+                <a:srgbClr val="000000"/>
+              </a:buClr>
+              <a:buSzPct val="75000"/>
+              <a:buFontTx/>
+              <a:buNone/>
+              <a:tabLst/>
+              <a:defRPr/>
+            </a:pPr>
+            <a:endParaRPr kumimoji="0" lang="en-US" altLang="en-US" sz="1900" b="1" i="0" u="none" strike="noStrike" kern="0" cap="none" spc="0" normalizeH="0" baseline="0" noProof="0" dirty="0">
+              <a:ln>
+                <a:noFill/>
+              </a:ln>
+              <a:solidFill>
+                <a:srgbClr val="000000"/>
+              </a:solidFill>
+              <a:effectLst/>
+              <a:uLnTx/>
+              <a:uFillTx/>
+              <a:latin typeface="Courier New" panose="02070309020205020404" pitchFamily="49" charset="0"/>
+              <a:ea typeface="ＭＳ Ｐゴシック" panose="020B0600070205080204" pitchFamily="34" charset="-128"/>
+            </a:endParaRPr>
+          </a:p>
+          <a:p>
+            <a:pPr marL="782638" marR="0" lvl="1" indent="-260350" algn="l" defTabSz="414338" rtl="0" eaLnBrk="1" fontAlgn="base" latinLnBrk="0" hangingPunct="1">
+              <a:lnSpc>
+                <a:spcPct val="100000"/>
+              </a:lnSpc>
+              <a:spcBef>
+                <a:spcPct val="0"/>
+              </a:spcBef>
+              <a:spcAft>
+                <a:spcPts val="1025"/>
+              </a:spcAft>
+              <a:buClr>
+                <a:srgbClr val="000000"/>
+              </a:buClr>
+              <a:buSzPct val="75000"/>
+              <a:buFontTx/>
+              <a:buNone/>
+              <a:tabLst/>
+              <a:defRPr/>
+            </a:pPr>
+            <a:r>
+              <a:rPr kumimoji="0" lang="en-US" altLang="en-US" sz="1900" b="1" i="0" u="none" strike="noStrike" kern="0" cap="none" spc="0" normalizeH="0" baseline="0" noProof="0" dirty="0">
+                <a:ln>
+                  <a:noFill/>
+                </a:ln>
+                <a:solidFill>
+                  <a:srgbClr val="000000"/>
+                </a:solidFill>
+                <a:effectLst/>
+                <a:uLnTx/>
+                <a:uFillTx/>
+                <a:latin typeface="Courier New" panose="02070309020205020404" pitchFamily="49" charset="0"/>
+                <a:ea typeface="ＭＳ Ｐゴシック" panose="020B0600070205080204" pitchFamily="34" charset="-128"/>
+              </a:rPr>
+              <a:t>public class Two&lt;T1 extends Class1, T2 extends Class2 &amp; Comparable&gt;</a:t>
             </a:r>
           </a:p>
         </p:txBody>
@@ -13555,7 +13842,7 @@
     </p:spTree>
     <p:extLst>
       <p:ext uri="{BB962C8B-B14F-4D97-AF65-F5344CB8AC3E}">
-        <p14:creationId xmlns:p14="http://schemas.microsoft.com/office/powerpoint/2010/main" xmlns="" val="739683668"/>
+        <p14:creationId xmlns:p14="http://schemas.microsoft.com/office/powerpoint/2010/main" xmlns="" val="2928778702"/>
       </p:ext>
     </p:extLst>
   </p:cSld>
@@ -13599,172 +13886,6 @@
             <p:ph type="title"/>
           </p:nvPr>
         </p:nvSpPr>
-        <p:spPr/>
-        <p:txBody>
-          <a:bodyPr/>
-          <a:lstStyle/>
-          <a:p>
-            <a:r>
-              <a:rPr lang="en-US" dirty="0"/>
-              <a:t>Generics</a:t>
-            </a:r>
-            <a:endParaRPr lang="en-CA" dirty="0"/>
-          </a:p>
-        </p:txBody>
-      </p:sp>
-      <p:sp>
-        <p:nvSpPr>
-          <p:cNvPr id="3" name="Content Placeholder 2"/>
-          <p:cNvSpPr>
-            <a:spLocks noGrp="1"/>
-          </p:cNvSpPr>
-          <p:nvPr>
-            <p:ph idx="1"/>
-          </p:nvPr>
-        </p:nvSpPr>
-        <p:spPr>
-          <a:xfrm>
-            <a:off x="640874" y="1168401"/>
-            <a:ext cx="10515600" cy="4399753"/>
-          </a:xfrm>
-        </p:spPr>
-        <p:txBody>
-          <a:bodyPr>
-            <a:normAutofit/>
-          </a:bodyPr>
-          <a:lstStyle/>
-          <a:p>
-            <a:r>
-              <a:rPr lang="en-US" altLang="en-US" dirty="0">
-                <a:ea typeface="ＭＳ Ｐゴシック" panose="020B0600070205080204" pitchFamily="34" charset="-128"/>
-              </a:rPr>
-              <a:t>A way to build classes with arbitrary or unknown types (classes) that may or may not need to define a particular set of methods.</a:t>
-            </a:r>
-          </a:p>
-          <a:p>
-            <a:endParaRPr lang="en-US" altLang="en-US" dirty="0">
-              <a:ea typeface="ＭＳ Ｐゴシック" panose="020B0600070205080204" pitchFamily="34" charset="-128"/>
-            </a:endParaRPr>
-          </a:p>
-          <a:p>
-            <a:r>
-              <a:rPr lang="en-US" altLang="en-US" dirty="0">
-                <a:ea typeface="ＭＳ Ｐゴシック" panose="020B0600070205080204" pitchFamily="34" charset="-128"/>
-              </a:rPr>
-              <a:t>Useful for building methods that can be used on any type (think the max method which uses the Comparable interface)</a:t>
-            </a:r>
-          </a:p>
-          <a:p>
-            <a:endParaRPr lang="en-US" altLang="en-US" dirty="0">
-              <a:ea typeface="ＭＳ Ｐゴシック" panose="020B0600070205080204" pitchFamily="34" charset="-128"/>
-            </a:endParaRPr>
-          </a:p>
-          <a:p>
-            <a:r>
-              <a:rPr lang="en-US" altLang="en-US" dirty="0">
-                <a:ea typeface="ＭＳ Ｐゴシック" panose="020B0600070205080204" pitchFamily="34" charset="-128"/>
-              </a:rPr>
-              <a:t>Useful for building classes that perform operations on or with a parametrized type (superhero/villain example)</a:t>
-            </a:r>
-          </a:p>
-        </p:txBody>
-      </p:sp>
-      <p:sp>
-        <p:nvSpPr>
-          <p:cNvPr id="10" name="Footer Placeholder 9"/>
-          <p:cNvSpPr>
-            <a:spLocks noGrp="1"/>
-          </p:cNvSpPr>
-          <p:nvPr>
-            <p:ph type="ftr" sz="quarter" idx="3"/>
-          </p:nvPr>
-        </p:nvSpPr>
-        <p:spPr/>
-        <p:txBody>
-          <a:bodyPr/>
-          <a:lstStyle/>
-          <a:p>
-            <a:r>
-              <a:rPr lang="en-CA" dirty="0"/>
-              <a:t>CS321: Advanced Programming Techniques</a:t>
-            </a:r>
-          </a:p>
-        </p:txBody>
-      </p:sp>
-      <p:sp>
-        <p:nvSpPr>
-          <p:cNvPr id="12" name="Slide Number Placeholder 11"/>
-          <p:cNvSpPr>
-            <a:spLocks noGrp="1"/>
-          </p:cNvSpPr>
-          <p:nvPr>
-            <p:ph type="sldNum" sz="quarter" idx="4"/>
-          </p:nvPr>
-        </p:nvSpPr>
-        <p:spPr/>
-        <p:txBody>
-          <a:bodyPr/>
-          <a:lstStyle/>
-          <a:p>
-            <a:fld id="{5174927E-2439-42C0-9720-7BBCA09BF46F}" type="slidenum">
-              <a:rPr lang="en-CA" smtClean="0"/>
-              <a:pPr/>
-              <a:t>38</a:t>
-            </a:fld>
-            <a:r>
-              <a:rPr lang="en-CA" dirty="0"/>
-              <a:t> </a:t>
-            </a:r>
-          </a:p>
-        </p:txBody>
-      </p:sp>
-    </p:spTree>
-    <p:extLst>
-      <p:ext uri="{BB962C8B-B14F-4D97-AF65-F5344CB8AC3E}">
-        <p14:creationId xmlns:p14="http://schemas.microsoft.com/office/powerpoint/2010/main" xmlns="" val="1261194124"/>
-      </p:ext>
-    </p:extLst>
-  </p:cSld>
-  <p:clrMapOvr>
-    <a:masterClrMapping/>
-  </p:clrMapOvr>
-  <p:timing>
-    <p:tnLst>
-      <p:par>
-        <p:cTn id="1" dur="indefinite" restart="never" nodeType="tmRoot"/>
-      </p:par>
-    </p:tnLst>
-  </p:timing>
-</p:sld>
-</file>
-
-<file path=ppt/slides/slide39.xml><?xml version="1.0" encoding="utf-8"?>
-<p:sld xmlns:a="http://schemas.openxmlformats.org/drawingml/2006/main" xmlns:r="http://schemas.openxmlformats.org/officeDocument/2006/relationships" xmlns:p="http://schemas.openxmlformats.org/presentationml/2006/main">
-  <p:cSld>
-    <p:spTree>
-      <p:nvGrpSpPr>
-        <p:cNvPr id="1" name=""/>
-        <p:cNvGrpSpPr/>
-        <p:nvPr/>
-      </p:nvGrpSpPr>
-      <p:grpSpPr>
-        <a:xfrm>
-          <a:off x="0" y="0"/>
-          <a:ext cx="0" cy="0"/>
-          <a:chOff x="0" y="0"/>
-          <a:chExt cx="0" cy="0"/>
-        </a:xfrm>
-      </p:grpSpPr>
-      <p:sp>
-        <p:nvSpPr>
-          <p:cNvPr id="2" name="Title 1"/>
-          <p:cNvSpPr>
-            <a:spLocks noGrp="1"/>
-          </p:cNvSpPr>
-          <p:nvPr>
-            <p:ph type="title"/>
-          </p:nvPr>
-        </p:nvSpPr>
         <p:spPr>
           <a:xfrm>
             <a:off x="0" y="-157162"/>
@@ -13777,394 +13898,7 @@
           </a:bodyPr>
           <a:lstStyle/>
           <a:p>
-            <a:r>
-              <a:rPr lang="en-US" altLang="en-US" dirty="0"/>
-              <a:t>Bounds for Type Parameters</a:t>
-            </a:r>
             <a:endParaRPr lang="en-CA" dirty="0"/>
-          </a:p>
-        </p:txBody>
-      </p:sp>
-      <p:sp>
-        <p:nvSpPr>
-          <p:cNvPr id="3" name="Content Placeholder 2"/>
-          <p:cNvSpPr>
-            <a:spLocks noGrp="1"/>
-          </p:cNvSpPr>
-          <p:nvPr>
-            <p:ph idx="1"/>
-          </p:nvPr>
-        </p:nvSpPr>
-        <p:spPr>
-          <a:xfrm>
-            <a:off x="660538" y="1168401"/>
-            <a:ext cx="10515600" cy="5025922"/>
-          </a:xfrm>
-        </p:spPr>
-        <p:txBody>
-          <a:bodyPr>
-            <a:normAutofit lnSpcReduction="10000"/>
-          </a:bodyPr>
-          <a:lstStyle/>
-          <a:p>
-            <a:pPr marL="392113" marR="0" lvl="0" indent="-293688" algn="l" defTabSz="414338" rtl="0" eaLnBrk="1" fontAlgn="base" latinLnBrk="0" hangingPunct="1">
-              <a:lnSpc>
-                <a:spcPct val="100000"/>
-              </a:lnSpc>
-              <a:spcBef>
-                <a:spcPct val="0"/>
-              </a:spcBef>
-              <a:spcAft>
-                <a:spcPts val="1288"/>
-              </a:spcAft>
-              <a:buClr>
-                <a:srgbClr val="000000"/>
-              </a:buClr>
-              <a:buSzPct val="45000"/>
-              <a:buFont typeface="StarBats" charset="0"/>
-              <a:buChar char="&quot;"/>
-              <a:tabLst/>
-              <a:defRPr/>
-            </a:pPr>
-            <a:r>
-              <a:rPr kumimoji="0" lang="en-US" altLang="en-US" sz="2500" b="0" i="0" u="none" strike="noStrike" kern="0" cap="none" spc="0" normalizeH="0" baseline="0" noProof="0" dirty="0">
-                <a:ln>
-                  <a:noFill/>
-                </a:ln>
-                <a:solidFill>
-                  <a:srgbClr val="000000"/>
-                </a:solidFill>
-                <a:effectLst/>
-                <a:uLnTx/>
-                <a:uFillTx/>
-                <a:latin typeface="Times"/>
-                <a:ea typeface="ＭＳ Ｐゴシック" panose="020B0600070205080204" pitchFamily="34" charset="-128"/>
-                <a:cs typeface="+mn-cs"/>
-              </a:rPr>
-              <a:t>A bound on a type may be a class name (rather than an interface name)</a:t>
-            </a:r>
-          </a:p>
-          <a:p>
-            <a:pPr marL="782638" marR="0" lvl="1" indent="-260350" algn="l" defTabSz="414338" rtl="0" eaLnBrk="1" fontAlgn="base" latinLnBrk="0" hangingPunct="1">
-              <a:lnSpc>
-                <a:spcPct val="100000"/>
-              </a:lnSpc>
-              <a:spcBef>
-                <a:spcPct val="0"/>
-              </a:spcBef>
-              <a:spcAft>
-                <a:spcPts val="1025"/>
-              </a:spcAft>
-              <a:buClr>
-                <a:srgbClr val="000000"/>
-              </a:buClr>
-              <a:buSzPct val="75000"/>
-              <a:buFont typeface="StarBats" charset="0"/>
-              <a:buChar char=""/>
-              <a:tabLst/>
-              <a:defRPr/>
-            </a:pPr>
-            <a:r>
-              <a:rPr kumimoji="0" lang="en-US" altLang="en-US" sz="1900" b="0" i="0" u="none" strike="noStrike" kern="0" cap="none" spc="0" normalizeH="0" baseline="0" noProof="0" dirty="0">
-                <a:ln>
-                  <a:noFill/>
-                </a:ln>
-                <a:solidFill>
-                  <a:srgbClr val="000000"/>
-                </a:solidFill>
-                <a:effectLst/>
-                <a:uLnTx/>
-                <a:uFillTx/>
-                <a:latin typeface="Times"/>
-                <a:ea typeface="ＭＳ Ｐゴシック" panose="020B0600070205080204" pitchFamily="34" charset="-128"/>
-              </a:rPr>
-              <a:t>Then only descendent classes of the bounding class may be plugged in for the type parameters:</a:t>
-            </a:r>
-          </a:p>
-          <a:p>
-            <a:pPr marL="782638" marR="0" lvl="1" indent="-260350" algn="l" defTabSz="414338" rtl="0" eaLnBrk="1" fontAlgn="base" latinLnBrk="0" hangingPunct="1">
-              <a:lnSpc>
-                <a:spcPct val="100000"/>
-              </a:lnSpc>
-              <a:spcBef>
-                <a:spcPct val="0"/>
-              </a:spcBef>
-              <a:spcAft>
-                <a:spcPts val="1025"/>
-              </a:spcAft>
-              <a:buClr>
-                <a:srgbClr val="000000"/>
-              </a:buClr>
-              <a:buSzPct val="75000"/>
-              <a:buFont typeface="StarBats" charset="0"/>
-              <a:buChar char=""/>
-              <a:tabLst/>
-              <a:defRPr/>
-            </a:pPr>
-            <a:endParaRPr kumimoji="0" lang="en-US" altLang="en-US" sz="1900" b="0" i="0" u="none" strike="noStrike" kern="0" cap="none" spc="0" normalizeH="0" baseline="0" noProof="0" dirty="0">
-              <a:ln>
-                <a:noFill/>
-              </a:ln>
-              <a:solidFill>
-                <a:srgbClr val="000000"/>
-              </a:solidFill>
-              <a:effectLst/>
-              <a:uLnTx/>
-              <a:uFillTx/>
-              <a:latin typeface="Times"/>
-              <a:ea typeface="ＭＳ Ｐゴシック" panose="020B0600070205080204" pitchFamily="34" charset="-128"/>
-            </a:endParaRPr>
-          </a:p>
-          <a:p>
-            <a:pPr marL="782638" marR="0" lvl="1" indent="-260350" algn="ctr" defTabSz="414338" rtl="0" eaLnBrk="1" fontAlgn="base" latinLnBrk="0" hangingPunct="1">
-              <a:lnSpc>
-                <a:spcPct val="100000"/>
-              </a:lnSpc>
-              <a:spcBef>
-                <a:spcPct val="0"/>
-              </a:spcBef>
-              <a:spcAft>
-                <a:spcPts val="1025"/>
-              </a:spcAft>
-              <a:buClr>
-                <a:srgbClr val="000000"/>
-              </a:buClr>
-              <a:buSzPct val="75000"/>
-              <a:buFontTx/>
-              <a:buNone/>
-              <a:tabLst/>
-              <a:defRPr/>
-            </a:pPr>
-            <a:r>
-              <a:rPr kumimoji="0" lang="en-US" altLang="en-US" sz="1900" b="1" i="0" u="none" strike="noStrike" kern="0" cap="none" spc="0" normalizeH="0" baseline="0" noProof="0" dirty="0">
-                <a:ln>
-                  <a:noFill/>
-                </a:ln>
-                <a:solidFill>
-                  <a:srgbClr val="000000"/>
-                </a:solidFill>
-                <a:effectLst/>
-                <a:uLnTx/>
-                <a:uFillTx/>
-                <a:latin typeface="Courier New" panose="02070309020205020404" pitchFamily="49" charset="0"/>
-                <a:ea typeface="ＭＳ Ｐゴシック" panose="020B0600070205080204" pitchFamily="34" charset="-128"/>
-              </a:rPr>
-              <a:t>public class </a:t>
-            </a:r>
-            <a:r>
-              <a:rPr kumimoji="0" lang="en-US" altLang="en-US" sz="1900" b="1" i="0" u="none" strike="noStrike" kern="0" cap="none" spc="0" normalizeH="0" baseline="0" noProof="0" dirty="0" err="1">
-                <a:ln>
-                  <a:noFill/>
-                </a:ln>
-                <a:solidFill>
-                  <a:srgbClr val="000000"/>
-                </a:solidFill>
-                <a:effectLst/>
-                <a:uLnTx/>
-                <a:uFillTx/>
-                <a:latin typeface="Courier New" panose="02070309020205020404" pitchFamily="49" charset="0"/>
-                <a:ea typeface="ＭＳ Ｐゴシック" panose="020B0600070205080204" pitchFamily="34" charset="-128"/>
-              </a:rPr>
-              <a:t>ExClass</a:t>
-            </a:r>
-            <a:r>
-              <a:rPr kumimoji="0" lang="en-US" altLang="en-US" sz="1900" b="1" i="0" u="none" strike="noStrike" kern="0" cap="none" spc="0" normalizeH="0" baseline="0" noProof="0" dirty="0">
-                <a:ln>
-                  <a:noFill/>
-                </a:ln>
-                <a:solidFill>
-                  <a:srgbClr val="000000"/>
-                </a:solidFill>
-                <a:effectLst/>
-                <a:uLnTx/>
-                <a:uFillTx/>
-                <a:latin typeface="Courier New" panose="02070309020205020404" pitchFamily="49" charset="0"/>
-                <a:ea typeface="ＭＳ Ｐゴシック" panose="020B0600070205080204" pitchFamily="34" charset="-128"/>
-              </a:rPr>
-              <a:t>&lt;T extends Class1&gt;</a:t>
-            </a:r>
-          </a:p>
-          <a:p>
-            <a:pPr marL="392113" marR="0" lvl="0" indent="-293688" algn="l" defTabSz="414338" rtl="0" eaLnBrk="1" fontAlgn="base" latinLnBrk="0" hangingPunct="1">
-              <a:lnSpc>
-                <a:spcPct val="100000"/>
-              </a:lnSpc>
-              <a:spcBef>
-                <a:spcPct val="0"/>
-              </a:spcBef>
-              <a:spcAft>
-                <a:spcPts val="1288"/>
-              </a:spcAft>
-              <a:buClr>
-                <a:srgbClr val="000000"/>
-              </a:buClr>
-              <a:buSzPct val="45000"/>
-              <a:buFont typeface="StarBats" charset="0"/>
-              <a:buChar char="&quot;"/>
-              <a:tabLst/>
-              <a:defRPr/>
-            </a:pPr>
-            <a:r>
-              <a:rPr kumimoji="0" lang="en-US" altLang="en-US" sz="2500" b="0" i="0" u="none" strike="noStrike" kern="0" cap="none" spc="0" normalizeH="0" baseline="0" noProof="0" dirty="0">
-                <a:ln>
-                  <a:noFill/>
-                </a:ln>
-                <a:solidFill>
-                  <a:srgbClr val="000000"/>
-                </a:solidFill>
-                <a:effectLst/>
-                <a:uLnTx/>
-                <a:uFillTx/>
-                <a:latin typeface="Times"/>
-                <a:ea typeface="ＭＳ Ｐゴシック" panose="020B0600070205080204" pitchFamily="34" charset="-128"/>
-                <a:cs typeface="+mn-cs"/>
-              </a:rPr>
-              <a:t>A bounds expression may contain multiple interfaces and up to one class.</a:t>
-            </a:r>
-          </a:p>
-          <a:p>
-            <a:pPr marL="392113" marR="0" lvl="0" indent="-293688" algn="l" defTabSz="414338" rtl="0" eaLnBrk="1" fontAlgn="base" latinLnBrk="0" hangingPunct="1">
-              <a:lnSpc>
-                <a:spcPct val="100000"/>
-              </a:lnSpc>
-              <a:spcBef>
-                <a:spcPct val="0"/>
-              </a:spcBef>
-              <a:spcAft>
-                <a:spcPts val="1288"/>
-              </a:spcAft>
-              <a:buClr>
-                <a:srgbClr val="000000"/>
-              </a:buClr>
-              <a:buSzPct val="45000"/>
-              <a:buFont typeface="StarBats" charset="0"/>
-              <a:buChar char="&quot;"/>
-              <a:tabLst/>
-              <a:defRPr/>
-            </a:pPr>
-            <a:endParaRPr kumimoji="0" lang="en-US" altLang="en-US" sz="2500" b="0" i="0" u="none" strike="noStrike" kern="0" cap="none" spc="0" normalizeH="0" baseline="0" noProof="0" dirty="0">
-              <a:ln>
-                <a:noFill/>
-              </a:ln>
-              <a:solidFill>
-                <a:srgbClr val="000000"/>
-              </a:solidFill>
-              <a:effectLst/>
-              <a:uLnTx/>
-              <a:uFillTx/>
-              <a:latin typeface="Times"/>
-              <a:ea typeface="ＭＳ Ｐゴシック" panose="020B0600070205080204" pitchFamily="34" charset="-128"/>
-              <a:cs typeface="+mn-cs"/>
-            </a:endParaRPr>
-          </a:p>
-          <a:p>
-            <a:pPr marL="392113" marR="0" lvl="0" indent="-293688" algn="l" defTabSz="414338" rtl="0" eaLnBrk="1" fontAlgn="base" latinLnBrk="0" hangingPunct="1">
-              <a:lnSpc>
-                <a:spcPct val="100000"/>
-              </a:lnSpc>
-              <a:spcBef>
-                <a:spcPct val="0"/>
-              </a:spcBef>
-              <a:spcAft>
-                <a:spcPts val="1288"/>
-              </a:spcAft>
-              <a:buClr>
-                <a:srgbClr val="000000"/>
-              </a:buClr>
-              <a:buSzPct val="45000"/>
-              <a:buFont typeface="StarBats" charset="0"/>
-              <a:buChar char="&quot;"/>
-              <a:tabLst/>
-              <a:defRPr/>
-            </a:pPr>
-            <a:r>
-              <a:rPr kumimoji="0" lang="en-US" altLang="en-US" sz="2500" b="0" i="0" u="none" strike="noStrike" kern="0" cap="none" spc="0" normalizeH="0" baseline="0" noProof="0" dirty="0">
-                <a:ln>
-                  <a:noFill/>
-                </a:ln>
-                <a:solidFill>
-                  <a:srgbClr val="000000"/>
-                </a:solidFill>
-                <a:effectLst/>
-                <a:uLnTx/>
-                <a:uFillTx/>
-                <a:latin typeface="Times"/>
-                <a:ea typeface="ＭＳ Ｐゴシック" panose="020B0600070205080204" pitchFamily="34" charset="-128"/>
-                <a:cs typeface="+mn-cs"/>
-              </a:rPr>
-              <a:t>If there is more than one type parameter, the syntax is as follows:</a:t>
-            </a:r>
-          </a:p>
-          <a:p>
-            <a:pPr marL="782638" marR="0" lvl="1" indent="-260350" algn="l" defTabSz="414338" rtl="0" eaLnBrk="1" fontAlgn="base" latinLnBrk="0" hangingPunct="1">
-              <a:lnSpc>
-                <a:spcPct val="100000"/>
-              </a:lnSpc>
-              <a:spcBef>
-                <a:spcPct val="0"/>
-              </a:spcBef>
-              <a:spcAft>
-                <a:spcPts val="1025"/>
-              </a:spcAft>
-              <a:buClr>
-                <a:srgbClr val="000000"/>
-              </a:buClr>
-              <a:buSzPct val="75000"/>
-              <a:buFontTx/>
-              <a:buNone/>
-              <a:tabLst/>
-              <a:defRPr/>
-            </a:pPr>
-            <a:endParaRPr kumimoji="0" lang="en-US" altLang="en-US" sz="1900" b="1" i="0" u="none" strike="noStrike" kern="0" cap="none" spc="0" normalizeH="0" baseline="0" noProof="0" dirty="0">
-              <a:ln>
-                <a:noFill/>
-              </a:ln>
-              <a:solidFill>
-                <a:srgbClr val="000000"/>
-              </a:solidFill>
-              <a:effectLst/>
-              <a:uLnTx/>
-              <a:uFillTx/>
-              <a:latin typeface="Courier New" panose="02070309020205020404" pitchFamily="49" charset="0"/>
-              <a:ea typeface="ＭＳ Ｐゴシック" panose="020B0600070205080204" pitchFamily="34" charset="-128"/>
-            </a:endParaRPr>
-          </a:p>
-          <a:p>
-            <a:pPr marL="782638" marR="0" lvl="1" indent="-260350" algn="l" defTabSz="414338" rtl="0" eaLnBrk="1" fontAlgn="base" latinLnBrk="0" hangingPunct="1">
-              <a:lnSpc>
-                <a:spcPct val="100000"/>
-              </a:lnSpc>
-              <a:spcBef>
-                <a:spcPct val="0"/>
-              </a:spcBef>
-              <a:spcAft>
-                <a:spcPts val="1025"/>
-              </a:spcAft>
-              <a:buClr>
-                <a:srgbClr val="000000"/>
-              </a:buClr>
-              <a:buSzPct val="75000"/>
-              <a:buFontTx/>
-              <a:buNone/>
-              <a:tabLst/>
-              <a:defRPr/>
-            </a:pPr>
-            <a:r>
-              <a:rPr kumimoji="0" lang="en-US" altLang="en-US" sz="1900" b="1" i="0" u="none" strike="noStrike" kern="0" cap="none" spc="0" normalizeH="0" baseline="0" noProof="0" dirty="0">
-                <a:ln>
-                  <a:noFill/>
-                </a:ln>
-                <a:solidFill>
-                  <a:srgbClr val="000000"/>
-                </a:solidFill>
-                <a:effectLst/>
-                <a:uLnTx/>
-                <a:uFillTx/>
-                <a:latin typeface="Courier New" panose="02070309020205020404" pitchFamily="49" charset="0"/>
-                <a:ea typeface="ＭＳ Ｐゴシック" panose="020B0600070205080204" pitchFamily="34" charset="-128"/>
-              </a:rPr>
-              <a:t>public class Two&lt;T1 extends Class1, T2 extends Class2 &amp; Comparable&gt;</a:t>
-            </a:r>
           </a:p>
         </p:txBody>
       </p:sp>
@@ -14208,293 +13942,7 @@
             <a:fld id="{5174927E-2439-42C0-9720-7BBCA09BF46F}" type="slidenum">
               <a:rPr lang="en-CA" smtClean="0"/>
               <a:pPr/>
-              <a:t>39</a:t>
-            </a:fld>
-            <a:r>
-              <a:rPr lang="en-CA" dirty="0"/>
-              <a:t> </a:t>
-            </a:r>
-          </a:p>
-        </p:txBody>
-      </p:sp>
-    </p:spTree>
-    <p:extLst>
-      <p:ext uri="{BB962C8B-B14F-4D97-AF65-F5344CB8AC3E}">
-        <p14:creationId xmlns:p14="http://schemas.microsoft.com/office/powerpoint/2010/main" xmlns="" val="2928778702"/>
-      </p:ext>
-    </p:extLst>
-  </p:cSld>
-  <p:clrMapOvr>
-    <a:masterClrMapping/>
-  </p:clrMapOvr>
-  <p:timing>
-    <p:tnLst>
-      <p:par>
-        <p:cTn id="1" dur="indefinite" restart="never" nodeType="tmRoot"/>
-      </p:par>
-    </p:tnLst>
-  </p:timing>
-</p:sld>
-</file>
-
-<file path=ppt/slides/slide4.xml><?xml version="1.0" encoding="utf-8"?>
-<p:sld xmlns:a="http://schemas.openxmlformats.org/drawingml/2006/main" xmlns:r="http://schemas.openxmlformats.org/officeDocument/2006/relationships" xmlns:p="http://schemas.openxmlformats.org/presentationml/2006/main">
-  <p:cSld>
-    <p:spTree>
-      <p:nvGrpSpPr>
-        <p:cNvPr id="1" name=""/>
-        <p:cNvGrpSpPr/>
-        <p:nvPr/>
-      </p:nvGrpSpPr>
-      <p:grpSpPr>
-        <a:xfrm>
-          <a:off x="0" y="0"/>
-          <a:ext cx="0" cy="0"/>
-          <a:chOff x="0" y="0"/>
-          <a:chExt cx="0" cy="0"/>
-        </a:xfrm>
-      </p:grpSpPr>
-      <p:sp>
-        <p:nvSpPr>
-          <p:cNvPr id="2" name="Title 1"/>
-          <p:cNvSpPr>
-            <a:spLocks noGrp="1"/>
-          </p:cNvSpPr>
-          <p:nvPr>
-            <p:ph type="title"/>
-          </p:nvPr>
-        </p:nvSpPr>
-        <p:spPr/>
-        <p:txBody>
-          <a:bodyPr/>
-          <a:lstStyle/>
-          <a:p>
-            <a:r>
-              <a:rPr lang="en-US" dirty="0"/>
-              <a:t>Basics</a:t>
-            </a:r>
-            <a:endParaRPr lang="en-CA" dirty="0"/>
-          </a:p>
-        </p:txBody>
-      </p:sp>
-      <p:sp>
-        <p:nvSpPr>
-          <p:cNvPr id="3" name="Content Placeholder 2"/>
-          <p:cNvSpPr>
-            <a:spLocks noGrp="1"/>
-          </p:cNvSpPr>
-          <p:nvPr>
-            <p:ph idx="1"/>
-          </p:nvPr>
-        </p:nvSpPr>
-        <p:spPr>
-          <a:xfrm>
-            <a:off x="640874" y="1168401"/>
-            <a:ext cx="10515600" cy="4399753"/>
-          </a:xfrm>
-        </p:spPr>
-        <p:txBody>
-          <a:bodyPr>
-            <a:normAutofit/>
-          </a:bodyPr>
-          <a:lstStyle/>
-          <a:p>
-            <a:r>
-              <a:rPr lang="en-US" altLang="en-US" dirty="0">
-                <a:ea typeface="ＭＳ Ｐゴシック" panose="020B0600070205080204" pitchFamily="34" charset="-128"/>
-              </a:rPr>
-              <a:t>DON’T make a while loop that has the potential to run infinitely</a:t>
-            </a:r>
-          </a:p>
-          <a:p>
-            <a:endParaRPr lang="en-US" altLang="en-US" dirty="0">
-              <a:ea typeface="ＭＳ Ｐゴシック" panose="020B0600070205080204" pitchFamily="34" charset="-128"/>
-            </a:endParaRPr>
-          </a:p>
-          <a:p>
-            <a:r>
-              <a:rPr lang="en-US" altLang="en-US" dirty="0">
-                <a:ea typeface="ＭＳ Ｐゴシック" panose="020B0600070205080204" pitchFamily="34" charset="-128"/>
-              </a:rPr>
-              <a:t>Always have a timeout on your while loops when their ending is ambiguous</a:t>
-            </a:r>
-          </a:p>
-          <a:p>
-            <a:endParaRPr lang="en-US" altLang="en-US" dirty="0">
-              <a:ea typeface="ＭＳ Ｐゴシック" panose="020B0600070205080204" pitchFamily="34" charset="-128"/>
-            </a:endParaRPr>
-          </a:p>
-          <a:p>
-            <a:r>
-              <a:rPr lang="en-US" altLang="en-US" dirty="0">
-                <a:ea typeface="ＭＳ Ｐゴシック" panose="020B0600070205080204" pitchFamily="34" charset="-128"/>
-              </a:rPr>
-              <a:t>Overusing if/switch statements is a sign of bad programming</a:t>
-            </a:r>
-          </a:p>
-          <a:p>
-            <a:pPr marL="0" indent="0">
-              <a:buNone/>
-            </a:pPr>
-            <a:endParaRPr lang="en-US" altLang="en-US" dirty="0">
-              <a:ea typeface="ＭＳ Ｐゴシック" panose="020B0600070205080204" pitchFamily="34" charset="-128"/>
-            </a:endParaRPr>
-          </a:p>
-        </p:txBody>
-      </p:sp>
-      <p:sp>
-        <p:nvSpPr>
-          <p:cNvPr id="10" name="Footer Placeholder 9"/>
-          <p:cNvSpPr>
-            <a:spLocks noGrp="1"/>
-          </p:cNvSpPr>
-          <p:nvPr>
-            <p:ph type="ftr" sz="quarter" idx="3"/>
-          </p:nvPr>
-        </p:nvSpPr>
-        <p:spPr/>
-        <p:txBody>
-          <a:bodyPr/>
-          <a:lstStyle/>
-          <a:p>
-            <a:r>
-              <a:rPr lang="en-CA" dirty="0"/>
-              <a:t>CS321: Advanced Programming Techniques</a:t>
-            </a:r>
-          </a:p>
-        </p:txBody>
-      </p:sp>
-      <p:sp>
-        <p:nvSpPr>
-          <p:cNvPr id="12" name="Slide Number Placeholder 11"/>
-          <p:cNvSpPr>
-            <a:spLocks noGrp="1"/>
-          </p:cNvSpPr>
-          <p:nvPr>
-            <p:ph type="sldNum" sz="quarter" idx="4"/>
-          </p:nvPr>
-        </p:nvSpPr>
-        <p:spPr/>
-        <p:txBody>
-          <a:bodyPr/>
-          <a:lstStyle/>
-          <a:p>
-            <a:fld id="{5174927E-2439-42C0-9720-7BBCA09BF46F}" type="slidenum">
-              <a:rPr lang="en-CA" smtClean="0"/>
-              <a:pPr/>
-              <a:t>4</a:t>
-            </a:fld>
-            <a:r>
-              <a:rPr lang="en-CA" dirty="0"/>
-              <a:t> </a:t>
-            </a:r>
-          </a:p>
-        </p:txBody>
-      </p:sp>
-    </p:spTree>
-    <p:extLst>
-      <p:ext uri="{BB962C8B-B14F-4D97-AF65-F5344CB8AC3E}">
-        <p14:creationId xmlns:p14="http://schemas.microsoft.com/office/powerpoint/2010/main" xmlns="" val="224240828"/>
-      </p:ext>
-    </p:extLst>
-  </p:cSld>
-  <p:clrMapOvr>
-    <a:masterClrMapping/>
-  </p:clrMapOvr>
-  <p:timing>
-    <p:tnLst>
-      <p:par>
-        <p:cTn id="1" dur="indefinite" restart="never" nodeType="tmRoot"/>
-      </p:par>
-    </p:tnLst>
-  </p:timing>
-</p:sld>
-</file>
-
-<file path=ppt/slides/slide40.xml><?xml version="1.0" encoding="utf-8"?>
-<p:sld xmlns:a="http://schemas.openxmlformats.org/drawingml/2006/main" xmlns:r="http://schemas.openxmlformats.org/officeDocument/2006/relationships" xmlns:p="http://schemas.openxmlformats.org/presentationml/2006/main">
-  <p:cSld>
-    <p:spTree>
-      <p:nvGrpSpPr>
-        <p:cNvPr id="1" name=""/>
-        <p:cNvGrpSpPr/>
-        <p:nvPr/>
-      </p:nvGrpSpPr>
-      <p:grpSpPr>
-        <a:xfrm>
-          <a:off x="0" y="0"/>
-          <a:ext cx="0" cy="0"/>
-          <a:chOff x="0" y="0"/>
-          <a:chExt cx="0" cy="0"/>
-        </a:xfrm>
-      </p:grpSpPr>
-      <p:sp>
-        <p:nvSpPr>
-          <p:cNvPr id="2" name="Title 1"/>
-          <p:cNvSpPr>
-            <a:spLocks noGrp="1"/>
-          </p:cNvSpPr>
-          <p:nvPr>
-            <p:ph type="title"/>
-          </p:nvPr>
-        </p:nvSpPr>
-        <p:spPr>
-          <a:xfrm>
-            <a:off x="0" y="-157162"/>
-            <a:ext cx="11012129" cy="1325563"/>
-          </a:xfrm>
-        </p:spPr>
-        <p:txBody>
-          <a:bodyPr>
-            <a:normAutofit/>
-          </a:bodyPr>
-          <a:lstStyle/>
-          <a:p>
-            <a:endParaRPr lang="en-CA" dirty="0"/>
-          </a:p>
-        </p:txBody>
-      </p:sp>
-      <p:sp>
-        <p:nvSpPr>
-          <p:cNvPr id="10" name="Footer Placeholder 9"/>
-          <p:cNvSpPr>
-            <a:spLocks noGrp="1"/>
-          </p:cNvSpPr>
-          <p:nvPr>
-            <p:ph type="ftr" sz="quarter" idx="3"/>
-          </p:nvPr>
-        </p:nvSpPr>
-        <p:spPr/>
-        <p:txBody>
-          <a:bodyPr/>
-          <a:lstStyle/>
-          <a:p>
-            <a:r>
-              <a:rPr lang="en-CA" dirty="0"/>
-              <a:t>CS321: Advanced Programming Techniques</a:t>
-            </a:r>
-          </a:p>
-        </p:txBody>
-      </p:sp>
-      <p:sp>
-        <p:nvSpPr>
-          <p:cNvPr id="12" name="Slide Number Placeholder 11"/>
-          <p:cNvSpPr>
-            <a:spLocks noGrp="1"/>
-          </p:cNvSpPr>
-          <p:nvPr>
-            <p:ph type="sldNum" sz="quarter" idx="4"/>
-          </p:nvPr>
-        </p:nvSpPr>
-        <p:spPr/>
-        <p:txBody>
-          <a:bodyPr/>
-          <a:lstStyle/>
-          <a:p>
-            <a:fld id="{5174927E-2439-42C0-9720-7BBCA09BF46F}" type="slidenum">
-              <a:rPr lang="en-CA" smtClean="0"/>
-              <a:pPr/>
-              <a:t>40</a:t>
+              <a:t>38</a:t>
             </a:fld>
             <a:r>
               <a:rPr lang="en-CA" dirty="0"/>
@@ -15649,7 +15097,7 @@
 </p:sld>
 </file>
 
-<file path=ppt/slides/slide41.xml><?xml version="1.0" encoding="utf-8"?>
+<file path=ppt/slides/slide39.xml><?xml version="1.0" encoding="utf-8"?>
 <p:sld xmlns:a="http://schemas.openxmlformats.org/drawingml/2006/main" xmlns:r="http://schemas.openxmlformats.org/officeDocument/2006/relationships" xmlns:p="http://schemas.openxmlformats.org/presentationml/2006/main">
   <p:cSld>
     <p:spTree>
@@ -15732,7 +15180,7 @@
             <a:fld id="{5174927E-2439-42C0-9720-7BBCA09BF46F}" type="slidenum">
               <a:rPr lang="en-CA" smtClean="0"/>
               <a:pPr/>
-              <a:t>41</a:t>
+              <a:t>39</a:t>
             </a:fld>
             <a:r>
               <a:rPr lang="en-CA" dirty="0"/>
@@ -17411,6 +16859,180 @@
     <p:extLst>
       <p:ext uri="{BB962C8B-B14F-4D97-AF65-F5344CB8AC3E}">
         <p14:creationId xmlns:p14="http://schemas.microsoft.com/office/powerpoint/2010/main" xmlns="" val="151665903"/>
+      </p:ext>
+    </p:extLst>
+  </p:cSld>
+  <p:clrMapOvr>
+    <a:masterClrMapping/>
+  </p:clrMapOvr>
+  <p:timing>
+    <p:tnLst>
+      <p:par>
+        <p:cTn id="1" dur="indefinite" restart="never" nodeType="tmRoot"/>
+      </p:par>
+    </p:tnLst>
+  </p:timing>
+</p:sld>
+</file>
+
+<file path=ppt/slides/slide4.xml><?xml version="1.0" encoding="utf-8"?>
+<p:sld xmlns:a="http://schemas.openxmlformats.org/drawingml/2006/main" xmlns:r="http://schemas.openxmlformats.org/officeDocument/2006/relationships" xmlns:p="http://schemas.openxmlformats.org/presentationml/2006/main">
+  <p:cSld>
+    <p:spTree>
+      <p:nvGrpSpPr>
+        <p:cNvPr id="1" name=""/>
+        <p:cNvGrpSpPr/>
+        <p:nvPr/>
+      </p:nvGrpSpPr>
+      <p:grpSpPr>
+        <a:xfrm>
+          <a:off x="0" y="0"/>
+          <a:ext cx="0" cy="0"/>
+          <a:chOff x="0" y="0"/>
+          <a:chExt cx="0" cy="0"/>
+        </a:xfrm>
+      </p:grpSpPr>
+      <p:sp>
+        <p:nvSpPr>
+          <p:cNvPr id="2" name="Title 1"/>
+          <p:cNvSpPr>
+            <a:spLocks noGrp="1"/>
+          </p:cNvSpPr>
+          <p:nvPr>
+            <p:ph type="title"/>
+          </p:nvPr>
+        </p:nvSpPr>
+        <p:spPr/>
+        <p:txBody>
+          <a:bodyPr/>
+          <a:lstStyle/>
+          <a:p>
+            <a:r>
+              <a:rPr lang="en-US" dirty="0"/>
+              <a:t>Basics</a:t>
+            </a:r>
+            <a:endParaRPr lang="en-CA" dirty="0"/>
+          </a:p>
+        </p:txBody>
+      </p:sp>
+      <p:sp>
+        <p:nvSpPr>
+          <p:cNvPr id="3" name="Content Placeholder 2"/>
+          <p:cNvSpPr>
+            <a:spLocks noGrp="1"/>
+          </p:cNvSpPr>
+          <p:nvPr>
+            <p:ph idx="1"/>
+          </p:nvPr>
+        </p:nvSpPr>
+        <p:spPr>
+          <a:xfrm>
+            <a:off x="640874" y="1168401"/>
+            <a:ext cx="10515600" cy="4399753"/>
+          </a:xfrm>
+        </p:spPr>
+        <p:txBody>
+          <a:bodyPr>
+            <a:normAutofit/>
+          </a:bodyPr>
+          <a:lstStyle/>
+          <a:p>
+            <a:r>
+              <a:rPr lang="en-US" altLang="en-US" dirty="0">
+                <a:ea typeface="ＭＳ Ｐゴシック" panose="020B0600070205080204" pitchFamily="34" charset="-128"/>
+              </a:rPr>
+              <a:t>DON’T make a while loop that has the potential to run infinitely</a:t>
+            </a:r>
+          </a:p>
+          <a:p>
+            <a:endParaRPr lang="en-US" altLang="en-US" dirty="0">
+              <a:ea typeface="ＭＳ Ｐゴシック" panose="020B0600070205080204" pitchFamily="34" charset="-128"/>
+            </a:endParaRPr>
+          </a:p>
+          <a:p>
+            <a:r>
+              <a:rPr lang="en-US" altLang="en-US" dirty="0">
+                <a:ea typeface="ＭＳ Ｐゴシック" panose="020B0600070205080204" pitchFamily="34" charset="-128"/>
+              </a:rPr>
+              <a:t>Always have a timeout on your while loops when their ending is ambiguous</a:t>
+            </a:r>
+          </a:p>
+          <a:p>
+            <a:endParaRPr lang="en-US" altLang="en-US" dirty="0">
+              <a:ea typeface="ＭＳ Ｐゴシック" panose="020B0600070205080204" pitchFamily="34" charset="-128"/>
+            </a:endParaRPr>
+          </a:p>
+          <a:p>
+            <a:r>
+              <a:rPr lang="en-US" altLang="en-US" dirty="0">
+                <a:ea typeface="ＭＳ Ｐゴシック" panose="020B0600070205080204" pitchFamily="34" charset="-128"/>
+              </a:rPr>
+              <a:t>Overusing if/switch statements is a sign of bad programming</a:t>
+            </a:r>
+          </a:p>
+          <a:p>
+            <a:pPr marL="0" indent="0">
+              <a:buNone/>
+            </a:pPr>
+            <a:endParaRPr lang="en-US" altLang="en-US" dirty="0">
+              <a:ea typeface="ＭＳ Ｐゴシック" panose="020B0600070205080204" pitchFamily="34" charset="-128"/>
+            </a:endParaRPr>
+          </a:p>
+        </p:txBody>
+      </p:sp>
+      <p:sp>
+        <p:nvSpPr>
+          <p:cNvPr id="10" name="Footer Placeholder 9"/>
+          <p:cNvSpPr>
+            <a:spLocks noGrp="1"/>
+          </p:cNvSpPr>
+          <p:nvPr>
+            <p:ph type="ftr" sz="quarter" idx="3"/>
+          </p:nvPr>
+        </p:nvSpPr>
+        <p:spPr/>
+        <p:txBody>
+          <a:bodyPr/>
+          <a:lstStyle/>
+          <a:p>
+            <a:r>
+              <a:rPr lang="en-CA" dirty="0"/>
+              <a:t>CS321: Advanced Programming Techniques</a:t>
+            </a:r>
+          </a:p>
+        </p:txBody>
+      </p:sp>
+      <p:sp>
+        <p:nvSpPr>
+          <p:cNvPr id="12" name="Slide Number Placeholder 11"/>
+          <p:cNvSpPr>
+            <a:spLocks noGrp="1"/>
+          </p:cNvSpPr>
+          <p:nvPr>
+            <p:ph type="sldNum" sz="quarter" idx="4"/>
+          </p:nvPr>
+        </p:nvSpPr>
+        <p:spPr/>
+        <p:txBody>
+          <a:bodyPr/>
+          <a:lstStyle/>
+          <a:p>
+            <a:fld id="{5174927E-2439-42C0-9720-7BBCA09BF46F}" type="slidenum">
+              <a:rPr lang="en-CA" smtClean="0"/>
+              <a:pPr/>
+              <a:t>4</a:t>
+            </a:fld>
+            <a:r>
+              <a:rPr lang="en-CA" dirty="0"/>
+              <a:t> </a:t>
+            </a:r>
+          </a:p>
+        </p:txBody>
+      </p:sp>
+    </p:spTree>
+    <p:extLst>
+      <p:ext uri="{BB962C8B-B14F-4D97-AF65-F5344CB8AC3E}">
+        <p14:creationId xmlns:p14="http://schemas.microsoft.com/office/powerpoint/2010/main" xmlns="" val="224240828"/>
       </p:ext>
     </p:extLst>
   </p:cSld>
